--- a/outputs/flyers/USMLE_June_Advert.pptx
+++ b/outputs/flyers/USMLE_June_Advert.pptx
@@ -884,7 +884,7 @@
         <p:spPr>
           <a:xfrm>
             <a:off x="0" y="0"/>
-            <a:ext cx="8229600" cy="2011680"/>
+            <a:ext cx="8229600" cy="1828800"/>
           </a:xfrm>
           <a:prstGeom prst="rect">
             <a:avLst/>
@@ -908,7 +908,7 @@
         </p:nvSpPr>
         <p:spPr>
           <a:xfrm>
-            <a:off x="0" y="1847088"/>
+            <a:off x="0" y="1664208"/>
             <a:ext cx="8229600" cy="164592"/>
           </a:xfrm>
           <a:prstGeom prst="rect">
@@ -1105,7 +1105,7 @@
         </p:nvSpPr>
         <p:spPr>
           <a:xfrm>
-            <a:off x="6163056" y="150876"/>
+            <a:off x="6163056" y="59436"/>
             <a:ext cx="1618488" cy="1618488"/>
           </a:xfrm>
           <a:prstGeom prst="ellipse">
@@ -1138,7 +1138,7 @@
         </p:blipFill>
         <p:spPr>
           <a:xfrm>
-            <a:off x="6217920" y="205740"/>
+            <a:off x="6217920" y="114300"/>
             <a:ext cx="1508760" cy="1508760"/>
           </a:xfrm>
           <a:prstGeom prst="rect">
@@ -1154,8 +1154,8 @@
         </p:nvSpPr>
         <p:spPr>
           <a:xfrm>
-            <a:off x="502920" y="2231136"/>
-            <a:ext cx="7223760" cy="256032"/>
+            <a:off x="502920" y="2029968"/>
+            <a:ext cx="7223760" cy="237744"/>
           </a:xfrm>
           <a:prstGeom prst="rect">
             <a:avLst/>
@@ -1193,7 +1193,7 @@
         </p:nvSpPr>
         <p:spPr>
           <a:xfrm>
-            <a:off x="502920" y="2542032"/>
+            <a:off x="502920" y="2331720"/>
             <a:ext cx="1005840" cy="0"/>
           </a:xfrm>
           <a:prstGeom prst="line">
@@ -1216,12 +1216,12 @@
         </p:nvSpPr>
         <p:spPr>
           <a:xfrm>
-            <a:off x="502920" y="2697480"/>
-            <a:ext cx="1723644" cy="4526280"/>
+            <a:off x="502920" y="2331720"/>
+            <a:ext cx="3543300" cy="2377440"/>
           </a:xfrm>
           <a:prstGeom prst="roundRect">
             <a:avLst>
-              <a:gd name="adj" fmla="val 5305"/>
+              <a:gd name="adj" fmla="val 3846"/>
             </a:avLst>
           </a:prstGeom>
           <a:solidFill>
@@ -1243,8 +1243,8 @@
         </p:nvSpPr>
         <p:spPr>
           <a:xfrm>
-            <a:off x="502920" y="2788920"/>
-            <a:ext cx="1723644" cy="621792"/>
+            <a:off x="502920" y="2404872"/>
+            <a:ext cx="3543300" cy="493776"/>
           </a:xfrm>
           <a:prstGeom prst="rect">
             <a:avLst/>
@@ -1268,12 +1268,12 @@
         </p:nvSpPr>
         <p:spPr>
           <a:xfrm>
-            <a:off x="502920" y="2697480"/>
-            <a:ext cx="1723644" cy="713232"/>
+            <a:off x="502920" y="2331720"/>
+            <a:ext cx="3543300" cy="566928"/>
           </a:xfrm>
           <a:prstGeom prst="roundRect">
             <a:avLst>
-              <a:gd name="adj" fmla="val 12821"/>
+              <a:gd name="adj" fmla="val 16129"/>
             </a:avLst>
           </a:prstGeom>
           <a:solidFill>
@@ -1295,24 +1295,24 @@
         </p:nvSpPr>
         <p:spPr>
           <a:xfrm>
-            <a:off x="594360" y="2788920"/>
-            <a:ext cx="1540764" cy="274320"/>
-          </a:xfrm>
-          <a:prstGeom prst="rect">
-            <a:avLst/>
-          </a:prstGeom>
-          <a:noFill/>
-          <a:ln/>
-        </p:spPr>
-        <p:txBody>
-          <a:bodyPr wrap="square" lIns="0" tIns="0" rIns="0" bIns="0" rtlCol="0" anchor="ctr"/>
-          <a:lstStyle/>
-          <a:p>
-            <a:pPr indent="0" marL="0">
-              <a:buNone/>
-            </a:pPr>
-            <a:r>
-              <a:rPr lang="en-US" sz="1100" b="1" spc="100" kern="0" dirty="0">
+            <a:off x="630936" y="2386584"/>
+            <a:ext cx="3287268" cy="256032"/>
+          </a:xfrm>
+          <a:prstGeom prst="rect">
+            <a:avLst/>
+          </a:prstGeom>
+          <a:noFill/>
+          <a:ln/>
+        </p:spPr>
+        <p:txBody>
+          <a:bodyPr wrap="square" lIns="0" tIns="0" rIns="0" bIns="0" rtlCol="0" anchor="ctr"/>
+          <a:lstStyle/>
+          <a:p>
+            <a:pPr indent="0" marL="0">
+              <a:buNone/>
+            </a:pPr>
+            <a:r>
+              <a:rPr lang="en-US" sz="1300" b="1" spc="100" kern="0" dirty="0">
                 <a:solidFill>
                   <a:srgbClr val="FFFFFF"/>
                 </a:solidFill>
@@ -1322,7 +1322,7 @@
               </a:rPr>
               <a:t>CARDIOVASCULAR</a:t>
             </a:r>
-            <a:endParaRPr lang="en-US" sz="1100" dirty="0"/>
+            <a:endParaRPr lang="en-US" sz="1300" dirty="0"/>
           </a:p>
         </p:txBody>
       </p:sp>
@@ -1334,32 +1334,85 @@
         </p:nvSpPr>
         <p:spPr>
           <a:xfrm>
-            <a:off x="594360" y="3081528"/>
-            <a:ext cx="1540764" cy="256032"/>
-          </a:xfrm>
-          <a:prstGeom prst="rect">
-            <a:avLst/>
-          </a:prstGeom>
-          <a:noFill/>
-          <a:ln/>
-        </p:spPr>
-        <p:txBody>
-          <a:bodyPr wrap="square" lIns="0" tIns="0" rIns="0" bIns="0" rtlCol="0" anchor="ctr"/>
-          <a:lstStyle/>
-          <a:p>
+            <a:off x="630936" y="2642616"/>
+            <a:ext cx="3287268" cy="219456"/>
+          </a:xfrm>
+          <a:prstGeom prst="rect">
+            <a:avLst/>
+          </a:prstGeom>
+          <a:noFill/>
+          <a:ln/>
+        </p:spPr>
+        <p:txBody>
+          <a:bodyPr wrap="square" lIns="0" tIns="0" rIns="0" bIns="0" rtlCol="0" anchor="ctr"/>
+          <a:lstStyle/>
+          <a:p>
+            <a:pPr indent="0" marL="0">
+              <a:buNone/>
+            </a:pPr>
+            <a:r>
+              <a:rPr lang="en-US" sz="1000" dirty="0">
+                <a:solidFill>
+                  <a:srgbClr val="FFFFFF"/>
+                </a:solidFill>
+                <a:latin typeface="Calibri" pitchFamily="34" charset="0"/>
+                <a:ea typeface="Calibri" pitchFamily="34" charset="-122"/>
+                <a:cs typeface="Calibri" pitchFamily="34" charset="-120"/>
+              </a:rPr>
+              <a:t>10 days  ·  Jun 1 – 10</a:t>
+            </a:r>
+            <a:endParaRPr lang="en-US" sz="1000" dirty="0"/>
+          </a:p>
+        </p:txBody>
+      </p:sp>
+      <p:sp>
+        <p:nvSpPr>
+          <p:cNvPr id="17" name="Text 14"/>
+          <p:cNvSpPr/>
+          <p:nvPr/>
+        </p:nvSpPr>
+        <p:spPr>
+          <a:xfrm>
+            <a:off x="630936" y="2990088"/>
+            <a:ext cx="3287268" cy="173736"/>
+          </a:xfrm>
+          <a:prstGeom prst="rect">
+            <a:avLst/>
+          </a:prstGeom>
+          <a:noFill/>
+          <a:ln/>
+        </p:spPr>
+        <p:txBody>
+          <a:bodyPr wrap="square" lIns="0" tIns="0" rIns="0" bIns="0" rtlCol="0" anchor="ctr"/>
+          <a:lstStyle/>
+          <a:p>
+            <a:pPr indent="0" marL="0">
+              <a:buNone/>
+            </a:pPr>
+            <a:r>
+              <a:rPr lang="en-US" sz="950" b="1" dirty="0">
+                <a:solidFill>
+                  <a:srgbClr val="0284C7"/>
+                </a:solidFill>
+                <a:latin typeface="Calibri" pitchFamily="34" charset="0"/>
+                <a:ea typeface="Calibri" pitchFamily="34" charset="-122"/>
+                <a:cs typeface="Calibri" pitchFamily="34" charset="-120"/>
+              </a:rPr>
+              <a:t>01  </a:t>
+            </a:r>
             <a:pPr indent="0" marL="0">
               <a:buNone/>
             </a:pPr>
             <a:r>
               <a:rPr lang="en-US" sz="950" dirty="0">
                 <a:solidFill>
-                  <a:srgbClr val="FFFFFF"/>
-                </a:solidFill>
-                <a:latin typeface="Calibri" pitchFamily="34" charset="0"/>
-                <a:ea typeface="Calibri" pitchFamily="34" charset="-122"/>
-                <a:cs typeface="Calibri" pitchFamily="34" charset="-120"/>
-              </a:rPr>
-              <a:t>11 days  ·  Jun 1 – 11</a:t>
+                  <a:srgbClr val="345671"/>
+                </a:solidFill>
+                <a:latin typeface="Calibri" pitchFamily="34" charset="0"/>
+                <a:ea typeface="Calibri" pitchFamily="34" charset="-122"/>
+                <a:cs typeface="Calibri" pitchFamily="34" charset="-120"/>
+              </a:rPr>
+              <a:t>Orientation, embryology &amp; congenital</a:t>
             </a:r>
             <a:endParaRPr lang="en-US" sz="950" dirty="0"/>
           </a:p>
@@ -1367,30 +1420,30 @@
       </p:sp>
       <p:sp>
         <p:nvSpPr>
-          <p:cNvPr id="17" name="Text 14"/>
-          <p:cNvSpPr/>
-          <p:nvPr/>
-        </p:nvSpPr>
-        <p:spPr>
-          <a:xfrm>
-            <a:off x="594360" y="3502152"/>
-            <a:ext cx="1540764" cy="274320"/>
-          </a:xfrm>
-          <a:prstGeom prst="rect">
-            <a:avLst/>
-          </a:prstGeom>
-          <a:noFill/>
-          <a:ln/>
-        </p:spPr>
-        <p:txBody>
-          <a:bodyPr wrap="square" lIns="0" tIns="0" rIns="0" bIns="0" rtlCol="0" anchor="ctr"/>
-          <a:lstStyle/>
-          <a:p>
-            <a:pPr indent="0" marL="0">
-              <a:buNone/>
-            </a:pPr>
-            <a:r>
-              <a:rPr lang="en-US" sz="850" b="1" dirty="0">
+          <p:cNvPr id="18" name="Text 15"/>
+          <p:cNvSpPr/>
+          <p:nvPr/>
+        </p:nvSpPr>
+        <p:spPr>
+          <a:xfrm>
+            <a:off x="630936" y="3163824"/>
+            <a:ext cx="3287268" cy="173736"/>
+          </a:xfrm>
+          <a:prstGeom prst="rect">
+            <a:avLst/>
+          </a:prstGeom>
+          <a:noFill/>
+          <a:ln/>
+        </p:spPr>
+        <p:txBody>
+          <a:bodyPr wrap="square" lIns="0" tIns="0" rIns="0" bIns="0" rtlCol="0" anchor="ctr"/>
+          <a:lstStyle/>
+          <a:p>
+            <a:pPr indent="0" marL="0">
+              <a:buNone/>
+            </a:pPr>
+            <a:r>
+              <a:rPr lang="en-US" sz="950" b="1" dirty="0">
                 <a:solidFill>
                   <a:srgbClr val="0284C7"/>
                 </a:solidFill>
@@ -1398,13 +1451,13 @@
                 <a:ea typeface="Calibri" pitchFamily="34" charset="-122"/>
                 <a:cs typeface="Calibri" pitchFamily="34" charset="-120"/>
               </a:rPr>
-              <a:t>01  </a:t>
-            </a:r>
-            <a:pPr indent="0" marL="0">
-              <a:buNone/>
-            </a:pPr>
-            <a:r>
-              <a:rPr lang="en-US" sz="850" dirty="0">
+              <a:t>02  </a:t>
+            </a:r>
+            <a:pPr indent="0" marL="0">
+              <a:buNone/>
+            </a:pPr>
+            <a:r>
+              <a:rPr lang="en-US" sz="950" dirty="0">
                 <a:solidFill>
                   <a:srgbClr val="345671"/>
                 </a:solidFill>
@@ -1412,38 +1465,38 @@
                 <a:ea typeface="Calibri" pitchFamily="34" charset="-122"/>
                 <a:cs typeface="Calibri" pitchFamily="34" charset="-120"/>
               </a:rPr>
-              <a:t>Orientation &amp; overview</a:t>
-            </a:r>
-            <a:endParaRPr lang="en-US" sz="850" dirty="0"/>
-          </a:p>
-        </p:txBody>
-      </p:sp>
-      <p:sp>
-        <p:nvSpPr>
-          <p:cNvPr id="18" name="Text 15"/>
-          <p:cNvSpPr/>
-          <p:nvPr/>
-        </p:nvSpPr>
-        <p:spPr>
-          <a:xfrm>
-            <a:off x="594360" y="3776472"/>
-            <a:ext cx="1540764" cy="274320"/>
-          </a:xfrm>
-          <a:prstGeom prst="rect">
-            <a:avLst/>
-          </a:prstGeom>
-          <a:noFill/>
-          <a:ln/>
-        </p:spPr>
-        <p:txBody>
-          <a:bodyPr wrap="square" lIns="0" tIns="0" rIns="0" bIns="0" rtlCol="0" anchor="ctr"/>
-          <a:lstStyle/>
-          <a:p>
-            <a:pPr indent="0" marL="0">
-              <a:buNone/>
-            </a:pPr>
-            <a:r>
-              <a:rPr lang="en-US" sz="850" b="1" dirty="0">
+              <a:t>Anatomy &amp; cardiac imaging</a:t>
+            </a:r>
+            <a:endParaRPr lang="en-US" sz="950" dirty="0"/>
+          </a:p>
+        </p:txBody>
+      </p:sp>
+      <p:sp>
+        <p:nvSpPr>
+          <p:cNvPr id="19" name="Text 16"/>
+          <p:cNvSpPr/>
+          <p:nvPr/>
+        </p:nvSpPr>
+        <p:spPr>
+          <a:xfrm>
+            <a:off x="630936" y="3337560"/>
+            <a:ext cx="3287268" cy="173736"/>
+          </a:xfrm>
+          <a:prstGeom prst="rect">
+            <a:avLst/>
+          </a:prstGeom>
+          <a:noFill/>
+          <a:ln/>
+        </p:spPr>
+        <p:txBody>
+          <a:bodyPr wrap="square" lIns="0" tIns="0" rIns="0" bIns="0" rtlCol="0" anchor="ctr"/>
+          <a:lstStyle/>
+          <a:p>
+            <a:pPr indent="0" marL="0">
+              <a:buNone/>
+            </a:pPr>
+            <a:r>
+              <a:rPr lang="en-US" sz="950" b="1" dirty="0">
                 <a:solidFill>
                   <a:srgbClr val="0284C7"/>
                 </a:solidFill>
@@ -1451,13 +1504,13 @@
                 <a:ea typeface="Calibri" pitchFamily="34" charset="-122"/>
                 <a:cs typeface="Calibri" pitchFamily="34" charset="-120"/>
               </a:rPr>
-              <a:t>02  </a:t>
-            </a:r>
-            <a:pPr indent="0" marL="0">
-              <a:buNone/>
-            </a:pPr>
-            <a:r>
-              <a:rPr lang="en-US" sz="850" dirty="0">
+              <a:t>03  </a:t>
+            </a:r>
+            <a:pPr indent="0" marL="0">
+              <a:buNone/>
+            </a:pPr>
+            <a:r>
+              <a:rPr lang="en-US" sz="950" dirty="0">
                 <a:solidFill>
                   <a:srgbClr val="345671"/>
                 </a:solidFill>
@@ -1465,38 +1518,38 @@
                 <a:ea typeface="Calibri" pitchFamily="34" charset="-122"/>
                 <a:cs typeface="Calibri" pitchFamily="34" charset="-120"/>
               </a:rPr>
-              <a:t>Embryology · congenital</a:t>
-            </a:r>
-            <a:endParaRPr lang="en-US" sz="850" dirty="0"/>
-          </a:p>
-        </p:txBody>
-      </p:sp>
-      <p:sp>
-        <p:nvSpPr>
-          <p:cNvPr id="19" name="Text 16"/>
-          <p:cNvSpPr/>
-          <p:nvPr/>
-        </p:nvSpPr>
-        <p:spPr>
-          <a:xfrm>
-            <a:off x="594360" y="4050792"/>
-            <a:ext cx="1540764" cy="274320"/>
-          </a:xfrm>
-          <a:prstGeom prst="rect">
-            <a:avLst/>
-          </a:prstGeom>
-          <a:noFill/>
-          <a:ln/>
-        </p:spPr>
-        <p:txBody>
-          <a:bodyPr wrap="square" lIns="0" tIns="0" rIns="0" bIns="0" rtlCol="0" anchor="ctr"/>
-          <a:lstStyle/>
-          <a:p>
-            <a:pPr indent="0" marL="0">
-              <a:buNone/>
-            </a:pPr>
-            <a:r>
-              <a:rPr lang="en-US" sz="850" b="1" dirty="0">
+              <a:t>Cardiac output &amp; PV loops</a:t>
+            </a:r>
+            <a:endParaRPr lang="en-US" sz="950" dirty="0"/>
+          </a:p>
+        </p:txBody>
+      </p:sp>
+      <p:sp>
+        <p:nvSpPr>
+          <p:cNvPr id="20" name="Text 17"/>
+          <p:cNvSpPr/>
+          <p:nvPr/>
+        </p:nvSpPr>
+        <p:spPr>
+          <a:xfrm>
+            <a:off x="630936" y="3511296"/>
+            <a:ext cx="3287268" cy="173736"/>
+          </a:xfrm>
+          <a:prstGeom prst="rect">
+            <a:avLst/>
+          </a:prstGeom>
+          <a:noFill/>
+          <a:ln/>
+        </p:spPr>
+        <p:txBody>
+          <a:bodyPr wrap="square" lIns="0" tIns="0" rIns="0" bIns="0" rtlCol="0" anchor="ctr"/>
+          <a:lstStyle/>
+          <a:p>
+            <a:pPr indent="0" marL="0">
+              <a:buNone/>
+            </a:pPr>
+            <a:r>
+              <a:rPr lang="en-US" sz="950" b="1" dirty="0">
                 <a:solidFill>
                   <a:srgbClr val="0284C7"/>
                 </a:solidFill>
@@ -1504,13 +1557,13 @@
                 <a:ea typeface="Calibri" pitchFamily="34" charset="-122"/>
                 <a:cs typeface="Calibri" pitchFamily="34" charset="-120"/>
               </a:rPr>
-              <a:t>03  </a:t>
-            </a:r>
-            <a:pPr indent="0" marL="0">
-              <a:buNone/>
-            </a:pPr>
-            <a:r>
-              <a:rPr lang="en-US" sz="850" dirty="0">
+              <a:t>04  </a:t>
+            </a:r>
+            <a:pPr indent="0" marL="0">
+              <a:buNone/>
+            </a:pPr>
+            <a:r>
+              <a:rPr lang="en-US" sz="950" dirty="0">
                 <a:solidFill>
                   <a:srgbClr val="345671"/>
                 </a:solidFill>
@@ -1518,38 +1571,38 @@
                 <a:ea typeface="Calibri" pitchFamily="34" charset="-122"/>
                 <a:cs typeface="Calibri" pitchFamily="34" charset="-120"/>
               </a:rPr>
-              <a:t>Anatomy · pericardium</a:t>
-            </a:r>
-            <a:endParaRPr lang="en-US" sz="850" dirty="0"/>
-          </a:p>
-        </p:txBody>
-      </p:sp>
-      <p:sp>
-        <p:nvSpPr>
-          <p:cNvPr id="20" name="Text 17"/>
-          <p:cNvSpPr/>
-          <p:nvPr/>
-        </p:nvSpPr>
-        <p:spPr>
-          <a:xfrm>
-            <a:off x="594360" y="4325112"/>
-            <a:ext cx="1540764" cy="274320"/>
-          </a:xfrm>
-          <a:prstGeom prst="rect">
-            <a:avLst/>
-          </a:prstGeom>
-          <a:noFill/>
-          <a:ln/>
-        </p:spPr>
-        <p:txBody>
-          <a:bodyPr wrap="square" lIns="0" tIns="0" rIns="0" bIns="0" rtlCol="0" anchor="ctr"/>
-          <a:lstStyle/>
-          <a:p>
-            <a:pPr indent="0" marL="0">
-              <a:buNone/>
-            </a:pPr>
-            <a:r>
-              <a:rPr lang="en-US" sz="850" b="1" dirty="0">
+              <a:t>Heart sounds &amp; murmurs</a:t>
+            </a:r>
+            <a:endParaRPr lang="en-US" sz="950" dirty="0"/>
+          </a:p>
+        </p:txBody>
+      </p:sp>
+      <p:sp>
+        <p:nvSpPr>
+          <p:cNvPr id="21" name="Text 18"/>
+          <p:cNvSpPr/>
+          <p:nvPr/>
+        </p:nvSpPr>
+        <p:spPr>
+          <a:xfrm>
+            <a:off x="630936" y="3685032"/>
+            <a:ext cx="3287268" cy="173736"/>
+          </a:xfrm>
+          <a:prstGeom prst="rect">
+            <a:avLst/>
+          </a:prstGeom>
+          <a:noFill/>
+          <a:ln/>
+        </p:spPr>
+        <p:txBody>
+          <a:bodyPr wrap="square" lIns="0" tIns="0" rIns="0" bIns="0" rtlCol="0" anchor="ctr"/>
+          <a:lstStyle/>
+          <a:p>
+            <a:pPr indent="0" marL="0">
+              <a:buNone/>
+            </a:pPr>
+            <a:r>
+              <a:rPr lang="en-US" sz="950" b="1" dirty="0">
                 <a:solidFill>
                   <a:srgbClr val="0284C7"/>
                 </a:solidFill>
@@ -1557,13 +1610,13 @@
                 <a:ea typeface="Calibri" pitchFamily="34" charset="-122"/>
                 <a:cs typeface="Calibri" pitchFamily="34" charset="-120"/>
               </a:rPr>
-              <a:t>04  </a:t>
-            </a:r>
-            <a:pPr indent="0" marL="0">
-              <a:buNone/>
-            </a:pPr>
-            <a:r>
-              <a:rPr lang="en-US" sz="850" dirty="0">
+              <a:t>05  </a:t>
+            </a:r>
+            <a:pPr indent="0" marL="0">
+              <a:buNone/>
+            </a:pPr>
+            <a:r>
+              <a:rPr lang="en-US" sz="950" dirty="0">
                 <a:solidFill>
                   <a:srgbClr val="345671"/>
                 </a:solidFill>
@@ -1571,38 +1624,38 @@
                 <a:ea typeface="Calibri" pitchFamily="34" charset="-122"/>
                 <a:cs typeface="Calibri" pitchFamily="34" charset="-120"/>
               </a:rPr>
-              <a:t>Pump physiology · PV</a:t>
-            </a:r>
-            <a:endParaRPr lang="en-US" sz="850" dirty="0"/>
-          </a:p>
-        </p:txBody>
-      </p:sp>
-      <p:sp>
-        <p:nvSpPr>
-          <p:cNvPr id="21" name="Text 18"/>
-          <p:cNvSpPr/>
-          <p:nvPr/>
-        </p:nvSpPr>
-        <p:spPr>
-          <a:xfrm>
-            <a:off x="594360" y="4599432"/>
-            <a:ext cx="1540764" cy="274320"/>
-          </a:xfrm>
-          <a:prstGeom prst="rect">
-            <a:avLst/>
-          </a:prstGeom>
-          <a:noFill/>
-          <a:ln/>
-        </p:spPr>
-        <p:txBody>
-          <a:bodyPr wrap="square" lIns="0" tIns="0" rIns="0" bIns="0" rtlCol="0" anchor="ctr"/>
-          <a:lstStyle/>
-          <a:p>
-            <a:pPr indent="0" marL="0">
-              <a:buNone/>
-            </a:pPr>
-            <a:r>
-              <a:rPr lang="en-US" sz="850" b="1" dirty="0">
+              <a:t>ECG &amp; action potentials</a:t>
+            </a:r>
+            <a:endParaRPr lang="en-US" sz="950" dirty="0"/>
+          </a:p>
+        </p:txBody>
+      </p:sp>
+      <p:sp>
+        <p:nvSpPr>
+          <p:cNvPr id="22" name="Text 19"/>
+          <p:cNvSpPr/>
+          <p:nvPr/>
+        </p:nvSpPr>
+        <p:spPr>
+          <a:xfrm>
+            <a:off x="630936" y="3858768"/>
+            <a:ext cx="3287268" cy="173736"/>
+          </a:xfrm>
+          <a:prstGeom prst="rect">
+            <a:avLst/>
+          </a:prstGeom>
+          <a:noFill/>
+          <a:ln/>
+        </p:spPr>
+        <p:txBody>
+          <a:bodyPr wrap="square" lIns="0" tIns="0" rIns="0" bIns="0" rtlCol="0" anchor="ctr"/>
+          <a:lstStyle/>
+          <a:p>
+            <a:pPr indent="0" marL="0">
+              <a:buNone/>
+            </a:pPr>
+            <a:r>
+              <a:rPr lang="en-US" sz="950" b="1" dirty="0">
                 <a:solidFill>
                   <a:srgbClr val="0284C7"/>
                 </a:solidFill>
@@ -1610,13 +1663,13 @@
                 <a:ea typeface="Calibri" pitchFamily="34" charset="-122"/>
                 <a:cs typeface="Calibri" pitchFamily="34" charset="-120"/>
               </a:rPr>
-              <a:t>05  </a:t>
-            </a:r>
-            <a:pPr indent="0" marL="0">
-              <a:buNone/>
-            </a:pPr>
-            <a:r>
-              <a:rPr lang="en-US" sz="850" dirty="0">
+              <a:t>06  </a:t>
+            </a:r>
+            <a:pPr indent="0" marL="0">
+              <a:buNone/>
+            </a:pPr>
+            <a:r>
+              <a:rPr lang="en-US" sz="950" dirty="0">
                 <a:solidFill>
                   <a:srgbClr val="345671"/>
                 </a:solidFill>
@@ -1624,38 +1677,38 @@
                 <a:ea typeface="Calibri" pitchFamily="34" charset="-122"/>
                 <a:cs typeface="Calibri" pitchFamily="34" charset="-120"/>
               </a:rPr>
-              <a:t>Heart sounds · murmurs</a:t>
-            </a:r>
-            <a:endParaRPr lang="en-US" sz="850" dirty="0"/>
-          </a:p>
-        </p:txBody>
-      </p:sp>
-      <p:sp>
-        <p:nvSpPr>
-          <p:cNvPr id="22" name="Text 19"/>
-          <p:cNvSpPr/>
-          <p:nvPr/>
-        </p:nvSpPr>
-        <p:spPr>
-          <a:xfrm>
-            <a:off x="594360" y="4873752"/>
-            <a:ext cx="1540764" cy="274320"/>
-          </a:xfrm>
-          <a:prstGeom prst="rect">
-            <a:avLst/>
-          </a:prstGeom>
-          <a:noFill/>
-          <a:ln/>
-        </p:spPr>
-        <p:txBody>
-          <a:bodyPr wrap="square" lIns="0" tIns="0" rIns="0" bIns="0" rtlCol="0" anchor="ctr"/>
-          <a:lstStyle/>
-          <a:p>
-            <a:pPr indent="0" marL="0">
-              <a:buNone/>
-            </a:pPr>
-            <a:r>
-              <a:rPr lang="en-US" sz="850" b="1" dirty="0">
+              <a:t>CAD, IHD &amp; myocardial infarction</a:t>
+            </a:r>
+            <a:endParaRPr lang="en-US" sz="950" dirty="0"/>
+          </a:p>
+        </p:txBody>
+      </p:sp>
+      <p:sp>
+        <p:nvSpPr>
+          <p:cNvPr id="23" name="Text 20"/>
+          <p:cNvSpPr/>
+          <p:nvPr/>
+        </p:nvSpPr>
+        <p:spPr>
+          <a:xfrm>
+            <a:off x="630936" y="4032504"/>
+            <a:ext cx="3287268" cy="173736"/>
+          </a:xfrm>
+          <a:prstGeom prst="rect">
+            <a:avLst/>
+          </a:prstGeom>
+          <a:noFill/>
+          <a:ln/>
+        </p:spPr>
+        <p:txBody>
+          <a:bodyPr wrap="square" lIns="0" tIns="0" rIns="0" bIns="0" rtlCol="0" anchor="ctr"/>
+          <a:lstStyle/>
+          <a:p>
+            <a:pPr indent="0" marL="0">
+              <a:buNone/>
+            </a:pPr>
+            <a:r>
+              <a:rPr lang="en-US" sz="950" b="1" dirty="0">
                 <a:solidFill>
                   <a:srgbClr val="0284C7"/>
                 </a:solidFill>
@@ -1663,13 +1716,13 @@
                 <a:ea typeface="Calibri" pitchFamily="34" charset="-122"/>
                 <a:cs typeface="Calibri" pitchFamily="34" charset="-120"/>
               </a:rPr>
-              <a:t>06  </a:t>
-            </a:r>
-            <a:pPr indent="0" marL="0">
-              <a:buNone/>
-            </a:pPr>
-            <a:r>
-              <a:rPr lang="en-US" sz="850" dirty="0">
+              <a:t>07  </a:t>
+            </a:r>
+            <a:pPr indent="0" marL="0">
+              <a:buNone/>
+            </a:pPr>
+            <a:r>
+              <a:rPr lang="en-US" sz="950" dirty="0">
                 <a:solidFill>
                   <a:srgbClr val="345671"/>
                 </a:solidFill>
@@ -1677,38 +1730,38 @@
                 <a:ea typeface="Calibri" pitchFamily="34" charset="-122"/>
                 <a:cs typeface="Calibri" pitchFamily="34" charset="-120"/>
               </a:rPr>
-              <a:t>ECG · action potentials</a:t>
-            </a:r>
-            <a:endParaRPr lang="en-US" sz="850" dirty="0"/>
-          </a:p>
-        </p:txBody>
-      </p:sp>
-      <p:sp>
-        <p:nvSpPr>
-          <p:cNvPr id="23" name="Text 20"/>
-          <p:cNvSpPr/>
-          <p:nvPr/>
-        </p:nvSpPr>
-        <p:spPr>
-          <a:xfrm>
-            <a:off x="594360" y="5148072"/>
-            <a:ext cx="1540764" cy="274320"/>
-          </a:xfrm>
-          <a:prstGeom prst="rect">
-            <a:avLst/>
-          </a:prstGeom>
-          <a:noFill/>
-          <a:ln/>
-        </p:spPr>
-        <p:txBody>
-          <a:bodyPr wrap="square" lIns="0" tIns="0" rIns="0" bIns="0" rtlCol="0" anchor="ctr"/>
-          <a:lstStyle/>
-          <a:p>
-            <a:pPr indent="0" marL="0">
-              <a:buNone/>
-            </a:pPr>
-            <a:r>
-              <a:rPr lang="en-US" sz="850" b="1" dirty="0">
+              <a:t>Hypertension &amp; atherosclerosis</a:t>
+            </a:r>
+            <a:endParaRPr lang="en-US" sz="950" dirty="0"/>
+          </a:p>
+        </p:txBody>
+      </p:sp>
+      <p:sp>
+        <p:nvSpPr>
+          <p:cNvPr id="24" name="Text 21"/>
+          <p:cNvSpPr/>
+          <p:nvPr/>
+        </p:nvSpPr>
+        <p:spPr>
+          <a:xfrm>
+            <a:off x="630936" y="4206240"/>
+            <a:ext cx="3287268" cy="173736"/>
+          </a:xfrm>
+          <a:prstGeom prst="rect">
+            <a:avLst/>
+          </a:prstGeom>
+          <a:noFill/>
+          <a:ln/>
+        </p:spPr>
+        <p:txBody>
+          <a:bodyPr wrap="square" lIns="0" tIns="0" rIns="0" bIns="0" rtlCol="0" anchor="ctr"/>
+          <a:lstStyle/>
+          <a:p>
+            <a:pPr indent="0" marL="0">
+              <a:buNone/>
+            </a:pPr>
+            <a:r>
+              <a:rPr lang="en-US" sz="950" b="1" dirty="0">
                 <a:solidFill>
                   <a:srgbClr val="0284C7"/>
                 </a:solidFill>
@@ -1716,13 +1769,13 @@
                 <a:ea typeface="Calibri" pitchFamily="34" charset="-122"/>
                 <a:cs typeface="Calibri" pitchFamily="34" charset="-120"/>
               </a:rPr>
-              <a:t>07  </a:t>
-            </a:r>
-            <a:pPr indent="0" marL="0">
-              <a:buNone/>
-            </a:pPr>
-            <a:r>
-              <a:rPr lang="en-US" sz="850" dirty="0">
+              <a:t>08  </a:t>
+            </a:r>
+            <a:pPr indent="0" marL="0">
+              <a:buNone/>
+            </a:pPr>
+            <a:r>
+              <a:rPr lang="en-US" sz="950" dirty="0">
                 <a:solidFill>
                   <a:srgbClr val="345671"/>
                 </a:solidFill>
@@ -1730,38 +1783,38 @@
                 <a:ea typeface="Calibri" pitchFamily="34" charset="-122"/>
                 <a:cs typeface="Calibri" pitchFamily="34" charset="-120"/>
               </a:rPr>
-              <a:t>CAD · IHD · MI</a:t>
-            </a:r>
-            <a:endParaRPr lang="en-US" sz="850" dirty="0"/>
-          </a:p>
-        </p:txBody>
-      </p:sp>
-      <p:sp>
-        <p:nvSpPr>
-          <p:cNvPr id="24" name="Text 21"/>
-          <p:cNvSpPr/>
-          <p:nvPr/>
-        </p:nvSpPr>
-        <p:spPr>
-          <a:xfrm>
-            <a:off x="594360" y="5422392"/>
-            <a:ext cx="1540764" cy="274320"/>
-          </a:xfrm>
-          <a:prstGeom prst="rect">
-            <a:avLst/>
-          </a:prstGeom>
-          <a:noFill/>
-          <a:ln/>
-        </p:spPr>
-        <p:txBody>
-          <a:bodyPr wrap="square" lIns="0" tIns="0" rIns="0" bIns="0" rtlCol="0" anchor="ctr"/>
-          <a:lstStyle/>
-          <a:p>
-            <a:pPr indent="0" marL="0">
-              <a:buNone/>
-            </a:pPr>
-            <a:r>
-              <a:rPr lang="en-US" sz="850" b="1" dirty="0">
+              <a:t>Heart failure &amp; cardiomyopathies</a:t>
+            </a:r>
+            <a:endParaRPr lang="en-US" sz="950" dirty="0"/>
+          </a:p>
+        </p:txBody>
+      </p:sp>
+      <p:sp>
+        <p:nvSpPr>
+          <p:cNvPr id="25" name="Text 22"/>
+          <p:cNvSpPr/>
+          <p:nvPr/>
+        </p:nvSpPr>
+        <p:spPr>
+          <a:xfrm>
+            <a:off x="630936" y="4379976"/>
+            <a:ext cx="3287268" cy="173736"/>
+          </a:xfrm>
+          <a:prstGeom prst="rect">
+            <a:avLst/>
+          </a:prstGeom>
+          <a:noFill/>
+          <a:ln/>
+        </p:spPr>
+        <p:txBody>
+          <a:bodyPr wrap="square" lIns="0" tIns="0" rIns="0" bIns="0" rtlCol="0" anchor="ctr"/>
+          <a:lstStyle/>
+          <a:p>
+            <a:pPr indent="0" marL="0">
+              <a:buNone/>
+            </a:pPr>
+            <a:r>
+              <a:rPr lang="en-US" sz="950" b="1" dirty="0">
                 <a:solidFill>
                   <a:srgbClr val="0284C7"/>
                 </a:solidFill>
@@ -1769,13 +1822,13 @@
                 <a:ea typeface="Calibri" pitchFamily="34" charset="-122"/>
                 <a:cs typeface="Calibri" pitchFamily="34" charset="-120"/>
               </a:rPr>
-              <a:t>08  </a:t>
-            </a:r>
-            <a:pPr indent="0" marL="0">
-              <a:buNone/>
-            </a:pPr>
-            <a:r>
-              <a:rPr lang="en-US" sz="850" dirty="0">
+              <a:t>09  </a:t>
+            </a:r>
+            <a:pPr indent="0" marL="0">
+              <a:buNone/>
+            </a:pPr>
+            <a:r>
+              <a:rPr lang="en-US" sz="950" dirty="0">
                 <a:solidFill>
                   <a:srgbClr val="345671"/>
                 </a:solidFill>
@@ -1783,38 +1836,38 @@
                 <a:ea typeface="Calibri" pitchFamily="34" charset="-122"/>
                 <a:cs typeface="Calibri" pitchFamily="34" charset="-120"/>
               </a:rPr>
-              <a:t>HTN · atherosclerosis</a:t>
-            </a:r>
-            <a:endParaRPr lang="en-US" sz="850" dirty="0"/>
-          </a:p>
-        </p:txBody>
-      </p:sp>
-      <p:sp>
-        <p:nvSpPr>
-          <p:cNvPr id="25" name="Text 22"/>
-          <p:cNvSpPr/>
-          <p:nvPr/>
-        </p:nvSpPr>
-        <p:spPr>
-          <a:xfrm>
-            <a:off x="594360" y="5696712"/>
-            <a:ext cx="1540764" cy="274320"/>
-          </a:xfrm>
-          <a:prstGeom prst="rect">
-            <a:avLst/>
-          </a:prstGeom>
-          <a:noFill/>
-          <a:ln/>
-        </p:spPr>
-        <p:txBody>
-          <a:bodyPr wrap="square" lIns="0" tIns="0" rIns="0" bIns="0" rtlCol="0" anchor="ctr"/>
-          <a:lstStyle/>
-          <a:p>
-            <a:pPr indent="0" marL="0">
-              <a:buNone/>
-            </a:pPr>
-            <a:r>
-              <a:rPr lang="en-US" sz="850" b="1" dirty="0">
+              <a:t>Endocarditis, myocarditis &amp; vasculitis</a:t>
+            </a:r>
+            <a:endParaRPr lang="en-US" sz="950" dirty="0"/>
+          </a:p>
+        </p:txBody>
+      </p:sp>
+      <p:sp>
+        <p:nvSpPr>
+          <p:cNvPr id="26" name="Text 23"/>
+          <p:cNvSpPr/>
+          <p:nvPr/>
+        </p:nvSpPr>
+        <p:spPr>
+          <a:xfrm>
+            <a:off x="630936" y="4553712"/>
+            <a:ext cx="3287268" cy="173736"/>
+          </a:xfrm>
+          <a:prstGeom prst="rect">
+            <a:avLst/>
+          </a:prstGeom>
+          <a:noFill/>
+          <a:ln/>
+        </p:spPr>
+        <p:txBody>
+          <a:bodyPr wrap="square" lIns="0" tIns="0" rIns="0" bIns="0" rtlCol="0" anchor="ctr"/>
+          <a:lstStyle/>
+          <a:p>
+            <a:pPr indent="0" marL="0">
+              <a:buNone/>
+            </a:pPr>
+            <a:r>
+              <a:rPr lang="en-US" sz="950" b="1" dirty="0">
                 <a:solidFill>
                   <a:srgbClr val="0284C7"/>
                 </a:solidFill>
@@ -1822,13 +1875,13 @@
                 <a:ea typeface="Calibri" pitchFamily="34" charset="-122"/>
                 <a:cs typeface="Calibri" pitchFamily="34" charset="-120"/>
               </a:rPr>
-              <a:t>09  </a:t>
-            </a:r>
-            <a:pPr indent="0" marL="0">
-              <a:buNone/>
-            </a:pPr>
-            <a:r>
-              <a:rPr lang="en-US" sz="850" dirty="0">
+              <a:t>10  </a:t>
+            </a:r>
+            <a:pPr indent="0" marL="0">
+              <a:buNone/>
+            </a:pPr>
+            <a:r>
+              <a:rPr lang="en-US" sz="950" dirty="0">
                 <a:solidFill>
                   <a:srgbClr val="345671"/>
                 </a:solidFill>
@@ -1836,132 +1889,26 @@
                 <a:ea typeface="Calibri" pitchFamily="34" charset="-122"/>
                 <a:cs typeface="Calibri" pitchFamily="34" charset="-120"/>
               </a:rPr>
-              <a:t>HF · cardiomyopathies</a:t>
-            </a:r>
-            <a:endParaRPr lang="en-US" sz="850" dirty="0"/>
-          </a:p>
-        </p:txBody>
-      </p:sp>
-      <p:sp>
-        <p:nvSpPr>
-          <p:cNvPr id="26" name="Text 23"/>
-          <p:cNvSpPr/>
-          <p:nvPr/>
-        </p:nvSpPr>
-        <p:spPr>
-          <a:xfrm>
-            <a:off x="594360" y="5971032"/>
-            <a:ext cx="1540764" cy="274320"/>
-          </a:xfrm>
-          <a:prstGeom prst="rect">
-            <a:avLst/>
-          </a:prstGeom>
-          <a:noFill/>
-          <a:ln/>
-        </p:spPr>
-        <p:txBody>
-          <a:bodyPr wrap="square" lIns="0" tIns="0" rIns="0" bIns="0" rtlCol="0" anchor="ctr"/>
-          <a:lstStyle/>
-          <a:p>
-            <a:pPr indent="0" marL="0">
-              <a:buNone/>
-            </a:pPr>
-            <a:r>
-              <a:rPr lang="en-US" sz="850" b="1" dirty="0">
-                <a:solidFill>
-                  <a:srgbClr val="0284C7"/>
-                </a:solidFill>
-                <a:latin typeface="Calibri" pitchFamily="34" charset="0"/>
-                <a:ea typeface="Calibri" pitchFamily="34" charset="-122"/>
-                <a:cs typeface="Calibri" pitchFamily="34" charset="-120"/>
-              </a:rPr>
-              <a:t>10  </a:t>
-            </a:r>
-            <a:pPr indent="0" marL="0">
-              <a:buNone/>
-            </a:pPr>
-            <a:r>
-              <a:rPr lang="en-US" sz="850" dirty="0">
-                <a:solidFill>
-                  <a:srgbClr val="345671"/>
-                </a:solidFill>
-                <a:latin typeface="Calibri" pitchFamily="34" charset="0"/>
-                <a:ea typeface="Calibri" pitchFamily="34" charset="-122"/>
-                <a:cs typeface="Calibri" pitchFamily="34" charset="-120"/>
-              </a:rPr>
-              <a:t>Rheumatic · IE · vasc</a:t>
-            </a:r>
-            <a:endParaRPr lang="en-US" sz="850" dirty="0"/>
-          </a:p>
-        </p:txBody>
-      </p:sp>
-      <p:sp>
-        <p:nvSpPr>
-          <p:cNvPr id="27" name="Text 24"/>
-          <p:cNvSpPr/>
-          <p:nvPr/>
-        </p:nvSpPr>
-        <p:spPr>
-          <a:xfrm>
-            <a:off x="594360" y="6245352"/>
-            <a:ext cx="1540764" cy="274320"/>
-          </a:xfrm>
-          <a:prstGeom prst="rect">
-            <a:avLst/>
-          </a:prstGeom>
-          <a:noFill/>
-          <a:ln/>
-        </p:spPr>
-        <p:txBody>
-          <a:bodyPr wrap="square" lIns="0" tIns="0" rIns="0" bIns="0" rtlCol="0" anchor="ctr"/>
-          <a:lstStyle/>
-          <a:p>
-            <a:pPr indent="0" marL="0">
-              <a:buNone/>
-            </a:pPr>
-            <a:r>
-              <a:rPr lang="en-US" sz="850" b="1" dirty="0">
-                <a:solidFill>
-                  <a:srgbClr val="0284C7"/>
-                </a:solidFill>
-                <a:latin typeface="Calibri" pitchFamily="34" charset="0"/>
-                <a:ea typeface="Calibri" pitchFamily="34" charset="-122"/>
-                <a:cs typeface="Calibri" pitchFamily="34" charset="-120"/>
-              </a:rPr>
-              <a:t>11  </a:t>
-            </a:r>
-            <a:pPr indent="0" marL="0">
-              <a:buNone/>
-            </a:pPr>
-            <a:r>
-              <a:rPr lang="en-US" sz="850" dirty="0">
-                <a:solidFill>
-                  <a:srgbClr val="345671"/>
-                </a:solidFill>
-                <a:latin typeface="Calibri" pitchFamily="34" charset="0"/>
-                <a:ea typeface="Calibri" pitchFamily="34" charset="-122"/>
-                <a:cs typeface="Calibri" pitchFamily="34" charset="-120"/>
-              </a:rPr>
-              <a:t>CV pharmacology</a:t>
-            </a:r>
-            <a:endParaRPr lang="en-US" sz="850" dirty="0"/>
-          </a:p>
-        </p:txBody>
-      </p:sp>
-      <p:sp>
-        <p:nvSpPr>
-          <p:cNvPr id="28" name="Shape 25"/>
-          <p:cNvSpPr/>
-          <p:nvPr/>
-        </p:nvSpPr>
-        <p:spPr>
-          <a:xfrm>
-            <a:off x="2336292" y="2697480"/>
-            <a:ext cx="1723644" cy="4526280"/>
+              <a:t>Cardiovascular pharmacology</a:t>
+            </a:r>
+            <a:endParaRPr lang="en-US" sz="950" dirty="0"/>
+          </a:p>
+        </p:txBody>
+      </p:sp>
+      <p:sp>
+        <p:nvSpPr>
+          <p:cNvPr id="27" name="Shape 24"/>
+          <p:cNvSpPr/>
+          <p:nvPr/>
+        </p:nvSpPr>
+        <p:spPr>
+          <a:xfrm>
+            <a:off x="4183380" y="2331720"/>
+            <a:ext cx="3543300" cy="2377440"/>
           </a:xfrm>
           <a:prstGeom prst="roundRect">
             <a:avLst>
-              <a:gd name="adj" fmla="val 5305"/>
+              <a:gd name="adj" fmla="val 3846"/>
             </a:avLst>
           </a:prstGeom>
           <a:solidFill>
@@ -1977,14 +1924,14 @@
       </p:sp>
       <p:sp>
         <p:nvSpPr>
-          <p:cNvPr id="29" name="Shape 26"/>
-          <p:cNvSpPr/>
-          <p:nvPr/>
-        </p:nvSpPr>
-        <p:spPr>
-          <a:xfrm>
-            <a:off x="2336292" y="2788920"/>
-            <a:ext cx="1723644" cy="621792"/>
+          <p:cNvPr id="28" name="Shape 25"/>
+          <p:cNvSpPr/>
+          <p:nvPr/>
+        </p:nvSpPr>
+        <p:spPr>
+          <a:xfrm>
+            <a:off x="4183380" y="2404872"/>
+            <a:ext cx="3543300" cy="493776"/>
           </a:xfrm>
           <a:prstGeom prst="rect">
             <a:avLst/>
@@ -2002,18 +1949,18 @@
       </p:sp>
       <p:sp>
         <p:nvSpPr>
-          <p:cNvPr id="30" name="Shape 27"/>
-          <p:cNvSpPr/>
-          <p:nvPr/>
-        </p:nvSpPr>
-        <p:spPr>
-          <a:xfrm>
-            <a:off x="2336292" y="2697480"/>
-            <a:ext cx="1723644" cy="713232"/>
+          <p:cNvPr id="29" name="Shape 26"/>
+          <p:cNvSpPr/>
+          <p:nvPr/>
+        </p:nvSpPr>
+        <p:spPr>
+          <a:xfrm>
+            <a:off x="4183380" y="2331720"/>
+            <a:ext cx="3543300" cy="566928"/>
           </a:xfrm>
           <a:prstGeom prst="roundRect">
             <a:avLst>
-              <a:gd name="adj" fmla="val 12821"/>
+              <a:gd name="adj" fmla="val 16129"/>
             </a:avLst>
           </a:prstGeom>
           <a:solidFill>
@@ -2029,30 +1976,69 @@
       </p:sp>
       <p:sp>
         <p:nvSpPr>
+          <p:cNvPr id="30" name="Text 27"/>
+          <p:cNvSpPr/>
+          <p:nvPr/>
+        </p:nvSpPr>
+        <p:spPr>
+          <a:xfrm>
+            <a:off x="4311396" y="2386584"/>
+            <a:ext cx="3287268" cy="256032"/>
+          </a:xfrm>
+          <a:prstGeom prst="rect">
+            <a:avLst/>
+          </a:prstGeom>
+          <a:noFill/>
+          <a:ln/>
+        </p:spPr>
+        <p:txBody>
+          <a:bodyPr wrap="square" lIns="0" tIns="0" rIns="0" bIns="0" rtlCol="0" anchor="ctr"/>
+          <a:lstStyle/>
+          <a:p>
+            <a:pPr indent="0" marL="0">
+              <a:buNone/>
+            </a:pPr>
+            <a:r>
+              <a:rPr lang="en-US" sz="1300" b="1" spc="100" kern="0" dirty="0">
+                <a:solidFill>
+                  <a:srgbClr val="FFFFFF"/>
+                </a:solidFill>
+                <a:latin typeface="Calibri" pitchFamily="34" charset="0"/>
+                <a:ea typeface="Calibri" pitchFamily="34" charset="-122"/>
+                <a:cs typeface="Calibri" pitchFamily="34" charset="-120"/>
+              </a:rPr>
+              <a:t>RESPIRATORY</a:t>
+            </a:r>
+            <a:endParaRPr lang="en-US" sz="1300" dirty="0"/>
+          </a:p>
+        </p:txBody>
+      </p:sp>
+      <p:sp>
+        <p:nvSpPr>
           <p:cNvPr id="31" name="Text 28"/>
           <p:cNvSpPr/>
           <p:nvPr/>
         </p:nvSpPr>
         <p:spPr>
           <a:xfrm>
-            <a:off x="2427732" y="2788920"/>
-            <a:ext cx="1540764" cy="274320"/>
-          </a:xfrm>
-          <a:prstGeom prst="rect">
-            <a:avLst/>
-          </a:prstGeom>
-          <a:noFill/>
-          <a:ln/>
-        </p:spPr>
-        <p:txBody>
-          <a:bodyPr wrap="square" lIns="0" tIns="0" rIns="0" bIns="0" rtlCol="0" anchor="ctr"/>
-          <a:lstStyle/>
-          <a:p>
-            <a:pPr indent="0" marL="0">
-              <a:buNone/>
-            </a:pPr>
-            <a:r>
-              <a:rPr lang="en-US" sz="1100" b="1" spc="100" kern="0" dirty="0">
+            <a:off x="4311396" y="2642616"/>
+            <a:ext cx="3287268" cy="219456"/>
+          </a:xfrm>
+          <a:prstGeom prst="rect">
+            <a:avLst/>
+          </a:prstGeom>
+          <a:noFill/>
+          <a:ln/>
+        </p:spPr>
+        <p:txBody>
+          <a:bodyPr wrap="square" lIns="0" tIns="0" rIns="0" bIns="0" rtlCol="0" anchor="ctr"/>
+          <a:lstStyle/>
+          <a:p>
+            <a:pPr indent="0" marL="0">
+              <a:buNone/>
+            </a:pPr>
+            <a:r>
+              <a:rPr lang="en-US" sz="1000" dirty="0">
                 <a:solidFill>
                   <a:srgbClr val="FFFFFF"/>
                 </a:solidFill>
@@ -2060,9 +2046,9 @@
                 <a:ea typeface="Calibri" pitchFamily="34" charset="-122"/>
                 <a:cs typeface="Calibri" pitchFamily="34" charset="-120"/>
               </a:rPr>
-              <a:t>RESPIRATORY</a:t>
-            </a:r>
-            <a:endParaRPr lang="en-US" sz="1100" dirty="0"/>
+              <a:t>8 days  ·  Jun 11 – 18</a:t>
+            </a:r>
+            <a:endParaRPr lang="en-US" sz="1000" dirty="0"/>
           </a:p>
         </p:txBody>
       </p:sp>
@@ -2074,32 +2060,46 @@
         </p:nvSpPr>
         <p:spPr>
           <a:xfrm>
-            <a:off x="2427732" y="3081528"/>
-            <a:ext cx="1540764" cy="256032"/>
-          </a:xfrm>
-          <a:prstGeom prst="rect">
-            <a:avLst/>
-          </a:prstGeom>
-          <a:noFill/>
-          <a:ln/>
-        </p:spPr>
-        <p:txBody>
-          <a:bodyPr wrap="square" lIns="0" tIns="0" rIns="0" bIns="0" rtlCol="0" anchor="ctr"/>
-          <a:lstStyle/>
-          <a:p>
+            <a:off x="4311396" y="2990088"/>
+            <a:ext cx="3287268" cy="173736"/>
+          </a:xfrm>
+          <a:prstGeom prst="rect">
+            <a:avLst/>
+          </a:prstGeom>
+          <a:noFill/>
+          <a:ln/>
+        </p:spPr>
+        <p:txBody>
+          <a:bodyPr wrap="square" lIns="0" tIns="0" rIns="0" bIns="0" rtlCol="0" anchor="ctr"/>
+          <a:lstStyle/>
+          <a:p>
+            <a:pPr indent="0" marL="0">
+              <a:buNone/>
+            </a:pPr>
+            <a:r>
+              <a:rPr lang="en-US" sz="950" b="1" dirty="0">
+                <a:solidFill>
+                  <a:srgbClr val="059669"/>
+                </a:solidFill>
+                <a:latin typeface="Calibri" pitchFamily="34" charset="0"/>
+                <a:ea typeface="Calibri" pitchFamily="34" charset="-122"/>
+                <a:cs typeface="Calibri" pitchFamily="34" charset="-120"/>
+              </a:rPr>
+              <a:t>01  </a:t>
+            </a:r>
             <a:pPr indent="0" marL="0">
               <a:buNone/>
             </a:pPr>
             <a:r>
               <a:rPr lang="en-US" sz="950" dirty="0">
                 <a:solidFill>
-                  <a:srgbClr val="FFFFFF"/>
-                </a:solidFill>
-                <a:latin typeface="Calibri" pitchFamily="34" charset="0"/>
-                <a:ea typeface="Calibri" pitchFamily="34" charset="-122"/>
-                <a:cs typeface="Calibri" pitchFamily="34" charset="-120"/>
-              </a:rPr>
-              <a:t>9 days  ·  Jun 12 – 20</a:t>
+                  <a:srgbClr val="345671"/>
+                </a:solidFill>
+                <a:latin typeface="Calibri" pitchFamily="34" charset="0"/>
+                <a:ea typeface="Calibri" pitchFamily="34" charset="-122"/>
+                <a:cs typeface="Calibri" pitchFamily="34" charset="-120"/>
+              </a:rPr>
+              <a:t>Embryology, surfactant &amp; congenital</a:t>
             </a:r>
             <a:endParaRPr lang="en-US" sz="950" dirty="0"/>
           </a:p>
@@ -2113,24 +2113,24 @@
         </p:nvSpPr>
         <p:spPr>
           <a:xfrm>
-            <a:off x="2427732" y="3502152"/>
-            <a:ext cx="1540764" cy="274320"/>
-          </a:xfrm>
-          <a:prstGeom prst="rect">
-            <a:avLst/>
-          </a:prstGeom>
-          <a:noFill/>
-          <a:ln/>
-        </p:spPr>
-        <p:txBody>
-          <a:bodyPr wrap="square" lIns="0" tIns="0" rIns="0" bIns="0" rtlCol="0" anchor="ctr"/>
-          <a:lstStyle/>
-          <a:p>
-            <a:pPr indent="0" marL="0">
-              <a:buNone/>
-            </a:pPr>
-            <a:r>
-              <a:rPr lang="en-US" sz="850" b="1" dirty="0">
+            <a:off x="4311396" y="3163824"/>
+            <a:ext cx="3287268" cy="173736"/>
+          </a:xfrm>
+          <a:prstGeom prst="rect">
+            <a:avLst/>
+          </a:prstGeom>
+          <a:noFill/>
+          <a:ln/>
+        </p:spPr>
+        <p:txBody>
+          <a:bodyPr wrap="square" lIns="0" tIns="0" rIns="0" bIns="0" rtlCol="0" anchor="ctr"/>
+          <a:lstStyle/>
+          <a:p>
+            <a:pPr indent="0" marL="0">
+              <a:buNone/>
+            </a:pPr>
+            <a:r>
+              <a:rPr lang="en-US" sz="950" b="1" dirty="0">
                 <a:solidFill>
                   <a:srgbClr val="059669"/>
                 </a:solidFill>
@@ -2138,13 +2138,13 @@
                 <a:ea typeface="Calibri" pitchFamily="34" charset="-122"/>
                 <a:cs typeface="Calibri" pitchFamily="34" charset="-120"/>
               </a:rPr>
-              <a:t>01  </a:t>
-            </a:r>
-            <a:pPr indent="0" marL="0">
-              <a:buNone/>
-            </a:pPr>
-            <a:r>
-              <a:rPr lang="en-US" sz="850" dirty="0">
+              <a:t>02  </a:t>
+            </a:r>
+            <a:pPr indent="0" marL="0">
+              <a:buNone/>
+            </a:pPr>
+            <a:r>
+              <a:rPr lang="en-US" sz="950" dirty="0">
                 <a:solidFill>
                   <a:srgbClr val="345671"/>
                 </a:solidFill>
@@ -2152,9 +2152,9 @@
                 <a:ea typeface="Calibri" pitchFamily="34" charset="-122"/>
                 <a:cs typeface="Calibri" pitchFamily="34" charset="-120"/>
               </a:rPr>
-              <a:t>Embryology · surfactant</a:t>
-            </a:r>
-            <a:endParaRPr lang="en-US" sz="850" dirty="0"/>
+              <a:t>Anatomy &amp; muscles of breathing</a:t>
+            </a:r>
+            <a:endParaRPr lang="en-US" sz="950" dirty="0"/>
           </a:p>
         </p:txBody>
       </p:sp>
@@ -2166,24 +2166,24 @@
         </p:nvSpPr>
         <p:spPr>
           <a:xfrm>
-            <a:off x="2427732" y="3776472"/>
-            <a:ext cx="1540764" cy="274320"/>
-          </a:xfrm>
-          <a:prstGeom prst="rect">
-            <a:avLst/>
-          </a:prstGeom>
-          <a:noFill/>
-          <a:ln/>
-        </p:spPr>
-        <p:txBody>
-          <a:bodyPr wrap="square" lIns="0" tIns="0" rIns="0" bIns="0" rtlCol="0" anchor="ctr"/>
-          <a:lstStyle/>
-          <a:p>
-            <a:pPr indent="0" marL="0">
-              <a:buNone/>
-            </a:pPr>
-            <a:r>
-              <a:rPr lang="en-US" sz="850" b="1" dirty="0">
+            <a:off x="4311396" y="3337560"/>
+            <a:ext cx="3287268" cy="173736"/>
+          </a:xfrm>
+          <a:prstGeom prst="rect">
+            <a:avLst/>
+          </a:prstGeom>
+          <a:noFill/>
+          <a:ln/>
+        </p:spPr>
+        <p:txBody>
+          <a:bodyPr wrap="square" lIns="0" tIns="0" rIns="0" bIns="0" rtlCol="0" anchor="ctr"/>
+          <a:lstStyle/>
+          <a:p>
+            <a:pPr indent="0" marL="0">
+              <a:buNone/>
+            </a:pPr>
+            <a:r>
+              <a:rPr lang="en-US" sz="950" b="1" dirty="0">
                 <a:solidFill>
                   <a:srgbClr val="059669"/>
                 </a:solidFill>
@@ -2191,13 +2191,13 @@
                 <a:ea typeface="Calibri" pitchFamily="34" charset="-122"/>
                 <a:cs typeface="Calibri" pitchFamily="34" charset="-120"/>
               </a:rPr>
-              <a:t>02  </a:t>
-            </a:r>
-            <a:pPr indent="0" marL="0">
-              <a:buNone/>
-            </a:pPr>
-            <a:r>
-              <a:rPr lang="en-US" sz="850" dirty="0">
+              <a:t>03  </a:t>
+            </a:r>
+            <a:pPr indent="0" marL="0">
+              <a:buNone/>
+            </a:pPr>
+            <a:r>
+              <a:rPr lang="en-US" sz="950" dirty="0">
                 <a:solidFill>
                   <a:srgbClr val="345671"/>
                 </a:solidFill>
@@ -2205,9 +2205,9 @@
                 <a:ea typeface="Calibri" pitchFamily="34" charset="-122"/>
                 <a:cs typeface="Calibri" pitchFamily="34" charset="-120"/>
               </a:rPr>
-              <a:t>Anatomy · diaphragm</a:t>
-            </a:r>
-            <a:endParaRPr lang="en-US" sz="850" dirty="0"/>
+              <a:t>Lung volumes &amp; ventilation</a:t>
+            </a:r>
+            <a:endParaRPr lang="en-US" sz="950" dirty="0"/>
           </a:p>
         </p:txBody>
       </p:sp>
@@ -2219,24 +2219,24 @@
         </p:nvSpPr>
         <p:spPr>
           <a:xfrm>
-            <a:off x="2427732" y="4050792"/>
-            <a:ext cx="1540764" cy="274320"/>
-          </a:xfrm>
-          <a:prstGeom prst="rect">
-            <a:avLst/>
-          </a:prstGeom>
-          <a:noFill/>
-          <a:ln/>
-        </p:spPr>
-        <p:txBody>
-          <a:bodyPr wrap="square" lIns="0" tIns="0" rIns="0" bIns="0" rtlCol="0" anchor="ctr"/>
-          <a:lstStyle/>
-          <a:p>
-            <a:pPr indent="0" marL="0">
-              <a:buNone/>
-            </a:pPr>
-            <a:r>
-              <a:rPr lang="en-US" sz="850" b="1" dirty="0">
+            <a:off x="4311396" y="3511296"/>
+            <a:ext cx="3287268" cy="173736"/>
+          </a:xfrm>
+          <a:prstGeom prst="rect">
+            <a:avLst/>
+          </a:prstGeom>
+          <a:noFill/>
+          <a:ln/>
+        </p:spPr>
+        <p:txBody>
+          <a:bodyPr wrap="square" lIns="0" tIns="0" rIns="0" bIns="0" rtlCol="0" anchor="ctr"/>
+          <a:lstStyle/>
+          <a:p>
+            <a:pPr indent="0" marL="0">
+              <a:buNone/>
+            </a:pPr>
+            <a:r>
+              <a:rPr lang="en-US" sz="950" b="1" dirty="0">
                 <a:solidFill>
                   <a:srgbClr val="059669"/>
                 </a:solidFill>
@@ -2244,13 +2244,13 @@
                 <a:ea typeface="Calibri" pitchFamily="34" charset="-122"/>
                 <a:cs typeface="Calibri" pitchFamily="34" charset="-120"/>
               </a:rPr>
-              <a:t>03  </a:t>
-            </a:r>
-            <a:pPr indent="0" marL="0">
-              <a:buNone/>
-            </a:pPr>
-            <a:r>
-              <a:rPr lang="en-US" sz="850" dirty="0">
+              <a:t>04  </a:t>
+            </a:r>
+            <a:pPr indent="0" marL="0">
+              <a:buNone/>
+            </a:pPr>
+            <a:r>
+              <a:rPr lang="en-US" sz="950" dirty="0">
                 <a:solidFill>
                   <a:srgbClr val="345671"/>
                 </a:solidFill>
@@ -2258,9 +2258,9 @@
                 <a:ea typeface="Calibri" pitchFamily="34" charset="-122"/>
                 <a:cs typeface="Calibri" pitchFamily="34" charset="-120"/>
               </a:rPr>
-              <a:t>Volumes · mechanics</a:t>
-            </a:r>
-            <a:endParaRPr lang="en-US" sz="850" dirty="0"/>
+              <a:t>Gas exchange &amp; V/Q mismatch</a:t>
+            </a:r>
+            <a:endParaRPr lang="en-US" sz="950" dirty="0"/>
           </a:p>
         </p:txBody>
       </p:sp>
@@ -2272,24 +2272,24 @@
         </p:nvSpPr>
         <p:spPr>
           <a:xfrm>
-            <a:off x="2427732" y="4325112"/>
-            <a:ext cx="1540764" cy="274320"/>
-          </a:xfrm>
-          <a:prstGeom prst="rect">
-            <a:avLst/>
-          </a:prstGeom>
-          <a:noFill/>
-          <a:ln/>
-        </p:spPr>
-        <p:txBody>
-          <a:bodyPr wrap="square" lIns="0" tIns="0" rIns="0" bIns="0" rtlCol="0" anchor="ctr"/>
-          <a:lstStyle/>
-          <a:p>
-            <a:pPr indent="0" marL="0">
-              <a:buNone/>
-            </a:pPr>
-            <a:r>
-              <a:rPr lang="en-US" sz="850" b="1" dirty="0">
+            <a:off x="4311396" y="3685032"/>
+            <a:ext cx="3287268" cy="173736"/>
+          </a:xfrm>
+          <a:prstGeom prst="rect">
+            <a:avLst/>
+          </a:prstGeom>
+          <a:noFill/>
+          <a:ln/>
+        </p:spPr>
+        <p:txBody>
+          <a:bodyPr wrap="square" lIns="0" tIns="0" rIns="0" bIns="0" rtlCol="0" anchor="ctr"/>
+          <a:lstStyle/>
+          <a:p>
+            <a:pPr indent="0" marL="0">
+              <a:buNone/>
+            </a:pPr>
+            <a:r>
+              <a:rPr lang="en-US" sz="950" b="1" dirty="0">
                 <a:solidFill>
                   <a:srgbClr val="059669"/>
                 </a:solidFill>
@@ -2297,13 +2297,13 @@
                 <a:ea typeface="Calibri" pitchFamily="34" charset="-122"/>
                 <a:cs typeface="Calibri" pitchFamily="34" charset="-120"/>
               </a:rPr>
-              <a:t>04  </a:t>
-            </a:r>
-            <a:pPr indent="0" marL="0">
-              <a:buNone/>
-            </a:pPr>
-            <a:r>
-              <a:rPr lang="en-US" sz="850" dirty="0">
+              <a:t>05  </a:t>
+            </a:r>
+            <a:pPr indent="0" marL="0">
+              <a:buNone/>
+            </a:pPr>
+            <a:r>
+              <a:rPr lang="en-US" sz="950" dirty="0">
                 <a:solidFill>
                   <a:srgbClr val="345671"/>
                 </a:solidFill>
@@ -2311,9 +2311,9 @@
                 <a:ea typeface="Calibri" pitchFamily="34" charset="-122"/>
                 <a:cs typeface="Calibri" pitchFamily="34" charset="-120"/>
               </a:rPr>
-              <a:t>V/Q · A–a · pulm circ</a:t>
-            </a:r>
-            <a:endParaRPr lang="en-US" sz="850" dirty="0"/>
+              <a:t>Control of breathing &amp; sleep apnea</a:t>
+            </a:r>
+            <a:endParaRPr lang="en-US" sz="950" dirty="0"/>
           </a:p>
         </p:txBody>
       </p:sp>
@@ -2325,24 +2325,24 @@
         </p:nvSpPr>
         <p:spPr>
           <a:xfrm>
-            <a:off x="2427732" y="4599432"/>
-            <a:ext cx="1540764" cy="274320"/>
-          </a:xfrm>
-          <a:prstGeom prst="rect">
-            <a:avLst/>
-          </a:prstGeom>
-          <a:noFill/>
-          <a:ln/>
-        </p:spPr>
-        <p:txBody>
-          <a:bodyPr wrap="square" lIns="0" tIns="0" rIns="0" bIns="0" rtlCol="0" anchor="ctr"/>
-          <a:lstStyle/>
-          <a:p>
-            <a:pPr indent="0" marL="0">
-              <a:buNone/>
-            </a:pPr>
-            <a:r>
-              <a:rPr lang="en-US" sz="850" b="1" dirty="0">
+            <a:off x="4311396" y="3858768"/>
+            <a:ext cx="3287268" cy="173736"/>
+          </a:xfrm>
+          <a:prstGeom prst="rect">
+            <a:avLst/>
+          </a:prstGeom>
+          <a:noFill/>
+          <a:ln/>
+        </p:spPr>
+        <p:txBody>
+          <a:bodyPr wrap="square" lIns="0" tIns="0" rIns="0" bIns="0" rtlCol="0" anchor="ctr"/>
+          <a:lstStyle/>
+          <a:p>
+            <a:pPr indent="0" marL="0">
+              <a:buNone/>
+            </a:pPr>
+            <a:r>
+              <a:rPr lang="en-US" sz="950" b="1" dirty="0">
                 <a:solidFill>
                   <a:srgbClr val="059669"/>
                 </a:solidFill>
@@ -2350,13 +2350,13 @@
                 <a:ea typeface="Calibri" pitchFamily="34" charset="-122"/>
                 <a:cs typeface="Calibri" pitchFamily="34" charset="-120"/>
               </a:rPr>
-              <a:t>05  </a:t>
-            </a:r>
-            <a:pPr indent="0" marL="0">
-              <a:buNone/>
-            </a:pPr>
-            <a:r>
-              <a:rPr lang="en-US" sz="850" dirty="0">
+              <a:t>06  </a:t>
+            </a:r>
+            <a:pPr indent="0" marL="0">
+              <a:buNone/>
+            </a:pPr>
+            <a:r>
+              <a:rPr lang="en-US" sz="950" dirty="0">
                 <a:solidFill>
                   <a:srgbClr val="345671"/>
                 </a:solidFill>
@@ -2364,9 +2364,9 @@
                 <a:ea typeface="Calibri" pitchFamily="34" charset="-122"/>
                 <a:cs typeface="Calibri" pitchFamily="34" charset="-120"/>
               </a:rPr>
-              <a:t>Control · sleep apnea</a:t>
-            </a:r>
-            <a:endParaRPr lang="en-US" sz="850" dirty="0"/>
+              <a:t>Asthma &amp; COPD</a:t>
+            </a:r>
+            <a:endParaRPr lang="en-US" sz="950" dirty="0"/>
           </a:p>
         </p:txBody>
       </p:sp>
@@ -2378,24 +2378,24 @@
         </p:nvSpPr>
         <p:spPr>
           <a:xfrm>
-            <a:off x="2427732" y="4873752"/>
-            <a:ext cx="1540764" cy="274320"/>
-          </a:xfrm>
-          <a:prstGeom prst="rect">
-            <a:avLst/>
-          </a:prstGeom>
-          <a:noFill/>
-          <a:ln/>
-        </p:spPr>
-        <p:txBody>
-          <a:bodyPr wrap="square" lIns="0" tIns="0" rIns="0" bIns="0" rtlCol="0" anchor="ctr"/>
-          <a:lstStyle/>
-          <a:p>
-            <a:pPr indent="0" marL="0">
-              <a:buNone/>
-            </a:pPr>
-            <a:r>
-              <a:rPr lang="en-US" sz="850" b="1" dirty="0">
+            <a:off x="4311396" y="4032504"/>
+            <a:ext cx="3287268" cy="173736"/>
+          </a:xfrm>
+          <a:prstGeom prst="rect">
+            <a:avLst/>
+          </a:prstGeom>
+          <a:noFill/>
+          <a:ln/>
+        </p:spPr>
+        <p:txBody>
+          <a:bodyPr wrap="square" lIns="0" tIns="0" rIns="0" bIns="0" rtlCol="0" anchor="ctr"/>
+          <a:lstStyle/>
+          <a:p>
+            <a:pPr indent="0" marL="0">
+              <a:buNone/>
+            </a:pPr>
+            <a:r>
+              <a:rPr lang="en-US" sz="950" b="1" dirty="0">
                 <a:solidFill>
                   <a:srgbClr val="059669"/>
                 </a:solidFill>
@@ -2403,13 +2403,13 @@
                 <a:ea typeface="Calibri" pitchFamily="34" charset="-122"/>
                 <a:cs typeface="Calibri" pitchFamily="34" charset="-120"/>
               </a:rPr>
-              <a:t>06  </a:t>
-            </a:r>
-            <a:pPr indent="0" marL="0">
-              <a:buNone/>
-            </a:pPr>
-            <a:r>
-              <a:rPr lang="en-US" sz="850" dirty="0">
+              <a:t>07  </a:t>
+            </a:r>
+            <a:pPr indent="0" marL="0">
+              <a:buNone/>
+            </a:pPr>
+            <a:r>
+              <a:rPr lang="en-US" sz="950" dirty="0">
                 <a:solidFill>
                   <a:srgbClr val="345671"/>
                 </a:solidFill>
@@ -2417,9 +2417,9 @@
                 <a:ea typeface="Calibri" pitchFamily="34" charset="-122"/>
                 <a:cs typeface="Calibri" pitchFamily="34" charset="-120"/>
               </a:rPr>
-              <a:t>Upper airway · obstr</a:t>
-            </a:r>
-            <a:endParaRPr lang="en-US" sz="850" dirty="0"/>
+              <a:t>Restrictive disease, ARDS, pneumonia</a:t>
+            </a:r>
+            <a:endParaRPr lang="en-US" sz="950" dirty="0"/>
           </a:p>
         </p:txBody>
       </p:sp>
@@ -2431,24 +2431,24 @@
         </p:nvSpPr>
         <p:spPr>
           <a:xfrm>
-            <a:off x="2427732" y="5148072"/>
-            <a:ext cx="1540764" cy="274320"/>
-          </a:xfrm>
-          <a:prstGeom prst="rect">
-            <a:avLst/>
-          </a:prstGeom>
-          <a:noFill/>
-          <a:ln/>
-        </p:spPr>
-        <p:txBody>
-          <a:bodyPr wrap="square" lIns="0" tIns="0" rIns="0" bIns="0" rtlCol="0" anchor="ctr"/>
-          <a:lstStyle/>
-          <a:p>
-            <a:pPr indent="0" marL="0">
-              <a:buNone/>
-            </a:pPr>
-            <a:r>
-              <a:rPr lang="en-US" sz="850" b="1" dirty="0">
+            <a:off x="4311396" y="4206240"/>
+            <a:ext cx="3287268" cy="173736"/>
+          </a:xfrm>
+          <a:prstGeom prst="rect">
+            <a:avLst/>
+          </a:prstGeom>
+          <a:noFill/>
+          <a:ln/>
+        </p:spPr>
+        <p:txBody>
+          <a:bodyPr wrap="square" lIns="0" tIns="0" rIns="0" bIns="0" rtlCol="0" anchor="ctr"/>
+          <a:lstStyle/>
+          <a:p>
+            <a:pPr indent="0" marL="0">
+              <a:buNone/>
+            </a:pPr>
+            <a:r>
+              <a:rPr lang="en-US" sz="950" b="1" dirty="0">
                 <a:solidFill>
                   <a:srgbClr val="059669"/>
                 </a:solidFill>
@@ -2456,13 +2456,13 @@
                 <a:ea typeface="Calibri" pitchFamily="34" charset="-122"/>
                 <a:cs typeface="Calibri" pitchFamily="34" charset="-120"/>
               </a:rPr>
-              <a:t>07  </a:t>
-            </a:r>
-            <a:pPr indent="0" marL="0">
-              <a:buNone/>
-            </a:pPr>
-            <a:r>
-              <a:rPr lang="en-US" sz="850" dirty="0">
+              <a:t>08  </a:t>
+            </a:r>
+            <a:pPr indent="0" marL="0">
+              <a:buNone/>
+            </a:pPr>
+            <a:r>
+              <a:rPr lang="en-US" sz="950" dirty="0">
                 <a:solidFill>
                   <a:srgbClr val="345671"/>
                 </a:solidFill>
@@ -2470,132 +2470,26 @@
                 <a:ea typeface="Calibri" pitchFamily="34" charset="-122"/>
                 <a:cs typeface="Calibri" pitchFamily="34" charset="-120"/>
               </a:rPr>
-              <a:t>Restrictive · ARDS</a:t>
-            </a:r>
-            <a:endParaRPr lang="en-US" sz="850" dirty="0"/>
-          </a:p>
-        </p:txBody>
-      </p:sp>
-      <p:sp>
-        <p:nvSpPr>
-          <p:cNvPr id="40" name="Text 37"/>
-          <p:cNvSpPr/>
-          <p:nvPr/>
-        </p:nvSpPr>
-        <p:spPr>
-          <a:xfrm>
-            <a:off x="2427732" y="5422392"/>
-            <a:ext cx="1540764" cy="274320"/>
-          </a:xfrm>
-          <a:prstGeom prst="rect">
-            <a:avLst/>
-          </a:prstGeom>
-          <a:noFill/>
-          <a:ln/>
-        </p:spPr>
-        <p:txBody>
-          <a:bodyPr wrap="square" lIns="0" tIns="0" rIns="0" bIns="0" rtlCol="0" anchor="ctr"/>
-          <a:lstStyle/>
-          <a:p>
-            <a:pPr indent="0" marL="0">
-              <a:buNone/>
-            </a:pPr>
-            <a:r>
-              <a:rPr lang="en-US" sz="850" b="1" dirty="0">
-                <a:solidFill>
-                  <a:srgbClr val="059669"/>
-                </a:solidFill>
-                <a:latin typeface="Calibri" pitchFamily="34" charset="0"/>
-                <a:ea typeface="Calibri" pitchFamily="34" charset="-122"/>
-                <a:cs typeface="Calibri" pitchFamily="34" charset="-120"/>
-              </a:rPr>
-              <a:t>08  </a:t>
-            </a:r>
-            <a:pPr indent="0" marL="0">
-              <a:buNone/>
-            </a:pPr>
-            <a:r>
-              <a:rPr lang="en-US" sz="850" dirty="0">
-                <a:solidFill>
-                  <a:srgbClr val="345671"/>
-                </a:solidFill>
-                <a:latin typeface="Calibri" pitchFamily="34" charset="0"/>
-                <a:ea typeface="Calibri" pitchFamily="34" charset="-122"/>
-                <a:cs typeface="Calibri" pitchFamily="34" charset="-120"/>
-              </a:rPr>
-              <a:t>TB · pleural · cancer</a:t>
-            </a:r>
-            <a:endParaRPr lang="en-US" sz="850" dirty="0"/>
-          </a:p>
-        </p:txBody>
-      </p:sp>
-      <p:sp>
-        <p:nvSpPr>
-          <p:cNvPr id="41" name="Text 38"/>
-          <p:cNvSpPr/>
-          <p:nvPr/>
-        </p:nvSpPr>
-        <p:spPr>
-          <a:xfrm>
-            <a:off x="2427732" y="5696712"/>
-            <a:ext cx="1540764" cy="274320"/>
-          </a:xfrm>
-          <a:prstGeom prst="rect">
-            <a:avLst/>
-          </a:prstGeom>
-          <a:noFill/>
-          <a:ln/>
-        </p:spPr>
-        <p:txBody>
-          <a:bodyPr wrap="square" lIns="0" tIns="0" rIns="0" bIns="0" rtlCol="0" anchor="ctr"/>
-          <a:lstStyle/>
-          <a:p>
-            <a:pPr indent="0" marL="0">
-              <a:buNone/>
-            </a:pPr>
-            <a:r>
-              <a:rPr lang="en-US" sz="850" b="1" dirty="0">
-                <a:solidFill>
-                  <a:srgbClr val="059669"/>
-                </a:solidFill>
-                <a:latin typeface="Calibri" pitchFamily="34" charset="0"/>
-                <a:ea typeface="Calibri" pitchFamily="34" charset="-122"/>
-                <a:cs typeface="Calibri" pitchFamily="34" charset="-120"/>
-              </a:rPr>
-              <a:t>09  </a:t>
-            </a:r>
-            <a:pPr indent="0" marL="0">
-              <a:buNone/>
-            </a:pPr>
-            <a:r>
-              <a:rPr lang="en-US" sz="850" dirty="0">
-                <a:solidFill>
-                  <a:srgbClr val="345671"/>
-                </a:solidFill>
-                <a:latin typeface="Calibri" pitchFamily="34" charset="0"/>
-                <a:ea typeface="Calibri" pitchFamily="34" charset="-122"/>
-                <a:cs typeface="Calibri" pitchFamily="34" charset="-120"/>
-              </a:rPr>
-              <a:t>Chapter review</a:t>
-            </a:r>
-            <a:endParaRPr lang="en-US" sz="850" dirty="0"/>
-          </a:p>
-        </p:txBody>
-      </p:sp>
-      <p:sp>
-        <p:nvSpPr>
-          <p:cNvPr id="42" name="Shape 39"/>
-          <p:cNvSpPr/>
-          <p:nvPr/>
-        </p:nvSpPr>
-        <p:spPr>
-          <a:xfrm>
-            <a:off x="4169664" y="2697480"/>
-            <a:ext cx="1723644" cy="4526280"/>
+              <a:t>TB, lung cancer &amp; pharmacology</a:t>
+            </a:r>
+            <a:endParaRPr lang="en-US" sz="950" dirty="0"/>
+          </a:p>
+        </p:txBody>
+      </p:sp>
+      <p:sp>
+        <p:nvSpPr>
+          <p:cNvPr id="40" name="Shape 37"/>
+          <p:cNvSpPr/>
+          <p:nvPr/>
+        </p:nvSpPr>
+        <p:spPr>
+          <a:xfrm>
+            <a:off x="502920" y="4846320"/>
+            <a:ext cx="3543300" cy="2377440"/>
           </a:xfrm>
           <a:prstGeom prst="roundRect">
             <a:avLst>
-              <a:gd name="adj" fmla="val 5305"/>
+              <a:gd name="adj" fmla="val 3846"/>
             </a:avLst>
           </a:prstGeom>
           <a:solidFill>
@@ -2611,14 +2505,14 @@
       </p:sp>
       <p:sp>
         <p:nvSpPr>
-          <p:cNvPr id="43" name="Shape 40"/>
-          <p:cNvSpPr/>
-          <p:nvPr/>
-        </p:nvSpPr>
-        <p:spPr>
-          <a:xfrm>
-            <a:off x="4169664" y="2788920"/>
-            <a:ext cx="1723644" cy="621792"/>
+          <p:cNvPr id="41" name="Shape 38"/>
+          <p:cNvSpPr/>
+          <p:nvPr/>
+        </p:nvSpPr>
+        <p:spPr>
+          <a:xfrm>
+            <a:off x="502920" y="4919472"/>
+            <a:ext cx="3543300" cy="493776"/>
           </a:xfrm>
           <a:prstGeom prst="rect">
             <a:avLst/>
@@ -2636,18 +2530,18 @@
       </p:sp>
       <p:sp>
         <p:nvSpPr>
-          <p:cNvPr id="44" name="Shape 41"/>
-          <p:cNvSpPr/>
-          <p:nvPr/>
-        </p:nvSpPr>
-        <p:spPr>
-          <a:xfrm>
-            <a:off x="4169664" y="2697480"/>
-            <a:ext cx="1723644" cy="713232"/>
+          <p:cNvPr id="42" name="Shape 39"/>
+          <p:cNvSpPr/>
+          <p:nvPr/>
+        </p:nvSpPr>
+        <p:spPr>
+          <a:xfrm>
+            <a:off x="502920" y="4846320"/>
+            <a:ext cx="3543300" cy="566928"/>
           </a:xfrm>
           <a:prstGeom prst="roundRect">
             <a:avLst>
-              <a:gd name="adj" fmla="val 12821"/>
+              <a:gd name="adj" fmla="val 16129"/>
             </a:avLst>
           </a:prstGeom>
           <a:solidFill>
@@ -2663,38 +2557,130 @@
       </p:sp>
       <p:sp>
         <p:nvSpPr>
+          <p:cNvPr id="43" name="Text 40"/>
+          <p:cNvSpPr/>
+          <p:nvPr/>
+        </p:nvSpPr>
+        <p:spPr>
+          <a:xfrm>
+            <a:off x="630936" y="4901184"/>
+            <a:ext cx="3287268" cy="256032"/>
+          </a:xfrm>
+          <a:prstGeom prst="rect">
+            <a:avLst/>
+          </a:prstGeom>
+          <a:noFill/>
+          <a:ln/>
+        </p:spPr>
+        <p:txBody>
+          <a:bodyPr wrap="square" lIns="0" tIns="0" rIns="0" bIns="0" rtlCol="0" anchor="ctr"/>
+          <a:lstStyle/>
+          <a:p>
+            <a:pPr indent="0" marL="0">
+              <a:buNone/>
+            </a:pPr>
+            <a:r>
+              <a:rPr lang="en-US" sz="1300" b="1" spc="100" kern="0" dirty="0">
+                <a:solidFill>
+                  <a:srgbClr val="FFFFFF"/>
+                </a:solidFill>
+                <a:latin typeface="Calibri" pitchFamily="34" charset="0"/>
+                <a:ea typeface="Calibri" pitchFamily="34" charset="-122"/>
+                <a:cs typeface="Calibri" pitchFamily="34" charset="-120"/>
+              </a:rPr>
+              <a:t>EPI &amp; BIOSTATS</a:t>
+            </a:r>
+            <a:endParaRPr lang="en-US" sz="1300" dirty="0"/>
+          </a:p>
+        </p:txBody>
+      </p:sp>
+      <p:sp>
+        <p:nvSpPr>
+          <p:cNvPr id="44" name="Text 41"/>
+          <p:cNvSpPr/>
+          <p:nvPr/>
+        </p:nvSpPr>
+        <p:spPr>
+          <a:xfrm>
+            <a:off x="630936" y="5157216"/>
+            <a:ext cx="3287268" cy="219456"/>
+          </a:xfrm>
+          <a:prstGeom prst="rect">
+            <a:avLst/>
+          </a:prstGeom>
+          <a:noFill/>
+          <a:ln/>
+        </p:spPr>
+        <p:txBody>
+          <a:bodyPr wrap="square" lIns="0" tIns="0" rIns="0" bIns="0" rtlCol="0" anchor="ctr"/>
+          <a:lstStyle/>
+          <a:p>
+            <a:pPr indent="0" marL="0">
+              <a:buNone/>
+            </a:pPr>
+            <a:r>
+              <a:rPr lang="en-US" sz="1000" dirty="0">
+                <a:solidFill>
+                  <a:srgbClr val="FFFFFF"/>
+                </a:solidFill>
+                <a:latin typeface="Calibri" pitchFamily="34" charset="0"/>
+                <a:ea typeface="Calibri" pitchFamily="34" charset="-122"/>
+                <a:cs typeface="Calibri" pitchFamily="34" charset="-120"/>
+              </a:rPr>
+              <a:t>4 days  ·  Jun 19 – 22</a:t>
+            </a:r>
+            <a:endParaRPr lang="en-US" sz="1000" dirty="0"/>
+          </a:p>
+        </p:txBody>
+      </p:sp>
+      <p:sp>
+        <p:nvSpPr>
           <p:cNvPr id="45" name="Text 42"/>
           <p:cNvSpPr/>
           <p:nvPr/>
         </p:nvSpPr>
         <p:spPr>
           <a:xfrm>
-            <a:off x="4261104" y="2788920"/>
-            <a:ext cx="1540764" cy="274320"/>
-          </a:xfrm>
-          <a:prstGeom prst="rect">
-            <a:avLst/>
-          </a:prstGeom>
-          <a:noFill/>
-          <a:ln/>
-        </p:spPr>
-        <p:txBody>
-          <a:bodyPr wrap="square" lIns="0" tIns="0" rIns="0" bIns="0" rtlCol="0" anchor="ctr"/>
-          <a:lstStyle/>
-          <a:p>
-            <a:pPr indent="0" marL="0">
-              <a:buNone/>
-            </a:pPr>
-            <a:r>
-              <a:rPr lang="en-US" sz="1100" b="1" spc="100" kern="0" dirty="0">
-                <a:solidFill>
-                  <a:srgbClr val="FFFFFF"/>
-                </a:solidFill>
-                <a:latin typeface="Calibri" pitchFamily="34" charset="0"/>
-                <a:ea typeface="Calibri" pitchFamily="34" charset="-122"/>
-                <a:cs typeface="Calibri" pitchFamily="34" charset="-120"/>
-              </a:rPr>
-              <a:t>EPI / BIOSTATS</a:t>
+            <a:off x="630936" y="5596128"/>
+            <a:ext cx="3287268" cy="384048"/>
+          </a:xfrm>
+          <a:prstGeom prst="rect">
+            <a:avLst/>
+          </a:prstGeom>
+          <a:noFill/>
+          <a:ln/>
+        </p:spPr>
+        <p:txBody>
+          <a:bodyPr wrap="square" lIns="0" tIns="0" rIns="0" bIns="0" rtlCol="0" anchor="ctr"/>
+          <a:lstStyle/>
+          <a:p>
+            <a:pPr indent="0" marL="0">
+              <a:buNone/>
+            </a:pPr>
+            <a:r>
+              <a:rPr lang="en-US" sz="1100" b="1" dirty="0">
+                <a:solidFill>
+                  <a:srgbClr val="D97706"/>
+                </a:solidFill>
+                <a:latin typeface="Calibri" pitchFamily="34" charset="0"/>
+                <a:ea typeface="Calibri" pitchFamily="34" charset="-122"/>
+                <a:cs typeface="Calibri" pitchFamily="34" charset="-120"/>
+              </a:rPr>
+              <a:t>01  </a:t>
+            </a:r>
+            <a:pPr indent="0" marL="0">
+              <a:buNone/>
+            </a:pPr>
+            <a:r>
+              <a:rPr lang="en-US" sz="1100" dirty="0">
+                <a:solidFill>
+                  <a:srgbClr val="345671"/>
+                </a:solidFill>
+                <a:latin typeface="Calibri" pitchFamily="34" charset="0"/>
+                <a:ea typeface="Calibri" pitchFamily="34" charset="-122"/>
+                <a:cs typeface="Calibri" pitchFamily="34" charset="-120"/>
+              </a:rPr>
+              <a:t>Study designs &amp; levels of evidence</a:t>
             </a:r>
             <a:endParaRPr lang="en-US" sz="1100" dirty="0"/>
           </a:p>
@@ -2708,34 +2694,48 @@
         </p:nvSpPr>
         <p:spPr>
           <a:xfrm>
-            <a:off x="4261104" y="3081528"/>
-            <a:ext cx="1540764" cy="256032"/>
-          </a:xfrm>
-          <a:prstGeom prst="rect">
-            <a:avLst/>
-          </a:prstGeom>
-          <a:noFill/>
-          <a:ln/>
-        </p:spPr>
-        <p:txBody>
-          <a:bodyPr wrap="square" lIns="0" tIns="0" rIns="0" bIns="0" rtlCol="0" anchor="ctr"/>
-          <a:lstStyle/>
-          <a:p>
-            <a:pPr indent="0" marL="0">
-              <a:buNone/>
-            </a:pPr>
-            <a:r>
-              <a:rPr lang="en-US" sz="950" dirty="0">
-                <a:solidFill>
-                  <a:srgbClr val="FFFFFF"/>
-                </a:solidFill>
-                <a:latin typeface="Calibri" pitchFamily="34" charset="0"/>
-                <a:ea typeface="Calibri" pitchFamily="34" charset="-122"/>
-                <a:cs typeface="Calibri" pitchFamily="34" charset="-120"/>
-              </a:rPr>
-              <a:t>4 days  ·  Jun 21 – 24</a:t>
-            </a:r>
-            <a:endParaRPr lang="en-US" sz="950" dirty="0"/>
+            <a:off x="630936" y="5980176"/>
+            <a:ext cx="3287268" cy="384048"/>
+          </a:xfrm>
+          <a:prstGeom prst="rect">
+            <a:avLst/>
+          </a:prstGeom>
+          <a:noFill/>
+          <a:ln/>
+        </p:spPr>
+        <p:txBody>
+          <a:bodyPr wrap="square" lIns="0" tIns="0" rIns="0" bIns="0" rtlCol="0" anchor="ctr"/>
+          <a:lstStyle/>
+          <a:p>
+            <a:pPr indent="0" marL="0">
+              <a:buNone/>
+            </a:pPr>
+            <a:r>
+              <a:rPr lang="en-US" sz="1100" b="1" dirty="0">
+                <a:solidFill>
+                  <a:srgbClr val="D97706"/>
+                </a:solidFill>
+                <a:latin typeface="Calibri" pitchFamily="34" charset="0"/>
+                <a:ea typeface="Calibri" pitchFamily="34" charset="-122"/>
+                <a:cs typeface="Calibri" pitchFamily="34" charset="-120"/>
+              </a:rPr>
+              <a:t>02  </a:t>
+            </a:r>
+            <a:pPr indent="0" marL="0">
+              <a:buNone/>
+            </a:pPr>
+            <a:r>
+              <a:rPr lang="en-US" sz="1100" dirty="0">
+                <a:solidFill>
+                  <a:srgbClr val="345671"/>
+                </a:solidFill>
+                <a:latin typeface="Calibri" pitchFamily="34" charset="0"/>
+                <a:ea typeface="Calibri" pitchFamily="34" charset="-122"/>
+                <a:cs typeface="Calibri" pitchFamily="34" charset="-120"/>
+              </a:rPr>
+              <a:t>Sensitivity, specificity &amp; predictive values</a:t>
+            </a:r>
+            <a:endParaRPr lang="en-US" sz="1100" dirty="0"/>
           </a:p>
         </p:txBody>
       </p:sp>
@@ -2747,24 +2747,24 @@
         </p:nvSpPr>
         <p:spPr>
           <a:xfrm>
-            <a:off x="4261104" y="3502152"/>
-            <a:ext cx="1540764" cy="274320"/>
-          </a:xfrm>
-          <a:prstGeom prst="rect">
-            <a:avLst/>
-          </a:prstGeom>
-          <a:noFill/>
-          <a:ln/>
-        </p:spPr>
-        <p:txBody>
-          <a:bodyPr wrap="square" lIns="0" tIns="0" rIns="0" bIns="0" rtlCol="0" anchor="ctr"/>
-          <a:lstStyle/>
-          <a:p>
-            <a:pPr indent="0" marL="0">
-              <a:buNone/>
-            </a:pPr>
-            <a:r>
-              <a:rPr lang="en-US" sz="850" b="1" dirty="0">
+            <a:off x="630936" y="6364224"/>
+            <a:ext cx="3287268" cy="384048"/>
+          </a:xfrm>
+          <a:prstGeom prst="rect">
+            <a:avLst/>
+          </a:prstGeom>
+          <a:noFill/>
+          <a:ln/>
+        </p:spPr>
+        <p:txBody>
+          <a:bodyPr wrap="square" lIns="0" tIns="0" rIns="0" bIns="0" rtlCol="0" anchor="ctr"/>
+          <a:lstStyle/>
+          <a:p>
+            <a:pPr indent="0" marL="0">
+              <a:buNone/>
+            </a:pPr>
+            <a:r>
+              <a:rPr lang="en-US" sz="1100" b="1" dirty="0">
                 <a:solidFill>
                   <a:srgbClr val="D97706"/>
                 </a:solidFill>
@@ -2772,13 +2772,13 @@
                 <a:ea typeface="Calibri" pitchFamily="34" charset="-122"/>
                 <a:cs typeface="Calibri" pitchFamily="34" charset="-120"/>
               </a:rPr>
-              <a:t>01  </a:t>
-            </a:r>
-            <a:pPr indent="0" marL="0">
-              <a:buNone/>
-            </a:pPr>
-            <a:r>
-              <a:rPr lang="en-US" sz="850" dirty="0">
+              <a:t>03  </a:t>
+            </a:r>
+            <a:pPr indent="0" marL="0">
+              <a:buNone/>
+            </a:pPr>
+            <a:r>
+              <a:rPr lang="en-US" sz="1100" dirty="0">
                 <a:solidFill>
                   <a:srgbClr val="345671"/>
                 </a:solidFill>
@@ -2786,9 +2786,9 @@
                 <a:ea typeface="Calibri" pitchFamily="34" charset="-122"/>
                 <a:cs typeface="Calibri" pitchFamily="34" charset="-120"/>
               </a:rPr>
-              <a:t>Study design · trials</a:t>
-            </a:r>
-            <a:endParaRPr lang="en-US" sz="850" dirty="0"/>
+              <a:t>Risk measures, bias &amp; confounding</a:t>
+            </a:r>
+            <a:endParaRPr lang="en-US" sz="1100" dirty="0"/>
           </a:p>
         </p:txBody>
       </p:sp>
@@ -2800,24 +2800,24 @@
         </p:nvSpPr>
         <p:spPr>
           <a:xfrm>
-            <a:off x="4261104" y="3776472"/>
-            <a:ext cx="1540764" cy="274320"/>
-          </a:xfrm>
-          <a:prstGeom prst="rect">
-            <a:avLst/>
-          </a:prstGeom>
-          <a:noFill/>
-          <a:ln/>
-        </p:spPr>
-        <p:txBody>
-          <a:bodyPr wrap="square" lIns="0" tIns="0" rIns="0" bIns="0" rtlCol="0" anchor="ctr"/>
-          <a:lstStyle/>
-          <a:p>
-            <a:pPr indent="0" marL="0">
-              <a:buNone/>
-            </a:pPr>
-            <a:r>
-              <a:rPr lang="en-US" sz="850" b="1" dirty="0">
+            <a:off x="630936" y="6748272"/>
+            <a:ext cx="3287268" cy="384048"/>
+          </a:xfrm>
+          <a:prstGeom prst="rect">
+            <a:avLst/>
+          </a:prstGeom>
+          <a:noFill/>
+          <a:ln/>
+        </p:spPr>
+        <p:txBody>
+          <a:bodyPr wrap="square" lIns="0" tIns="0" rIns="0" bIns="0" rtlCol="0" anchor="ctr"/>
+          <a:lstStyle/>
+          <a:p>
+            <a:pPr indent="0" marL="0">
+              <a:buNone/>
+            </a:pPr>
+            <a:r>
+              <a:rPr lang="en-US" sz="1100" b="1" dirty="0">
                 <a:solidFill>
                   <a:srgbClr val="D97706"/>
                 </a:solidFill>
@@ -2825,13 +2825,13 @@
                 <a:ea typeface="Calibri" pitchFamily="34" charset="-122"/>
                 <a:cs typeface="Calibri" pitchFamily="34" charset="-120"/>
               </a:rPr>
-              <a:t>02  </a:t>
-            </a:r>
-            <a:pPr indent="0" marL="0">
-              <a:buNone/>
-            </a:pPr>
-            <a:r>
-              <a:rPr lang="en-US" sz="850" dirty="0">
+              <a:t>04  </a:t>
+            </a:r>
+            <a:pPr indent="0" marL="0">
+              <a:buNone/>
+            </a:pPr>
+            <a:r>
+              <a:rPr lang="en-US" sz="1100" dirty="0">
                 <a:solidFill>
                   <a:srgbClr val="345671"/>
                 </a:solidFill>
@@ -2839,132 +2839,26 @@
                 <a:ea typeface="Calibri" pitchFamily="34" charset="-122"/>
                 <a:cs typeface="Calibri" pitchFamily="34" charset="-120"/>
               </a:rPr>
-              <a:t>Sens/spec · PPV/NPV</a:t>
-            </a:r>
-            <a:endParaRPr lang="en-US" sz="850" dirty="0"/>
-          </a:p>
-        </p:txBody>
-      </p:sp>
-      <p:sp>
-        <p:nvSpPr>
-          <p:cNvPr id="49" name="Text 46"/>
-          <p:cNvSpPr/>
-          <p:nvPr/>
-        </p:nvSpPr>
-        <p:spPr>
-          <a:xfrm>
-            <a:off x="4261104" y="4050792"/>
-            <a:ext cx="1540764" cy="274320"/>
-          </a:xfrm>
-          <a:prstGeom prst="rect">
-            <a:avLst/>
-          </a:prstGeom>
-          <a:noFill/>
-          <a:ln/>
-        </p:spPr>
-        <p:txBody>
-          <a:bodyPr wrap="square" lIns="0" tIns="0" rIns="0" bIns="0" rtlCol="0" anchor="ctr"/>
-          <a:lstStyle/>
-          <a:p>
-            <a:pPr indent="0" marL="0">
-              <a:buNone/>
-            </a:pPr>
-            <a:r>
-              <a:rPr lang="en-US" sz="850" b="1" dirty="0">
-                <a:solidFill>
-                  <a:srgbClr val="D97706"/>
-                </a:solidFill>
-                <a:latin typeface="Calibri" pitchFamily="34" charset="0"/>
-                <a:ea typeface="Calibri" pitchFamily="34" charset="-122"/>
-                <a:cs typeface="Calibri" pitchFamily="34" charset="-120"/>
-              </a:rPr>
-              <a:t>03  </a:t>
-            </a:r>
-            <a:pPr indent="0" marL="0">
-              <a:buNone/>
-            </a:pPr>
-            <a:r>
-              <a:rPr lang="en-US" sz="850" dirty="0">
-                <a:solidFill>
-                  <a:srgbClr val="345671"/>
-                </a:solidFill>
-                <a:latin typeface="Calibri" pitchFamily="34" charset="0"/>
-                <a:ea typeface="Calibri" pitchFamily="34" charset="-122"/>
-                <a:cs typeface="Calibri" pitchFamily="34" charset="-120"/>
-              </a:rPr>
-              <a:t>Bias · confounding</a:t>
-            </a:r>
-            <a:endParaRPr lang="en-US" sz="850" dirty="0"/>
-          </a:p>
-        </p:txBody>
-      </p:sp>
-      <p:sp>
-        <p:nvSpPr>
-          <p:cNvPr id="50" name="Text 47"/>
-          <p:cNvSpPr/>
-          <p:nvPr/>
-        </p:nvSpPr>
-        <p:spPr>
-          <a:xfrm>
-            <a:off x="4261104" y="4325112"/>
-            <a:ext cx="1540764" cy="274320"/>
-          </a:xfrm>
-          <a:prstGeom prst="rect">
-            <a:avLst/>
-          </a:prstGeom>
-          <a:noFill/>
-          <a:ln/>
-        </p:spPr>
-        <p:txBody>
-          <a:bodyPr wrap="square" lIns="0" tIns="0" rIns="0" bIns="0" rtlCol="0" anchor="ctr"/>
-          <a:lstStyle/>
-          <a:p>
-            <a:pPr indent="0" marL="0">
-              <a:buNone/>
-            </a:pPr>
-            <a:r>
-              <a:rPr lang="en-US" sz="850" b="1" dirty="0">
-                <a:solidFill>
-                  <a:srgbClr val="D97706"/>
-                </a:solidFill>
-                <a:latin typeface="Calibri" pitchFamily="34" charset="0"/>
-                <a:ea typeface="Calibri" pitchFamily="34" charset="-122"/>
-                <a:cs typeface="Calibri" pitchFamily="34" charset="-120"/>
-              </a:rPr>
-              <a:t>04  </a:t>
-            </a:r>
-            <a:pPr indent="0" marL="0">
-              <a:buNone/>
-            </a:pPr>
-            <a:r>
-              <a:rPr lang="en-US" sz="850" dirty="0">
-                <a:solidFill>
-                  <a:srgbClr val="345671"/>
-                </a:solidFill>
-                <a:latin typeface="Calibri" pitchFamily="34" charset="0"/>
-                <a:ea typeface="Calibri" pitchFamily="34" charset="-122"/>
-                <a:cs typeface="Calibri" pitchFamily="34" charset="-120"/>
-              </a:rPr>
-              <a:t>Ethics · health policy</a:t>
-            </a:r>
-            <a:endParaRPr lang="en-US" sz="850" dirty="0"/>
-          </a:p>
-        </p:txBody>
-      </p:sp>
-      <p:sp>
-        <p:nvSpPr>
-          <p:cNvPr id="51" name="Shape 48"/>
-          <p:cNvSpPr/>
-          <p:nvPr/>
-        </p:nvSpPr>
-        <p:spPr>
-          <a:xfrm>
-            <a:off x="6003036" y="2697480"/>
-            <a:ext cx="1723644" cy="4526280"/>
+              <a:t>Statistical tests &amp; confidence intervals</a:t>
+            </a:r>
+            <a:endParaRPr lang="en-US" sz="1100" dirty="0"/>
+          </a:p>
+        </p:txBody>
+      </p:sp>
+      <p:sp>
+        <p:nvSpPr>
+          <p:cNvPr id="49" name="Shape 46"/>
+          <p:cNvSpPr/>
+          <p:nvPr/>
+        </p:nvSpPr>
+        <p:spPr>
+          <a:xfrm>
+            <a:off x="4183380" y="4846320"/>
+            <a:ext cx="3543300" cy="2377440"/>
           </a:xfrm>
           <a:prstGeom prst="roundRect">
             <a:avLst>
-              <a:gd name="adj" fmla="val 5305"/>
+              <a:gd name="adj" fmla="val 3846"/>
             </a:avLst>
           </a:prstGeom>
           <a:solidFill>
@@ -2980,14 +2874,14 @@
       </p:sp>
       <p:sp>
         <p:nvSpPr>
-          <p:cNvPr id="52" name="Shape 49"/>
-          <p:cNvSpPr/>
-          <p:nvPr/>
-        </p:nvSpPr>
-        <p:spPr>
-          <a:xfrm>
-            <a:off x="6003036" y="2788920"/>
-            <a:ext cx="1723644" cy="621792"/>
+          <p:cNvPr id="50" name="Shape 47"/>
+          <p:cNvSpPr/>
+          <p:nvPr/>
+        </p:nvSpPr>
+        <p:spPr>
+          <a:xfrm>
+            <a:off x="4183380" y="4919472"/>
+            <a:ext cx="3543300" cy="493776"/>
           </a:xfrm>
           <a:prstGeom prst="rect">
             <a:avLst/>
@@ -3005,18 +2899,18 @@
       </p:sp>
       <p:sp>
         <p:nvSpPr>
-          <p:cNvPr id="53" name="Shape 50"/>
-          <p:cNvSpPr/>
-          <p:nvPr/>
-        </p:nvSpPr>
-        <p:spPr>
-          <a:xfrm>
-            <a:off x="6003036" y="2697480"/>
-            <a:ext cx="1723644" cy="713232"/>
+          <p:cNvPr id="51" name="Shape 48"/>
+          <p:cNvSpPr/>
+          <p:nvPr/>
+        </p:nvSpPr>
+        <p:spPr>
+          <a:xfrm>
+            <a:off x="4183380" y="4846320"/>
+            <a:ext cx="3543300" cy="566928"/>
           </a:xfrm>
           <a:prstGeom prst="roundRect">
             <a:avLst>
-              <a:gd name="adj" fmla="val 12821"/>
+              <a:gd name="adj" fmla="val 16129"/>
             </a:avLst>
           </a:prstGeom>
           <a:solidFill>
@@ -3032,40 +2926,132 @@
       </p:sp>
       <p:sp>
         <p:nvSpPr>
+          <p:cNvPr id="52" name="Text 49"/>
+          <p:cNvSpPr/>
+          <p:nvPr/>
+        </p:nvSpPr>
+        <p:spPr>
+          <a:xfrm>
+            <a:off x="4311396" y="4901184"/>
+            <a:ext cx="3287268" cy="256032"/>
+          </a:xfrm>
+          <a:prstGeom prst="rect">
+            <a:avLst/>
+          </a:prstGeom>
+          <a:noFill/>
+          <a:ln/>
+        </p:spPr>
+        <p:txBody>
+          <a:bodyPr wrap="square" lIns="0" tIns="0" rIns="0" bIns="0" rtlCol="0" anchor="ctr"/>
+          <a:lstStyle/>
+          <a:p>
+            <a:pPr indent="0" marL="0">
+              <a:buNone/>
+            </a:pPr>
+            <a:r>
+              <a:rPr lang="en-US" sz="1300" b="1" spc="100" kern="0" dirty="0">
+                <a:solidFill>
+                  <a:srgbClr val="FFFFFF"/>
+                </a:solidFill>
+                <a:latin typeface="Calibri" pitchFamily="34" charset="0"/>
+                <a:ea typeface="Calibri" pitchFamily="34" charset="-122"/>
+                <a:cs typeface="Calibri" pitchFamily="34" charset="-120"/>
+              </a:rPr>
+              <a:t>GENERAL PATHOLOGY</a:t>
+            </a:r>
+            <a:endParaRPr lang="en-US" sz="1300" dirty="0"/>
+          </a:p>
+        </p:txBody>
+      </p:sp>
+      <p:sp>
+        <p:nvSpPr>
+          <p:cNvPr id="53" name="Text 50"/>
+          <p:cNvSpPr/>
+          <p:nvPr/>
+        </p:nvSpPr>
+        <p:spPr>
+          <a:xfrm>
+            <a:off x="4311396" y="5157216"/>
+            <a:ext cx="3287268" cy="219456"/>
+          </a:xfrm>
+          <a:prstGeom prst="rect">
+            <a:avLst/>
+          </a:prstGeom>
+          <a:noFill/>
+          <a:ln/>
+        </p:spPr>
+        <p:txBody>
+          <a:bodyPr wrap="square" lIns="0" tIns="0" rIns="0" bIns="0" rtlCol="0" anchor="ctr"/>
+          <a:lstStyle/>
+          <a:p>
+            <a:pPr indent="0" marL="0">
+              <a:buNone/>
+            </a:pPr>
+            <a:r>
+              <a:rPr lang="en-US" sz="1000" dirty="0">
+                <a:solidFill>
+                  <a:srgbClr val="FFFFFF"/>
+                </a:solidFill>
+                <a:latin typeface="Calibri" pitchFamily="34" charset="0"/>
+                <a:ea typeface="Calibri" pitchFamily="34" charset="-122"/>
+                <a:cs typeface="Calibri" pitchFamily="34" charset="-120"/>
+              </a:rPr>
+              <a:t>8 days  ·  Jun 23 – 30</a:t>
+            </a:r>
+            <a:endParaRPr lang="en-US" sz="1000" dirty="0"/>
+          </a:p>
+        </p:txBody>
+      </p:sp>
+      <p:sp>
+        <p:nvSpPr>
           <p:cNvPr id="54" name="Text 51"/>
           <p:cNvSpPr/>
           <p:nvPr/>
         </p:nvSpPr>
         <p:spPr>
           <a:xfrm>
-            <a:off x="6094476" y="2788920"/>
-            <a:ext cx="1540764" cy="274320"/>
-          </a:xfrm>
-          <a:prstGeom prst="rect">
-            <a:avLst/>
-          </a:prstGeom>
-          <a:noFill/>
-          <a:ln/>
-        </p:spPr>
-        <p:txBody>
-          <a:bodyPr wrap="square" lIns="0" tIns="0" rIns="0" bIns="0" rtlCol="0" anchor="ctr"/>
-          <a:lstStyle/>
-          <a:p>
-            <a:pPr indent="0" marL="0">
-              <a:buNone/>
-            </a:pPr>
-            <a:r>
-              <a:rPr lang="en-US" sz="1100" b="1" spc="100" kern="0" dirty="0">
-                <a:solidFill>
-                  <a:srgbClr val="FFFFFF"/>
-                </a:solidFill>
-                <a:latin typeface="Calibri" pitchFamily="34" charset="0"/>
-                <a:ea typeface="Calibri" pitchFamily="34" charset="-122"/>
-                <a:cs typeface="Calibri" pitchFamily="34" charset="-120"/>
-              </a:rPr>
-              <a:t>GEN. PATHOLOGY</a:t>
-            </a:r>
-            <a:endParaRPr lang="en-US" sz="1100" dirty="0"/>
+            <a:off x="4311396" y="5504688"/>
+            <a:ext cx="3287268" cy="173736"/>
+          </a:xfrm>
+          <a:prstGeom prst="rect">
+            <a:avLst/>
+          </a:prstGeom>
+          <a:noFill/>
+          <a:ln/>
+        </p:spPr>
+        <p:txBody>
+          <a:bodyPr wrap="square" lIns="0" tIns="0" rIns="0" bIns="0" rtlCol="0" anchor="ctr"/>
+          <a:lstStyle/>
+          <a:p>
+            <a:pPr indent="0" marL="0">
+              <a:buNone/>
+            </a:pPr>
+            <a:r>
+              <a:rPr lang="en-US" sz="950" b="1" dirty="0">
+                <a:solidFill>
+                  <a:srgbClr val="7C3AED"/>
+                </a:solidFill>
+                <a:latin typeface="Calibri" pitchFamily="34" charset="0"/>
+                <a:ea typeface="Calibri" pitchFamily="34" charset="-122"/>
+                <a:cs typeface="Calibri" pitchFamily="34" charset="-120"/>
+              </a:rPr>
+              <a:t>01  </a:t>
+            </a:r>
+            <a:pPr indent="0" marL="0">
+              <a:buNone/>
+            </a:pPr>
+            <a:r>
+              <a:rPr lang="en-US" sz="950" dirty="0">
+                <a:solidFill>
+                  <a:srgbClr val="345671"/>
+                </a:solidFill>
+                <a:latin typeface="Calibri" pitchFamily="34" charset="0"/>
+                <a:ea typeface="Calibri" pitchFamily="34" charset="-122"/>
+                <a:cs typeface="Calibri" pitchFamily="34" charset="-120"/>
+              </a:rPr>
+              <a:t>Cellular adaptations &amp; apoptosis</a:t>
+            </a:r>
+            <a:endParaRPr lang="en-US" sz="950" dirty="0"/>
           </a:p>
         </p:txBody>
       </p:sp>
@@ -3077,32 +3063,46 @@
         </p:nvSpPr>
         <p:spPr>
           <a:xfrm>
-            <a:off x="6094476" y="3081528"/>
-            <a:ext cx="1540764" cy="256032"/>
-          </a:xfrm>
-          <a:prstGeom prst="rect">
-            <a:avLst/>
-          </a:prstGeom>
-          <a:noFill/>
-          <a:ln/>
-        </p:spPr>
-        <p:txBody>
-          <a:bodyPr wrap="square" lIns="0" tIns="0" rIns="0" bIns="0" rtlCol="0" anchor="ctr"/>
-          <a:lstStyle/>
-          <a:p>
+            <a:off x="4311396" y="5678424"/>
+            <a:ext cx="3287268" cy="173736"/>
+          </a:xfrm>
+          <a:prstGeom prst="rect">
+            <a:avLst/>
+          </a:prstGeom>
+          <a:noFill/>
+          <a:ln/>
+        </p:spPr>
+        <p:txBody>
+          <a:bodyPr wrap="square" lIns="0" tIns="0" rIns="0" bIns="0" rtlCol="0" anchor="ctr"/>
+          <a:lstStyle/>
+          <a:p>
+            <a:pPr indent="0" marL="0">
+              <a:buNone/>
+            </a:pPr>
+            <a:r>
+              <a:rPr lang="en-US" sz="950" b="1" dirty="0">
+                <a:solidFill>
+                  <a:srgbClr val="7C3AED"/>
+                </a:solidFill>
+                <a:latin typeface="Calibri" pitchFamily="34" charset="0"/>
+                <a:ea typeface="Calibri" pitchFamily="34" charset="-122"/>
+                <a:cs typeface="Calibri" pitchFamily="34" charset="-120"/>
+              </a:rPr>
+              <a:t>02  </a:t>
+            </a:r>
             <a:pPr indent="0" marL="0">
               <a:buNone/>
             </a:pPr>
             <a:r>
               <a:rPr lang="en-US" sz="950" dirty="0">
                 <a:solidFill>
-                  <a:srgbClr val="FFFFFF"/>
-                </a:solidFill>
-                <a:latin typeface="Calibri" pitchFamily="34" charset="0"/>
-                <a:ea typeface="Calibri" pitchFamily="34" charset="-122"/>
-                <a:cs typeface="Calibri" pitchFamily="34" charset="-120"/>
-              </a:rPr>
-              <a:t>8 days  ·  Jun 25 – Jul 2</a:t>
+                  <a:srgbClr val="345671"/>
+                </a:solidFill>
+                <a:latin typeface="Calibri" pitchFamily="34" charset="0"/>
+                <a:ea typeface="Calibri" pitchFamily="34" charset="-122"/>
+                <a:cs typeface="Calibri" pitchFamily="34" charset="-120"/>
+              </a:rPr>
+              <a:t>Necrosis, ischemia &amp; free radicals</a:t>
             </a:r>
             <a:endParaRPr lang="en-US" sz="950" dirty="0"/>
           </a:p>
@@ -3116,24 +3116,24 @@
         </p:nvSpPr>
         <p:spPr>
           <a:xfrm>
-            <a:off x="6094476" y="3502152"/>
-            <a:ext cx="1540764" cy="274320"/>
-          </a:xfrm>
-          <a:prstGeom prst="rect">
-            <a:avLst/>
-          </a:prstGeom>
-          <a:noFill/>
-          <a:ln/>
-        </p:spPr>
-        <p:txBody>
-          <a:bodyPr wrap="square" lIns="0" tIns="0" rIns="0" bIns="0" rtlCol="0" anchor="ctr"/>
-          <a:lstStyle/>
-          <a:p>
-            <a:pPr indent="0" marL="0">
-              <a:buNone/>
-            </a:pPr>
-            <a:r>
-              <a:rPr lang="en-US" sz="850" b="1" dirty="0">
+            <a:off x="4311396" y="5852160"/>
+            <a:ext cx="3287268" cy="173736"/>
+          </a:xfrm>
+          <a:prstGeom prst="rect">
+            <a:avLst/>
+          </a:prstGeom>
+          <a:noFill/>
+          <a:ln/>
+        </p:spPr>
+        <p:txBody>
+          <a:bodyPr wrap="square" lIns="0" tIns="0" rIns="0" bIns="0" rtlCol="0" anchor="ctr"/>
+          <a:lstStyle/>
+          <a:p>
+            <a:pPr indent="0" marL="0">
+              <a:buNone/>
+            </a:pPr>
+            <a:r>
+              <a:rPr lang="en-US" sz="950" b="1" dirty="0">
                 <a:solidFill>
                   <a:srgbClr val="7C3AED"/>
                 </a:solidFill>
@@ -3141,13 +3141,13 @@
                 <a:ea typeface="Calibri" pitchFamily="34" charset="-122"/>
                 <a:cs typeface="Calibri" pitchFamily="34" charset="-120"/>
               </a:rPr>
-              <a:t>01  </a:t>
-            </a:r>
-            <a:pPr indent="0" marL="0">
-              <a:buNone/>
-            </a:pPr>
-            <a:r>
-              <a:rPr lang="en-US" sz="850" dirty="0">
+              <a:t>03  </a:t>
+            </a:r>
+            <a:pPr indent="0" marL="0">
+              <a:buNone/>
+            </a:pPr>
+            <a:r>
+              <a:rPr lang="en-US" sz="950" dirty="0">
                 <a:solidFill>
                   <a:srgbClr val="345671"/>
                 </a:solidFill>
@@ -3155,9 +3155,9 @@
                 <a:ea typeface="Calibri" pitchFamily="34" charset="-122"/>
                 <a:cs typeface="Calibri" pitchFamily="34" charset="-120"/>
               </a:rPr>
-              <a:t>Adaptations · apoptosis</a:t>
-            </a:r>
-            <a:endParaRPr lang="en-US" sz="850" dirty="0"/>
+              <a:t>Acute inflammation</a:t>
+            </a:r>
+            <a:endParaRPr lang="en-US" sz="950" dirty="0"/>
           </a:p>
         </p:txBody>
       </p:sp>
@@ -3169,24 +3169,24 @@
         </p:nvSpPr>
         <p:spPr>
           <a:xfrm>
-            <a:off x="6094476" y="3776472"/>
-            <a:ext cx="1540764" cy="274320"/>
-          </a:xfrm>
-          <a:prstGeom prst="rect">
-            <a:avLst/>
-          </a:prstGeom>
-          <a:noFill/>
-          <a:ln/>
-        </p:spPr>
-        <p:txBody>
-          <a:bodyPr wrap="square" lIns="0" tIns="0" rIns="0" bIns="0" rtlCol="0" anchor="ctr"/>
-          <a:lstStyle/>
-          <a:p>
-            <a:pPr indent="0" marL="0">
-              <a:buNone/>
-            </a:pPr>
-            <a:r>
-              <a:rPr lang="en-US" sz="850" b="1" dirty="0">
+            <a:off x="4311396" y="6025896"/>
+            <a:ext cx="3287268" cy="173736"/>
+          </a:xfrm>
+          <a:prstGeom prst="rect">
+            <a:avLst/>
+          </a:prstGeom>
+          <a:noFill/>
+          <a:ln/>
+        </p:spPr>
+        <p:txBody>
+          <a:bodyPr wrap="square" lIns="0" tIns="0" rIns="0" bIns="0" rtlCol="0" anchor="ctr"/>
+          <a:lstStyle/>
+          <a:p>
+            <a:pPr indent="0" marL="0">
+              <a:buNone/>
+            </a:pPr>
+            <a:r>
+              <a:rPr lang="en-US" sz="950" b="1" dirty="0">
                 <a:solidFill>
                   <a:srgbClr val="7C3AED"/>
                 </a:solidFill>
@@ -3194,13 +3194,13 @@
                 <a:ea typeface="Calibri" pitchFamily="34" charset="-122"/>
                 <a:cs typeface="Calibri" pitchFamily="34" charset="-120"/>
               </a:rPr>
-              <a:t>02  </a:t>
-            </a:r>
-            <a:pPr indent="0" marL="0">
-              <a:buNone/>
-            </a:pPr>
-            <a:r>
-              <a:rPr lang="en-US" sz="850" dirty="0">
+              <a:t>04  </a:t>
+            </a:r>
+            <a:pPr indent="0" marL="0">
+              <a:buNone/>
+            </a:pPr>
+            <a:r>
+              <a:rPr lang="en-US" sz="950" dirty="0">
                 <a:solidFill>
                   <a:srgbClr val="345671"/>
                 </a:solidFill>
@@ -3208,9 +3208,9 @@
                 <a:ea typeface="Calibri" pitchFamily="34" charset="-122"/>
                 <a:cs typeface="Calibri" pitchFamily="34" charset="-120"/>
               </a:rPr>
-              <a:t>Necrosis · free radicals</a:t>
-            </a:r>
-            <a:endParaRPr lang="en-US" sz="850" dirty="0"/>
+              <a:t>Chronic inflammation &amp; repair</a:t>
+            </a:r>
+            <a:endParaRPr lang="en-US" sz="950" dirty="0"/>
           </a:p>
         </p:txBody>
       </p:sp>
@@ -3222,24 +3222,24 @@
         </p:nvSpPr>
         <p:spPr>
           <a:xfrm>
-            <a:off x="6094476" y="4050792"/>
-            <a:ext cx="1540764" cy="274320"/>
-          </a:xfrm>
-          <a:prstGeom prst="rect">
-            <a:avLst/>
-          </a:prstGeom>
-          <a:noFill/>
-          <a:ln/>
-        </p:spPr>
-        <p:txBody>
-          <a:bodyPr wrap="square" lIns="0" tIns="0" rIns="0" bIns="0" rtlCol="0" anchor="ctr"/>
-          <a:lstStyle/>
-          <a:p>
-            <a:pPr indent="0" marL="0">
-              <a:buNone/>
-            </a:pPr>
-            <a:r>
-              <a:rPr lang="en-US" sz="850" b="1" dirty="0">
+            <a:off x="4311396" y="6199632"/>
+            <a:ext cx="3287268" cy="173736"/>
+          </a:xfrm>
+          <a:prstGeom prst="rect">
+            <a:avLst/>
+          </a:prstGeom>
+          <a:noFill/>
+          <a:ln/>
+        </p:spPr>
+        <p:txBody>
+          <a:bodyPr wrap="square" lIns="0" tIns="0" rIns="0" bIns="0" rtlCol="0" anchor="ctr"/>
+          <a:lstStyle/>
+          <a:p>
+            <a:pPr indent="0" marL="0">
+              <a:buNone/>
+            </a:pPr>
+            <a:r>
+              <a:rPr lang="en-US" sz="950" b="1" dirty="0">
                 <a:solidFill>
                   <a:srgbClr val="7C3AED"/>
                 </a:solidFill>
@@ -3247,13 +3247,13 @@
                 <a:ea typeface="Calibri" pitchFamily="34" charset="-122"/>
                 <a:cs typeface="Calibri" pitchFamily="34" charset="-120"/>
               </a:rPr>
-              <a:t>03  </a:t>
-            </a:r>
-            <a:pPr indent="0" marL="0">
-              <a:buNone/>
-            </a:pPr>
-            <a:r>
-              <a:rPr lang="en-US" sz="850" dirty="0">
+              <a:t>05  </a:t>
+            </a:r>
+            <a:pPr indent="0" marL="0">
+              <a:buNone/>
+            </a:pPr>
+            <a:r>
+              <a:rPr lang="en-US" sz="950" dirty="0">
                 <a:solidFill>
                   <a:srgbClr val="345671"/>
                 </a:solidFill>
@@ -3261,9 +3261,9 @@
                 <a:ea typeface="Calibri" pitchFamily="34" charset="-122"/>
                 <a:cs typeface="Calibri" pitchFamily="34" charset="-120"/>
               </a:rPr>
-              <a:t>Acute inflammation</a:t>
-            </a:r>
-            <a:endParaRPr lang="en-US" sz="850" dirty="0"/>
+              <a:t>Neoplasia I — hallmarks &amp; metastases</a:t>
+            </a:r>
+            <a:endParaRPr lang="en-US" sz="950" dirty="0"/>
           </a:p>
         </p:txBody>
       </p:sp>
@@ -3275,24 +3275,24 @@
         </p:nvSpPr>
         <p:spPr>
           <a:xfrm>
-            <a:off x="6094476" y="4325112"/>
-            <a:ext cx="1540764" cy="274320"/>
-          </a:xfrm>
-          <a:prstGeom prst="rect">
-            <a:avLst/>
-          </a:prstGeom>
-          <a:noFill/>
-          <a:ln/>
-        </p:spPr>
-        <p:txBody>
-          <a:bodyPr wrap="square" lIns="0" tIns="0" rIns="0" bIns="0" rtlCol="0" anchor="ctr"/>
-          <a:lstStyle/>
-          <a:p>
-            <a:pPr indent="0" marL="0">
-              <a:buNone/>
-            </a:pPr>
-            <a:r>
-              <a:rPr lang="en-US" sz="850" b="1" dirty="0">
+            <a:off x="4311396" y="6373368"/>
+            <a:ext cx="3287268" cy="173736"/>
+          </a:xfrm>
+          <a:prstGeom prst="rect">
+            <a:avLst/>
+          </a:prstGeom>
+          <a:noFill/>
+          <a:ln/>
+        </p:spPr>
+        <p:txBody>
+          <a:bodyPr wrap="square" lIns="0" tIns="0" rIns="0" bIns="0" rtlCol="0" anchor="ctr"/>
+          <a:lstStyle/>
+          <a:p>
+            <a:pPr indent="0" marL="0">
+              <a:buNone/>
+            </a:pPr>
+            <a:r>
+              <a:rPr lang="en-US" sz="950" b="1" dirty="0">
                 <a:solidFill>
                   <a:srgbClr val="7C3AED"/>
                 </a:solidFill>
@@ -3300,13 +3300,13 @@
                 <a:ea typeface="Calibri" pitchFamily="34" charset="-122"/>
                 <a:cs typeface="Calibri" pitchFamily="34" charset="-120"/>
               </a:rPr>
-              <a:t>04  </a:t>
-            </a:r>
-            <a:pPr indent="0" marL="0">
-              <a:buNone/>
-            </a:pPr>
-            <a:r>
-              <a:rPr lang="en-US" sz="850" dirty="0">
+              <a:t>06  </a:t>
+            </a:r>
+            <a:pPr indent="0" marL="0">
+              <a:buNone/>
+            </a:pPr>
+            <a:r>
+              <a:rPr lang="en-US" sz="950" dirty="0">
                 <a:solidFill>
                   <a:srgbClr val="345671"/>
                 </a:solidFill>
@@ -3314,9 +3314,9 @@
                 <a:ea typeface="Calibri" pitchFamily="34" charset="-122"/>
                 <a:cs typeface="Calibri" pitchFamily="34" charset="-120"/>
               </a:rPr>
-              <a:t>Chronic inflam · repair</a:t>
-            </a:r>
-            <a:endParaRPr lang="en-US" sz="850" dirty="0"/>
+              <a:t>Neoplasia II — oncogenes &amp; TSGs</a:t>
+            </a:r>
+            <a:endParaRPr lang="en-US" sz="950" dirty="0"/>
           </a:p>
         </p:txBody>
       </p:sp>
@@ -3328,24 +3328,24 @@
         </p:nvSpPr>
         <p:spPr>
           <a:xfrm>
-            <a:off x="6094476" y="4599432"/>
-            <a:ext cx="1540764" cy="274320"/>
-          </a:xfrm>
-          <a:prstGeom prst="rect">
-            <a:avLst/>
-          </a:prstGeom>
-          <a:noFill/>
-          <a:ln/>
-        </p:spPr>
-        <p:txBody>
-          <a:bodyPr wrap="square" lIns="0" tIns="0" rIns="0" bIns="0" rtlCol="0" anchor="ctr"/>
-          <a:lstStyle/>
-          <a:p>
-            <a:pPr indent="0" marL="0">
-              <a:buNone/>
-            </a:pPr>
-            <a:r>
-              <a:rPr lang="en-US" sz="850" b="1" dirty="0">
+            <a:off x="4311396" y="6547104"/>
+            <a:ext cx="3287268" cy="173736"/>
+          </a:xfrm>
+          <a:prstGeom prst="rect">
+            <a:avLst/>
+          </a:prstGeom>
+          <a:noFill/>
+          <a:ln/>
+        </p:spPr>
+        <p:txBody>
+          <a:bodyPr wrap="square" lIns="0" tIns="0" rIns="0" bIns="0" rtlCol="0" anchor="ctr"/>
+          <a:lstStyle/>
+          <a:p>
+            <a:pPr indent="0" marL="0">
+              <a:buNone/>
+            </a:pPr>
+            <a:r>
+              <a:rPr lang="en-US" sz="950" b="1" dirty="0">
                 <a:solidFill>
                   <a:srgbClr val="7C3AED"/>
                 </a:solidFill>
@@ -3353,13 +3353,13 @@
                 <a:ea typeface="Calibri" pitchFamily="34" charset="-122"/>
                 <a:cs typeface="Calibri" pitchFamily="34" charset="-120"/>
               </a:rPr>
-              <a:t>05  </a:t>
-            </a:r>
-            <a:pPr indent="0" marL="0">
-              <a:buNone/>
-            </a:pPr>
-            <a:r>
-              <a:rPr lang="en-US" sz="850" dirty="0">
+              <a:t>07  </a:t>
+            </a:r>
+            <a:pPr indent="0" marL="0">
+              <a:buNone/>
+            </a:pPr>
+            <a:r>
+              <a:rPr lang="en-US" sz="950" dirty="0">
                 <a:solidFill>
                   <a:srgbClr val="345671"/>
                 </a:solidFill>
@@ -3367,9 +3367,9 @@
                 <a:ea typeface="Calibri" pitchFamily="34" charset="-122"/>
                 <a:cs typeface="Calibri" pitchFamily="34" charset="-120"/>
               </a:rPr>
-              <a:t>Neoplasia I · hallmarks</a:t>
-            </a:r>
-            <a:endParaRPr lang="en-US" sz="850" dirty="0"/>
+              <a:t>Neoplasia III — markers &amp; aging</a:t>
+            </a:r>
+            <a:endParaRPr lang="en-US" sz="950" dirty="0"/>
           </a:p>
         </p:txBody>
       </p:sp>
@@ -3381,24 +3381,24 @@
         </p:nvSpPr>
         <p:spPr>
           <a:xfrm>
-            <a:off x="6094476" y="4873752"/>
-            <a:ext cx="1540764" cy="274320"/>
-          </a:xfrm>
-          <a:prstGeom prst="rect">
-            <a:avLst/>
-          </a:prstGeom>
-          <a:noFill/>
-          <a:ln/>
-        </p:spPr>
-        <p:txBody>
-          <a:bodyPr wrap="square" lIns="0" tIns="0" rIns="0" bIns="0" rtlCol="0" anchor="ctr"/>
-          <a:lstStyle/>
-          <a:p>
-            <a:pPr indent="0" marL="0">
-              <a:buNone/>
-            </a:pPr>
-            <a:r>
-              <a:rPr lang="en-US" sz="850" b="1" dirty="0">
+            <a:off x="4311396" y="6720840"/>
+            <a:ext cx="3287268" cy="173736"/>
+          </a:xfrm>
+          <a:prstGeom prst="rect">
+            <a:avLst/>
+          </a:prstGeom>
+          <a:noFill/>
+          <a:ln/>
+        </p:spPr>
+        <p:txBody>
+          <a:bodyPr wrap="square" lIns="0" tIns="0" rIns="0" bIns="0" rtlCol="0" anchor="ctr"/>
+          <a:lstStyle/>
+          <a:p>
+            <a:pPr indent="0" marL="0">
+              <a:buNone/>
+            </a:pPr>
+            <a:r>
+              <a:rPr lang="en-US" sz="950" b="1" dirty="0">
                 <a:solidFill>
                   <a:srgbClr val="7C3AED"/>
                 </a:solidFill>
@@ -3406,13 +3406,13 @@
                 <a:ea typeface="Calibri" pitchFamily="34" charset="-122"/>
                 <a:cs typeface="Calibri" pitchFamily="34" charset="-120"/>
               </a:rPr>
-              <a:t>06  </a:t>
-            </a:r>
-            <a:pPr indent="0" marL="0">
-              <a:buNone/>
-            </a:pPr>
-            <a:r>
-              <a:rPr lang="en-US" sz="850" dirty="0">
+              <a:t>08  </a:t>
+            </a:r>
+            <a:pPr indent="0" marL="0">
+              <a:buNone/>
+            </a:pPr>
+            <a:r>
+              <a:rPr lang="en-US" sz="950" dirty="0">
                 <a:solidFill>
                   <a:srgbClr val="345671"/>
                 </a:solidFill>
@@ -3420,121 +3420,15 @@
                 <a:ea typeface="Calibri" pitchFamily="34" charset="-122"/>
                 <a:cs typeface="Calibri" pitchFamily="34" charset="-120"/>
               </a:rPr>
-              <a:t>Neoplasia II · oncogenes</a:t>
-            </a:r>
-            <a:endParaRPr lang="en-US" sz="850" dirty="0"/>
-          </a:p>
-        </p:txBody>
-      </p:sp>
-      <p:sp>
-        <p:nvSpPr>
-          <p:cNvPr id="62" name="Text 59"/>
-          <p:cNvSpPr/>
-          <p:nvPr/>
-        </p:nvSpPr>
-        <p:spPr>
-          <a:xfrm>
-            <a:off x="6094476" y="5148072"/>
-            <a:ext cx="1540764" cy="274320"/>
-          </a:xfrm>
-          <a:prstGeom prst="rect">
-            <a:avLst/>
-          </a:prstGeom>
-          <a:noFill/>
-          <a:ln/>
-        </p:spPr>
-        <p:txBody>
-          <a:bodyPr wrap="square" lIns="0" tIns="0" rIns="0" bIns="0" rtlCol="0" anchor="ctr"/>
-          <a:lstStyle/>
-          <a:p>
-            <a:pPr indent="0" marL="0">
-              <a:buNone/>
-            </a:pPr>
-            <a:r>
-              <a:rPr lang="en-US" sz="850" b="1" dirty="0">
-                <a:solidFill>
-                  <a:srgbClr val="7C3AED"/>
-                </a:solidFill>
-                <a:latin typeface="Calibri" pitchFamily="34" charset="0"/>
-                <a:ea typeface="Calibri" pitchFamily="34" charset="-122"/>
-                <a:cs typeface="Calibri" pitchFamily="34" charset="-120"/>
-              </a:rPr>
-              <a:t>07  </a:t>
-            </a:r>
-            <a:pPr indent="0" marL="0">
-              <a:buNone/>
-            </a:pPr>
-            <a:r>
-              <a:rPr lang="en-US" sz="850" dirty="0">
-                <a:solidFill>
-                  <a:srgbClr val="345671"/>
-                </a:solidFill>
-                <a:latin typeface="Calibri" pitchFamily="34" charset="0"/>
-                <a:ea typeface="Calibri" pitchFamily="34" charset="-122"/>
-                <a:cs typeface="Calibri" pitchFamily="34" charset="-120"/>
-              </a:rPr>
-              <a:t>Neoplasia III · aging</a:t>
-            </a:r>
-            <a:endParaRPr lang="en-US" sz="850" dirty="0"/>
-          </a:p>
-        </p:txBody>
-      </p:sp>
-      <p:sp>
-        <p:nvSpPr>
-          <p:cNvPr id="63" name="Text 60"/>
-          <p:cNvSpPr/>
-          <p:nvPr/>
-        </p:nvSpPr>
-        <p:spPr>
-          <a:xfrm>
-            <a:off x="6094476" y="5422392"/>
-            <a:ext cx="1540764" cy="274320"/>
-          </a:xfrm>
-          <a:prstGeom prst="rect">
-            <a:avLst/>
-          </a:prstGeom>
-          <a:noFill/>
-          <a:ln/>
-        </p:spPr>
-        <p:txBody>
-          <a:bodyPr wrap="square" lIns="0" tIns="0" rIns="0" bIns="0" rtlCol="0" anchor="ctr"/>
-          <a:lstStyle/>
-          <a:p>
-            <a:pPr indent="0" marL="0">
-              <a:buNone/>
-            </a:pPr>
-            <a:r>
-              <a:rPr lang="en-US" sz="850" b="1" dirty="0">
-                <a:solidFill>
-                  <a:srgbClr val="7C3AED"/>
-                </a:solidFill>
-                <a:latin typeface="Calibri" pitchFamily="34" charset="0"/>
-                <a:ea typeface="Calibri" pitchFamily="34" charset="-122"/>
-                <a:cs typeface="Calibri" pitchFamily="34" charset="-120"/>
-              </a:rPr>
-              <a:t>08  </a:t>
-            </a:r>
-            <a:pPr indent="0" marL="0">
-              <a:buNone/>
-            </a:pPr>
-            <a:r>
-              <a:rPr lang="en-US" sz="850" dirty="0">
-                <a:solidFill>
-                  <a:srgbClr val="345671"/>
-                </a:solidFill>
-                <a:latin typeface="Calibri" pitchFamily="34" charset="0"/>
-                <a:ea typeface="Calibri" pitchFamily="34" charset="-122"/>
-                <a:cs typeface="Calibri" pitchFamily="34" charset="-120"/>
-              </a:rPr>
-              <a:t>Chapter review</a:t>
-            </a:r>
-            <a:endParaRPr lang="en-US" sz="850" dirty="0"/>
-          </a:p>
-        </p:txBody>
-      </p:sp>
-      <p:sp>
-        <p:nvSpPr>
-          <p:cNvPr id="64" name="Shape 61"/>
+              <a:t>General pathology review</a:t>
+            </a:r>
+            <a:endParaRPr lang="en-US" sz="950" dirty="0"/>
+          </a:p>
+        </p:txBody>
+      </p:sp>
+      <p:sp>
+        <p:nvSpPr>
+          <p:cNvPr id="62" name="Shape 59"/>
           <p:cNvSpPr/>
           <p:nvPr/>
         </p:nvSpPr>
@@ -3561,7 +3455,7 @@
       </p:sp>
       <p:sp>
         <p:nvSpPr>
-          <p:cNvPr id="65" name="Text 62"/>
+          <p:cNvPr id="63" name="Text 60"/>
           <p:cNvSpPr/>
           <p:nvPr/>
         </p:nvSpPr>
@@ -3614,7 +3508,7 @@
       </p:sp>
       <p:sp>
         <p:nvSpPr>
-          <p:cNvPr id="66" name="Shape 63"/>
+          <p:cNvPr id="64" name="Shape 61"/>
           <p:cNvSpPr/>
           <p:nvPr/>
         </p:nvSpPr>
@@ -3641,7 +3535,7 @@
       </p:sp>
       <p:pic>
         <p:nvPicPr>
-          <p:cNvPr id="67" name="Image 1" descr="signup_qr.png">    </p:cNvPr>
+          <p:cNvPr id="65" name="Image 1" descr="signup_qr.png">    </p:cNvPr>
           <p:cNvPicPr>
             <a:picLocks noChangeAspect="1"/>
           </p:cNvPicPr>
@@ -3665,7 +3559,7 @@
       </p:pic>
       <p:sp>
         <p:nvSpPr>
-          <p:cNvPr id="68" name="Text 64"/>
+          <p:cNvPr id="66" name="Text 62"/>
           <p:cNvSpPr/>
           <p:nvPr/>
         </p:nvSpPr>
@@ -3704,7 +3598,7 @@
       </p:sp>
       <p:sp>
         <p:nvSpPr>
-          <p:cNvPr id="69" name="Text 65"/>
+          <p:cNvPr id="67" name="Text 63"/>
           <p:cNvSpPr/>
           <p:nvPr/>
         </p:nvSpPr>
@@ -3743,7 +3637,7 @@
       </p:sp>
       <p:sp>
         <p:nvSpPr>
-          <p:cNvPr id="70" name="Text 66"/>
+          <p:cNvPr id="68" name="Text 64"/>
           <p:cNvSpPr/>
           <p:nvPr/>
         </p:nvSpPr>
@@ -3782,7 +3676,7 @@
       </p:sp>
       <p:sp>
         <p:nvSpPr>
-          <p:cNvPr id="71" name="Text 67"/>
+          <p:cNvPr id="69" name="Text 65"/>
           <p:cNvSpPr/>
           <p:nvPr/>
         </p:nvSpPr>
@@ -3835,7 +3729,7 @@
       </p:sp>
       <p:sp>
         <p:nvSpPr>
-          <p:cNvPr id="72" name="Text 68"/>
+          <p:cNvPr id="70" name="Text 66"/>
           <p:cNvSpPr/>
           <p:nvPr/>
         </p:nvSpPr>
@@ -3902,7 +3796,7 @@
       </p:sp>
       <p:sp>
         <p:nvSpPr>
-          <p:cNvPr id="73" name="Shape 69"/>
+          <p:cNvPr id="71" name="Shape 67"/>
           <p:cNvSpPr/>
           <p:nvPr/>
         </p:nvSpPr>
@@ -3925,7 +3819,7 @@
       </p:sp>
       <p:sp>
         <p:nvSpPr>
-          <p:cNvPr id="74" name="Text 70"/>
+          <p:cNvPr id="72" name="Text 68"/>
           <p:cNvSpPr/>
           <p:nvPr/>
         </p:nvSpPr>

--- a/outputs/flyers/USMLE_June_Advert.pptx
+++ b/outputs/flyers/USMLE_June_Advert.pptx
@@ -1412,7 +1412,7 @@
                 <a:ea typeface="Calibri" pitchFamily="34" charset="-122"/>
                 <a:cs typeface="Calibri" pitchFamily="34" charset="-120"/>
               </a:rPr>
-              <a:t>Orientation, embryology &amp; congenital</a:t>
+              <a:t>Orientation, embryology &amp; congenital heart defects</a:t>
             </a:r>
             <a:endParaRPr lang="en-US" sz="950" dirty="0"/>
           </a:p>
@@ -2099,7 +2099,7 @@
                 <a:ea typeface="Calibri" pitchFamily="34" charset="-122"/>
                 <a:cs typeface="Calibri" pitchFamily="34" charset="-120"/>
               </a:rPr>
-              <a:t>Embryology, surfactant &amp; congenital</a:t>
+              <a:t>Embryology, surfactant &amp; congenital anomalies</a:t>
             </a:r>
             <a:endParaRPr lang="en-US" sz="950" dirty="0"/>
           </a:p>
@@ -2733,7 +2733,7 @@
                 <a:ea typeface="Calibri" pitchFamily="34" charset="-122"/>
                 <a:cs typeface="Calibri" pitchFamily="34" charset="-120"/>
               </a:rPr>
-              <a:t>Sensitivity, specificity &amp; predictive values</a:t>
+              <a:t>Quantifying risk, transitions &amp; survival analysis</a:t>
             </a:r>
             <a:endParaRPr lang="en-US" sz="1100" dirty="0"/>
           </a:p>
@@ -2786,7 +2786,7 @@
                 <a:ea typeface="Calibri" pitchFamily="34" charset="-122"/>
                 <a:cs typeface="Calibri" pitchFamily="34" charset="-120"/>
               </a:rPr>
-              <a:t>Risk measures, bias &amp; confounding</a:t>
+              <a:t>Bias, confounding &amp; effect modification</a:t>
             </a:r>
             <a:endParaRPr lang="en-US" sz="1100" dirty="0"/>
           </a:p>
@@ -2839,7 +2839,7 @@
                 <a:ea typeface="Calibri" pitchFamily="34" charset="-122"/>
                 <a:cs typeface="Calibri" pitchFamily="34" charset="-120"/>
               </a:rPr>
-              <a:t>Statistical tests &amp; confidence intervals</a:t>
+              <a:t>Statistical distributions, testing &amp; CIs</a:t>
             </a:r>
             <a:endParaRPr lang="en-US" sz="1100" dirty="0"/>
           </a:p>

--- a/outputs/flyers/USMLE_June_Advert.pptx
+++ b/outputs/flyers/USMLE_June_Advert.pptx
@@ -883,10 +883,207 @@
         </p:nvSpPr>
         <p:spPr>
           <a:xfrm>
-            <a:off x="0" y="0"/>
-            <a:ext cx="8229600" cy="1828800"/>
-          </a:xfrm>
-          <a:prstGeom prst="rect">
+            <a:off x="0" y="1792224"/>
+            <a:ext cx="8229600" cy="36576"/>
+          </a:xfrm>
+          <a:prstGeom prst="rect">
+            <a:avLst/>
+          </a:prstGeom>
+          <a:solidFill>
+            <a:srgbClr val="D6E8F5"/>
+          </a:solidFill>
+          <a:ln w="12700">
+            <a:solidFill>
+              <a:srgbClr val="D6E8F5"/>
+            </a:solidFill>
+            <a:prstDash val="solid"/>
+          </a:ln>
+        </p:spPr>
+      </p:sp>
+      <p:sp>
+        <p:nvSpPr>
+          <p:cNvPr id="3" name="Shape 1"/>
+          <p:cNvSpPr/>
+          <p:nvPr/>
+        </p:nvSpPr>
+        <p:spPr>
+          <a:xfrm>
+            <a:off x="502920" y="274320"/>
+            <a:ext cx="3337560" cy="329184"/>
+          </a:xfrm>
+          <a:prstGeom prst="roundRect">
+            <a:avLst>
+              <a:gd name="adj" fmla="val 50000"/>
+            </a:avLst>
+          </a:prstGeom>
+          <a:solidFill>
+            <a:srgbClr val="E0F2FE"/>
+          </a:solidFill>
+          <a:ln w="12700">
+            <a:solidFill>
+              <a:srgbClr val="E0F2FE"/>
+            </a:solidFill>
+            <a:prstDash val="solid"/>
+          </a:ln>
+        </p:spPr>
+      </p:sp>
+      <p:sp>
+        <p:nvSpPr>
+          <p:cNvPr id="4" name="Text 2"/>
+          <p:cNvSpPr/>
+          <p:nvPr/>
+        </p:nvSpPr>
+        <p:spPr>
+          <a:xfrm>
+            <a:off x="502920" y="274320"/>
+            <a:ext cx="3337560" cy="329184"/>
+          </a:xfrm>
+          <a:prstGeom prst="rect">
+            <a:avLst/>
+          </a:prstGeom>
+          <a:noFill/>
+          <a:ln/>
+        </p:spPr>
+        <p:txBody>
+          <a:bodyPr wrap="square" lIns="0" tIns="0" rIns="0" bIns="0" rtlCol="0" anchor="ctr"/>
+          <a:lstStyle/>
+          <a:p>
+            <a:pPr algn="ctr" indent="0" marL="0">
+              <a:buNone/>
+            </a:pPr>
+            <a:r>
+              <a:rPr lang="en-US" sz="1050" b="1" spc="200" kern="0" dirty="0">
+                <a:solidFill>
+                  <a:srgbClr val="075985"/>
+                </a:solidFill>
+                <a:latin typeface="Calibri" pitchFamily="34" charset="0"/>
+                <a:ea typeface="Calibri" pitchFamily="34" charset="-122"/>
+                <a:cs typeface="Calibri" pitchFamily="34" charset="-120"/>
+              </a:rPr>
+              <a:t>JUNE SCHEDULE  ·  LIMITED SLOTS</a:t>
+            </a:r>
+            <a:endParaRPr lang="en-US" sz="1050" dirty="0"/>
+          </a:p>
+        </p:txBody>
+      </p:sp>
+      <p:sp>
+        <p:nvSpPr>
+          <p:cNvPr id="5" name="Text 3"/>
+          <p:cNvSpPr/>
+          <p:nvPr/>
+        </p:nvSpPr>
+        <p:spPr>
+          <a:xfrm>
+            <a:off x="502920" y="676656"/>
+            <a:ext cx="5440680" cy="749808"/>
+          </a:xfrm>
+          <a:prstGeom prst="rect">
+            <a:avLst/>
+          </a:prstGeom>
+          <a:noFill/>
+          <a:ln/>
+        </p:spPr>
+        <p:txBody>
+          <a:bodyPr wrap="square" lIns="0" tIns="0" rIns="0" bIns="0" rtlCol="0" anchor="ctr"/>
+          <a:lstStyle/>
+          <a:p>
+            <a:pPr indent="0" marL="0">
+              <a:buNone/>
+            </a:pPr>
+            <a:r>
+              <a:rPr lang="en-US" sz="5200" b="1" spc="-100" kern="0" dirty="0">
+                <a:solidFill>
+                  <a:srgbClr val="075985"/>
+                </a:solidFill>
+                <a:latin typeface="Calibri" pitchFamily="34" charset="0"/>
+                <a:ea typeface="Calibri" pitchFamily="34" charset="-122"/>
+                <a:cs typeface="Calibri" pitchFamily="34" charset="-120"/>
+              </a:rPr>
+              <a:t>STARTS JUNE 1</a:t>
+            </a:r>
+            <a:endParaRPr lang="en-US" sz="5200" dirty="0"/>
+          </a:p>
+        </p:txBody>
+      </p:sp>
+      <p:sp>
+        <p:nvSpPr>
+          <p:cNvPr id="6" name="Text 4"/>
+          <p:cNvSpPr/>
+          <p:nvPr/>
+        </p:nvSpPr>
+        <p:spPr>
+          <a:xfrm>
+            <a:off x="502920" y="1389888"/>
+            <a:ext cx="5440680" cy="365760"/>
+          </a:xfrm>
+          <a:prstGeom prst="rect">
+            <a:avLst/>
+          </a:prstGeom>
+          <a:noFill/>
+          <a:ln/>
+        </p:spPr>
+        <p:txBody>
+          <a:bodyPr wrap="square" lIns="0" tIns="0" rIns="0" bIns="0" rtlCol="0" anchor="ctr"/>
+          <a:lstStyle/>
+          <a:p>
+            <a:pPr indent="0" marL="0">
+              <a:buNone/>
+            </a:pPr>
+            <a:r>
+              <a:rPr lang="en-US" sz="1800" b="1" dirty="0">
+                <a:solidFill>
+                  <a:srgbClr val="0C2A3D"/>
+                </a:solidFill>
+                <a:latin typeface="Calibri" pitchFamily="34" charset="0"/>
+                <a:ea typeface="Calibri" pitchFamily="34" charset="-122"/>
+                <a:cs typeface="Calibri" pitchFamily="34" charset="-120"/>
+              </a:rPr>
+              <a:t>USMLE Step 1</a:t>
+            </a:r>
+            <a:pPr indent="0" marL="0">
+              <a:buNone/>
+            </a:pPr>
+            <a:r>
+              <a:rPr lang="en-US" sz="1800" dirty="0">
+                <a:solidFill>
+                  <a:srgbClr val="6B87A3"/>
+                </a:solidFill>
+                <a:latin typeface="Calibri" pitchFamily="34" charset="0"/>
+                <a:ea typeface="Calibri" pitchFamily="34" charset="-122"/>
+                <a:cs typeface="Calibri" pitchFamily="34" charset="-120"/>
+              </a:rPr>
+              <a:t>   ·   </a:t>
+            </a:r>
+            <a:pPr indent="0" marL="0">
+              <a:buNone/>
+            </a:pPr>
+            <a:r>
+              <a:rPr lang="en-US" sz="1800" dirty="0">
+                <a:solidFill>
+                  <a:srgbClr val="345671"/>
+                </a:solidFill>
+                <a:latin typeface="Calibri" pitchFamily="34" charset="0"/>
+                <a:ea typeface="Calibri" pitchFamily="34" charset="-122"/>
+                <a:cs typeface="Calibri" pitchFamily="34" charset="-120"/>
+              </a:rPr>
+              <a:t>Daily, Mon to Sun</a:t>
+            </a:r>
+            <a:endParaRPr lang="en-US" sz="1800" dirty="0"/>
+          </a:p>
+        </p:txBody>
+      </p:sp>
+      <p:sp>
+        <p:nvSpPr>
+          <p:cNvPr id="7" name="Shape 5"/>
+          <p:cNvSpPr/>
+          <p:nvPr/>
+        </p:nvSpPr>
+        <p:spPr>
+          <a:xfrm>
+            <a:off x="6181344" y="77724"/>
+            <a:ext cx="1581912" cy="1581912"/>
+          </a:xfrm>
+          <a:prstGeom prst="ellipse">
             <a:avLst/>
           </a:prstGeom>
           <a:solidFill>
@@ -900,231 +1097,9 @@
           </a:ln>
         </p:spPr>
       </p:sp>
-      <p:sp>
-        <p:nvSpPr>
-          <p:cNvPr id="3" name="Shape 1"/>
-          <p:cNvSpPr/>
-          <p:nvPr/>
-        </p:nvSpPr>
-        <p:spPr>
-          <a:xfrm>
-            <a:off x="0" y="1664208"/>
-            <a:ext cx="8229600" cy="164592"/>
-          </a:xfrm>
-          <a:prstGeom prst="rect">
-            <a:avLst/>
-          </a:prstGeom>
-          <a:solidFill>
-            <a:srgbClr val="075985"/>
-          </a:solidFill>
-          <a:ln w="12700">
-            <a:solidFill>
-              <a:srgbClr val="075985"/>
-            </a:solidFill>
-            <a:prstDash val="solid"/>
-          </a:ln>
-        </p:spPr>
-      </p:sp>
-      <p:sp>
-        <p:nvSpPr>
-          <p:cNvPr id="4" name="Shape 2"/>
-          <p:cNvSpPr/>
-          <p:nvPr/>
-        </p:nvSpPr>
-        <p:spPr>
-          <a:xfrm>
-            <a:off x="502920" y="274320"/>
-            <a:ext cx="2926080" cy="329184"/>
-          </a:xfrm>
-          <a:prstGeom prst="roundRect">
-            <a:avLst>
-              <a:gd name="adj" fmla="val 50000"/>
-            </a:avLst>
-          </a:prstGeom>
-          <a:solidFill>
-            <a:srgbClr val="FFFFFF"/>
-          </a:solidFill>
-          <a:ln w="12700">
-            <a:solidFill>
-              <a:srgbClr val="FFFFFF"/>
-            </a:solidFill>
-            <a:prstDash val="solid"/>
-          </a:ln>
-        </p:spPr>
-      </p:sp>
-      <p:sp>
-        <p:nvSpPr>
-          <p:cNvPr id="5" name="Text 3"/>
-          <p:cNvSpPr/>
-          <p:nvPr/>
-        </p:nvSpPr>
-        <p:spPr>
-          <a:xfrm>
-            <a:off x="502920" y="274320"/>
-            <a:ext cx="2926080" cy="329184"/>
-          </a:xfrm>
-          <a:prstGeom prst="rect">
-            <a:avLst/>
-          </a:prstGeom>
-          <a:noFill/>
-          <a:ln/>
-        </p:spPr>
-        <p:txBody>
-          <a:bodyPr wrap="square" lIns="0" tIns="0" rIns="0" bIns="0" rtlCol="0" anchor="ctr"/>
-          <a:lstStyle/>
-          <a:p>
-            <a:pPr algn="ctr" indent="0" marL="0">
-              <a:buNone/>
-            </a:pPr>
-            <a:r>
-              <a:rPr lang="en-US" sz="1100" b="1" spc="300" kern="0" dirty="0">
-                <a:solidFill>
-                  <a:srgbClr val="075985"/>
-                </a:solidFill>
-                <a:latin typeface="Calibri" pitchFamily="34" charset="0"/>
-                <a:ea typeface="Calibri" pitchFamily="34" charset="-122"/>
-                <a:cs typeface="Calibri" pitchFamily="34" charset="-120"/>
-              </a:rPr>
-              <a:t>JUNE COHORT  ·  LIMITED SLOTS</a:t>
-            </a:r>
-            <a:endParaRPr lang="en-US" sz="1100" dirty="0"/>
-          </a:p>
-        </p:txBody>
-      </p:sp>
-      <p:sp>
-        <p:nvSpPr>
-          <p:cNvPr id="6" name="Text 4"/>
-          <p:cNvSpPr/>
-          <p:nvPr/>
-        </p:nvSpPr>
-        <p:spPr>
-          <a:xfrm>
-            <a:off x="502920" y="676656"/>
-            <a:ext cx="5440680" cy="749808"/>
-          </a:xfrm>
-          <a:prstGeom prst="rect">
-            <a:avLst/>
-          </a:prstGeom>
-          <a:noFill/>
-          <a:ln/>
-        </p:spPr>
-        <p:txBody>
-          <a:bodyPr wrap="square" lIns="0" tIns="0" rIns="0" bIns="0" rtlCol="0" anchor="ctr"/>
-          <a:lstStyle/>
-          <a:p>
-            <a:pPr indent="0" marL="0">
-              <a:buNone/>
-            </a:pPr>
-            <a:r>
-              <a:rPr lang="en-US" sz="5200" b="1" spc="-100" kern="0" dirty="0">
-                <a:solidFill>
-                  <a:srgbClr val="FFFFFF"/>
-                </a:solidFill>
-                <a:latin typeface="Calibri" pitchFamily="34" charset="0"/>
-                <a:ea typeface="Calibri" pitchFamily="34" charset="-122"/>
-                <a:cs typeface="Calibri" pitchFamily="34" charset="-120"/>
-              </a:rPr>
-              <a:t>STARTS JUNE 1</a:t>
-            </a:r>
-            <a:endParaRPr lang="en-US" sz="5200" dirty="0"/>
-          </a:p>
-        </p:txBody>
-      </p:sp>
-      <p:sp>
-        <p:nvSpPr>
-          <p:cNvPr id="7" name="Text 5"/>
-          <p:cNvSpPr/>
-          <p:nvPr/>
-        </p:nvSpPr>
-        <p:spPr>
-          <a:xfrm>
-            <a:off x="502920" y="1389888"/>
-            <a:ext cx="5440680" cy="365760"/>
-          </a:xfrm>
-          <a:prstGeom prst="rect">
-            <a:avLst/>
-          </a:prstGeom>
-          <a:noFill/>
-          <a:ln/>
-        </p:spPr>
-        <p:txBody>
-          <a:bodyPr wrap="square" lIns="0" tIns="0" rIns="0" bIns="0" rtlCol="0" anchor="ctr"/>
-          <a:lstStyle/>
-          <a:p>
-            <a:pPr indent="0" marL="0">
-              <a:buNone/>
-            </a:pPr>
-            <a:r>
-              <a:rPr lang="en-US" sz="1800" b="1" dirty="0">
-                <a:solidFill>
-                  <a:srgbClr val="FFFFFF"/>
-                </a:solidFill>
-                <a:latin typeface="Calibri" pitchFamily="34" charset="0"/>
-                <a:ea typeface="Calibri" pitchFamily="34" charset="-122"/>
-                <a:cs typeface="Calibri" pitchFamily="34" charset="-120"/>
-              </a:rPr>
-              <a:t>USMLE Step 1</a:t>
-            </a:r>
-            <a:pPr indent="0" marL="0">
-              <a:buNone/>
-            </a:pPr>
-            <a:r>
-              <a:rPr lang="en-US" sz="1800" dirty="0">
-                <a:solidFill>
-                  <a:srgbClr val="BFE3F7"/>
-                </a:solidFill>
-                <a:latin typeface="Calibri" pitchFamily="34" charset="0"/>
-                <a:ea typeface="Calibri" pitchFamily="34" charset="-122"/>
-                <a:cs typeface="Calibri" pitchFamily="34" charset="-120"/>
-              </a:rPr>
-              <a:t>   ·   </a:t>
-            </a:r>
-            <a:pPr indent="0" marL="0">
-              <a:buNone/>
-            </a:pPr>
-            <a:r>
-              <a:rPr lang="en-US" sz="1800" dirty="0">
-                <a:solidFill>
-                  <a:srgbClr val="E0F2FE"/>
-                </a:solidFill>
-                <a:latin typeface="Calibri" pitchFamily="34" charset="0"/>
-                <a:ea typeface="Calibri" pitchFamily="34" charset="-122"/>
-                <a:cs typeface="Calibri" pitchFamily="34" charset="-120"/>
-              </a:rPr>
-              <a:t>Daily, Mon to Sun</a:t>
-            </a:r>
-            <a:endParaRPr lang="en-US" sz="1800" dirty="0"/>
-          </a:p>
-        </p:txBody>
-      </p:sp>
-      <p:sp>
-        <p:nvSpPr>
-          <p:cNvPr id="8" name="Shape 6"/>
-          <p:cNvSpPr/>
-          <p:nvPr/>
-        </p:nvSpPr>
-        <p:spPr>
-          <a:xfrm>
-            <a:off x="6163056" y="59436"/>
-            <a:ext cx="1618488" cy="1618488"/>
-          </a:xfrm>
-          <a:prstGeom prst="ellipse">
-            <a:avLst/>
-          </a:prstGeom>
-          <a:solidFill>
-            <a:srgbClr val="FFFFFF"/>
-          </a:solidFill>
-          <a:ln w="12700">
-            <a:solidFill>
-              <a:srgbClr val="FFFFFF"/>
-            </a:solidFill>
-            <a:prstDash val="solid"/>
-          </a:ln>
-        </p:spPr>
-      </p:sp>
       <p:pic>
         <p:nvPicPr>
-          <p:cNvPr id="9" name="Image 0" descr="allan_circle.png">    </p:cNvPr>
+          <p:cNvPr id="8" name="Image 0" descr="allan_circle.png">    </p:cNvPr>
           <p:cNvPicPr>
             <a:picLocks noChangeAspect="1"/>
           </p:cNvPicPr>
@@ -1148,7 +1123,7 @@
       </p:pic>
       <p:sp>
         <p:nvSpPr>
-          <p:cNvPr id="10" name="Text 7"/>
+          <p:cNvPr id="9" name="Text 6"/>
           <p:cNvSpPr/>
           <p:nvPr/>
         </p:nvSpPr>
@@ -1187,7 +1162,7 @@
       </p:sp>
       <p:sp>
         <p:nvSpPr>
-          <p:cNvPr id="11" name="Shape 8"/>
+          <p:cNvPr id="10" name="Shape 7"/>
           <p:cNvSpPr/>
           <p:nvPr/>
         </p:nvSpPr>
@@ -1210,7 +1185,7 @@
       </p:sp>
       <p:sp>
         <p:nvSpPr>
-          <p:cNvPr id="12" name="Shape 9"/>
+          <p:cNvPr id="11" name="Shape 8"/>
           <p:cNvSpPr/>
           <p:nvPr/>
         </p:nvSpPr>
@@ -1237,7 +1212,7 @@
       </p:sp>
       <p:sp>
         <p:nvSpPr>
-          <p:cNvPr id="13" name="Shape 10"/>
+          <p:cNvPr id="12" name="Shape 9"/>
           <p:cNvSpPr/>
           <p:nvPr/>
         </p:nvSpPr>
@@ -1262,7 +1237,7 @@
       </p:sp>
       <p:sp>
         <p:nvSpPr>
-          <p:cNvPr id="14" name="Shape 11"/>
+          <p:cNvPr id="13" name="Shape 10"/>
           <p:cNvSpPr/>
           <p:nvPr/>
         </p:nvSpPr>
@@ -1289,7 +1264,7 @@
       </p:sp>
       <p:sp>
         <p:nvSpPr>
-          <p:cNvPr id="15" name="Text 12"/>
+          <p:cNvPr id="14" name="Text 11"/>
           <p:cNvSpPr/>
           <p:nvPr/>
         </p:nvSpPr>
@@ -1328,7 +1303,7 @@
       </p:sp>
       <p:sp>
         <p:nvSpPr>
-          <p:cNvPr id="16" name="Text 13"/>
+          <p:cNvPr id="15" name="Text 12"/>
           <p:cNvSpPr/>
           <p:nvPr/>
         </p:nvSpPr>
@@ -1367,7 +1342,7 @@
       </p:sp>
       <p:sp>
         <p:nvSpPr>
-          <p:cNvPr id="17" name="Text 14"/>
+          <p:cNvPr id="16" name="Text 13"/>
           <p:cNvSpPr/>
           <p:nvPr/>
         </p:nvSpPr>
@@ -1420,7 +1395,7 @@
       </p:sp>
       <p:sp>
         <p:nvSpPr>
-          <p:cNvPr id="18" name="Text 15"/>
+          <p:cNvPr id="17" name="Text 14"/>
           <p:cNvSpPr/>
           <p:nvPr/>
         </p:nvSpPr>
@@ -1473,7 +1448,7 @@
       </p:sp>
       <p:sp>
         <p:nvSpPr>
-          <p:cNvPr id="19" name="Text 16"/>
+          <p:cNvPr id="18" name="Text 15"/>
           <p:cNvSpPr/>
           <p:nvPr/>
         </p:nvSpPr>
@@ -1526,7 +1501,7 @@
       </p:sp>
       <p:sp>
         <p:nvSpPr>
-          <p:cNvPr id="20" name="Text 17"/>
+          <p:cNvPr id="19" name="Text 16"/>
           <p:cNvSpPr/>
           <p:nvPr/>
         </p:nvSpPr>
@@ -1579,7 +1554,7 @@
       </p:sp>
       <p:sp>
         <p:nvSpPr>
-          <p:cNvPr id="21" name="Text 18"/>
+          <p:cNvPr id="20" name="Text 17"/>
           <p:cNvSpPr/>
           <p:nvPr/>
         </p:nvSpPr>
@@ -1632,7 +1607,7 @@
       </p:sp>
       <p:sp>
         <p:nvSpPr>
-          <p:cNvPr id="22" name="Text 19"/>
+          <p:cNvPr id="21" name="Text 18"/>
           <p:cNvSpPr/>
           <p:nvPr/>
         </p:nvSpPr>
@@ -1685,7 +1660,7 @@
       </p:sp>
       <p:sp>
         <p:nvSpPr>
-          <p:cNvPr id="23" name="Text 20"/>
+          <p:cNvPr id="22" name="Text 19"/>
           <p:cNvSpPr/>
           <p:nvPr/>
         </p:nvSpPr>
@@ -1738,7 +1713,7 @@
       </p:sp>
       <p:sp>
         <p:nvSpPr>
-          <p:cNvPr id="24" name="Text 21"/>
+          <p:cNvPr id="23" name="Text 20"/>
           <p:cNvSpPr/>
           <p:nvPr/>
         </p:nvSpPr>
@@ -1791,7 +1766,7 @@
       </p:sp>
       <p:sp>
         <p:nvSpPr>
-          <p:cNvPr id="25" name="Text 22"/>
+          <p:cNvPr id="24" name="Text 21"/>
           <p:cNvSpPr/>
           <p:nvPr/>
         </p:nvSpPr>
@@ -1844,7 +1819,7 @@
       </p:sp>
       <p:sp>
         <p:nvSpPr>
-          <p:cNvPr id="26" name="Text 23"/>
+          <p:cNvPr id="25" name="Text 22"/>
           <p:cNvSpPr/>
           <p:nvPr/>
         </p:nvSpPr>
@@ -1897,7 +1872,7 @@
       </p:sp>
       <p:sp>
         <p:nvSpPr>
-          <p:cNvPr id="27" name="Shape 24"/>
+          <p:cNvPr id="26" name="Shape 23"/>
           <p:cNvSpPr/>
           <p:nvPr/>
         </p:nvSpPr>
@@ -1924,7 +1899,7 @@
       </p:sp>
       <p:sp>
         <p:nvSpPr>
-          <p:cNvPr id="28" name="Shape 25"/>
+          <p:cNvPr id="27" name="Shape 24"/>
           <p:cNvSpPr/>
           <p:nvPr/>
         </p:nvSpPr>
@@ -1949,7 +1924,7 @@
       </p:sp>
       <p:sp>
         <p:nvSpPr>
-          <p:cNvPr id="29" name="Shape 26"/>
+          <p:cNvPr id="28" name="Shape 25"/>
           <p:cNvSpPr/>
           <p:nvPr/>
         </p:nvSpPr>
@@ -1976,7 +1951,7 @@
       </p:sp>
       <p:sp>
         <p:nvSpPr>
-          <p:cNvPr id="30" name="Text 27"/>
+          <p:cNvPr id="29" name="Text 26"/>
           <p:cNvSpPr/>
           <p:nvPr/>
         </p:nvSpPr>
@@ -2015,7 +1990,7 @@
       </p:sp>
       <p:sp>
         <p:nvSpPr>
-          <p:cNvPr id="31" name="Text 28"/>
+          <p:cNvPr id="30" name="Text 27"/>
           <p:cNvSpPr/>
           <p:nvPr/>
         </p:nvSpPr>
@@ -2054,7 +2029,7 @@
       </p:sp>
       <p:sp>
         <p:nvSpPr>
-          <p:cNvPr id="32" name="Text 29"/>
+          <p:cNvPr id="31" name="Text 28"/>
           <p:cNvSpPr/>
           <p:nvPr/>
         </p:nvSpPr>
@@ -2107,7 +2082,7 @@
       </p:sp>
       <p:sp>
         <p:nvSpPr>
-          <p:cNvPr id="33" name="Text 30"/>
+          <p:cNvPr id="32" name="Text 29"/>
           <p:cNvSpPr/>
           <p:nvPr/>
         </p:nvSpPr>
@@ -2160,7 +2135,7 @@
       </p:sp>
       <p:sp>
         <p:nvSpPr>
-          <p:cNvPr id="34" name="Text 31"/>
+          <p:cNvPr id="33" name="Text 30"/>
           <p:cNvSpPr/>
           <p:nvPr/>
         </p:nvSpPr>
@@ -2213,7 +2188,7 @@
       </p:sp>
       <p:sp>
         <p:nvSpPr>
-          <p:cNvPr id="35" name="Text 32"/>
+          <p:cNvPr id="34" name="Text 31"/>
           <p:cNvSpPr/>
           <p:nvPr/>
         </p:nvSpPr>
@@ -2266,7 +2241,7 @@
       </p:sp>
       <p:sp>
         <p:nvSpPr>
-          <p:cNvPr id="36" name="Text 33"/>
+          <p:cNvPr id="35" name="Text 32"/>
           <p:cNvSpPr/>
           <p:nvPr/>
         </p:nvSpPr>
@@ -2319,7 +2294,7 @@
       </p:sp>
       <p:sp>
         <p:nvSpPr>
-          <p:cNvPr id="37" name="Text 34"/>
+          <p:cNvPr id="36" name="Text 33"/>
           <p:cNvSpPr/>
           <p:nvPr/>
         </p:nvSpPr>
@@ -2372,7 +2347,7 @@
       </p:sp>
       <p:sp>
         <p:nvSpPr>
-          <p:cNvPr id="38" name="Text 35"/>
+          <p:cNvPr id="37" name="Text 34"/>
           <p:cNvSpPr/>
           <p:nvPr/>
         </p:nvSpPr>
@@ -2425,7 +2400,7 @@
       </p:sp>
       <p:sp>
         <p:nvSpPr>
-          <p:cNvPr id="39" name="Text 36"/>
+          <p:cNvPr id="38" name="Text 35"/>
           <p:cNvSpPr/>
           <p:nvPr/>
         </p:nvSpPr>
@@ -2470,7 +2445,7 @@
                 <a:ea typeface="Calibri" pitchFamily="34" charset="-122"/>
                 <a:cs typeface="Calibri" pitchFamily="34" charset="-120"/>
               </a:rPr>
-              <a:t>TB, lung cancer &amp; pharmacology</a:t>
+              <a:t>TB, lung cancer &amp; respiratory pharmacology</a:t>
             </a:r>
             <a:endParaRPr lang="en-US" sz="950" dirty="0"/>
           </a:p>
@@ -2478,7 +2453,7 @@
       </p:sp>
       <p:sp>
         <p:nvSpPr>
-          <p:cNvPr id="40" name="Shape 37"/>
+          <p:cNvPr id="39" name="Shape 36"/>
           <p:cNvSpPr/>
           <p:nvPr/>
         </p:nvSpPr>
@@ -2505,7 +2480,7 @@
       </p:sp>
       <p:sp>
         <p:nvSpPr>
-          <p:cNvPr id="41" name="Shape 38"/>
+          <p:cNvPr id="40" name="Shape 37"/>
           <p:cNvSpPr/>
           <p:nvPr/>
         </p:nvSpPr>
@@ -2530,7 +2505,7 @@
       </p:sp>
       <p:sp>
         <p:nvSpPr>
-          <p:cNvPr id="42" name="Shape 39"/>
+          <p:cNvPr id="41" name="Shape 38"/>
           <p:cNvSpPr/>
           <p:nvPr/>
         </p:nvSpPr>
@@ -2557,7 +2532,7 @@
       </p:sp>
       <p:sp>
         <p:nvSpPr>
-          <p:cNvPr id="43" name="Text 40"/>
+          <p:cNvPr id="42" name="Text 39"/>
           <p:cNvSpPr/>
           <p:nvPr/>
         </p:nvSpPr>
@@ -2596,7 +2571,7 @@
       </p:sp>
       <p:sp>
         <p:nvSpPr>
-          <p:cNvPr id="44" name="Text 41"/>
+          <p:cNvPr id="43" name="Text 40"/>
           <p:cNvSpPr/>
           <p:nvPr/>
         </p:nvSpPr>
@@ -2635,7 +2610,7 @@
       </p:sp>
       <p:sp>
         <p:nvSpPr>
-          <p:cNvPr id="45" name="Text 42"/>
+          <p:cNvPr id="44" name="Text 41"/>
           <p:cNvSpPr/>
           <p:nvPr/>
         </p:nvSpPr>
@@ -2658,7 +2633,7 @@
               <a:buNone/>
             </a:pPr>
             <a:r>
-              <a:rPr lang="en-US" sz="1100" b="1" dirty="0">
+              <a:rPr lang="en-US" sz="1000" b="1" dirty="0">
                 <a:solidFill>
                   <a:srgbClr val="D97706"/>
                 </a:solidFill>
@@ -2672,7 +2647,7 @@
               <a:buNone/>
             </a:pPr>
             <a:r>
-              <a:rPr lang="en-US" sz="1100" dirty="0">
+              <a:rPr lang="en-US" sz="1000" dirty="0">
                 <a:solidFill>
                   <a:srgbClr val="345671"/>
                 </a:solidFill>
@@ -2680,15 +2655,15 @@
                 <a:ea typeface="Calibri" pitchFamily="34" charset="-122"/>
                 <a:cs typeface="Calibri" pitchFamily="34" charset="-120"/>
               </a:rPr>
-              <a:t>Study designs &amp; levels of evidence</a:t>
-            </a:r>
-            <a:endParaRPr lang="en-US" sz="1100" dirty="0"/>
-          </a:p>
-        </p:txBody>
-      </p:sp>
-      <p:sp>
-        <p:nvSpPr>
-          <p:cNvPr id="46" name="Text 43"/>
+              <a:t>Study designs, evidence, Sens/Spec/PPV/NPV</a:t>
+            </a:r>
+            <a:endParaRPr lang="en-US" sz="1000" dirty="0"/>
+          </a:p>
+        </p:txBody>
+      </p:sp>
+      <p:sp>
+        <p:nvSpPr>
+          <p:cNvPr id="45" name="Text 42"/>
           <p:cNvSpPr/>
           <p:nvPr/>
         </p:nvSpPr>
@@ -2711,7 +2686,7 @@
               <a:buNone/>
             </a:pPr>
             <a:r>
-              <a:rPr lang="en-US" sz="1100" b="1" dirty="0">
+              <a:rPr lang="en-US" sz="1000" b="1" dirty="0">
                 <a:solidFill>
                   <a:srgbClr val="D97706"/>
                 </a:solidFill>
@@ -2725,7 +2700,7 @@
               <a:buNone/>
             </a:pPr>
             <a:r>
-              <a:rPr lang="en-US" sz="1100" dirty="0">
+              <a:rPr lang="en-US" sz="1000" dirty="0">
                 <a:solidFill>
                   <a:srgbClr val="345671"/>
                 </a:solidFill>
@@ -2735,13 +2710,13 @@
               </a:rPr>
               <a:t>Quantifying risk, transitions &amp; survival analysis</a:t>
             </a:r>
-            <a:endParaRPr lang="en-US" sz="1100" dirty="0"/>
-          </a:p>
-        </p:txBody>
-      </p:sp>
-      <p:sp>
-        <p:nvSpPr>
-          <p:cNvPr id="47" name="Text 44"/>
+            <a:endParaRPr lang="en-US" sz="1000" dirty="0"/>
+          </a:p>
+        </p:txBody>
+      </p:sp>
+      <p:sp>
+        <p:nvSpPr>
+          <p:cNvPr id="46" name="Text 43"/>
           <p:cNvSpPr/>
           <p:nvPr/>
         </p:nvSpPr>
@@ -2764,7 +2739,7 @@
               <a:buNone/>
             </a:pPr>
             <a:r>
-              <a:rPr lang="en-US" sz="1100" b="1" dirty="0">
+              <a:rPr lang="en-US" sz="1000" b="1" dirty="0">
                 <a:solidFill>
                   <a:srgbClr val="D97706"/>
                 </a:solidFill>
@@ -2778,7 +2753,7 @@
               <a:buNone/>
             </a:pPr>
             <a:r>
-              <a:rPr lang="en-US" sz="1100" dirty="0">
+              <a:rPr lang="en-US" sz="1000" dirty="0">
                 <a:solidFill>
                   <a:srgbClr val="345671"/>
                 </a:solidFill>
@@ -2788,13 +2763,13 @@
               </a:rPr>
               <a:t>Bias, confounding &amp; effect modification</a:t>
             </a:r>
-            <a:endParaRPr lang="en-US" sz="1100" dirty="0"/>
-          </a:p>
-        </p:txBody>
-      </p:sp>
-      <p:sp>
-        <p:nvSpPr>
-          <p:cNvPr id="48" name="Text 45"/>
+            <a:endParaRPr lang="en-US" sz="1000" dirty="0"/>
+          </a:p>
+        </p:txBody>
+      </p:sp>
+      <p:sp>
+        <p:nvSpPr>
+          <p:cNvPr id="47" name="Text 44"/>
           <p:cNvSpPr/>
           <p:nvPr/>
         </p:nvSpPr>
@@ -2817,7 +2792,7 @@
               <a:buNone/>
             </a:pPr>
             <a:r>
-              <a:rPr lang="en-US" sz="1100" b="1" dirty="0">
+              <a:rPr lang="en-US" sz="1000" b="1" dirty="0">
                 <a:solidFill>
                   <a:srgbClr val="D97706"/>
                 </a:solidFill>
@@ -2831,7 +2806,7 @@
               <a:buNone/>
             </a:pPr>
             <a:r>
-              <a:rPr lang="en-US" sz="1100" dirty="0">
+              <a:rPr lang="en-US" sz="1000" dirty="0">
                 <a:solidFill>
                   <a:srgbClr val="345671"/>
                 </a:solidFill>
@@ -2841,13 +2816,13 @@
               </a:rPr>
               <a:t>Statistical distributions, testing &amp; CIs</a:t>
             </a:r>
-            <a:endParaRPr lang="en-US" sz="1100" dirty="0"/>
-          </a:p>
-        </p:txBody>
-      </p:sp>
-      <p:sp>
-        <p:nvSpPr>
-          <p:cNvPr id="49" name="Shape 46"/>
+            <a:endParaRPr lang="en-US" sz="1000" dirty="0"/>
+          </a:p>
+        </p:txBody>
+      </p:sp>
+      <p:sp>
+        <p:nvSpPr>
+          <p:cNvPr id="48" name="Shape 45"/>
           <p:cNvSpPr/>
           <p:nvPr/>
         </p:nvSpPr>
@@ -2874,7 +2849,7 @@
       </p:sp>
       <p:sp>
         <p:nvSpPr>
-          <p:cNvPr id="50" name="Shape 47"/>
+          <p:cNvPr id="49" name="Shape 46"/>
           <p:cNvSpPr/>
           <p:nvPr/>
         </p:nvSpPr>
@@ -2899,7 +2874,7 @@
       </p:sp>
       <p:sp>
         <p:nvSpPr>
-          <p:cNvPr id="51" name="Shape 48"/>
+          <p:cNvPr id="50" name="Shape 47"/>
           <p:cNvSpPr/>
           <p:nvPr/>
         </p:nvSpPr>
@@ -2926,7 +2901,7 @@
       </p:sp>
       <p:sp>
         <p:nvSpPr>
-          <p:cNvPr id="52" name="Text 49"/>
+          <p:cNvPr id="51" name="Text 48"/>
           <p:cNvSpPr/>
           <p:nvPr/>
         </p:nvSpPr>
@@ -2965,7 +2940,7 @@
       </p:sp>
       <p:sp>
         <p:nvSpPr>
-          <p:cNvPr id="53" name="Text 50"/>
+          <p:cNvPr id="52" name="Text 49"/>
           <p:cNvSpPr/>
           <p:nvPr/>
         </p:nvSpPr>
@@ -3004,7 +2979,7 @@
       </p:sp>
       <p:sp>
         <p:nvSpPr>
-          <p:cNvPr id="54" name="Text 51"/>
+          <p:cNvPr id="53" name="Text 50"/>
           <p:cNvSpPr/>
           <p:nvPr/>
         </p:nvSpPr>
@@ -3057,7 +3032,7 @@
       </p:sp>
       <p:sp>
         <p:nvSpPr>
-          <p:cNvPr id="55" name="Text 52"/>
+          <p:cNvPr id="54" name="Text 51"/>
           <p:cNvSpPr/>
           <p:nvPr/>
         </p:nvSpPr>
@@ -3110,7 +3085,7 @@
       </p:sp>
       <p:sp>
         <p:nvSpPr>
-          <p:cNvPr id="56" name="Text 53"/>
+          <p:cNvPr id="55" name="Text 52"/>
           <p:cNvSpPr/>
           <p:nvPr/>
         </p:nvSpPr>
@@ -3163,7 +3138,7 @@
       </p:sp>
       <p:sp>
         <p:nvSpPr>
-          <p:cNvPr id="57" name="Text 54"/>
+          <p:cNvPr id="56" name="Text 53"/>
           <p:cNvSpPr/>
           <p:nvPr/>
         </p:nvSpPr>
@@ -3216,7 +3191,7 @@
       </p:sp>
       <p:sp>
         <p:nvSpPr>
-          <p:cNvPr id="58" name="Text 55"/>
+          <p:cNvPr id="57" name="Text 54"/>
           <p:cNvSpPr/>
           <p:nvPr/>
         </p:nvSpPr>
@@ -3269,7 +3244,7 @@
       </p:sp>
       <p:sp>
         <p:nvSpPr>
-          <p:cNvPr id="59" name="Text 56"/>
+          <p:cNvPr id="58" name="Text 55"/>
           <p:cNvSpPr/>
           <p:nvPr/>
         </p:nvSpPr>
@@ -3322,7 +3297,7 @@
       </p:sp>
       <p:sp>
         <p:nvSpPr>
-          <p:cNvPr id="60" name="Text 57"/>
+          <p:cNvPr id="59" name="Text 56"/>
           <p:cNvSpPr/>
           <p:nvPr/>
         </p:nvSpPr>
@@ -3375,7 +3350,7 @@
       </p:sp>
       <p:sp>
         <p:nvSpPr>
-          <p:cNvPr id="61" name="Text 58"/>
+          <p:cNvPr id="60" name="Text 57"/>
           <p:cNvSpPr/>
           <p:nvPr/>
         </p:nvSpPr>
@@ -3428,7 +3403,7 @@
       </p:sp>
       <p:sp>
         <p:nvSpPr>
-          <p:cNvPr id="62" name="Shape 59"/>
+          <p:cNvPr id="61" name="Shape 58"/>
           <p:cNvSpPr/>
           <p:nvPr/>
         </p:nvSpPr>
@@ -3455,7 +3430,7 @@
       </p:sp>
       <p:sp>
         <p:nvSpPr>
-          <p:cNvPr id="63" name="Text 60"/>
+          <p:cNvPr id="62" name="Text 59"/>
           <p:cNvSpPr/>
           <p:nvPr/>
         </p:nvSpPr>
@@ -3508,7 +3483,7 @@
       </p:sp>
       <p:sp>
         <p:nvSpPr>
-          <p:cNvPr id="64" name="Shape 61"/>
+          <p:cNvPr id="63" name="Shape 60"/>
           <p:cNvSpPr/>
           <p:nvPr/>
         </p:nvSpPr>
@@ -3535,7 +3510,7 @@
       </p:sp>
       <p:pic>
         <p:nvPicPr>
-          <p:cNvPr id="65" name="Image 1" descr="signup_qr.png">    </p:cNvPr>
+          <p:cNvPr id="64" name="Image 1" descr="signup_qr.png">    </p:cNvPr>
           <p:cNvPicPr>
             <a:picLocks noChangeAspect="1"/>
           </p:cNvPicPr>
@@ -3559,7 +3534,7 @@
       </p:pic>
       <p:sp>
         <p:nvSpPr>
-          <p:cNvPr id="66" name="Text 62"/>
+          <p:cNvPr id="65" name="Text 61"/>
           <p:cNvSpPr/>
           <p:nvPr/>
         </p:nvSpPr>
@@ -3598,7 +3573,7 @@
       </p:sp>
       <p:sp>
         <p:nvSpPr>
-          <p:cNvPr id="67" name="Text 63"/>
+          <p:cNvPr id="66" name="Text 62"/>
           <p:cNvSpPr/>
           <p:nvPr/>
         </p:nvSpPr>
@@ -3637,7 +3612,7 @@
       </p:sp>
       <p:sp>
         <p:nvSpPr>
-          <p:cNvPr id="68" name="Text 64"/>
+          <p:cNvPr id="67" name="Text 63"/>
           <p:cNvSpPr/>
           <p:nvPr/>
         </p:nvSpPr>
@@ -3676,7 +3651,7 @@
       </p:sp>
       <p:sp>
         <p:nvSpPr>
-          <p:cNvPr id="69" name="Text 65"/>
+          <p:cNvPr id="68" name="Text 64"/>
           <p:cNvSpPr/>
           <p:nvPr/>
         </p:nvSpPr>
@@ -3729,7 +3704,7 @@
       </p:sp>
       <p:sp>
         <p:nvSpPr>
-          <p:cNvPr id="70" name="Text 66"/>
+          <p:cNvPr id="69" name="Text 65"/>
           <p:cNvSpPr/>
           <p:nvPr/>
         </p:nvSpPr>
@@ -3796,7 +3771,7 @@
       </p:sp>
       <p:sp>
         <p:nvSpPr>
-          <p:cNvPr id="71" name="Shape 67"/>
+          <p:cNvPr id="70" name="Shape 66"/>
           <p:cNvSpPr/>
           <p:nvPr/>
         </p:nvSpPr>
@@ -3819,7 +3794,7 @@
       </p:sp>
       <p:sp>
         <p:nvSpPr>
-          <p:cNvPr id="72" name="Text 68"/>
+          <p:cNvPr id="71" name="Text 67"/>
           <p:cNvSpPr/>
           <p:nvPr/>
         </p:nvSpPr>

--- a/outputs/flyers/USMLE_June_Advert.pptx
+++ b/outputs/flyers/USMLE_June_Advert.pptx
@@ -3453,7 +3453,7 @@
               <a:buNone/>
             </a:pPr>
             <a:r>
-              <a:rPr lang="en-US" sz="1500" b="1" spc="200" kern="0" dirty="0">
+              <a:rPr lang="en-US" sz="1400" b="1" spc="200" kern="0" dirty="0">
                 <a:solidFill>
                   <a:srgbClr val="FFFFFF"/>
                 </a:solidFill>
@@ -3461,13 +3461,13 @@
                 <a:ea typeface="Calibri" pitchFamily="34" charset="-122"/>
                 <a:cs typeface="Calibri" pitchFamily="34" charset="-120"/>
               </a:rPr>
-              <a:t>FIRST AID 2025 + UWORLD</a:t>
-            </a:r>
-            <a:pPr indent="0" marL="0">
-              <a:buNone/>
-            </a:pPr>
-            <a:r>
-              <a:rPr lang="en-US" sz="1300" i="1" dirty="0">
+              <a:t>HIGH-YIELD MATERIAL + TEST QUESTIONS</a:t>
+            </a:r>
+            <a:pPr indent="0" marL="0">
+              <a:buNone/>
+            </a:pPr>
+            <a:r>
+              <a:rPr lang="en-US" sz="1200" i="1" dirty="0">
                 <a:solidFill>
                   <a:srgbClr val="BFE3F7"/>
                 </a:solidFill>
@@ -3475,9 +3475,9 @@
                 <a:ea typeface="Calibri" pitchFamily="34" charset="-122"/>
                 <a:cs typeface="Calibri" pitchFamily="34" charset="-120"/>
               </a:rPr>
-              <a:t>  every single day  </a:t>
-            </a:r>
-            <a:endParaRPr lang="en-US" sz="1500" dirty="0"/>
+              <a:t>  similar to exam day  ·  every day</a:t>
+            </a:r>
+            <a:endParaRPr lang="en-US" sz="1400" dirty="0"/>
           </a:p>
         </p:txBody>
       </p:sp>
@@ -3657,38 +3657,24 @@
         </p:nvSpPr>
         <p:spPr>
           <a:xfrm>
-            <a:off x="2057400" y="9006840"/>
-            <a:ext cx="5669280" cy="237744"/>
-          </a:xfrm>
-          <a:prstGeom prst="rect">
-            <a:avLst/>
-          </a:prstGeom>
-          <a:noFill/>
-          <a:ln/>
-        </p:spPr>
-        <p:txBody>
-          <a:bodyPr wrap="square" lIns="0" tIns="0" rIns="0" bIns="0" rtlCol="0" anchor="ctr"/>
-          <a:lstStyle/>
-          <a:p>
-            <a:pPr indent="0" marL="0">
-              <a:buNone/>
-            </a:pPr>
-            <a:r>
-              <a:rPr lang="en-US" sz="1050" dirty="0">
-                <a:solidFill>
-                  <a:srgbClr val="345671"/>
-                </a:solidFill>
-                <a:latin typeface="Calibri" pitchFamily="34" charset="0"/>
-                <a:ea typeface="Calibri" pitchFamily="34" charset="-122"/>
-                <a:cs typeface="Calibri" pitchFamily="34" charset="-120"/>
-              </a:rPr>
-              <a:t>Full plan + class details: </a:t>
-            </a:r>
-            <a:pPr indent="0" marL="0">
-              <a:buNone/>
-            </a:pPr>
-            <a:r>
-              <a:rPr lang="en-US" sz="1050" b="1" dirty="0">
+            <a:off x="2057400" y="8997696"/>
+            <a:ext cx="5669280" cy="219456"/>
+          </a:xfrm>
+          <a:prstGeom prst="rect">
+            <a:avLst/>
+          </a:prstGeom>
+          <a:noFill/>
+          <a:ln/>
+        </p:spPr>
+        <p:txBody>
+          <a:bodyPr wrap="square" lIns="0" tIns="0" rIns="0" bIns="0" rtlCol="0" anchor="ctr"/>
+          <a:lstStyle/>
+          <a:p>
+            <a:pPr indent="0" marL="0">
+              <a:buNone/>
+            </a:pPr>
+            <a:r>
+              <a:rPr lang="en-US" sz="1000" b="1" dirty="0">
                 <a:solidFill>
                   <a:srgbClr val="0284C7"/>
                 </a:solidFill>
@@ -3698,50 +3684,60 @@
               </a:rPr>
               <a:t>bakesiga.github.io/usmle-dashboard</a:t>
             </a:r>
-            <a:endParaRPr lang="en-US" sz="1050" dirty="0"/>
-          </a:p>
-        </p:txBody>
-      </p:sp>
-      <p:sp>
-        <p:nvSpPr>
-          <p:cNvPr id="69" name="Text 65"/>
-          <p:cNvSpPr/>
-          <p:nvPr/>
-        </p:nvSpPr>
-        <p:spPr>
-          <a:xfrm>
-            <a:off x="2057400" y="9253728"/>
-            <a:ext cx="5669280" cy="219456"/>
-          </a:xfrm>
-          <a:prstGeom prst="rect">
-            <a:avLst/>
-          </a:prstGeom>
-          <a:noFill/>
-          <a:ln/>
-        </p:spPr>
-        <p:txBody>
-          <a:bodyPr wrap="square" lIns="0" tIns="0" rIns="0" bIns="0" rtlCol="0" anchor="ctr"/>
-          <a:lstStyle/>
-          <a:p>
-            <a:pPr indent="0" marL="0">
-              <a:buNone/>
-            </a:pPr>
-            <a:r>
-              <a:rPr lang="en-US" sz="1000" dirty="0">
-                <a:solidFill>
-                  <a:srgbClr val="6B87A3"/>
-                </a:solidFill>
-                <a:latin typeface="Calibri" pitchFamily="34" charset="0"/>
-                <a:ea typeface="Calibri" pitchFamily="34" charset="-122"/>
-                <a:cs typeface="Calibri" pitchFamily="34" charset="-120"/>
-              </a:rPr>
-              <a:t>or message </a:t>
-            </a:r>
-            <a:pPr indent="0" marL="0">
-              <a:buNone/>
-            </a:pPr>
-            <a:r>
-              <a:rPr lang="en-US" sz="1000" b="1" dirty="0">
+            <a:endParaRPr lang="en-US" sz="1000" dirty="0"/>
+          </a:p>
+        </p:txBody>
+      </p:sp>
+      <p:pic>
+        <p:nvPicPr>
+          <p:cNvPr id="69" name="Image 2" descr="email-blue.png">    </p:cNvPr>
+          <p:cNvPicPr>
+            <a:picLocks noChangeAspect="1"/>
+          </p:cNvPicPr>
+          <p:nvPr/>
+        </p:nvPicPr>
+        <p:blipFill>
+          <a:blip r:embed="rId3"/>
+          <a:stretch>
+            <a:fillRect/>
+          </a:stretch>
+        </p:blipFill>
+        <p:spPr>
+          <a:xfrm>
+            <a:off x="2057400" y="9308592"/>
+            <a:ext cx="182880" cy="182880"/>
+          </a:xfrm>
+          <a:prstGeom prst="rect">
+            <a:avLst/>
+          </a:prstGeom>
+        </p:spPr>
+      </p:pic>
+      <p:sp>
+        <p:nvSpPr>
+          <p:cNvPr id="70" name="Text 65"/>
+          <p:cNvSpPr/>
+          <p:nvPr/>
+        </p:nvSpPr>
+        <p:spPr>
+          <a:xfrm>
+            <a:off x="2295144" y="9281160"/>
+            <a:ext cx="1615440" cy="256032"/>
+          </a:xfrm>
+          <a:prstGeom prst="rect">
+            <a:avLst/>
+          </a:prstGeom>
+          <a:noFill/>
+          <a:ln/>
+        </p:spPr>
+        <p:txBody>
+          <a:bodyPr wrap="square" lIns="0" tIns="0" rIns="0" bIns="0" rtlCol="0" anchor="ctr"/>
+          <a:lstStyle/>
+          <a:p>
+            <a:pPr indent="0" marL="0">
+              <a:buNone/>
+            </a:pPr>
+            <a:r>
+              <a:rPr lang="en-US" sz="950" b="1" dirty="0">
                 <a:solidFill>
                   <a:srgbClr val="0C2A3D"/>
                 </a:solidFill>
@@ -3749,29 +3745,141 @@
                 <a:ea typeface="Calibri" pitchFamily="34" charset="-122"/>
                 <a:cs typeface="Calibri" pitchFamily="34" charset="-120"/>
               </a:rPr>
+              <a:t>allanbakesiga@gmail.com</a:t>
+            </a:r>
+            <a:endParaRPr lang="en-US" sz="950" dirty="0"/>
+          </a:p>
+        </p:txBody>
+      </p:sp>
+      <p:pic>
+        <p:nvPicPr>
+          <p:cNvPr id="71" name="Image 3" descr="whatsapp.png">    </p:cNvPr>
+          <p:cNvPicPr>
+            <a:picLocks noChangeAspect="1"/>
+          </p:cNvPicPr>
+          <p:nvPr/>
+        </p:nvPicPr>
+        <p:blipFill>
+          <a:blip r:embed="rId4"/>
+          <a:stretch>
+            <a:fillRect/>
+          </a:stretch>
+        </p:blipFill>
+        <p:spPr>
+          <a:xfrm>
+            <a:off x="3947160" y="9308592"/>
+            <a:ext cx="182880" cy="182880"/>
+          </a:xfrm>
+          <a:prstGeom prst="rect">
+            <a:avLst/>
+          </a:prstGeom>
+        </p:spPr>
+      </p:pic>
+      <p:sp>
+        <p:nvSpPr>
+          <p:cNvPr id="72" name="Text 66"/>
+          <p:cNvSpPr/>
+          <p:nvPr/>
+        </p:nvSpPr>
+        <p:spPr>
+          <a:xfrm>
+            <a:off x="4184904" y="9281160"/>
+            <a:ext cx="1615440" cy="256032"/>
+          </a:xfrm>
+          <a:prstGeom prst="rect">
+            <a:avLst/>
+          </a:prstGeom>
+          <a:noFill/>
+          <a:ln/>
+        </p:spPr>
+        <p:txBody>
+          <a:bodyPr wrap="square" lIns="0" tIns="0" rIns="0" bIns="0" rtlCol="0" anchor="ctr"/>
+          <a:lstStyle/>
+          <a:p>
+            <a:pPr indent="0" marL="0">
+              <a:buNone/>
+            </a:pPr>
+            <a:r>
+              <a:rPr lang="en-US" sz="950" b="1" dirty="0">
+                <a:solidFill>
+                  <a:srgbClr val="0C2A3D"/>
+                </a:solidFill>
+                <a:latin typeface="Calibri" pitchFamily="34" charset="0"/>
+                <a:ea typeface="Calibri" pitchFamily="34" charset="-122"/>
+                <a:cs typeface="Calibri" pitchFamily="34" charset="-120"/>
+              </a:rPr>
               <a:t>+256 705 571 443</a:t>
             </a:r>
-            <a:pPr indent="0" marL="0">
-              <a:buNone/>
-            </a:pPr>
-            <a:r>
-              <a:rPr lang="en-US" sz="1000" dirty="0">
-                <a:solidFill>
-                  <a:srgbClr val="6B87A3"/>
-                </a:solidFill>
-                <a:latin typeface="Calibri" pitchFamily="34" charset="0"/>
-                <a:ea typeface="Calibri" pitchFamily="34" charset="-122"/>
-                <a:cs typeface="Calibri" pitchFamily="34" charset="-120"/>
-              </a:rPr>
-              <a:t>  ·  WhatsApp</a:t>
-            </a:r>
-            <a:endParaRPr lang="en-US" sz="1000" dirty="0"/>
-          </a:p>
-        </p:txBody>
-      </p:sp>
-      <p:sp>
-        <p:nvSpPr>
-          <p:cNvPr id="70" name="Shape 66"/>
+            <a:endParaRPr lang="en-US" sz="950" dirty="0"/>
+          </a:p>
+        </p:txBody>
+      </p:sp>
+      <p:pic>
+        <p:nvPicPr>
+          <p:cNvPr id="73" name="Image 4" descr="phone-blue.png">    </p:cNvPr>
+          <p:cNvPicPr>
+            <a:picLocks noChangeAspect="1"/>
+          </p:cNvPicPr>
+          <p:nvPr/>
+        </p:nvPicPr>
+        <p:blipFill>
+          <a:blip r:embed="rId5"/>
+          <a:stretch>
+            <a:fillRect/>
+          </a:stretch>
+        </p:blipFill>
+        <p:spPr>
+          <a:xfrm>
+            <a:off x="5836920" y="9308592"/>
+            <a:ext cx="182880" cy="182880"/>
+          </a:xfrm>
+          <a:prstGeom prst="rect">
+            <a:avLst/>
+          </a:prstGeom>
+        </p:spPr>
+      </p:pic>
+      <p:sp>
+        <p:nvSpPr>
+          <p:cNvPr id="74" name="Text 67"/>
+          <p:cNvSpPr/>
+          <p:nvPr/>
+        </p:nvSpPr>
+        <p:spPr>
+          <a:xfrm>
+            <a:off x="6074664" y="9281160"/>
+            <a:ext cx="1615440" cy="256032"/>
+          </a:xfrm>
+          <a:prstGeom prst="rect">
+            <a:avLst/>
+          </a:prstGeom>
+          <a:noFill/>
+          <a:ln/>
+        </p:spPr>
+        <p:txBody>
+          <a:bodyPr wrap="square" lIns="0" tIns="0" rIns="0" bIns="0" rtlCol="0" anchor="ctr"/>
+          <a:lstStyle/>
+          <a:p>
+            <a:pPr indent="0" marL="0">
+              <a:buNone/>
+            </a:pPr>
+            <a:r>
+              <a:rPr lang="en-US" sz="950" b="1" dirty="0">
+                <a:solidFill>
+                  <a:srgbClr val="0C2A3D"/>
+                </a:solidFill>
+                <a:latin typeface="Calibri" pitchFamily="34" charset="0"/>
+                <a:ea typeface="Calibri" pitchFamily="34" charset="-122"/>
+                <a:cs typeface="Calibri" pitchFamily="34" charset="-120"/>
+              </a:rPr>
+              <a:t>+1 984 710 2902</a:t>
+            </a:r>
+            <a:endParaRPr lang="en-US" sz="950" dirty="0"/>
+          </a:p>
+        </p:txBody>
+      </p:sp>
+      <p:sp>
+        <p:nvSpPr>
+          <p:cNvPr id="75" name="Shape 68"/>
           <p:cNvSpPr/>
           <p:nvPr/>
         </p:nvSpPr>
@@ -3794,7 +3902,7 @@
       </p:sp>
       <p:sp>
         <p:nvSpPr>
-          <p:cNvPr id="71" name="Text 67"/>
+          <p:cNvPr id="76" name="Text 69"/>
           <p:cNvSpPr/>
           <p:nvPr/>
         </p:nvSpPr>

--- a/outputs/flyers/USMLE_June_Advert.pptx
+++ b/outputs/flyers/USMLE_June_Advert.pptx
@@ -2655,7 +2655,7 @@
                 <a:ea typeface="Calibri" pitchFamily="34" charset="-122"/>
                 <a:cs typeface="Calibri" pitchFamily="34" charset="-120"/>
               </a:rPr>
-              <a:t>Study designs, evidence, Sens/Spec/PPV/NPV</a:t>
+              <a:t>Study designs, evidence &amp; diagnostic testing</a:t>
             </a:r>
             <a:endParaRPr lang="en-US" sz="1000" dirty="0"/>
           </a:p>

--- a/outputs/flyers/USMLE_June_Advert.pptx
+++ b/outputs/flyers/USMLE_June_Advert.pptx
@@ -883,7 +883,7 @@
         </p:nvSpPr>
         <p:spPr>
           <a:xfrm>
-            <a:off x="0" y="1792224"/>
+            <a:off x="0" y="2203704"/>
             <a:ext cx="8229600" cy="36576"/>
           </a:xfrm>
           <a:prstGeom prst="rect">
@@ -1080,8 +1080,8 @@
         </p:nvSpPr>
         <p:spPr>
           <a:xfrm>
-            <a:off x="6181344" y="77724"/>
-            <a:ext cx="1581912" cy="1581912"/>
+            <a:off x="6199632" y="128016"/>
+            <a:ext cx="1399032" cy="1399032"/>
           </a:xfrm>
           <a:prstGeom prst="ellipse">
             <a:avLst/>
@@ -1113,8 +1113,8 @@
         </p:blipFill>
         <p:spPr>
           <a:xfrm>
-            <a:off x="6217920" y="114300"/>
-            <a:ext cx="1508760" cy="1508760"/>
+            <a:off x="6236208" y="164592"/>
+            <a:ext cx="1325880" cy="1325880"/>
           </a:xfrm>
           <a:prstGeom prst="rect">
             <a:avLst/>
@@ -1129,7 +1129,124 @@
         </p:nvSpPr>
         <p:spPr>
           <a:xfrm>
-            <a:off x="502920" y="2029968"/>
+            <a:off x="5961888" y="1545336"/>
+            <a:ext cx="1874520" cy="201168"/>
+          </a:xfrm>
+          <a:prstGeom prst="rect">
+            <a:avLst/>
+          </a:prstGeom>
+          <a:noFill/>
+          <a:ln/>
+        </p:spPr>
+        <p:txBody>
+          <a:bodyPr wrap="square" lIns="0" tIns="0" rIns="0" bIns="0" rtlCol="0" anchor="ctr"/>
+          <a:lstStyle/>
+          <a:p>
+            <a:pPr algn="ctr" indent="0" marL="0">
+              <a:buNone/>
+            </a:pPr>
+            <a:r>
+              <a:rPr lang="en-US" sz="1100" b="1" dirty="0">
+                <a:solidFill>
+                  <a:srgbClr val="0C2A3D"/>
+                </a:solidFill>
+                <a:latin typeface="Calibri" pitchFamily="34" charset="0"/>
+                <a:ea typeface="Calibri" pitchFamily="34" charset="-122"/>
+                <a:cs typeface="Calibri" pitchFamily="34" charset="-120"/>
+              </a:rPr>
+              <a:t>Allan Bakesiga, MD</a:t>
+            </a:r>
+            <a:endParaRPr lang="en-US" sz="1100" dirty="0"/>
+          </a:p>
+        </p:txBody>
+      </p:sp>
+      <p:sp>
+        <p:nvSpPr>
+          <p:cNvPr id="10" name="Text 7"/>
+          <p:cNvSpPr/>
+          <p:nvPr/>
+        </p:nvSpPr>
+        <p:spPr>
+          <a:xfrm>
+            <a:off x="5961888" y="1746504"/>
+            <a:ext cx="1874520" cy="182880"/>
+          </a:xfrm>
+          <a:prstGeom prst="rect">
+            <a:avLst/>
+          </a:prstGeom>
+          <a:noFill/>
+          <a:ln/>
+        </p:spPr>
+        <p:txBody>
+          <a:bodyPr wrap="square" lIns="0" tIns="0" rIns="0" bIns="0" rtlCol="0" anchor="ctr"/>
+          <a:lstStyle/>
+          <a:p>
+            <a:pPr algn="ctr" indent="0" marL="0">
+              <a:buNone/>
+            </a:pPr>
+            <a:r>
+              <a:rPr lang="en-US" sz="850" dirty="0">
+                <a:solidFill>
+                  <a:srgbClr val="6B87A3"/>
+                </a:solidFill>
+                <a:latin typeface="Calibri" pitchFamily="34" charset="0"/>
+                <a:ea typeface="Calibri" pitchFamily="34" charset="-122"/>
+                <a:cs typeface="Calibri" pitchFamily="34" charset="-120"/>
+              </a:rPr>
+              <a:t>MD (Makerere)  ·  MScGH (Duke)</a:t>
+            </a:r>
+            <a:endParaRPr lang="en-US" sz="850" dirty="0"/>
+          </a:p>
+        </p:txBody>
+      </p:sp>
+      <p:sp>
+        <p:nvSpPr>
+          <p:cNvPr id="11" name="Text 8"/>
+          <p:cNvSpPr/>
+          <p:nvPr/>
+        </p:nvSpPr>
+        <p:spPr>
+          <a:xfrm>
+            <a:off x="5961888" y="1929384"/>
+            <a:ext cx="1874520" cy="182880"/>
+          </a:xfrm>
+          <a:prstGeom prst="rect">
+            <a:avLst/>
+          </a:prstGeom>
+          <a:noFill/>
+          <a:ln/>
+        </p:spPr>
+        <p:txBody>
+          <a:bodyPr wrap="square" lIns="0" tIns="0" rIns="0" bIns="0" rtlCol="0" anchor="ctr"/>
+          <a:lstStyle/>
+          <a:p>
+            <a:pPr algn="ctr" indent="0" marL="0">
+              <a:buNone/>
+            </a:pPr>
+            <a:r>
+              <a:rPr lang="en-US" sz="850" dirty="0">
+                <a:solidFill>
+                  <a:srgbClr val="6B87A3"/>
+                </a:solidFill>
+                <a:latin typeface="Calibri" pitchFamily="34" charset="0"/>
+                <a:ea typeface="Calibri" pitchFamily="34" charset="-122"/>
+                <a:cs typeface="Calibri" pitchFamily="34" charset="-120"/>
+              </a:rPr>
+              <a:t>PGY-1 Neurology, Creighton</a:t>
+            </a:r>
+            <a:endParaRPr lang="en-US" sz="850" dirty="0"/>
+          </a:p>
+        </p:txBody>
+      </p:sp>
+      <p:sp>
+        <p:nvSpPr>
+          <p:cNvPr id="12" name="Text 9"/>
+          <p:cNvSpPr/>
+          <p:nvPr/>
+        </p:nvSpPr>
+        <p:spPr>
+          <a:xfrm>
+            <a:off x="502920" y="2441448"/>
             <a:ext cx="7223760" cy="237744"/>
           </a:xfrm>
           <a:prstGeom prst="rect">
@@ -1162,13 +1279,13 @@
       </p:sp>
       <p:sp>
         <p:nvSpPr>
-          <p:cNvPr id="10" name="Shape 7"/>
-          <p:cNvSpPr/>
-          <p:nvPr/>
-        </p:nvSpPr>
-        <p:spPr>
-          <a:xfrm>
-            <a:off x="502920" y="2331720"/>
+          <p:cNvPr id="13" name="Shape 10"/>
+          <p:cNvSpPr/>
+          <p:nvPr/>
+        </p:nvSpPr>
+        <p:spPr>
+          <a:xfrm>
+            <a:off x="502920" y="2743200"/>
             <a:ext cx="1005840" cy="0"/>
           </a:xfrm>
           <a:prstGeom prst="line">
@@ -1185,13 +1302,13 @@
       </p:sp>
       <p:sp>
         <p:nvSpPr>
-          <p:cNvPr id="11" name="Shape 8"/>
-          <p:cNvSpPr/>
-          <p:nvPr/>
-        </p:nvSpPr>
-        <p:spPr>
-          <a:xfrm>
-            <a:off x="502920" y="2331720"/>
+          <p:cNvPr id="14" name="Shape 11"/>
+          <p:cNvSpPr/>
+          <p:nvPr/>
+        </p:nvSpPr>
+        <p:spPr>
+          <a:xfrm>
+            <a:off x="502920" y="2743200"/>
             <a:ext cx="3543300" cy="2377440"/>
           </a:xfrm>
           <a:prstGeom prst="roundRect">
@@ -1212,13 +1329,13 @@
       </p:sp>
       <p:sp>
         <p:nvSpPr>
-          <p:cNvPr id="12" name="Shape 9"/>
-          <p:cNvSpPr/>
-          <p:nvPr/>
-        </p:nvSpPr>
-        <p:spPr>
-          <a:xfrm>
-            <a:off x="502920" y="2404872"/>
+          <p:cNvPr id="15" name="Shape 12"/>
+          <p:cNvSpPr/>
+          <p:nvPr/>
+        </p:nvSpPr>
+        <p:spPr>
+          <a:xfrm>
+            <a:off x="502920" y="2816352"/>
             <a:ext cx="3543300" cy="493776"/>
           </a:xfrm>
           <a:prstGeom prst="rect">
@@ -1237,13 +1354,13 @@
       </p:sp>
       <p:sp>
         <p:nvSpPr>
-          <p:cNvPr id="13" name="Shape 10"/>
-          <p:cNvSpPr/>
-          <p:nvPr/>
-        </p:nvSpPr>
-        <p:spPr>
-          <a:xfrm>
-            <a:off x="502920" y="2331720"/>
+          <p:cNvPr id="16" name="Shape 13"/>
+          <p:cNvSpPr/>
+          <p:nvPr/>
+        </p:nvSpPr>
+        <p:spPr>
+          <a:xfrm>
+            <a:off x="502920" y="2743200"/>
             <a:ext cx="3543300" cy="566928"/>
           </a:xfrm>
           <a:prstGeom prst="roundRect">
@@ -1264,13 +1381,13 @@
       </p:sp>
       <p:sp>
         <p:nvSpPr>
-          <p:cNvPr id="14" name="Text 11"/>
-          <p:cNvSpPr/>
-          <p:nvPr/>
-        </p:nvSpPr>
-        <p:spPr>
-          <a:xfrm>
-            <a:off x="630936" y="2386584"/>
+          <p:cNvPr id="17" name="Text 14"/>
+          <p:cNvSpPr/>
+          <p:nvPr/>
+        </p:nvSpPr>
+        <p:spPr>
+          <a:xfrm>
+            <a:off x="630936" y="2798064"/>
             <a:ext cx="3287268" cy="256032"/>
           </a:xfrm>
           <a:prstGeom prst="rect">
@@ -1303,13 +1420,13 @@
       </p:sp>
       <p:sp>
         <p:nvSpPr>
-          <p:cNvPr id="15" name="Text 12"/>
-          <p:cNvSpPr/>
-          <p:nvPr/>
-        </p:nvSpPr>
-        <p:spPr>
-          <a:xfrm>
-            <a:off x="630936" y="2642616"/>
+          <p:cNvPr id="18" name="Text 15"/>
+          <p:cNvSpPr/>
+          <p:nvPr/>
+        </p:nvSpPr>
+        <p:spPr>
+          <a:xfrm>
+            <a:off x="630936" y="3054096"/>
             <a:ext cx="3287268" cy="219456"/>
           </a:xfrm>
           <a:prstGeom prst="rect">
@@ -1342,13 +1459,13 @@
       </p:sp>
       <p:sp>
         <p:nvSpPr>
-          <p:cNvPr id="16" name="Text 13"/>
-          <p:cNvSpPr/>
-          <p:nvPr/>
-        </p:nvSpPr>
-        <p:spPr>
-          <a:xfrm>
-            <a:off x="630936" y="2990088"/>
+          <p:cNvPr id="19" name="Text 16"/>
+          <p:cNvSpPr/>
+          <p:nvPr/>
+        </p:nvSpPr>
+        <p:spPr>
+          <a:xfrm>
+            <a:off x="630936" y="3401568"/>
             <a:ext cx="3287268" cy="173736"/>
           </a:xfrm>
           <a:prstGeom prst="rect">
@@ -1395,13 +1512,13 @@
       </p:sp>
       <p:sp>
         <p:nvSpPr>
-          <p:cNvPr id="17" name="Text 14"/>
-          <p:cNvSpPr/>
-          <p:nvPr/>
-        </p:nvSpPr>
-        <p:spPr>
-          <a:xfrm>
-            <a:off x="630936" y="3163824"/>
+          <p:cNvPr id="20" name="Text 17"/>
+          <p:cNvSpPr/>
+          <p:nvPr/>
+        </p:nvSpPr>
+        <p:spPr>
+          <a:xfrm>
+            <a:off x="630936" y="3575304"/>
             <a:ext cx="3287268" cy="173736"/>
           </a:xfrm>
           <a:prstGeom prst="rect">
@@ -1448,13 +1565,13 @@
       </p:sp>
       <p:sp>
         <p:nvSpPr>
-          <p:cNvPr id="18" name="Text 15"/>
-          <p:cNvSpPr/>
-          <p:nvPr/>
-        </p:nvSpPr>
-        <p:spPr>
-          <a:xfrm>
-            <a:off x="630936" y="3337560"/>
+          <p:cNvPr id="21" name="Text 18"/>
+          <p:cNvSpPr/>
+          <p:nvPr/>
+        </p:nvSpPr>
+        <p:spPr>
+          <a:xfrm>
+            <a:off x="630936" y="3749040"/>
             <a:ext cx="3287268" cy="173736"/>
           </a:xfrm>
           <a:prstGeom prst="rect">
@@ -1501,13 +1618,13 @@
       </p:sp>
       <p:sp>
         <p:nvSpPr>
-          <p:cNvPr id="19" name="Text 16"/>
-          <p:cNvSpPr/>
-          <p:nvPr/>
-        </p:nvSpPr>
-        <p:spPr>
-          <a:xfrm>
-            <a:off x="630936" y="3511296"/>
+          <p:cNvPr id="22" name="Text 19"/>
+          <p:cNvSpPr/>
+          <p:nvPr/>
+        </p:nvSpPr>
+        <p:spPr>
+          <a:xfrm>
+            <a:off x="630936" y="3922776"/>
             <a:ext cx="3287268" cy="173736"/>
           </a:xfrm>
           <a:prstGeom prst="rect">
@@ -1554,13 +1671,13 @@
       </p:sp>
       <p:sp>
         <p:nvSpPr>
-          <p:cNvPr id="20" name="Text 17"/>
-          <p:cNvSpPr/>
-          <p:nvPr/>
-        </p:nvSpPr>
-        <p:spPr>
-          <a:xfrm>
-            <a:off x="630936" y="3685032"/>
+          <p:cNvPr id="23" name="Text 20"/>
+          <p:cNvSpPr/>
+          <p:nvPr/>
+        </p:nvSpPr>
+        <p:spPr>
+          <a:xfrm>
+            <a:off x="630936" y="4096512"/>
             <a:ext cx="3287268" cy="173736"/>
           </a:xfrm>
           <a:prstGeom prst="rect">
@@ -1607,13 +1724,13 @@
       </p:sp>
       <p:sp>
         <p:nvSpPr>
-          <p:cNvPr id="21" name="Text 18"/>
-          <p:cNvSpPr/>
-          <p:nvPr/>
-        </p:nvSpPr>
-        <p:spPr>
-          <a:xfrm>
-            <a:off x="630936" y="3858768"/>
+          <p:cNvPr id="24" name="Text 21"/>
+          <p:cNvSpPr/>
+          <p:nvPr/>
+        </p:nvSpPr>
+        <p:spPr>
+          <a:xfrm>
+            <a:off x="630936" y="4270248"/>
             <a:ext cx="3287268" cy="173736"/>
           </a:xfrm>
           <a:prstGeom prst="rect">
@@ -1660,13 +1777,13 @@
       </p:sp>
       <p:sp>
         <p:nvSpPr>
-          <p:cNvPr id="22" name="Text 19"/>
-          <p:cNvSpPr/>
-          <p:nvPr/>
-        </p:nvSpPr>
-        <p:spPr>
-          <a:xfrm>
-            <a:off x="630936" y="4032504"/>
+          <p:cNvPr id="25" name="Text 22"/>
+          <p:cNvSpPr/>
+          <p:nvPr/>
+        </p:nvSpPr>
+        <p:spPr>
+          <a:xfrm>
+            <a:off x="630936" y="4443984"/>
             <a:ext cx="3287268" cy="173736"/>
           </a:xfrm>
           <a:prstGeom prst="rect">
@@ -1713,13 +1830,13 @@
       </p:sp>
       <p:sp>
         <p:nvSpPr>
-          <p:cNvPr id="23" name="Text 20"/>
-          <p:cNvSpPr/>
-          <p:nvPr/>
-        </p:nvSpPr>
-        <p:spPr>
-          <a:xfrm>
-            <a:off x="630936" y="4206240"/>
+          <p:cNvPr id="26" name="Text 23"/>
+          <p:cNvSpPr/>
+          <p:nvPr/>
+        </p:nvSpPr>
+        <p:spPr>
+          <a:xfrm>
+            <a:off x="630936" y="4617720"/>
             <a:ext cx="3287268" cy="173736"/>
           </a:xfrm>
           <a:prstGeom prst="rect">
@@ -1766,13 +1883,13 @@
       </p:sp>
       <p:sp>
         <p:nvSpPr>
-          <p:cNvPr id="24" name="Text 21"/>
-          <p:cNvSpPr/>
-          <p:nvPr/>
-        </p:nvSpPr>
-        <p:spPr>
-          <a:xfrm>
-            <a:off x="630936" y="4379976"/>
+          <p:cNvPr id="27" name="Text 24"/>
+          <p:cNvSpPr/>
+          <p:nvPr/>
+        </p:nvSpPr>
+        <p:spPr>
+          <a:xfrm>
+            <a:off x="630936" y="4791456"/>
             <a:ext cx="3287268" cy="173736"/>
           </a:xfrm>
           <a:prstGeom prst="rect">
@@ -1819,13 +1936,13 @@
       </p:sp>
       <p:sp>
         <p:nvSpPr>
-          <p:cNvPr id="25" name="Text 22"/>
-          <p:cNvSpPr/>
-          <p:nvPr/>
-        </p:nvSpPr>
-        <p:spPr>
-          <a:xfrm>
-            <a:off x="630936" y="4553712"/>
+          <p:cNvPr id="28" name="Text 25"/>
+          <p:cNvSpPr/>
+          <p:nvPr/>
+        </p:nvSpPr>
+        <p:spPr>
+          <a:xfrm>
+            <a:off x="630936" y="4965192"/>
             <a:ext cx="3287268" cy="173736"/>
           </a:xfrm>
           <a:prstGeom prst="rect">
@@ -1872,13 +1989,13 @@
       </p:sp>
       <p:sp>
         <p:nvSpPr>
-          <p:cNvPr id="26" name="Shape 23"/>
-          <p:cNvSpPr/>
-          <p:nvPr/>
-        </p:nvSpPr>
-        <p:spPr>
-          <a:xfrm>
-            <a:off x="4183380" y="2331720"/>
+          <p:cNvPr id="29" name="Shape 26"/>
+          <p:cNvSpPr/>
+          <p:nvPr/>
+        </p:nvSpPr>
+        <p:spPr>
+          <a:xfrm>
+            <a:off x="4183380" y="2743200"/>
             <a:ext cx="3543300" cy="2377440"/>
           </a:xfrm>
           <a:prstGeom prst="roundRect">
@@ -1899,13 +2016,13 @@
       </p:sp>
       <p:sp>
         <p:nvSpPr>
-          <p:cNvPr id="27" name="Shape 24"/>
-          <p:cNvSpPr/>
-          <p:nvPr/>
-        </p:nvSpPr>
-        <p:spPr>
-          <a:xfrm>
-            <a:off x="4183380" y="2404872"/>
+          <p:cNvPr id="30" name="Shape 27"/>
+          <p:cNvSpPr/>
+          <p:nvPr/>
+        </p:nvSpPr>
+        <p:spPr>
+          <a:xfrm>
+            <a:off x="4183380" y="2816352"/>
             <a:ext cx="3543300" cy="493776"/>
           </a:xfrm>
           <a:prstGeom prst="rect">
@@ -1924,13 +2041,13 @@
       </p:sp>
       <p:sp>
         <p:nvSpPr>
-          <p:cNvPr id="28" name="Shape 25"/>
-          <p:cNvSpPr/>
-          <p:nvPr/>
-        </p:nvSpPr>
-        <p:spPr>
-          <a:xfrm>
-            <a:off x="4183380" y="2331720"/>
+          <p:cNvPr id="31" name="Shape 28"/>
+          <p:cNvSpPr/>
+          <p:nvPr/>
+        </p:nvSpPr>
+        <p:spPr>
+          <a:xfrm>
+            <a:off x="4183380" y="2743200"/>
             <a:ext cx="3543300" cy="566928"/>
           </a:xfrm>
           <a:prstGeom prst="roundRect">
@@ -1951,13 +2068,13 @@
       </p:sp>
       <p:sp>
         <p:nvSpPr>
-          <p:cNvPr id="29" name="Text 26"/>
-          <p:cNvSpPr/>
-          <p:nvPr/>
-        </p:nvSpPr>
-        <p:spPr>
-          <a:xfrm>
-            <a:off x="4311396" y="2386584"/>
+          <p:cNvPr id="32" name="Text 29"/>
+          <p:cNvSpPr/>
+          <p:nvPr/>
+        </p:nvSpPr>
+        <p:spPr>
+          <a:xfrm>
+            <a:off x="4311396" y="2798064"/>
             <a:ext cx="3287268" cy="256032"/>
           </a:xfrm>
           <a:prstGeom prst="rect">
@@ -1990,13 +2107,13 @@
       </p:sp>
       <p:sp>
         <p:nvSpPr>
-          <p:cNvPr id="30" name="Text 27"/>
-          <p:cNvSpPr/>
-          <p:nvPr/>
-        </p:nvSpPr>
-        <p:spPr>
-          <a:xfrm>
-            <a:off x="4311396" y="2642616"/>
+          <p:cNvPr id="33" name="Text 30"/>
+          <p:cNvSpPr/>
+          <p:nvPr/>
+        </p:nvSpPr>
+        <p:spPr>
+          <a:xfrm>
+            <a:off x="4311396" y="3054096"/>
             <a:ext cx="3287268" cy="219456"/>
           </a:xfrm>
           <a:prstGeom prst="rect">
@@ -2029,13 +2146,13 @@
       </p:sp>
       <p:sp>
         <p:nvSpPr>
-          <p:cNvPr id="31" name="Text 28"/>
-          <p:cNvSpPr/>
-          <p:nvPr/>
-        </p:nvSpPr>
-        <p:spPr>
-          <a:xfrm>
-            <a:off x="4311396" y="2990088"/>
+          <p:cNvPr id="34" name="Text 31"/>
+          <p:cNvSpPr/>
+          <p:nvPr/>
+        </p:nvSpPr>
+        <p:spPr>
+          <a:xfrm>
+            <a:off x="4311396" y="3401568"/>
             <a:ext cx="3287268" cy="173736"/>
           </a:xfrm>
           <a:prstGeom prst="rect">
@@ -2082,13 +2199,13 @@
       </p:sp>
       <p:sp>
         <p:nvSpPr>
-          <p:cNvPr id="32" name="Text 29"/>
-          <p:cNvSpPr/>
-          <p:nvPr/>
-        </p:nvSpPr>
-        <p:spPr>
-          <a:xfrm>
-            <a:off x="4311396" y="3163824"/>
+          <p:cNvPr id="35" name="Text 32"/>
+          <p:cNvSpPr/>
+          <p:nvPr/>
+        </p:nvSpPr>
+        <p:spPr>
+          <a:xfrm>
+            <a:off x="4311396" y="3575304"/>
             <a:ext cx="3287268" cy="173736"/>
           </a:xfrm>
           <a:prstGeom prst="rect">
@@ -2135,13 +2252,13 @@
       </p:sp>
       <p:sp>
         <p:nvSpPr>
-          <p:cNvPr id="33" name="Text 30"/>
-          <p:cNvSpPr/>
-          <p:nvPr/>
-        </p:nvSpPr>
-        <p:spPr>
-          <a:xfrm>
-            <a:off x="4311396" y="3337560"/>
+          <p:cNvPr id="36" name="Text 33"/>
+          <p:cNvSpPr/>
+          <p:nvPr/>
+        </p:nvSpPr>
+        <p:spPr>
+          <a:xfrm>
+            <a:off x="4311396" y="3749040"/>
             <a:ext cx="3287268" cy="173736"/>
           </a:xfrm>
           <a:prstGeom prst="rect">
@@ -2188,13 +2305,13 @@
       </p:sp>
       <p:sp>
         <p:nvSpPr>
-          <p:cNvPr id="34" name="Text 31"/>
-          <p:cNvSpPr/>
-          <p:nvPr/>
-        </p:nvSpPr>
-        <p:spPr>
-          <a:xfrm>
-            <a:off x="4311396" y="3511296"/>
+          <p:cNvPr id="37" name="Text 34"/>
+          <p:cNvSpPr/>
+          <p:nvPr/>
+        </p:nvSpPr>
+        <p:spPr>
+          <a:xfrm>
+            <a:off x="4311396" y="3922776"/>
             <a:ext cx="3287268" cy="173736"/>
           </a:xfrm>
           <a:prstGeom prst="rect">
@@ -2241,13 +2358,13 @@
       </p:sp>
       <p:sp>
         <p:nvSpPr>
-          <p:cNvPr id="35" name="Text 32"/>
-          <p:cNvSpPr/>
-          <p:nvPr/>
-        </p:nvSpPr>
-        <p:spPr>
-          <a:xfrm>
-            <a:off x="4311396" y="3685032"/>
+          <p:cNvPr id="38" name="Text 35"/>
+          <p:cNvSpPr/>
+          <p:nvPr/>
+        </p:nvSpPr>
+        <p:spPr>
+          <a:xfrm>
+            <a:off x="4311396" y="4096512"/>
             <a:ext cx="3287268" cy="173736"/>
           </a:xfrm>
           <a:prstGeom prst="rect">
@@ -2294,13 +2411,13 @@
       </p:sp>
       <p:sp>
         <p:nvSpPr>
-          <p:cNvPr id="36" name="Text 33"/>
-          <p:cNvSpPr/>
-          <p:nvPr/>
-        </p:nvSpPr>
-        <p:spPr>
-          <a:xfrm>
-            <a:off x="4311396" y="3858768"/>
+          <p:cNvPr id="39" name="Text 36"/>
+          <p:cNvSpPr/>
+          <p:nvPr/>
+        </p:nvSpPr>
+        <p:spPr>
+          <a:xfrm>
+            <a:off x="4311396" y="4270248"/>
             <a:ext cx="3287268" cy="173736"/>
           </a:xfrm>
           <a:prstGeom prst="rect">
@@ -2347,13 +2464,13 @@
       </p:sp>
       <p:sp>
         <p:nvSpPr>
-          <p:cNvPr id="37" name="Text 34"/>
-          <p:cNvSpPr/>
-          <p:nvPr/>
-        </p:nvSpPr>
-        <p:spPr>
-          <a:xfrm>
-            <a:off x="4311396" y="4032504"/>
+          <p:cNvPr id="40" name="Text 37"/>
+          <p:cNvSpPr/>
+          <p:nvPr/>
+        </p:nvSpPr>
+        <p:spPr>
+          <a:xfrm>
+            <a:off x="4311396" y="4443984"/>
             <a:ext cx="3287268" cy="173736"/>
           </a:xfrm>
           <a:prstGeom prst="rect">
@@ -2400,13 +2517,13 @@
       </p:sp>
       <p:sp>
         <p:nvSpPr>
-          <p:cNvPr id="38" name="Text 35"/>
-          <p:cNvSpPr/>
-          <p:nvPr/>
-        </p:nvSpPr>
-        <p:spPr>
-          <a:xfrm>
-            <a:off x="4311396" y="4206240"/>
+          <p:cNvPr id="41" name="Text 38"/>
+          <p:cNvSpPr/>
+          <p:nvPr/>
+        </p:nvSpPr>
+        <p:spPr>
+          <a:xfrm>
+            <a:off x="4311396" y="4617720"/>
             <a:ext cx="3287268" cy="173736"/>
           </a:xfrm>
           <a:prstGeom prst="rect">
@@ -2453,13 +2570,13 @@
       </p:sp>
       <p:sp>
         <p:nvSpPr>
-          <p:cNvPr id="39" name="Shape 36"/>
-          <p:cNvSpPr/>
-          <p:nvPr/>
-        </p:nvSpPr>
-        <p:spPr>
-          <a:xfrm>
-            <a:off x="502920" y="4846320"/>
+          <p:cNvPr id="42" name="Shape 39"/>
+          <p:cNvSpPr/>
+          <p:nvPr/>
+        </p:nvSpPr>
+        <p:spPr>
+          <a:xfrm>
+            <a:off x="502920" y="5257800"/>
             <a:ext cx="3543300" cy="2377440"/>
           </a:xfrm>
           <a:prstGeom prst="roundRect">
@@ -2480,13 +2597,13 @@
       </p:sp>
       <p:sp>
         <p:nvSpPr>
-          <p:cNvPr id="40" name="Shape 37"/>
-          <p:cNvSpPr/>
-          <p:nvPr/>
-        </p:nvSpPr>
-        <p:spPr>
-          <a:xfrm>
-            <a:off x="502920" y="4919472"/>
+          <p:cNvPr id="43" name="Shape 40"/>
+          <p:cNvSpPr/>
+          <p:nvPr/>
+        </p:nvSpPr>
+        <p:spPr>
+          <a:xfrm>
+            <a:off x="502920" y="5330952"/>
             <a:ext cx="3543300" cy="493776"/>
           </a:xfrm>
           <a:prstGeom prst="rect">
@@ -2505,13 +2622,13 @@
       </p:sp>
       <p:sp>
         <p:nvSpPr>
-          <p:cNvPr id="41" name="Shape 38"/>
-          <p:cNvSpPr/>
-          <p:nvPr/>
-        </p:nvSpPr>
-        <p:spPr>
-          <a:xfrm>
-            <a:off x="502920" y="4846320"/>
+          <p:cNvPr id="44" name="Shape 41"/>
+          <p:cNvSpPr/>
+          <p:nvPr/>
+        </p:nvSpPr>
+        <p:spPr>
+          <a:xfrm>
+            <a:off x="502920" y="5257800"/>
             <a:ext cx="3543300" cy="566928"/>
           </a:xfrm>
           <a:prstGeom prst="roundRect">
@@ -2532,13 +2649,13 @@
       </p:sp>
       <p:sp>
         <p:nvSpPr>
-          <p:cNvPr id="42" name="Text 39"/>
-          <p:cNvSpPr/>
-          <p:nvPr/>
-        </p:nvSpPr>
-        <p:spPr>
-          <a:xfrm>
-            <a:off x="630936" y="4901184"/>
+          <p:cNvPr id="45" name="Text 42"/>
+          <p:cNvSpPr/>
+          <p:nvPr/>
+        </p:nvSpPr>
+        <p:spPr>
+          <a:xfrm>
+            <a:off x="630936" y="5312664"/>
             <a:ext cx="3287268" cy="256032"/>
           </a:xfrm>
           <a:prstGeom prst="rect">
@@ -2571,13 +2688,13 @@
       </p:sp>
       <p:sp>
         <p:nvSpPr>
-          <p:cNvPr id="43" name="Text 40"/>
-          <p:cNvSpPr/>
-          <p:nvPr/>
-        </p:nvSpPr>
-        <p:spPr>
-          <a:xfrm>
-            <a:off x="630936" y="5157216"/>
+          <p:cNvPr id="46" name="Text 43"/>
+          <p:cNvSpPr/>
+          <p:nvPr/>
+        </p:nvSpPr>
+        <p:spPr>
+          <a:xfrm>
+            <a:off x="630936" y="5568696"/>
             <a:ext cx="3287268" cy="219456"/>
           </a:xfrm>
           <a:prstGeom prst="rect">
@@ -2610,13 +2727,13 @@
       </p:sp>
       <p:sp>
         <p:nvSpPr>
-          <p:cNvPr id="44" name="Text 41"/>
-          <p:cNvSpPr/>
-          <p:nvPr/>
-        </p:nvSpPr>
-        <p:spPr>
-          <a:xfrm>
-            <a:off x="630936" y="5596128"/>
+          <p:cNvPr id="47" name="Text 44"/>
+          <p:cNvSpPr/>
+          <p:nvPr/>
+        </p:nvSpPr>
+        <p:spPr>
+          <a:xfrm>
+            <a:off x="630936" y="6007608"/>
             <a:ext cx="3287268" cy="384048"/>
           </a:xfrm>
           <a:prstGeom prst="rect">
@@ -2663,13 +2780,13 @@
       </p:sp>
       <p:sp>
         <p:nvSpPr>
-          <p:cNvPr id="45" name="Text 42"/>
-          <p:cNvSpPr/>
-          <p:nvPr/>
-        </p:nvSpPr>
-        <p:spPr>
-          <a:xfrm>
-            <a:off x="630936" y="5980176"/>
+          <p:cNvPr id="48" name="Text 45"/>
+          <p:cNvSpPr/>
+          <p:nvPr/>
+        </p:nvSpPr>
+        <p:spPr>
+          <a:xfrm>
+            <a:off x="630936" y="6391656"/>
             <a:ext cx="3287268" cy="384048"/>
           </a:xfrm>
           <a:prstGeom prst="rect">
@@ -2716,13 +2833,13 @@
       </p:sp>
       <p:sp>
         <p:nvSpPr>
-          <p:cNvPr id="46" name="Text 43"/>
-          <p:cNvSpPr/>
-          <p:nvPr/>
-        </p:nvSpPr>
-        <p:spPr>
-          <a:xfrm>
-            <a:off x="630936" y="6364224"/>
+          <p:cNvPr id="49" name="Text 46"/>
+          <p:cNvSpPr/>
+          <p:nvPr/>
+        </p:nvSpPr>
+        <p:spPr>
+          <a:xfrm>
+            <a:off x="630936" y="6775704"/>
             <a:ext cx="3287268" cy="384048"/>
           </a:xfrm>
           <a:prstGeom prst="rect">
@@ -2769,13 +2886,13 @@
       </p:sp>
       <p:sp>
         <p:nvSpPr>
-          <p:cNvPr id="47" name="Text 44"/>
-          <p:cNvSpPr/>
-          <p:nvPr/>
-        </p:nvSpPr>
-        <p:spPr>
-          <a:xfrm>
-            <a:off x="630936" y="6748272"/>
+          <p:cNvPr id="50" name="Text 47"/>
+          <p:cNvSpPr/>
+          <p:nvPr/>
+        </p:nvSpPr>
+        <p:spPr>
+          <a:xfrm>
+            <a:off x="630936" y="7159752"/>
             <a:ext cx="3287268" cy="384048"/>
           </a:xfrm>
           <a:prstGeom prst="rect">
@@ -2822,13 +2939,13 @@
       </p:sp>
       <p:sp>
         <p:nvSpPr>
-          <p:cNvPr id="48" name="Shape 45"/>
-          <p:cNvSpPr/>
-          <p:nvPr/>
-        </p:nvSpPr>
-        <p:spPr>
-          <a:xfrm>
-            <a:off x="4183380" y="4846320"/>
+          <p:cNvPr id="51" name="Shape 48"/>
+          <p:cNvSpPr/>
+          <p:nvPr/>
+        </p:nvSpPr>
+        <p:spPr>
+          <a:xfrm>
+            <a:off x="4183380" y="5257800"/>
             <a:ext cx="3543300" cy="2377440"/>
           </a:xfrm>
           <a:prstGeom prst="roundRect">
@@ -2849,13 +2966,13 @@
       </p:sp>
       <p:sp>
         <p:nvSpPr>
-          <p:cNvPr id="49" name="Shape 46"/>
-          <p:cNvSpPr/>
-          <p:nvPr/>
-        </p:nvSpPr>
-        <p:spPr>
-          <a:xfrm>
-            <a:off x="4183380" y="4919472"/>
+          <p:cNvPr id="52" name="Shape 49"/>
+          <p:cNvSpPr/>
+          <p:nvPr/>
+        </p:nvSpPr>
+        <p:spPr>
+          <a:xfrm>
+            <a:off x="4183380" y="5330952"/>
             <a:ext cx="3543300" cy="493776"/>
           </a:xfrm>
           <a:prstGeom prst="rect">
@@ -2874,13 +2991,13 @@
       </p:sp>
       <p:sp>
         <p:nvSpPr>
-          <p:cNvPr id="50" name="Shape 47"/>
-          <p:cNvSpPr/>
-          <p:nvPr/>
-        </p:nvSpPr>
-        <p:spPr>
-          <a:xfrm>
-            <a:off x="4183380" y="4846320"/>
+          <p:cNvPr id="53" name="Shape 50"/>
+          <p:cNvSpPr/>
+          <p:nvPr/>
+        </p:nvSpPr>
+        <p:spPr>
+          <a:xfrm>
+            <a:off x="4183380" y="5257800"/>
             <a:ext cx="3543300" cy="566928"/>
           </a:xfrm>
           <a:prstGeom prst="roundRect">
@@ -2901,13 +3018,13 @@
       </p:sp>
       <p:sp>
         <p:nvSpPr>
-          <p:cNvPr id="51" name="Text 48"/>
-          <p:cNvSpPr/>
-          <p:nvPr/>
-        </p:nvSpPr>
-        <p:spPr>
-          <a:xfrm>
-            <a:off x="4311396" y="4901184"/>
+          <p:cNvPr id="54" name="Text 51"/>
+          <p:cNvSpPr/>
+          <p:nvPr/>
+        </p:nvSpPr>
+        <p:spPr>
+          <a:xfrm>
+            <a:off x="4311396" y="5312664"/>
             <a:ext cx="3287268" cy="256032"/>
           </a:xfrm>
           <a:prstGeom prst="rect">
@@ -2940,13 +3057,13 @@
       </p:sp>
       <p:sp>
         <p:nvSpPr>
-          <p:cNvPr id="52" name="Text 49"/>
-          <p:cNvSpPr/>
-          <p:nvPr/>
-        </p:nvSpPr>
-        <p:spPr>
-          <a:xfrm>
-            <a:off x="4311396" y="5157216"/>
+          <p:cNvPr id="55" name="Text 52"/>
+          <p:cNvSpPr/>
+          <p:nvPr/>
+        </p:nvSpPr>
+        <p:spPr>
+          <a:xfrm>
+            <a:off x="4311396" y="5568696"/>
             <a:ext cx="3287268" cy="219456"/>
           </a:xfrm>
           <a:prstGeom prst="rect">
@@ -2979,13 +3096,13 @@
       </p:sp>
       <p:sp>
         <p:nvSpPr>
-          <p:cNvPr id="53" name="Text 50"/>
-          <p:cNvSpPr/>
-          <p:nvPr/>
-        </p:nvSpPr>
-        <p:spPr>
-          <a:xfrm>
-            <a:off x="4311396" y="5504688"/>
+          <p:cNvPr id="56" name="Text 53"/>
+          <p:cNvSpPr/>
+          <p:nvPr/>
+        </p:nvSpPr>
+        <p:spPr>
+          <a:xfrm>
+            <a:off x="4311396" y="5916168"/>
             <a:ext cx="3287268" cy="173736"/>
           </a:xfrm>
           <a:prstGeom prst="rect">
@@ -3032,13 +3149,13 @@
       </p:sp>
       <p:sp>
         <p:nvSpPr>
-          <p:cNvPr id="54" name="Text 51"/>
-          <p:cNvSpPr/>
-          <p:nvPr/>
-        </p:nvSpPr>
-        <p:spPr>
-          <a:xfrm>
-            <a:off x="4311396" y="5678424"/>
+          <p:cNvPr id="57" name="Text 54"/>
+          <p:cNvSpPr/>
+          <p:nvPr/>
+        </p:nvSpPr>
+        <p:spPr>
+          <a:xfrm>
+            <a:off x="4311396" y="6089904"/>
             <a:ext cx="3287268" cy="173736"/>
           </a:xfrm>
           <a:prstGeom prst="rect">
@@ -3085,13 +3202,13 @@
       </p:sp>
       <p:sp>
         <p:nvSpPr>
-          <p:cNvPr id="55" name="Text 52"/>
-          <p:cNvSpPr/>
-          <p:nvPr/>
-        </p:nvSpPr>
-        <p:spPr>
-          <a:xfrm>
-            <a:off x="4311396" y="5852160"/>
+          <p:cNvPr id="58" name="Text 55"/>
+          <p:cNvSpPr/>
+          <p:nvPr/>
+        </p:nvSpPr>
+        <p:spPr>
+          <a:xfrm>
+            <a:off x="4311396" y="6263640"/>
             <a:ext cx="3287268" cy="173736"/>
           </a:xfrm>
           <a:prstGeom prst="rect">
@@ -3138,13 +3255,13 @@
       </p:sp>
       <p:sp>
         <p:nvSpPr>
-          <p:cNvPr id="56" name="Text 53"/>
-          <p:cNvSpPr/>
-          <p:nvPr/>
-        </p:nvSpPr>
-        <p:spPr>
-          <a:xfrm>
-            <a:off x="4311396" y="6025896"/>
+          <p:cNvPr id="59" name="Text 56"/>
+          <p:cNvSpPr/>
+          <p:nvPr/>
+        </p:nvSpPr>
+        <p:spPr>
+          <a:xfrm>
+            <a:off x="4311396" y="6437376"/>
             <a:ext cx="3287268" cy="173736"/>
           </a:xfrm>
           <a:prstGeom prst="rect">
@@ -3191,13 +3308,13 @@
       </p:sp>
       <p:sp>
         <p:nvSpPr>
-          <p:cNvPr id="57" name="Text 54"/>
-          <p:cNvSpPr/>
-          <p:nvPr/>
-        </p:nvSpPr>
-        <p:spPr>
-          <a:xfrm>
-            <a:off x="4311396" y="6199632"/>
+          <p:cNvPr id="60" name="Text 57"/>
+          <p:cNvSpPr/>
+          <p:nvPr/>
+        </p:nvSpPr>
+        <p:spPr>
+          <a:xfrm>
+            <a:off x="4311396" y="6611112"/>
             <a:ext cx="3287268" cy="173736"/>
           </a:xfrm>
           <a:prstGeom prst="rect">
@@ -3244,13 +3361,13 @@
       </p:sp>
       <p:sp>
         <p:nvSpPr>
-          <p:cNvPr id="58" name="Text 55"/>
-          <p:cNvSpPr/>
-          <p:nvPr/>
-        </p:nvSpPr>
-        <p:spPr>
-          <a:xfrm>
-            <a:off x="4311396" y="6373368"/>
+          <p:cNvPr id="61" name="Text 58"/>
+          <p:cNvSpPr/>
+          <p:nvPr/>
+        </p:nvSpPr>
+        <p:spPr>
+          <a:xfrm>
+            <a:off x="4311396" y="6784848"/>
             <a:ext cx="3287268" cy="173736"/>
           </a:xfrm>
           <a:prstGeom prst="rect">
@@ -3297,13 +3414,13 @@
       </p:sp>
       <p:sp>
         <p:nvSpPr>
-          <p:cNvPr id="59" name="Text 56"/>
-          <p:cNvSpPr/>
-          <p:nvPr/>
-        </p:nvSpPr>
-        <p:spPr>
-          <a:xfrm>
-            <a:off x="4311396" y="6547104"/>
+          <p:cNvPr id="62" name="Text 59"/>
+          <p:cNvSpPr/>
+          <p:nvPr/>
+        </p:nvSpPr>
+        <p:spPr>
+          <a:xfrm>
+            <a:off x="4311396" y="6958584"/>
             <a:ext cx="3287268" cy="173736"/>
           </a:xfrm>
           <a:prstGeom prst="rect">
@@ -3350,13 +3467,13 @@
       </p:sp>
       <p:sp>
         <p:nvSpPr>
-          <p:cNvPr id="60" name="Text 57"/>
-          <p:cNvSpPr/>
-          <p:nvPr/>
-        </p:nvSpPr>
-        <p:spPr>
-          <a:xfrm>
-            <a:off x="4311396" y="6720840"/>
+          <p:cNvPr id="63" name="Text 60"/>
+          <p:cNvSpPr/>
+          <p:nvPr/>
+        </p:nvSpPr>
+        <p:spPr>
+          <a:xfrm>
+            <a:off x="4311396" y="7132320"/>
             <a:ext cx="3287268" cy="173736"/>
           </a:xfrm>
           <a:prstGeom prst="rect">
@@ -3403,13 +3520,13 @@
       </p:sp>
       <p:sp>
         <p:nvSpPr>
-          <p:cNvPr id="61" name="Shape 58"/>
-          <p:cNvSpPr/>
-          <p:nvPr/>
-        </p:nvSpPr>
-        <p:spPr>
-          <a:xfrm>
-            <a:off x="502920" y="7388352"/>
+          <p:cNvPr id="64" name="Shape 61"/>
+          <p:cNvSpPr/>
+          <p:nvPr/>
+        </p:nvSpPr>
+        <p:spPr>
+          <a:xfrm>
+            <a:off x="502920" y="7799832"/>
             <a:ext cx="7223760" cy="658368"/>
           </a:xfrm>
           <a:prstGeom prst="roundRect">
@@ -3430,13 +3547,13 @@
       </p:sp>
       <p:sp>
         <p:nvSpPr>
-          <p:cNvPr id="62" name="Text 59"/>
-          <p:cNvSpPr/>
-          <p:nvPr/>
-        </p:nvSpPr>
-        <p:spPr>
-          <a:xfrm>
-            <a:off x="777240" y="7388352"/>
+          <p:cNvPr id="65" name="Text 62"/>
+          <p:cNvSpPr/>
+          <p:nvPr/>
+        </p:nvSpPr>
+        <p:spPr>
+          <a:xfrm>
+            <a:off x="777240" y="7799832"/>
             <a:ext cx="6675120" cy="658368"/>
           </a:xfrm>
           <a:prstGeom prst="rect">
@@ -3483,13 +3600,13 @@
       </p:sp>
       <p:sp>
         <p:nvSpPr>
-          <p:cNvPr id="63" name="Shape 60"/>
-          <p:cNvSpPr/>
-          <p:nvPr/>
-        </p:nvSpPr>
-        <p:spPr>
-          <a:xfrm>
-            <a:off x="502920" y="8229600"/>
+          <p:cNvPr id="66" name="Shape 63"/>
+          <p:cNvSpPr/>
+          <p:nvPr/>
+        </p:nvSpPr>
+        <p:spPr>
+          <a:xfrm>
+            <a:off x="502920" y="8641080"/>
             <a:ext cx="1280160" cy="1280160"/>
           </a:xfrm>
           <a:prstGeom prst="roundRect">
@@ -3510,7 +3627,7 @@
       </p:sp>
       <p:pic>
         <p:nvPicPr>
-          <p:cNvPr id="64" name="Image 1" descr="signup_qr.png">    </p:cNvPr>
+          <p:cNvPr id="67" name="Image 1" descr="signup_qr.png">    </p:cNvPr>
           <p:cNvPicPr>
             <a:picLocks noChangeAspect="1"/>
           </p:cNvPicPr>
@@ -3524,7 +3641,7 @@
         </p:blipFill>
         <p:spPr>
           <a:xfrm>
-            <a:off x="576072" y="8302752"/>
+            <a:off x="576072" y="8714232"/>
             <a:ext cx="1133856" cy="1133856"/>
           </a:xfrm>
           <a:prstGeom prst="rect">
@@ -3534,13 +3651,13 @@
       </p:pic>
       <p:sp>
         <p:nvSpPr>
-          <p:cNvPr id="65" name="Text 61"/>
-          <p:cNvSpPr/>
-          <p:nvPr/>
-        </p:nvSpPr>
-        <p:spPr>
-          <a:xfrm>
-            <a:off x="502920" y="9528048"/>
+          <p:cNvPr id="68" name="Text 64"/>
+          <p:cNvSpPr/>
+          <p:nvPr/>
+        </p:nvSpPr>
+        <p:spPr>
+          <a:xfrm>
+            <a:off x="502920" y="9939528"/>
             <a:ext cx="1280160" cy="201168"/>
           </a:xfrm>
           <a:prstGeom prst="rect">
@@ -3573,13 +3690,13 @@
       </p:sp>
       <p:sp>
         <p:nvSpPr>
-          <p:cNvPr id="66" name="Text 62"/>
-          <p:cNvSpPr/>
-          <p:nvPr/>
-        </p:nvSpPr>
-        <p:spPr>
-          <a:xfrm>
-            <a:off x="2057400" y="8247888"/>
+          <p:cNvPr id="69" name="Text 65"/>
+          <p:cNvSpPr/>
+          <p:nvPr/>
+        </p:nvSpPr>
+        <p:spPr>
+          <a:xfrm>
+            <a:off x="2057400" y="8659368"/>
             <a:ext cx="5669280" cy="457200"/>
           </a:xfrm>
           <a:prstGeom prst="rect">
@@ -3612,13 +3729,13 @@
       </p:sp>
       <p:sp>
         <p:nvSpPr>
-          <p:cNvPr id="67" name="Text 63"/>
-          <p:cNvSpPr/>
-          <p:nvPr/>
-        </p:nvSpPr>
-        <p:spPr>
-          <a:xfrm>
-            <a:off x="2057400" y="8723376"/>
+          <p:cNvPr id="70" name="Text 66"/>
+          <p:cNvSpPr/>
+          <p:nvPr/>
+        </p:nvSpPr>
+        <p:spPr>
+          <a:xfrm>
+            <a:off x="2057400" y="9134856"/>
             <a:ext cx="5669280" cy="237744"/>
           </a:xfrm>
           <a:prstGeom prst="rect">
@@ -3651,13 +3768,13 @@
       </p:sp>
       <p:sp>
         <p:nvSpPr>
-          <p:cNvPr id="68" name="Text 64"/>
-          <p:cNvSpPr/>
-          <p:nvPr/>
-        </p:nvSpPr>
-        <p:spPr>
-          <a:xfrm>
-            <a:off x="2057400" y="8997696"/>
+          <p:cNvPr id="71" name="Text 67"/>
+          <p:cNvSpPr/>
+          <p:nvPr/>
+        </p:nvSpPr>
+        <p:spPr>
+          <a:xfrm>
+            <a:off x="2057400" y="9409176"/>
             <a:ext cx="5669280" cy="219456"/>
           </a:xfrm>
           <a:prstGeom prst="rect">
@@ -3690,7 +3807,7 @@
       </p:sp>
       <p:pic>
         <p:nvPicPr>
-          <p:cNvPr id="69" name="Image 2" descr="email-blue.png">    </p:cNvPr>
+          <p:cNvPr id="72" name="Image 2" descr="email-blue.png">    </p:cNvPr>
           <p:cNvPicPr>
             <a:picLocks noChangeAspect="1"/>
           </p:cNvPicPr>
@@ -3704,7 +3821,7 @@
         </p:blipFill>
         <p:spPr>
           <a:xfrm>
-            <a:off x="2057400" y="9308592"/>
+            <a:off x="2057400" y="9720072"/>
             <a:ext cx="182880" cy="182880"/>
           </a:xfrm>
           <a:prstGeom prst="rect">
@@ -3714,13 +3831,13 @@
       </p:pic>
       <p:sp>
         <p:nvSpPr>
-          <p:cNvPr id="70" name="Text 65"/>
-          <p:cNvSpPr/>
-          <p:nvPr/>
-        </p:nvSpPr>
-        <p:spPr>
-          <a:xfrm>
-            <a:off x="2295144" y="9281160"/>
+          <p:cNvPr id="73" name="Text 68"/>
+          <p:cNvSpPr/>
+          <p:nvPr/>
+        </p:nvSpPr>
+        <p:spPr>
+          <a:xfrm>
+            <a:off x="2295144" y="9692640"/>
             <a:ext cx="1615440" cy="256032"/>
           </a:xfrm>
           <a:prstGeom prst="rect">
@@ -3753,7 +3870,7 @@
       </p:sp>
       <p:pic>
         <p:nvPicPr>
-          <p:cNvPr id="71" name="Image 3" descr="whatsapp.png">    </p:cNvPr>
+          <p:cNvPr id="74" name="Image 3" descr="whatsapp.png">    </p:cNvPr>
           <p:cNvPicPr>
             <a:picLocks noChangeAspect="1"/>
           </p:cNvPicPr>
@@ -3767,7 +3884,7 @@
         </p:blipFill>
         <p:spPr>
           <a:xfrm>
-            <a:off x="3947160" y="9308592"/>
+            <a:off x="3947160" y="9720072"/>
             <a:ext cx="182880" cy="182880"/>
           </a:xfrm>
           <a:prstGeom prst="rect">
@@ -3777,13 +3894,13 @@
       </p:pic>
       <p:sp>
         <p:nvSpPr>
-          <p:cNvPr id="72" name="Text 66"/>
-          <p:cNvSpPr/>
-          <p:nvPr/>
-        </p:nvSpPr>
-        <p:spPr>
-          <a:xfrm>
-            <a:off x="4184904" y="9281160"/>
+          <p:cNvPr id="75" name="Text 69"/>
+          <p:cNvSpPr/>
+          <p:nvPr/>
+        </p:nvSpPr>
+        <p:spPr>
+          <a:xfrm>
+            <a:off x="4184904" y="9692640"/>
             <a:ext cx="1615440" cy="256032"/>
           </a:xfrm>
           <a:prstGeom prst="rect">
@@ -3816,7 +3933,7 @@
       </p:sp>
       <p:pic>
         <p:nvPicPr>
-          <p:cNvPr id="73" name="Image 4" descr="phone-blue.png">    </p:cNvPr>
+          <p:cNvPr id="76" name="Image 4" descr="phone-blue.png">    </p:cNvPr>
           <p:cNvPicPr>
             <a:picLocks noChangeAspect="1"/>
           </p:cNvPicPr>
@@ -3830,7 +3947,7 @@
         </p:blipFill>
         <p:spPr>
           <a:xfrm>
-            <a:off x="5836920" y="9308592"/>
+            <a:off x="5836920" y="9720072"/>
             <a:ext cx="182880" cy="182880"/>
           </a:xfrm>
           <a:prstGeom prst="rect">
@@ -3840,13 +3957,13 @@
       </p:pic>
       <p:sp>
         <p:nvSpPr>
-          <p:cNvPr id="74" name="Text 67"/>
-          <p:cNvSpPr/>
-          <p:nvPr/>
-        </p:nvSpPr>
-        <p:spPr>
-          <a:xfrm>
-            <a:off x="6074664" y="9281160"/>
+          <p:cNvPr id="77" name="Text 70"/>
+          <p:cNvSpPr/>
+          <p:nvPr/>
+        </p:nvSpPr>
+        <p:spPr>
+          <a:xfrm>
+            <a:off x="6074664" y="9692640"/>
             <a:ext cx="1615440" cy="256032"/>
           </a:xfrm>
           <a:prstGeom prst="rect">
@@ -3872,82 +3989,6 @@
                 <a:cs typeface="Calibri" pitchFamily="34" charset="-120"/>
               </a:rPr>
               <a:t>+1 984 710 2902</a:t>
-            </a:r>
-            <a:endParaRPr lang="en-US" sz="950" dirty="0"/>
-          </a:p>
-        </p:txBody>
-      </p:sp>
-      <p:sp>
-        <p:nvSpPr>
-          <p:cNvPr id="75" name="Shape 68"/>
-          <p:cNvSpPr/>
-          <p:nvPr/>
-        </p:nvSpPr>
-        <p:spPr>
-          <a:xfrm>
-            <a:off x="502920" y="9857232"/>
-            <a:ext cx="7223760" cy="0"/>
-          </a:xfrm>
-          <a:prstGeom prst="line">
-            <a:avLst/>
-          </a:prstGeom>
-          <a:noFill/>
-          <a:ln w="9525">
-            <a:solidFill>
-              <a:srgbClr val="D6E8F5"/>
-            </a:solidFill>
-            <a:prstDash val="solid"/>
-          </a:ln>
-        </p:spPr>
-      </p:sp>
-      <p:sp>
-        <p:nvSpPr>
-          <p:cNvPr id="76" name="Text 69"/>
-          <p:cNvSpPr/>
-          <p:nvPr/>
-        </p:nvSpPr>
-        <p:spPr>
-          <a:xfrm>
-            <a:off x="502920" y="9902952"/>
-            <a:ext cx="7223760" cy="292608"/>
-          </a:xfrm>
-          <a:prstGeom prst="rect">
-            <a:avLst/>
-          </a:prstGeom>
-          <a:noFill/>
-          <a:ln/>
-        </p:spPr>
-        <p:txBody>
-          <a:bodyPr wrap="square" lIns="0" tIns="0" rIns="0" bIns="0" rtlCol="0" anchor="ctr"/>
-          <a:lstStyle/>
-          <a:p>
-            <a:pPr indent="0" marL="0">
-              <a:buNone/>
-            </a:pPr>
-            <a:r>
-              <a:rPr lang="en-US" sz="950" b="1" spc="200" kern="0" dirty="0">
-                <a:solidFill>
-                  <a:srgbClr val="0C2A3D"/>
-                </a:solidFill>
-                <a:latin typeface="Calibri" pitchFamily="34" charset="0"/>
-                <a:ea typeface="Calibri" pitchFamily="34" charset="-122"/>
-                <a:cs typeface="Calibri" pitchFamily="34" charset="-120"/>
-              </a:rPr>
-              <a:t>ALLAN BAKESIGA, MD</a:t>
-            </a:r>
-            <a:pPr indent="0" marL="0">
-              <a:buNone/>
-            </a:pPr>
-            <a:r>
-              <a:rPr lang="en-US" sz="950" dirty="0">
-                <a:solidFill>
-                  <a:srgbClr val="6B87A3"/>
-                </a:solidFill>
-                <a:latin typeface="Calibri" pitchFamily="34" charset="0"/>
-                <a:ea typeface="Calibri" pitchFamily="34" charset="-122"/>
-                <a:cs typeface="Calibri" pitchFamily="34" charset="-120"/>
-              </a:rPr>
-              <a:t>   MD (Makerere) · MScGH (Duke) · PGY-1 Neurology, Creighton</a:t>
             </a:r>
             <a:endParaRPr lang="en-US" sz="950" dirty="0"/>
           </a:p>

--- a/outputs/flyers/USMLE_June_Advert.pptx
+++ b/outputs/flyers/USMLE_June_Advert.pptx
@@ -1046,7 +1046,7 @@
             <a:r>
               <a:rPr lang="en-US" sz="1800" dirty="0">
                 <a:solidFill>
-                  <a:srgbClr val="6B87A3"/>
+                  <a:srgbClr val="3D5E80"/>
                 </a:solidFill>
                 <a:latin typeface="Calibri" pitchFamily="34" charset="0"/>
                 <a:ea typeface="Calibri" pitchFamily="34" charset="-122"/>
@@ -1185,9 +1185,9 @@
               <a:buNone/>
             </a:pPr>
             <a:r>
-              <a:rPr lang="en-US" sz="850" dirty="0">
-                <a:solidFill>
-                  <a:srgbClr val="6B87A3"/>
+              <a:rPr lang="en-US" sz="950" b="1" dirty="0">
+                <a:solidFill>
+                  <a:srgbClr val="345671"/>
                 </a:solidFill>
                 <a:latin typeface="Calibri" pitchFamily="34" charset="0"/>
                 <a:ea typeface="Calibri" pitchFamily="34" charset="-122"/>
@@ -1195,7 +1195,7 @@
               </a:rPr>
               <a:t>MD (Makerere)  ·  MScGH (Duke)</a:t>
             </a:r>
-            <a:endParaRPr lang="en-US" sz="850" dirty="0"/>
+            <a:endParaRPr lang="en-US" sz="950" dirty="0"/>
           </a:p>
         </p:txBody>
       </p:sp>
@@ -1224,9 +1224,9 @@
               <a:buNone/>
             </a:pPr>
             <a:r>
-              <a:rPr lang="en-US" sz="850" dirty="0">
-                <a:solidFill>
-                  <a:srgbClr val="6B87A3"/>
+              <a:rPr lang="en-US" sz="950" b="1" dirty="0">
+                <a:solidFill>
+                  <a:srgbClr val="345671"/>
                 </a:solidFill>
                 <a:latin typeface="Calibri" pitchFamily="34" charset="0"/>
                 <a:ea typeface="Calibri" pitchFamily="34" charset="-122"/>
@@ -1234,7 +1234,7 @@
               </a:rPr>
               <a:t>PGY-1 Neurology, Creighton</a:t>
             </a:r>
-            <a:endParaRPr lang="en-US" sz="850" dirty="0"/>
+            <a:endParaRPr lang="en-US" sz="950" dirty="0"/>
           </a:p>
         </p:txBody>
       </p:sp>
@@ -1265,7 +1265,7 @@
             <a:r>
               <a:rPr lang="en-US" sz="1100" b="1" spc="400" kern="0" dirty="0">
                 <a:solidFill>
-                  <a:srgbClr val="6B87A3"/>
+                  <a:srgbClr val="345671"/>
                 </a:solidFill>
                 <a:latin typeface="Calibri" pitchFamily="34" charset="0"/>
                 <a:ea typeface="Calibri" pitchFamily="34" charset="-122"/>
@@ -1465,7 +1465,7 @@
         </p:nvSpPr>
         <p:spPr>
           <a:xfrm>
-            <a:off x="630936" y="3401568"/>
+            <a:off x="630936" y="3383280"/>
             <a:ext cx="3287268" cy="173736"/>
           </a:xfrm>
           <a:prstGeom prst="rect">
@@ -1482,7 +1482,7 @@
               <a:buNone/>
             </a:pPr>
             <a:r>
-              <a:rPr lang="en-US" sz="950" b="1" dirty="0">
+              <a:rPr lang="en-US" sz="1000" b="1" dirty="0">
                 <a:solidFill>
                   <a:srgbClr val="0284C7"/>
                 </a:solidFill>
@@ -1496,7 +1496,7 @@
               <a:buNone/>
             </a:pPr>
             <a:r>
-              <a:rPr lang="en-US" sz="950" dirty="0">
+              <a:rPr lang="en-US" sz="1000" dirty="0">
                 <a:solidFill>
                   <a:srgbClr val="345671"/>
                 </a:solidFill>
@@ -1506,7 +1506,7 @@
               </a:rPr>
               <a:t>Orientation, embryology &amp; congenital heart defects</a:t>
             </a:r>
-            <a:endParaRPr lang="en-US" sz="950" dirty="0"/>
+            <a:endParaRPr lang="en-US" sz="1000" dirty="0"/>
           </a:p>
         </p:txBody>
       </p:sp>
@@ -1518,7 +1518,7 @@
         </p:nvSpPr>
         <p:spPr>
           <a:xfrm>
-            <a:off x="630936" y="3575304"/>
+            <a:off x="630936" y="3557016"/>
             <a:ext cx="3287268" cy="173736"/>
           </a:xfrm>
           <a:prstGeom prst="rect">
@@ -1535,7 +1535,7 @@
               <a:buNone/>
             </a:pPr>
             <a:r>
-              <a:rPr lang="en-US" sz="950" b="1" dirty="0">
+              <a:rPr lang="en-US" sz="1000" b="1" dirty="0">
                 <a:solidFill>
                   <a:srgbClr val="0284C7"/>
                 </a:solidFill>
@@ -1549,7 +1549,7 @@
               <a:buNone/>
             </a:pPr>
             <a:r>
-              <a:rPr lang="en-US" sz="950" dirty="0">
+              <a:rPr lang="en-US" sz="1000" dirty="0">
                 <a:solidFill>
                   <a:srgbClr val="345671"/>
                 </a:solidFill>
@@ -1559,7 +1559,7 @@
               </a:rPr>
               <a:t>Anatomy &amp; cardiac imaging</a:t>
             </a:r>
-            <a:endParaRPr lang="en-US" sz="950" dirty="0"/>
+            <a:endParaRPr lang="en-US" sz="1000" dirty="0"/>
           </a:p>
         </p:txBody>
       </p:sp>
@@ -1571,7 +1571,7 @@
         </p:nvSpPr>
         <p:spPr>
           <a:xfrm>
-            <a:off x="630936" y="3749040"/>
+            <a:off x="630936" y="3730752"/>
             <a:ext cx="3287268" cy="173736"/>
           </a:xfrm>
           <a:prstGeom prst="rect">
@@ -1588,7 +1588,7 @@
               <a:buNone/>
             </a:pPr>
             <a:r>
-              <a:rPr lang="en-US" sz="950" b="1" dirty="0">
+              <a:rPr lang="en-US" sz="1000" b="1" dirty="0">
                 <a:solidFill>
                   <a:srgbClr val="0284C7"/>
                 </a:solidFill>
@@ -1602,7 +1602,7 @@
               <a:buNone/>
             </a:pPr>
             <a:r>
-              <a:rPr lang="en-US" sz="950" dirty="0">
+              <a:rPr lang="en-US" sz="1000" dirty="0">
                 <a:solidFill>
                   <a:srgbClr val="345671"/>
                 </a:solidFill>
@@ -1612,7 +1612,7 @@
               </a:rPr>
               <a:t>Cardiac output &amp; PV loops</a:t>
             </a:r>
-            <a:endParaRPr lang="en-US" sz="950" dirty="0"/>
+            <a:endParaRPr lang="en-US" sz="1000" dirty="0"/>
           </a:p>
         </p:txBody>
       </p:sp>
@@ -1624,7 +1624,7 @@
         </p:nvSpPr>
         <p:spPr>
           <a:xfrm>
-            <a:off x="630936" y="3922776"/>
+            <a:off x="630936" y="3904488"/>
             <a:ext cx="3287268" cy="173736"/>
           </a:xfrm>
           <a:prstGeom prst="rect">
@@ -1641,7 +1641,7 @@
               <a:buNone/>
             </a:pPr>
             <a:r>
-              <a:rPr lang="en-US" sz="950" b="1" dirty="0">
+              <a:rPr lang="en-US" sz="1000" b="1" dirty="0">
                 <a:solidFill>
                   <a:srgbClr val="0284C7"/>
                 </a:solidFill>
@@ -1655,7 +1655,7 @@
               <a:buNone/>
             </a:pPr>
             <a:r>
-              <a:rPr lang="en-US" sz="950" dirty="0">
+              <a:rPr lang="en-US" sz="1000" dirty="0">
                 <a:solidFill>
                   <a:srgbClr val="345671"/>
                 </a:solidFill>
@@ -1665,7 +1665,7 @@
               </a:rPr>
               <a:t>Heart sounds &amp; murmurs</a:t>
             </a:r>
-            <a:endParaRPr lang="en-US" sz="950" dirty="0"/>
+            <a:endParaRPr lang="en-US" sz="1000" dirty="0"/>
           </a:p>
         </p:txBody>
       </p:sp>
@@ -1677,7 +1677,7 @@
         </p:nvSpPr>
         <p:spPr>
           <a:xfrm>
-            <a:off x="630936" y="4096512"/>
+            <a:off x="630936" y="4078224"/>
             <a:ext cx="3287268" cy="173736"/>
           </a:xfrm>
           <a:prstGeom prst="rect">
@@ -1694,7 +1694,7 @@
               <a:buNone/>
             </a:pPr>
             <a:r>
-              <a:rPr lang="en-US" sz="950" b="1" dirty="0">
+              <a:rPr lang="en-US" sz="1000" b="1" dirty="0">
                 <a:solidFill>
                   <a:srgbClr val="0284C7"/>
                 </a:solidFill>
@@ -1708,7 +1708,7 @@
               <a:buNone/>
             </a:pPr>
             <a:r>
-              <a:rPr lang="en-US" sz="950" dirty="0">
+              <a:rPr lang="en-US" sz="1000" dirty="0">
                 <a:solidFill>
                   <a:srgbClr val="345671"/>
                 </a:solidFill>
@@ -1718,7 +1718,7 @@
               </a:rPr>
               <a:t>ECG &amp; action potentials</a:t>
             </a:r>
-            <a:endParaRPr lang="en-US" sz="950" dirty="0"/>
+            <a:endParaRPr lang="en-US" sz="1000" dirty="0"/>
           </a:p>
         </p:txBody>
       </p:sp>
@@ -1730,7 +1730,7 @@
         </p:nvSpPr>
         <p:spPr>
           <a:xfrm>
-            <a:off x="630936" y="4270248"/>
+            <a:off x="630936" y="4251960"/>
             <a:ext cx="3287268" cy="173736"/>
           </a:xfrm>
           <a:prstGeom prst="rect">
@@ -1747,7 +1747,7 @@
               <a:buNone/>
             </a:pPr>
             <a:r>
-              <a:rPr lang="en-US" sz="950" b="1" dirty="0">
+              <a:rPr lang="en-US" sz="1000" b="1" dirty="0">
                 <a:solidFill>
                   <a:srgbClr val="0284C7"/>
                 </a:solidFill>
@@ -1761,7 +1761,7 @@
               <a:buNone/>
             </a:pPr>
             <a:r>
-              <a:rPr lang="en-US" sz="950" dirty="0">
+              <a:rPr lang="en-US" sz="1000" dirty="0">
                 <a:solidFill>
                   <a:srgbClr val="345671"/>
                 </a:solidFill>
@@ -1771,7 +1771,7 @@
               </a:rPr>
               <a:t>CAD, IHD &amp; myocardial infarction</a:t>
             </a:r>
-            <a:endParaRPr lang="en-US" sz="950" dirty="0"/>
+            <a:endParaRPr lang="en-US" sz="1000" dirty="0"/>
           </a:p>
         </p:txBody>
       </p:sp>
@@ -1783,7 +1783,7 @@
         </p:nvSpPr>
         <p:spPr>
           <a:xfrm>
-            <a:off x="630936" y="4443984"/>
+            <a:off x="630936" y="4425696"/>
             <a:ext cx="3287268" cy="173736"/>
           </a:xfrm>
           <a:prstGeom prst="rect">
@@ -1800,7 +1800,7 @@
               <a:buNone/>
             </a:pPr>
             <a:r>
-              <a:rPr lang="en-US" sz="950" b="1" dirty="0">
+              <a:rPr lang="en-US" sz="1000" b="1" dirty="0">
                 <a:solidFill>
                   <a:srgbClr val="0284C7"/>
                 </a:solidFill>
@@ -1814,7 +1814,7 @@
               <a:buNone/>
             </a:pPr>
             <a:r>
-              <a:rPr lang="en-US" sz="950" dirty="0">
+              <a:rPr lang="en-US" sz="1000" dirty="0">
                 <a:solidFill>
                   <a:srgbClr val="345671"/>
                 </a:solidFill>
@@ -1824,7 +1824,7 @@
               </a:rPr>
               <a:t>Hypertension &amp; atherosclerosis</a:t>
             </a:r>
-            <a:endParaRPr lang="en-US" sz="950" dirty="0"/>
+            <a:endParaRPr lang="en-US" sz="1000" dirty="0"/>
           </a:p>
         </p:txBody>
       </p:sp>
@@ -1836,7 +1836,7 @@
         </p:nvSpPr>
         <p:spPr>
           <a:xfrm>
-            <a:off x="630936" y="4617720"/>
+            <a:off x="630936" y="4599432"/>
             <a:ext cx="3287268" cy="173736"/>
           </a:xfrm>
           <a:prstGeom prst="rect">
@@ -1853,7 +1853,7 @@
               <a:buNone/>
             </a:pPr>
             <a:r>
-              <a:rPr lang="en-US" sz="950" b="1" dirty="0">
+              <a:rPr lang="en-US" sz="1000" b="1" dirty="0">
                 <a:solidFill>
                   <a:srgbClr val="0284C7"/>
                 </a:solidFill>
@@ -1867,7 +1867,7 @@
               <a:buNone/>
             </a:pPr>
             <a:r>
-              <a:rPr lang="en-US" sz="950" dirty="0">
+              <a:rPr lang="en-US" sz="1000" dirty="0">
                 <a:solidFill>
                   <a:srgbClr val="345671"/>
                 </a:solidFill>
@@ -1877,7 +1877,7 @@
               </a:rPr>
               <a:t>Heart failure &amp; cardiomyopathies</a:t>
             </a:r>
-            <a:endParaRPr lang="en-US" sz="950" dirty="0"/>
+            <a:endParaRPr lang="en-US" sz="1000" dirty="0"/>
           </a:p>
         </p:txBody>
       </p:sp>
@@ -1889,7 +1889,7 @@
         </p:nvSpPr>
         <p:spPr>
           <a:xfrm>
-            <a:off x="630936" y="4791456"/>
+            <a:off x="630936" y="4773168"/>
             <a:ext cx="3287268" cy="173736"/>
           </a:xfrm>
           <a:prstGeom prst="rect">
@@ -1906,7 +1906,7 @@
               <a:buNone/>
             </a:pPr>
             <a:r>
-              <a:rPr lang="en-US" sz="950" b="1" dirty="0">
+              <a:rPr lang="en-US" sz="1000" b="1" dirty="0">
                 <a:solidFill>
                   <a:srgbClr val="0284C7"/>
                 </a:solidFill>
@@ -1920,7 +1920,7 @@
               <a:buNone/>
             </a:pPr>
             <a:r>
-              <a:rPr lang="en-US" sz="950" dirty="0">
+              <a:rPr lang="en-US" sz="1000" dirty="0">
                 <a:solidFill>
                   <a:srgbClr val="345671"/>
                 </a:solidFill>
@@ -1930,7 +1930,7 @@
               </a:rPr>
               <a:t>Endocarditis, myocarditis &amp; vasculitis</a:t>
             </a:r>
-            <a:endParaRPr lang="en-US" sz="950" dirty="0"/>
+            <a:endParaRPr lang="en-US" sz="1000" dirty="0"/>
           </a:p>
         </p:txBody>
       </p:sp>
@@ -1942,7 +1942,7 @@
         </p:nvSpPr>
         <p:spPr>
           <a:xfrm>
-            <a:off x="630936" y="4965192"/>
+            <a:off x="630936" y="4946904"/>
             <a:ext cx="3287268" cy="173736"/>
           </a:xfrm>
           <a:prstGeom prst="rect">
@@ -1959,7 +1959,7 @@
               <a:buNone/>
             </a:pPr>
             <a:r>
-              <a:rPr lang="en-US" sz="950" b="1" dirty="0">
+              <a:rPr lang="en-US" sz="1000" b="1" dirty="0">
                 <a:solidFill>
                   <a:srgbClr val="0284C7"/>
                 </a:solidFill>
@@ -1973,7 +1973,7 @@
               <a:buNone/>
             </a:pPr>
             <a:r>
-              <a:rPr lang="en-US" sz="950" dirty="0">
+              <a:rPr lang="en-US" sz="1000" dirty="0">
                 <a:solidFill>
                   <a:srgbClr val="345671"/>
                 </a:solidFill>
@@ -1983,7 +1983,7 @@
               </a:rPr>
               <a:t>Cardiovascular pharmacology</a:t>
             </a:r>
-            <a:endParaRPr lang="en-US" sz="950" dirty="0"/>
+            <a:endParaRPr lang="en-US" sz="1000" dirty="0"/>
           </a:p>
         </p:txBody>
       </p:sp>
@@ -2152,7 +2152,7 @@
         </p:nvSpPr>
         <p:spPr>
           <a:xfrm>
-            <a:off x="4311396" y="3401568"/>
+            <a:off x="4311396" y="3383280"/>
             <a:ext cx="3287268" cy="173736"/>
           </a:xfrm>
           <a:prstGeom prst="rect">
@@ -2169,7 +2169,7 @@
               <a:buNone/>
             </a:pPr>
             <a:r>
-              <a:rPr lang="en-US" sz="950" b="1" dirty="0">
+              <a:rPr lang="en-US" sz="1000" b="1" dirty="0">
                 <a:solidFill>
                   <a:srgbClr val="059669"/>
                 </a:solidFill>
@@ -2183,7 +2183,7 @@
               <a:buNone/>
             </a:pPr>
             <a:r>
-              <a:rPr lang="en-US" sz="950" dirty="0">
+              <a:rPr lang="en-US" sz="1000" dirty="0">
                 <a:solidFill>
                   <a:srgbClr val="345671"/>
                 </a:solidFill>
@@ -2193,7 +2193,7 @@
               </a:rPr>
               <a:t>Embryology, surfactant &amp; congenital anomalies</a:t>
             </a:r>
-            <a:endParaRPr lang="en-US" sz="950" dirty="0"/>
+            <a:endParaRPr lang="en-US" sz="1000" dirty="0"/>
           </a:p>
         </p:txBody>
       </p:sp>
@@ -2205,7 +2205,7 @@
         </p:nvSpPr>
         <p:spPr>
           <a:xfrm>
-            <a:off x="4311396" y="3575304"/>
+            <a:off x="4311396" y="3557016"/>
             <a:ext cx="3287268" cy="173736"/>
           </a:xfrm>
           <a:prstGeom prst="rect">
@@ -2222,7 +2222,7 @@
               <a:buNone/>
             </a:pPr>
             <a:r>
-              <a:rPr lang="en-US" sz="950" b="1" dirty="0">
+              <a:rPr lang="en-US" sz="1000" b="1" dirty="0">
                 <a:solidFill>
                   <a:srgbClr val="059669"/>
                 </a:solidFill>
@@ -2236,7 +2236,7 @@
               <a:buNone/>
             </a:pPr>
             <a:r>
-              <a:rPr lang="en-US" sz="950" dirty="0">
+              <a:rPr lang="en-US" sz="1000" dirty="0">
                 <a:solidFill>
                   <a:srgbClr val="345671"/>
                 </a:solidFill>
@@ -2246,7 +2246,7 @@
               </a:rPr>
               <a:t>Anatomy &amp; muscles of breathing</a:t>
             </a:r>
-            <a:endParaRPr lang="en-US" sz="950" dirty="0"/>
+            <a:endParaRPr lang="en-US" sz="1000" dirty="0"/>
           </a:p>
         </p:txBody>
       </p:sp>
@@ -2258,7 +2258,7 @@
         </p:nvSpPr>
         <p:spPr>
           <a:xfrm>
-            <a:off x="4311396" y="3749040"/>
+            <a:off x="4311396" y="3730752"/>
             <a:ext cx="3287268" cy="173736"/>
           </a:xfrm>
           <a:prstGeom prst="rect">
@@ -2275,7 +2275,7 @@
               <a:buNone/>
             </a:pPr>
             <a:r>
-              <a:rPr lang="en-US" sz="950" b="1" dirty="0">
+              <a:rPr lang="en-US" sz="1000" b="1" dirty="0">
                 <a:solidFill>
                   <a:srgbClr val="059669"/>
                 </a:solidFill>
@@ -2289,7 +2289,7 @@
               <a:buNone/>
             </a:pPr>
             <a:r>
-              <a:rPr lang="en-US" sz="950" dirty="0">
+              <a:rPr lang="en-US" sz="1000" dirty="0">
                 <a:solidFill>
                   <a:srgbClr val="345671"/>
                 </a:solidFill>
@@ -2299,7 +2299,7 @@
               </a:rPr>
               <a:t>Lung volumes &amp; ventilation</a:t>
             </a:r>
-            <a:endParaRPr lang="en-US" sz="950" dirty="0"/>
+            <a:endParaRPr lang="en-US" sz="1000" dirty="0"/>
           </a:p>
         </p:txBody>
       </p:sp>
@@ -2311,7 +2311,7 @@
         </p:nvSpPr>
         <p:spPr>
           <a:xfrm>
-            <a:off x="4311396" y="3922776"/>
+            <a:off x="4311396" y="3904488"/>
             <a:ext cx="3287268" cy="173736"/>
           </a:xfrm>
           <a:prstGeom prst="rect">
@@ -2328,7 +2328,7 @@
               <a:buNone/>
             </a:pPr>
             <a:r>
-              <a:rPr lang="en-US" sz="950" b="1" dirty="0">
+              <a:rPr lang="en-US" sz="1000" b="1" dirty="0">
                 <a:solidFill>
                   <a:srgbClr val="059669"/>
                 </a:solidFill>
@@ -2342,7 +2342,7 @@
               <a:buNone/>
             </a:pPr>
             <a:r>
-              <a:rPr lang="en-US" sz="950" dirty="0">
+              <a:rPr lang="en-US" sz="1000" dirty="0">
                 <a:solidFill>
                   <a:srgbClr val="345671"/>
                 </a:solidFill>
@@ -2352,7 +2352,7 @@
               </a:rPr>
               <a:t>Gas exchange &amp; V/Q mismatch</a:t>
             </a:r>
-            <a:endParaRPr lang="en-US" sz="950" dirty="0"/>
+            <a:endParaRPr lang="en-US" sz="1000" dirty="0"/>
           </a:p>
         </p:txBody>
       </p:sp>
@@ -2364,7 +2364,7 @@
         </p:nvSpPr>
         <p:spPr>
           <a:xfrm>
-            <a:off x="4311396" y="4096512"/>
+            <a:off x="4311396" y="4078224"/>
             <a:ext cx="3287268" cy="173736"/>
           </a:xfrm>
           <a:prstGeom prst="rect">
@@ -2381,7 +2381,7 @@
               <a:buNone/>
             </a:pPr>
             <a:r>
-              <a:rPr lang="en-US" sz="950" b="1" dirty="0">
+              <a:rPr lang="en-US" sz="1000" b="1" dirty="0">
                 <a:solidFill>
                   <a:srgbClr val="059669"/>
                 </a:solidFill>
@@ -2395,7 +2395,7 @@
               <a:buNone/>
             </a:pPr>
             <a:r>
-              <a:rPr lang="en-US" sz="950" dirty="0">
+              <a:rPr lang="en-US" sz="1000" dirty="0">
                 <a:solidFill>
                   <a:srgbClr val="345671"/>
                 </a:solidFill>
@@ -2405,7 +2405,7 @@
               </a:rPr>
               <a:t>Control of breathing &amp; sleep apnea</a:t>
             </a:r>
-            <a:endParaRPr lang="en-US" sz="950" dirty="0"/>
+            <a:endParaRPr lang="en-US" sz="1000" dirty="0"/>
           </a:p>
         </p:txBody>
       </p:sp>
@@ -2417,7 +2417,7 @@
         </p:nvSpPr>
         <p:spPr>
           <a:xfrm>
-            <a:off x="4311396" y="4270248"/>
+            <a:off x="4311396" y="4251960"/>
             <a:ext cx="3287268" cy="173736"/>
           </a:xfrm>
           <a:prstGeom prst="rect">
@@ -2434,7 +2434,7 @@
               <a:buNone/>
             </a:pPr>
             <a:r>
-              <a:rPr lang="en-US" sz="950" b="1" dirty="0">
+              <a:rPr lang="en-US" sz="1000" b="1" dirty="0">
                 <a:solidFill>
                   <a:srgbClr val="059669"/>
                 </a:solidFill>
@@ -2448,7 +2448,7 @@
               <a:buNone/>
             </a:pPr>
             <a:r>
-              <a:rPr lang="en-US" sz="950" dirty="0">
+              <a:rPr lang="en-US" sz="1000" dirty="0">
                 <a:solidFill>
                   <a:srgbClr val="345671"/>
                 </a:solidFill>
@@ -2458,7 +2458,7 @@
               </a:rPr>
               <a:t>Asthma &amp; COPD</a:t>
             </a:r>
-            <a:endParaRPr lang="en-US" sz="950" dirty="0"/>
+            <a:endParaRPr lang="en-US" sz="1000" dirty="0"/>
           </a:p>
         </p:txBody>
       </p:sp>
@@ -2470,7 +2470,7 @@
         </p:nvSpPr>
         <p:spPr>
           <a:xfrm>
-            <a:off x="4311396" y="4443984"/>
+            <a:off x="4311396" y="4425696"/>
             <a:ext cx="3287268" cy="173736"/>
           </a:xfrm>
           <a:prstGeom prst="rect">
@@ -2487,7 +2487,7 @@
               <a:buNone/>
             </a:pPr>
             <a:r>
-              <a:rPr lang="en-US" sz="950" b="1" dirty="0">
+              <a:rPr lang="en-US" sz="1000" b="1" dirty="0">
                 <a:solidFill>
                   <a:srgbClr val="059669"/>
                 </a:solidFill>
@@ -2501,7 +2501,7 @@
               <a:buNone/>
             </a:pPr>
             <a:r>
-              <a:rPr lang="en-US" sz="950" dirty="0">
+              <a:rPr lang="en-US" sz="1000" dirty="0">
                 <a:solidFill>
                   <a:srgbClr val="345671"/>
                 </a:solidFill>
@@ -2511,7 +2511,7 @@
               </a:rPr>
               <a:t>Restrictive disease, ARDS, pneumonia</a:t>
             </a:r>
-            <a:endParaRPr lang="en-US" sz="950" dirty="0"/>
+            <a:endParaRPr lang="en-US" sz="1000" dirty="0"/>
           </a:p>
         </p:txBody>
       </p:sp>
@@ -2523,7 +2523,7 @@
         </p:nvSpPr>
         <p:spPr>
           <a:xfrm>
-            <a:off x="4311396" y="4617720"/>
+            <a:off x="4311396" y="4599432"/>
             <a:ext cx="3287268" cy="173736"/>
           </a:xfrm>
           <a:prstGeom prst="rect">
@@ -2540,7 +2540,7 @@
               <a:buNone/>
             </a:pPr>
             <a:r>
-              <a:rPr lang="en-US" sz="950" b="1" dirty="0">
+              <a:rPr lang="en-US" sz="1000" b="1" dirty="0">
                 <a:solidFill>
                   <a:srgbClr val="059669"/>
                 </a:solidFill>
@@ -2554,7 +2554,7 @@
               <a:buNone/>
             </a:pPr>
             <a:r>
-              <a:rPr lang="en-US" sz="950" dirty="0">
+              <a:rPr lang="en-US" sz="1000" dirty="0">
                 <a:solidFill>
                   <a:srgbClr val="345671"/>
                 </a:solidFill>
@@ -2564,7 +2564,7 @@
               </a:rPr>
               <a:t>TB, lung cancer &amp; respiratory pharmacology</a:t>
             </a:r>
-            <a:endParaRPr lang="en-US" sz="950" dirty="0"/>
+            <a:endParaRPr lang="en-US" sz="1000" dirty="0"/>
           </a:p>
         </p:txBody>
       </p:sp>
@@ -2750,7 +2750,7 @@
               <a:buNone/>
             </a:pPr>
             <a:r>
-              <a:rPr lang="en-US" sz="1000" b="1" dirty="0">
+              <a:rPr lang="en-US" sz="1050" b="1" dirty="0">
                 <a:solidFill>
                   <a:srgbClr val="D97706"/>
                 </a:solidFill>
@@ -2764,7 +2764,7 @@
               <a:buNone/>
             </a:pPr>
             <a:r>
-              <a:rPr lang="en-US" sz="1000" dirty="0">
+              <a:rPr lang="en-US" sz="1050" dirty="0">
                 <a:solidFill>
                   <a:srgbClr val="345671"/>
                 </a:solidFill>
@@ -2774,7 +2774,7 @@
               </a:rPr>
               <a:t>Study designs, evidence &amp; diagnostic testing</a:t>
             </a:r>
-            <a:endParaRPr lang="en-US" sz="1000" dirty="0"/>
+            <a:endParaRPr lang="en-US" sz="1050" dirty="0"/>
           </a:p>
         </p:txBody>
       </p:sp>
@@ -2803,7 +2803,7 @@
               <a:buNone/>
             </a:pPr>
             <a:r>
-              <a:rPr lang="en-US" sz="1000" b="1" dirty="0">
+              <a:rPr lang="en-US" sz="1050" b="1" dirty="0">
                 <a:solidFill>
                   <a:srgbClr val="D97706"/>
                 </a:solidFill>
@@ -2817,7 +2817,7 @@
               <a:buNone/>
             </a:pPr>
             <a:r>
-              <a:rPr lang="en-US" sz="1000" dirty="0">
+              <a:rPr lang="en-US" sz="1050" dirty="0">
                 <a:solidFill>
                   <a:srgbClr val="345671"/>
                 </a:solidFill>
@@ -2827,7 +2827,7 @@
               </a:rPr>
               <a:t>Quantifying risk, transitions &amp; survival analysis</a:t>
             </a:r>
-            <a:endParaRPr lang="en-US" sz="1000" dirty="0"/>
+            <a:endParaRPr lang="en-US" sz="1050" dirty="0"/>
           </a:p>
         </p:txBody>
       </p:sp>
@@ -2856,7 +2856,7 @@
               <a:buNone/>
             </a:pPr>
             <a:r>
-              <a:rPr lang="en-US" sz="1000" b="1" dirty="0">
+              <a:rPr lang="en-US" sz="1050" b="1" dirty="0">
                 <a:solidFill>
                   <a:srgbClr val="D97706"/>
                 </a:solidFill>
@@ -2870,7 +2870,7 @@
               <a:buNone/>
             </a:pPr>
             <a:r>
-              <a:rPr lang="en-US" sz="1000" dirty="0">
+              <a:rPr lang="en-US" sz="1050" dirty="0">
                 <a:solidFill>
                   <a:srgbClr val="345671"/>
                 </a:solidFill>
@@ -2880,7 +2880,7 @@
               </a:rPr>
               <a:t>Bias, confounding &amp; effect modification</a:t>
             </a:r>
-            <a:endParaRPr lang="en-US" sz="1000" dirty="0"/>
+            <a:endParaRPr lang="en-US" sz="1050" dirty="0"/>
           </a:p>
         </p:txBody>
       </p:sp>
@@ -2909,7 +2909,7 @@
               <a:buNone/>
             </a:pPr>
             <a:r>
-              <a:rPr lang="en-US" sz="1000" b="1" dirty="0">
+              <a:rPr lang="en-US" sz="1050" b="1" dirty="0">
                 <a:solidFill>
                   <a:srgbClr val="D97706"/>
                 </a:solidFill>
@@ -2923,7 +2923,7 @@
               <a:buNone/>
             </a:pPr>
             <a:r>
-              <a:rPr lang="en-US" sz="1000" dirty="0">
+              <a:rPr lang="en-US" sz="1050" dirty="0">
                 <a:solidFill>
                   <a:srgbClr val="345671"/>
                 </a:solidFill>
@@ -2933,7 +2933,7 @@
               </a:rPr>
               <a:t>Statistical distributions, testing &amp; CIs</a:t>
             </a:r>
-            <a:endParaRPr lang="en-US" sz="1000" dirty="0"/>
+            <a:endParaRPr lang="en-US" sz="1050" dirty="0"/>
           </a:p>
         </p:txBody>
       </p:sp>
@@ -3102,7 +3102,7 @@
         </p:nvSpPr>
         <p:spPr>
           <a:xfrm>
-            <a:off x="4311396" y="5916168"/>
+            <a:off x="4311396" y="5897880"/>
             <a:ext cx="3287268" cy="173736"/>
           </a:xfrm>
           <a:prstGeom prst="rect">
@@ -3119,7 +3119,7 @@
               <a:buNone/>
             </a:pPr>
             <a:r>
-              <a:rPr lang="en-US" sz="950" b="1" dirty="0">
+              <a:rPr lang="en-US" sz="1000" b="1" dirty="0">
                 <a:solidFill>
                   <a:srgbClr val="7C3AED"/>
                 </a:solidFill>
@@ -3133,7 +3133,7 @@
               <a:buNone/>
             </a:pPr>
             <a:r>
-              <a:rPr lang="en-US" sz="950" dirty="0">
+              <a:rPr lang="en-US" sz="1000" dirty="0">
                 <a:solidFill>
                   <a:srgbClr val="345671"/>
                 </a:solidFill>
@@ -3143,7 +3143,7 @@
               </a:rPr>
               <a:t>Cellular adaptations &amp; apoptosis</a:t>
             </a:r>
-            <a:endParaRPr lang="en-US" sz="950" dirty="0"/>
+            <a:endParaRPr lang="en-US" sz="1000" dirty="0"/>
           </a:p>
         </p:txBody>
       </p:sp>
@@ -3155,7 +3155,7 @@
         </p:nvSpPr>
         <p:spPr>
           <a:xfrm>
-            <a:off x="4311396" y="6089904"/>
+            <a:off x="4311396" y="6071616"/>
             <a:ext cx="3287268" cy="173736"/>
           </a:xfrm>
           <a:prstGeom prst="rect">
@@ -3172,7 +3172,7 @@
               <a:buNone/>
             </a:pPr>
             <a:r>
-              <a:rPr lang="en-US" sz="950" b="1" dirty="0">
+              <a:rPr lang="en-US" sz="1000" b="1" dirty="0">
                 <a:solidFill>
                   <a:srgbClr val="7C3AED"/>
                 </a:solidFill>
@@ -3186,7 +3186,7 @@
               <a:buNone/>
             </a:pPr>
             <a:r>
-              <a:rPr lang="en-US" sz="950" dirty="0">
+              <a:rPr lang="en-US" sz="1000" dirty="0">
                 <a:solidFill>
                   <a:srgbClr val="345671"/>
                 </a:solidFill>
@@ -3196,7 +3196,7 @@
               </a:rPr>
               <a:t>Necrosis, ischemia &amp; free radicals</a:t>
             </a:r>
-            <a:endParaRPr lang="en-US" sz="950" dirty="0"/>
+            <a:endParaRPr lang="en-US" sz="1000" dirty="0"/>
           </a:p>
         </p:txBody>
       </p:sp>
@@ -3208,7 +3208,7 @@
         </p:nvSpPr>
         <p:spPr>
           <a:xfrm>
-            <a:off x="4311396" y="6263640"/>
+            <a:off x="4311396" y="6245352"/>
             <a:ext cx="3287268" cy="173736"/>
           </a:xfrm>
           <a:prstGeom prst="rect">
@@ -3225,7 +3225,7 @@
               <a:buNone/>
             </a:pPr>
             <a:r>
-              <a:rPr lang="en-US" sz="950" b="1" dirty="0">
+              <a:rPr lang="en-US" sz="1000" b="1" dirty="0">
                 <a:solidFill>
                   <a:srgbClr val="7C3AED"/>
                 </a:solidFill>
@@ -3239,7 +3239,7 @@
               <a:buNone/>
             </a:pPr>
             <a:r>
-              <a:rPr lang="en-US" sz="950" dirty="0">
+              <a:rPr lang="en-US" sz="1000" dirty="0">
                 <a:solidFill>
                   <a:srgbClr val="345671"/>
                 </a:solidFill>
@@ -3249,7 +3249,7 @@
               </a:rPr>
               <a:t>Acute inflammation</a:t>
             </a:r>
-            <a:endParaRPr lang="en-US" sz="950" dirty="0"/>
+            <a:endParaRPr lang="en-US" sz="1000" dirty="0"/>
           </a:p>
         </p:txBody>
       </p:sp>
@@ -3261,7 +3261,7 @@
         </p:nvSpPr>
         <p:spPr>
           <a:xfrm>
-            <a:off x="4311396" y="6437376"/>
+            <a:off x="4311396" y="6419088"/>
             <a:ext cx="3287268" cy="173736"/>
           </a:xfrm>
           <a:prstGeom prst="rect">
@@ -3278,7 +3278,7 @@
               <a:buNone/>
             </a:pPr>
             <a:r>
-              <a:rPr lang="en-US" sz="950" b="1" dirty="0">
+              <a:rPr lang="en-US" sz="1000" b="1" dirty="0">
                 <a:solidFill>
                   <a:srgbClr val="7C3AED"/>
                 </a:solidFill>
@@ -3292,7 +3292,7 @@
               <a:buNone/>
             </a:pPr>
             <a:r>
-              <a:rPr lang="en-US" sz="950" dirty="0">
+              <a:rPr lang="en-US" sz="1000" dirty="0">
                 <a:solidFill>
                   <a:srgbClr val="345671"/>
                 </a:solidFill>
@@ -3302,7 +3302,7 @@
               </a:rPr>
               <a:t>Chronic inflammation &amp; repair</a:t>
             </a:r>
-            <a:endParaRPr lang="en-US" sz="950" dirty="0"/>
+            <a:endParaRPr lang="en-US" sz="1000" dirty="0"/>
           </a:p>
         </p:txBody>
       </p:sp>
@@ -3314,7 +3314,7 @@
         </p:nvSpPr>
         <p:spPr>
           <a:xfrm>
-            <a:off x="4311396" y="6611112"/>
+            <a:off x="4311396" y="6592824"/>
             <a:ext cx="3287268" cy="173736"/>
           </a:xfrm>
           <a:prstGeom prst="rect">
@@ -3331,7 +3331,7 @@
               <a:buNone/>
             </a:pPr>
             <a:r>
-              <a:rPr lang="en-US" sz="950" b="1" dirty="0">
+              <a:rPr lang="en-US" sz="1000" b="1" dirty="0">
                 <a:solidFill>
                   <a:srgbClr val="7C3AED"/>
                 </a:solidFill>
@@ -3345,7 +3345,7 @@
               <a:buNone/>
             </a:pPr>
             <a:r>
-              <a:rPr lang="en-US" sz="950" dirty="0">
+              <a:rPr lang="en-US" sz="1000" dirty="0">
                 <a:solidFill>
                   <a:srgbClr val="345671"/>
                 </a:solidFill>
@@ -3355,7 +3355,7 @@
               </a:rPr>
               <a:t>Neoplasia I — hallmarks &amp; metastases</a:t>
             </a:r>
-            <a:endParaRPr lang="en-US" sz="950" dirty="0"/>
+            <a:endParaRPr lang="en-US" sz="1000" dirty="0"/>
           </a:p>
         </p:txBody>
       </p:sp>
@@ -3367,7 +3367,7 @@
         </p:nvSpPr>
         <p:spPr>
           <a:xfrm>
-            <a:off x="4311396" y="6784848"/>
+            <a:off x="4311396" y="6766560"/>
             <a:ext cx="3287268" cy="173736"/>
           </a:xfrm>
           <a:prstGeom prst="rect">
@@ -3384,7 +3384,7 @@
               <a:buNone/>
             </a:pPr>
             <a:r>
-              <a:rPr lang="en-US" sz="950" b="1" dirty="0">
+              <a:rPr lang="en-US" sz="1000" b="1" dirty="0">
                 <a:solidFill>
                   <a:srgbClr val="7C3AED"/>
                 </a:solidFill>
@@ -3398,7 +3398,7 @@
               <a:buNone/>
             </a:pPr>
             <a:r>
-              <a:rPr lang="en-US" sz="950" dirty="0">
+              <a:rPr lang="en-US" sz="1000" dirty="0">
                 <a:solidFill>
                   <a:srgbClr val="345671"/>
                 </a:solidFill>
@@ -3408,7 +3408,7 @@
               </a:rPr>
               <a:t>Neoplasia II — oncogenes &amp; TSGs</a:t>
             </a:r>
-            <a:endParaRPr lang="en-US" sz="950" dirty="0"/>
+            <a:endParaRPr lang="en-US" sz="1000" dirty="0"/>
           </a:p>
         </p:txBody>
       </p:sp>
@@ -3420,7 +3420,7 @@
         </p:nvSpPr>
         <p:spPr>
           <a:xfrm>
-            <a:off x="4311396" y="6958584"/>
+            <a:off x="4311396" y="6940296"/>
             <a:ext cx="3287268" cy="173736"/>
           </a:xfrm>
           <a:prstGeom prst="rect">
@@ -3437,7 +3437,7 @@
               <a:buNone/>
             </a:pPr>
             <a:r>
-              <a:rPr lang="en-US" sz="950" b="1" dirty="0">
+              <a:rPr lang="en-US" sz="1000" b="1" dirty="0">
                 <a:solidFill>
                   <a:srgbClr val="7C3AED"/>
                 </a:solidFill>
@@ -3451,7 +3451,7 @@
               <a:buNone/>
             </a:pPr>
             <a:r>
-              <a:rPr lang="en-US" sz="950" dirty="0">
+              <a:rPr lang="en-US" sz="1000" dirty="0">
                 <a:solidFill>
                   <a:srgbClr val="345671"/>
                 </a:solidFill>
@@ -3461,7 +3461,7 @@
               </a:rPr>
               <a:t>Neoplasia III — markers &amp; aging</a:t>
             </a:r>
-            <a:endParaRPr lang="en-US" sz="950" dirty="0"/>
+            <a:endParaRPr lang="en-US" sz="1000" dirty="0"/>
           </a:p>
         </p:txBody>
       </p:sp>
@@ -3473,7 +3473,7 @@
         </p:nvSpPr>
         <p:spPr>
           <a:xfrm>
-            <a:off x="4311396" y="7132320"/>
+            <a:off x="4311396" y="7114032"/>
             <a:ext cx="3287268" cy="173736"/>
           </a:xfrm>
           <a:prstGeom prst="rect">
@@ -3490,7 +3490,7 @@
               <a:buNone/>
             </a:pPr>
             <a:r>
-              <a:rPr lang="en-US" sz="950" b="1" dirty="0">
+              <a:rPr lang="en-US" sz="1000" b="1" dirty="0">
                 <a:solidFill>
                   <a:srgbClr val="7C3AED"/>
                 </a:solidFill>
@@ -3504,7 +3504,7 @@
               <a:buNone/>
             </a:pPr>
             <a:r>
-              <a:rPr lang="en-US" sz="950" dirty="0">
+              <a:rPr lang="en-US" sz="1000" dirty="0">
                 <a:solidFill>
                   <a:srgbClr val="345671"/>
                 </a:solidFill>
@@ -3514,7 +3514,7 @@
               </a:rPr>
               <a:t>General pathology review</a:t>
             </a:r>
-            <a:endParaRPr lang="en-US" sz="950" dirty="0"/>
+            <a:endParaRPr lang="en-US" sz="1000" dirty="0"/>
           </a:p>
         </p:txBody>
       </p:sp>
@@ -3674,9 +3674,9 @@
               <a:buNone/>
             </a:pPr>
             <a:r>
-              <a:rPr lang="en-US" sz="950" spc="200" kern="0" dirty="0">
-                <a:solidFill>
-                  <a:srgbClr val="6B87A3"/>
+              <a:rPr lang="en-US" sz="1000" b="1" spc="200" kern="0" dirty="0">
+                <a:solidFill>
+                  <a:srgbClr val="345671"/>
                 </a:solidFill>
                 <a:latin typeface="Calibri" pitchFamily="34" charset="0"/>
                 <a:ea typeface="Calibri" pitchFamily="34" charset="-122"/>
@@ -3684,7 +3684,7 @@
               </a:rPr>
               <a:t>scan to sign up</a:t>
             </a:r>
-            <a:endParaRPr lang="en-US" sz="950" dirty="0"/>
+            <a:endParaRPr lang="en-US" sz="1000" dirty="0"/>
           </a:p>
         </p:txBody>
       </p:sp>
@@ -3791,7 +3791,7 @@
               <a:buNone/>
             </a:pPr>
             <a:r>
-              <a:rPr lang="en-US" sz="1000" b="1" dirty="0">
+              <a:rPr lang="en-US" sz="1100" b="1" dirty="0">
                 <a:solidFill>
                   <a:srgbClr val="0284C7"/>
                 </a:solidFill>
@@ -3801,7 +3801,7 @@
               </a:rPr>
               <a:t>bakesiga.github.io/usmle-dashboard</a:t>
             </a:r>
-            <a:endParaRPr lang="en-US" sz="1000" dirty="0"/>
+            <a:endParaRPr lang="en-US" sz="1100" dirty="0"/>
           </a:p>
         </p:txBody>
       </p:sp>
@@ -3854,7 +3854,7 @@
               <a:buNone/>
             </a:pPr>
             <a:r>
-              <a:rPr lang="en-US" sz="950" b="1" dirty="0">
+              <a:rPr lang="en-US" sz="1000" b="1" dirty="0">
                 <a:solidFill>
                   <a:srgbClr val="0C2A3D"/>
                 </a:solidFill>
@@ -3864,7 +3864,7 @@
               </a:rPr>
               <a:t>allanbakesiga@gmail.com</a:t>
             </a:r>
-            <a:endParaRPr lang="en-US" sz="950" dirty="0"/>
+            <a:endParaRPr lang="en-US" sz="1000" dirty="0"/>
           </a:p>
         </p:txBody>
       </p:sp>
@@ -3917,7 +3917,7 @@
               <a:buNone/>
             </a:pPr>
             <a:r>
-              <a:rPr lang="en-US" sz="950" b="1" dirty="0">
+              <a:rPr lang="en-US" sz="1000" b="1" dirty="0">
                 <a:solidFill>
                   <a:srgbClr val="0C2A3D"/>
                 </a:solidFill>
@@ -3927,7 +3927,7 @@
               </a:rPr>
               <a:t>+256 705 571 443</a:t>
             </a:r>
-            <a:endParaRPr lang="en-US" sz="950" dirty="0"/>
+            <a:endParaRPr lang="en-US" sz="1000" dirty="0"/>
           </a:p>
         </p:txBody>
       </p:sp>
@@ -3980,7 +3980,7 @@
               <a:buNone/>
             </a:pPr>
             <a:r>
-              <a:rPr lang="en-US" sz="950" b="1" dirty="0">
+              <a:rPr lang="en-US" sz="1000" b="1" dirty="0">
                 <a:solidFill>
                   <a:srgbClr val="0C2A3D"/>
                 </a:solidFill>
@@ -3990,7 +3990,7 @@
               </a:rPr>
               <a:t>+1 984 710 2902</a:t>
             </a:r>
-            <a:endParaRPr lang="en-US" sz="950" dirty="0"/>
+            <a:endParaRPr lang="en-US" sz="1000" dirty="0"/>
           </a:p>
         </p:txBody>
       </p:sp>

--- a/outputs/flyers/USMLE_June_Advert.pptx
+++ b/outputs/flyers/USMLE_June_Advert.pptx
@@ -1465,8 +1465,8 @@
         </p:nvSpPr>
         <p:spPr>
           <a:xfrm>
-            <a:off x="630936" y="3383280"/>
-            <a:ext cx="3287268" cy="173736"/>
+            <a:off x="630936" y="3401568"/>
+            <a:ext cx="3287268" cy="164592"/>
           </a:xfrm>
           <a:prstGeom prst="rect">
             <a:avLst/>
@@ -1518,8 +1518,8 @@
         </p:nvSpPr>
         <p:spPr>
           <a:xfrm>
-            <a:off x="630936" y="3557016"/>
-            <a:ext cx="3287268" cy="173736"/>
+            <a:off x="630936" y="3566160"/>
+            <a:ext cx="3287268" cy="164592"/>
           </a:xfrm>
           <a:prstGeom prst="rect">
             <a:avLst/>
@@ -1572,7 +1572,7 @@
         <p:spPr>
           <a:xfrm>
             <a:off x="630936" y="3730752"/>
-            <a:ext cx="3287268" cy="173736"/>
+            <a:ext cx="3287268" cy="164592"/>
           </a:xfrm>
           <a:prstGeom prst="rect">
             <a:avLst/>
@@ -1624,8 +1624,8 @@
         </p:nvSpPr>
         <p:spPr>
           <a:xfrm>
-            <a:off x="630936" y="3904488"/>
-            <a:ext cx="3287268" cy="173736"/>
+            <a:off x="630936" y="3895344"/>
+            <a:ext cx="3287268" cy="164592"/>
           </a:xfrm>
           <a:prstGeom prst="rect">
             <a:avLst/>
@@ -1677,8 +1677,8 @@
         </p:nvSpPr>
         <p:spPr>
           <a:xfrm>
-            <a:off x="630936" y="4078224"/>
-            <a:ext cx="3287268" cy="173736"/>
+            <a:off x="630936" y="4059936"/>
+            <a:ext cx="3287268" cy="164592"/>
           </a:xfrm>
           <a:prstGeom prst="rect">
             <a:avLst/>
@@ -1730,8 +1730,8 @@
         </p:nvSpPr>
         <p:spPr>
           <a:xfrm>
-            <a:off x="630936" y="4251960"/>
-            <a:ext cx="3287268" cy="173736"/>
+            <a:off x="630936" y="4224528"/>
+            <a:ext cx="3287268" cy="164592"/>
           </a:xfrm>
           <a:prstGeom prst="rect">
             <a:avLst/>
@@ -1783,8 +1783,8 @@
         </p:nvSpPr>
         <p:spPr>
           <a:xfrm>
-            <a:off x="630936" y="4425696"/>
-            <a:ext cx="3287268" cy="173736"/>
+            <a:off x="630936" y="4389120"/>
+            <a:ext cx="3287268" cy="164592"/>
           </a:xfrm>
           <a:prstGeom prst="rect">
             <a:avLst/>
@@ -1836,8 +1836,8 @@
         </p:nvSpPr>
         <p:spPr>
           <a:xfrm>
-            <a:off x="630936" y="4599432"/>
-            <a:ext cx="3287268" cy="173736"/>
+            <a:off x="630936" y="4553712"/>
+            <a:ext cx="3287268" cy="164592"/>
           </a:xfrm>
           <a:prstGeom prst="rect">
             <a:avLst/>
@@ -1889,8 +1889,8 @@
         </p:nvSpPr>
         <p:spPr>
           <a:xfrm>
-            <a:off x="630936" y="4773168"/>
-            <a:ext cx="3287268" cy="173736"/>
+            <a:off x="630936" y="4718304"/>
+            <a:ext cx="3287268" cy="164592"/>
           </a:xfrm>
           <a:prstGeom prst="rect">
             <a:avLst/>
@@ -1942,8 +1942,8 @@
         </p:nvSpPr>
         <p:spPr>
           <a:xfrm>
-            <a:off x="630936" y="4946904"/>
-            <a:ext cx="3287268" cy="173736"/>
+            <a:off x="630936" y="4882896"/>
+            <a:ext cx="3287268" cy="164592"/>
           </a:xfrm>
           <a:prstGeom prst="rect">
             <a:avLst/>
@@ -2152,8 +2152,8 @@
         </p:nvSpPr>
         <p:spPr>
           <a:xfrm>
-            <a:off x="4311396" y="3383280"/>
-            <a:ext cx="3287268" cy="173736"/>
+            <a:off x="4311396" y="3401568"/>
+            <a:ext cx="3287268" cy="205740"/>
           </a:xfrm>
           <a:prstGeom prst="rect">
             <a:avLst/>
@@ -2205,8 +2205,8 @@
         </p:nvSpPr>
         <p:spPr>
           <a:xfrm>
-            <a:off x="4311396" y="3557016"/>
-            <a:ext cx="3287268" cy="173736"/>
+            <a:off x="4311396" y="3607308"/>
+            <a:ext cx="3287268" cy="205740"/>
           </a:xfrm>
           <a:prstGeom prst="rect">
             <a:avLst/>
@@ -2258,8 +2258,8 @@
         </p:nvSpPr>
         <p:spPr>
           <a:xfrm>
-            <a:off x="4311396" y="3730752"/>
-            <a:ext cx="3287268" cy="173736"/>
+            <a:off x="4311396" y="3813048"/>
+            <a:ext cx="3287268" cy="205740"/>
           </a:xfrm>
           <a:prstGeom prst="rect">
             <a:avLst/>
@@ -2311,8 +2311,8 @@
         </p:nvSpPr>
         <p:spPr>
           <a:xfrm>
-            <a:off x="4311396" y="3904488"/>
-            <a:ext cx="3287268" cy="173736"/>
+            <a:off x="4311396" y="4018788"/>
+            <a:ext cx="3287268" cy="205740"/>
           </a:xfrm>
           <a:prstGeom prst="rect">
             <a:avLst/>
@@ -2364,8 +2364,8 @@
         </p:nvSpPr>
         <p:spPr>
           <a:xfrm>
-            <a:off x="4311396" y="4078224"/>
-            <a:ext cx="3287268" cy="173736"/>
+            <a:off x="4311396" y="4224528"/>
+            <a:ext cx="3287268" cy="205740"/>
           </a:xfrm>
           <a:prstGeom prst="rect">
             <a:avLst/>
@@ -2417,8 +2417,8 @@
         </p:nvSpPr>
         <p:spPr>
           <a:xfrm>
-            <a:off x="4311396" y="4251960"/>
-            <a:ext cx="3287268" cy="173736"/>
+            <a:off x="4311396" y="4430268"/>
+            <a:ext cx="3287268" cy="205740"/>
           </a:xfrm>
           <a:prstGeom prst="rect">
             <a:avLst/>
@@ -2470,8 +2470,8 @@
         </p:nvSpPr>
         <p:spPr>
           <a:xfrm>
-            <a:off x="4311396" y="4425696"/>
-            <a:ext cx="3287268" cy="173736"/>
+            <a:off x="4311396" y="4636008"/>
+            <a:ext cx="3287268" cy="205740"/>
           </a:xfrm>
           <a:prstGeom prst="rect">
             <a:avLst/>
@@ -2523,8 +2523,8 @@
         </p:nvSpPr>
         <p:spPr>
           <a:xfrm>
-            <a:off x="4311396" y="4599432"/>
-            <a:ext cx="3287268" cy="173736"/>
+            <a:off x="4311396" y="4841748"/>
+            <a:ext cx="3287268" cy="205740"/>
           </a:xfrm>
           <a:prstGeom prst="rect">
             <a:avLst/>
@@ -2733,8 +2733,8 @@
         </p:nvSpPr>
         <p:spPr>
           <a:xfrm>
-            <a:off x="630936" y="6007608"/>
-            <a:ext cx="3287268" cy="384048"/>
+            <a:off x="630936" y="5916168"/>
+            <a:ext cx="3287268" cy="411480"/>
           </a:xfrm>
           <a:prstGeom prst="rect">
             <a:avLst/>
@@ -2786,8 +2786,8 @@
         </p:nvSpPr>
         <p:spPr>
           <a:xfrm>
-            <a:off x="630936" y="6391656"/>
-            <a:ext cx="3287268" cy="384048"/>
+            <a:off x="630936" y="6327648"/>
+            <a:ext cx="3287268" cy="411480"/>
           </a:xfrm>
           <a:prstGeom prst="rect">
             <a:avLst/>
@@ -2839,8 +2839,8 @@
         </p:nvSpPr>
         <p:spPr>
           <a:xfrm>
-            <a:off x="630936" y="6775704"/>
-            <a:ext cx="3287268" cy="384048"/>
+            <a:off x="630936" y="6739128"/>
+            <a:ext cx="3287268" cy="411480"/>
           </a:xfrm>
           <a:prstGeom prst="rect">
             <a:avLst/>
@@ -2892,8 +2892,8 @@
         </p:nvSpPr>
         <p:spPr>
           <a:xfrm>
-            <a:off x="630936" y="7159752"/>
-            <a:ext cx="3287268" cy="384048"/>
+            <a:off x="630936" y="7150608"/>
+            <a:ext cx="3287268" cy="411480"/>
           </a:xfrm>
           <a:prstGeom prst="rect">
             <a:avLst/>
@@ -3102,8 +3102,8 @@
         </p:nvSpPr>
         <p:spPr>
           <a:xfrm>
-            <a:off x="4311396" y="5897880"/>
-            <a:ext cx="3287268" cy="173736"/>
+            <a:off x="4311396" y="5916168"/>
+            <a:ext cx="3287268" cy="205740"/>
           </a:xfrm>
           <a:prstGeom prst="rect">
             <a:avLst/>
@@ -3155,8 +3155,8 @@
         </p:nvSpPr>
         <p:spPr>
           <a:xfrm>
-            <a:off x="4311396" y="6071616"/>
-            <a:ext cx="3287268" cy="173736"/>
+            <a:off x="4311396" y="6121908"/>
+            <a:ext cx="3287268" cy="205740"/>
           </a:xfrm>
           <a:prstGeom prst="rect">
             <a:avLst/>
@@ -3208,8 +3208,8 @@
         </p:nvSpPr>
         <p:spPr>
           <a:xfrm>
-            <a:off x="4311396" y="6245352"/>
-            <a:ext cx="3287268" cy="173736"/>
+            <a:off x="4311396" y="6327648"/>
+            <a:ext cx="3287268" cy="205740"/>
           </a:xfrm>
           <a:prstGeom prst="rect">
             <a:avLst/>
@@ -3261,8 +3261,8 @@
         </p:nvSpPr>
         <p:spPr>
           <a:xfrm>
-            <a:off x="4311396" y="6419088"/>
-            <a:ext cx="3287268" cy="173736"/>
+            <a:off x="4311396" y="6533388"/>
+            <a:ext cx="3287268" cy="205740"/>
           </a:xfrm>
           <a:prstGeom prst="rect">
             <a:avLst/>
@@ -3314,8 +3314,8 @@
         </p:nvSpPr>
         <p:spPr>
           <a:xfrm>
-            <a:off x="4311396" y="6592824"/>
-            <a:ext cx="3287268" cy="173736"/>
+            <a:off x="4311396" y="6739128"/>
+            <a:ext cx="3287268" cy="205740"/>
           </a:xfrm>
           <a:prstGeom prst="rect">
             <a:avLst/>
@@ -3367,8 +3367,8 @@
         </p:nvSpPr>
         <p:spPr>
           <a:xfrm>
-            <a:off x="4311396" y="6766560"/>
-            <a:ext cx="3287268" cy="173736"/>
+            <a:off x="4311396" y="6944868"/>
+            <a:ext cx="3287268" cy="205740"/>
           </a:xfrm>
           <a:prstGeom prst="rect">
             <a:avLst/>
@@ -3420,8 +3420,8 @@
         </p:nvSpPr>
         <p:spPr>
           <a:xfrm>
-            <a:off x="4311396" y="6940296"/>
-            <a:ext cx="3287268" cy="173736"/>
+            <a:off x="4311396" y="7150608"/>
+            <a:ext cx="3287268" cy="205740"/>
           </a:xfrm>
           <a:prstGeom prst="rect">
             <a:avLst/>
@@ -3473,8 +3473,8 @@
         </p:nvSpPr>
         <p:spPr>
           <a:xfrm>
-            <a:off x="4311396" y="7114032"/>
-            <a:ext cx="3287268" cy="173736"/>
+            <a:off x="4311396" y="7356348"/>
+            <a:ext cx="3287268" cy="205740"/>
           </a:xfrm>
           <a:prstGeom prst="rect">
             <a:avLst/>

--- a/outputs/flyers/USMLE_June_Advert.pptx
+++ b/outputs/flyers/USMLE_June_Advert.pptx
@@ -1484,7 +1484,7 @@
             <a:r>
               <a:rPr lang="en-US" sz="1000" b="1" dirty="0">
                 <a:solidFill>
-                  <a:srgbClr val="0284C7"/>
+                  <a:srgbClr val="075985"/>
                 </a:solidFill>
                 <a:latin typeface="Calibri" pitchFamily="34" charset="0"/>
                 <a:ea typeface="Calibri" pitchFamily="34" charset="-122"/>
@@ -1496,9 +1496,9 @@
               <a:buNone/>
             </a:pPr>
             <a:r>
-              <a:rPr lang="en-US" sz="1000" dirty="0">
-                <a:solidFill>
-                  <a:srgbClr val="345671"/>
+              <a:rPr lang="en-US" sz="1000" b="1" dirty="0">
+                <a:solidFill>
+                  <a:srgbClr val="0C2A3D"/>
                 </a:solidFill>
                 <a:latin typeface="Calibri" pitchFamily="34" charset="0"/>
                 <a:ea typeface="Calibri" pitchFamily="34" charset="-122"/>
@@ -1537,7 +1537,7 @@
             <a:r>
               <a:rPr lang="en-US" sz="1000" b="1" dirty="0">
                 <a:solidFill>
-                  <a:srgbClr val="0284C7"/>
+                  <a:srgbClr val="075985"/>
                 </a:solidFill>
                 <a:latin typeface="Calibri" pitchFamily="34" charset="0"/>
                 <a:ea typeface="Calibri" pitchFamily="34" charset="-122"/>
@@ -1549,9 +1549,9 @@
               <a:buNone/>
             </a:pPr>
             <a:r>
-              <a:rPr lang="en-US" sz="1000" dirty="0">
-                <a:solidFill>
-                  <a:srgbClr val="345671"/>
+              <a:rPr lang="en-US" sz="1000" b="1" dirty="0">
+                <a:solidFill>
+                  <a:srgbClr val="0C2A3D"/>
                 </a:solidFill>
                 <a:latin typeface="Calibri" pitchFamily="34" charset="0"/>
                 <a:ea typeface="Calibri" pitchFamily="34" charset="-122"/>
@@ -1590,7 +1590,7 @@
             <a:r>
               <a:rPr lang="en-US" sz="1000" b="1" dirty="0">
                 <a:solidFill>
-                  <a:srgbClr val="0284C7"/>
+                  <a:srgbClr val="075985"/>
                 </a:solidFill>
                 <a:latin typeface="Calibri" pitchFamily="34" charset="0"/>
                 <a:ea typeface="Calibri" pitchFamily="34" charset="-122"/>
@@ -1602,9 +1602,9 @@
               <a:buNone/>
             </a:pPr>
             <a:r>
-              <a:rPr lang="en-US" sz="1000" dirty="0">
-                <a:solidFill>
-                  <a:srgbClr val="345671"/>
+              <a:rPr lang="en-US" sz="1000" b="1" dirty="0">
+                <a:solidFill>
+                  <a:srgbClr val="0C2A3D"/>
                 </a:solidFill>
                 <a:latin typeface="Calibri" pitchFamily="34" charset="0"/>
                 <a:ea typeface="Calibri" pitchFamily="34" charset="-122"/>
@@ -1643,7 +1643,7 @@
             <a:r>
               <a:rPr lang="en-US" sz="1000" b="1" dirty="0">
                 <a:solidFill>
-                  <a:srgbClr val="0284C7"/>
+                  <a:srgbClr val="075985"/>
                 </a:solidFill>
                 <a:latin typeface="Calibri" pitchFamily="34" charset="0"/>
                 <a:ea typeface="Calibri" pitchFamily="34" charset="-122"/>
@@ -1655,9 +1655,9 @@
               <a:buNone/>
             </a:pPr>
             <a:r>
-              <a:rPr lang="en-US" sz="1000" dirty="0">
-                <a:solidFill>
-                  <a:srgbClr val="345671"/>
+              <a:rPr lang="en-US" sz="1000" b="1" dirty="0">
+                <a:solidFill>
+                  <a:srgbClr val="0C2A3D"/>
                 </a:solidFill>
                 <a:latin typeface="Calibri" pitchFamily="34" charset="0"/>
                 <a:ea typeface="Calibri" pitchFamily="34" charset="-122"/>
@@ -1696,7 +1696,7 @@
             <a:r>
               <a:rPr lang="en-US" sz="1000" b="1" dirty="0">
                 <a:solidFill>
-                  <a:srgbClr val="0284C7"/>
+                  <a:srgbClr val="075985"/>
                 </a:solidFill>
                 <a:latin typeface="Calibri" pitchFamily="34" charset="0"/>
                 <a:ea typeface="Calibri" pitchFamily="34" charset="-122"/>
@@ -1708,9 +1708,9 @@
               <a:buNone/>
             </a:pPr>
             <a:r>
-              <a:rPr lang="en-US" sz="1000" dirty="0">
-                <a:solidFill>
-                  <a:srgbClr val="345671"/>
+              <a:rPr lang="en-US" sz="1000" b="1" dirty="0">
+                <a:solidFill>
+                  <a:srgbClr val="0C2A3D"/>
                 </a:solidFill>
                 <a:latin typeface="Calibri" pitchFamily="34" charset="0"/>
                 <a:ea typeface="Calibri" pitchFamily="34" charset="-122"/>
@@ -1749,7 +1749,7 @@
             <a:r>
               <a:rPr lang="en-US" sz="1000" b="1" dirty="0">
                 <a:solidFill>
-                  <a:srgbClr val="0284C7"/>
+                  <a:srgbClr val="075985"/>
                 </a:solidFill>
                 <a:latin typeface="Calibri" pitchFamily="34" charset="0"/>
                 <a:ea typeface="Calibri" pitchFamily="34" charset="-122"/>
@@ -1761,9 +1761,9 @@
               <a:buNone/>
             </a:pPr>
             <a:r>
-              <a:rPr lang="en-US" sz="1000" dirty="0">
-                <a:solidFill>
-                  <a:srgbClr val="345671"/>
+              <a:rPr lang="en-US" sz="1000" b="1" dirty="0">
+                <a:solidFill>
+                  <a:srgbClr val="0C2A3D"/>
                 </a:solidFill>
                 <a:latin typeface="Calibri" pitchFamily="34" charset="0"/>
                 <a:ea typeface="Calibri" pitchFamily="34" charset="-122"/>
@@ -1802,7 +1802,7 @@
             <a:r>
               <a:rPr lang="en-US" sz="1000" b="1" dirty="0">
                 <a:solidFill>
-                  <a:srgbClr val="0284C7"/>
+                  <a:srgbClr val="075985"/>
                 </a:solidFill>
                 <a:latin typeface="Calibri" pitchFamily="34" charset="0"/>
                 <a:ea typeface="Calibri" pitchFamily="34" charset="-122"/>
@@ -1814,9 +1814,9 @@
               <a:buNone/>
             </a:pPr>
             <a:r>
-              <a:rPr lang="en-US" sz="1000" dirty="0">
-                <a:solidFill>
-                  <a:srgbClr val="345671"/>
+              <a:rPr lang="en-US" sz="1000" b="1" dirty="0">
+                <a:solidFill>
+                  <a:srgbClr val="0C2A3D"/>
                 </a:solidFill>
                 <a:latin typeface="Calibri" pitchFamily="34" charset="0"/>
                 <a:ea typeface="Calibri" pitchFamily="34" charset="-122"/>
@@ -1855,7 +1855,7 @@
             <a:r>
               <a:rPr lang="en-US" sz="1000" b="1" dirty="0">
                 <a:solidFill>
-                  <a:srgbClr val="0284C7"/>
+                  <a:srgbClr val="075985"/>
                 </a:solidFill>
                 <a:latin typeface="Calibri" pitchFamily="34" charset="0"/>
                 <a:ea typeface="Calibri" pitchFamily="34" charset="-122"/>
@@ -1867,9 +1867,9 @@
               <a:buNone/>
             </a:pPr>
             <a:r>
-              <a:rPr lang="en-US" sz="1000" dirty="0">
-                <a:solidFill>
-                  <a:srgbClr val="345671"/>
+              <a:rPr lang="en-US" sz="1000" b="1" dirty="0">
+                <a:solidFill>
+                  <a:srgbClr val="0C2A3D"/>
                 </a:solidFill>
                 <a:latin typeface="Calibri" pitchFamily="34" charset="0"/>
                 <a:ea typeface="Calibri" pitchFamily="34" charset="-122"/>
@@ -1908,7 +1908,7 @@
             <a:r>
               <a:rPr lang="en-US" sz="1000" b="1" dirty="0">
                 <a:solidFill>
-                  <a:srgbClr val="0284C7"/>
+                  <a:srgbClr val="075985"/>
                 </a:solidFill>
                 <a:latin typeface="Calibri" pitchFamily="34" charset="0"/>
                 <a:ea typeface="Calibri" pitchFamily="34" charset="-122"/>
@@ -1920,9 +1920,9 @@
               <a:buNone/>
             </a:pPr>
             <a:r>
-              <a:rPr lang="en-US" sz="1000" dirty="0">
-                <a:solidFill>
-                  <a:srgbClr val="345671"/>
+              <a:rPr lang="en-US" sz="1000" b="1" dirty="0">
+                <a:solidFill>
+                  <a:srgbClr val="0C2A3D"/>
                 </a:solidFill>
                 <a:latin typeface="Calibri" pitchFamily="34" charset="0"/>
                 <a:ea typeface="Calibri" pitchFamily="34" charset="-122"/>
@@ -1961,7 +1961,7 @@
             <a:r>
               <a:rPr lang="en-US" sz="1000" b="1" dirty="0">
                 <a:solidFill>
-                  <a:srgbClr val="0284C7"/>
+                  <a:srgbClr val="075985"/>
                 </a:solidFill>
                 <a:latin typeface="Calibri" pitchFamily="34" charset="0"/>
                 <a:ea typeface="Calibri" pitchFamily="34" charset="-122"/>
@@ -1973,9 +1973,9 @@
               <a:buNone/>
             </a:pPr>
             <a:r>
-              <a:rPr lang="en-US" sz="1000" dirty="0">
-                <a:solidFill>
-                  <a:srgbClr val="345671"/>
+              <a:rPr lang="en-US" sz="1000" b="1" dirty="0">
+                <a:solidFill>
+                  <a:srgbClr val="0C2A3D"/>
                 </a:solidFill>
                 <a:latin typeface="Calibri" pitchFamily="34" charset="0"/>
                 <a:ea typeface="Calibri" pitchFamily="34" charset="-122"/>
@@ -2171,7 +2171,7 @@
             <a:r>
               <a:rPr lang="en-US" sz="1000" b="1" dirty="0">
                 <a:solidFill>
-                  <a:srgbClr val="059669"/>
+                  <a:srgbClr val="065F46"/>
                 </a:solidFill>
                 <a:latin typeface="Calibri" pitchFamily="34" charset="0"/>
                 <a:ea typeface="Calibri" pitchFamily="34" charset="-122"/>
@@ -2183,9 +2183,9 @@
               <a:buNone/>
             </a:pPr>
             <a:r>
-              <a:rPr lang="en-US" sz="1000" dirty="0">
-                <a:solidFill>
-                  <a:srgbClr val="345671"/>
+              <a:rPr lang="en-US" sz="1000" b="1" dirty="0">
+                <a:solidFill>
+                  <a:srgbClr val="0C2A3D"/>
                 </a:solidFill>
                 <a:latin typeface="Calibri" pitchFamily="34" charset="0"/>
                 <a:ea typeface="Calibri" pitchFamily="34" charset="-122"/>
@@ -2224,7 +2224,7 @@
             <a:r>
               <a:rPr lang="en-US" sz="1000" b="1" dirty="0">
                 <a:solidFill>
-                  <a:srgbClr val="059669"/>
+                  <a:srgbClr val="065F46"/>
                 </a:solidFill>
                 <a:latin typeface="Calibri" pitchFamily="34" charset="0"/>
                 <a:ea typeface="Calibri" pitchFamily="34" charset="-122"/>
@@ -2236,9 +2236,9 @@
               <a:buNone/>
             </a:pPr>
             <a:r>
-              <a:rPr lang="en-US" sz="1000" dirty="0">
-                <a:solidFill>
-                  <a:srgbClr val="345671"/>
+              <a:rPr lang="en-US" sz="1000" b="1" dirty="0">
+                <a:solidFill>
+                  <a:srgbClr val="0C2A3D"/>
                 </a:solidFill>
                 <a:latin typeface="Calibri" pitchFamily="34" charset="0"/>
                 <a:ea typeface="Calibri" pitchFamily="34" charset="-122"/>
@@ -2277,7 +2277,7 @@
             <a:r>
               <a:rPr lang="en-US" sz="1000" b="1" dirty="0">
                 <a:solidFill>
-                  <a:srgbClr val="059669"/>
+                  <a:srgbClr val="065F46"/>
                 </a:solidFill>
                 <a:latin typeface="Calibri" pitchFamily="34" charset="0"/>
                 <a:ea typeface="Calibri" pitchFamily="34" charset="-122"/>
@@ -2289,9 +2289,9 @@
               <a:buNone/>
             </a:pPr>
             <a:r>
-              <a:rPr lang="en-US" sz="1000" dirty="0">
-                <a:solidFill>
-                  <a:srgbClr val="345671"/>
+              <a:rPr lang="en-US" sz="1000" b="1" dirty="0">
+                <a:solidFill>
+                  <a:srgbClr val="0C2A3D"/>
                 </a:solidFill>
                 <a:latin typeface="Calibri" pitchFamily="34" charset="0"/>
                 <a:ea typeface="Calibri" pitchFamily="34" charset="-122"/>
@@ -2330,7 +2330,7 @@
             <a:r>
               <a:rPr lang="en-US" sz="1000" b="1" dirty="0">
                 <a:solidFill>
-                  <a:srgbClr val="059669"/>
+                  <a:srgbClr val="065F46"/>
                 </a:solidFill>
                 <a:latin typeface="Calibri" pitchFamily="34" charset="0"/>
                 <a:ea typeface="Calibri" pitchFamily="34" charset="-122"/>
@@ -2342,9 +2342,9 @@
               <a:buNone/>
             </a:pPr>
             <a:r>
-              <a:rPr lang="en-US" sz="1000" dirty="0">
-                <a:solidFill>
-                  <a:srgbClr val="345671"/>
+              <a:rPr lang="en-US" sz="1000" b="1" dirty="0">
+                <a:solidFill>
+                  <a:srgbClr val="0C2A3D"/>
                 </a:solidFill>
                 <a:latin typeface="Calibri" pitchFamily="34" charset="0"/>
                 <a:ea typeface="Calibri" pitchFamily="34" charset="-122"/>
@@ -2383,7 +2383,7 @@
             <a:r>
               <a:rPr lang="en-US" sz="1000" b="1" dirty="0">
                 <a:solidFill>
-                  <a:srgbClr val="059669"/>
+                  <a:srgbClr val="065F46"/>
                 </a:solidFill>
                 <a:latin typeface="Calibri" pitchFamily="34" charset="0"/>
                 <a:ea typeface="Calibri" pitchFamily="34" charset="-122"/>
@@ -2395,9 +2395,9 @@
               <a:buNone/>
             </a:pPr>
             <a:r>
-              <a:rPr lang="en-US" sz="1000" dirty="0">
-                <a:solidFill>
-                  <a:srgbClr val="345671"/>
+              <a:rPr lang="en-US" sz="1000" b="1" dirty="0">
+                <a:solidFill>
+                  <a:srgbClr val="0C2A3D"/>
                 </a:solidFill>
                 <a:latin typeface="Calibri" pitchFamily="34" charset="0"/>
                 <a:ea typeface="Calibri" pitchFamily="34" charset="-122"/>
@@ -2436,7 +2436,7 @@
             <a:r>
               <a:rPr lang="en-US" sz="1000" b="1" dirty="0">
                 <a:solidFill>
-                  <a:srgbClr val="059669"/>
+                  <a:srgbClr val="065F46"/>
                 </a:solidFill>
                 <a:latin typeface="Calibri" pitchFamily="34" charset="0"/>
                 <a:ea typeface="Calibri" pitchFamily="34" charset="-122"/>
@@ -2448,9 +2448,9 @@
               <a:buNone/>
             </a:pPr>
             <a:r>
-              <a:rPr lang="en-US" sz="1000" dirty="0">
-                <a:solidFill>
-                  <a:srgbClr val="345671"/>
+              <a:rPr lang="en-US" sz="1000" b="1" dirty="0">
+                <a:solidFill>
+                  <a:srgbClr val="0C2A3D"/>
                 </a:solidFill>
                 <a:latin typeface="Calibri" pitchFamily="34" charset="0"/>
                 <a:ea typeface="Calibri" pitchFamily="34" charset="-122"/>
@@ -2489,7 +2489,7 @@
             <a:r>
               <a:rPr lang="en-US" sz="1000" b="1" dirty="0">
                 <a:solidFill>
-                  <a:srgbClr val="059669"/>
+                  <a:srgbClr val="065F46"/>
                 </a:solidFill>
                 <a:latin typeface="Calibri" pitchFamily="34" charset="0"/>
                 <a:ea typeface="Calibri" pitchFamily="34" charset="-122"/>
@@ -2501,9 +2501,9 @@
               <a:buNone/>
             </a:pPr>
             <a:r>
-              <a:rPr lang="en-US" sz="1000" dirty="0">
-                <a:solidFill>
-                  <a:srgbClr val="345671"/>
+              <a:rPr lang="en-US" sz="1000" b="1" dirty="0">
+                <a:solidFill>
+                  <a:srgbClr val="0C2A3D"/>
                 </a:solidFill>
                 <a:latin typeface="Calibri" pitchFamily="34" charset="0"/>
                 <a:ea typeface="Calibri" pitchFamily="34" charset="-122"/>
@@ -2542,7 +2542,7 @@
             <a:r>
               <a:rPr lang="en-US" sz="1000" b="1" dirty="0">
                 <a:solidFill>
-                  <a:srgbClr val="059669"/>
+                  <a:srgbClr val="065F46"/>
                 </a:solidFill>
                 <a:latin typeface="Calibri" pitchFamily="34" charset="0"/>
                 <a:ea typeface="Calibri" pitchFamily="34" charset="-122"/>
@@ -2554,9 +2554,9 @@
               <a:buNone/>
             </a:pPr>
             <a:r>
-              <a:rPr lang="en-US" sz="1000" dirty="0">
-                <a:solidFill>
-                  <a:srgbClr val="345671"/>
+              <a:rPr lang="en-US" sz="1000" b="1" dirty="0">
+                <a:solidFill>
+                  <a:srgbClr val="0C2A3D"/>
                 </a:solidFill>
                 <a:latin typeface="Calibri" pitchFamily="34" charset="0"/>
                 <a:ea typeface="Calibri" pitchFamily="34" charset="-122"/>
@@ -2752,7 +2752,7 @@
             <a:r>
               <a:rPr lang="en-US" sz="1050" b="1" dirty="0">
                 <a:solidFill>
-                  <a:srgbClr val="D97706"/>
+                  <a:srgbClr val="B45309"/>
                 </a:solidFill>
                 <a:latin typeface="Calibri" pitchFamily="34" charset="0"/>
                 <a:ea typeface="Calibri" pitchFamily="34" charset="-122"/>
@@ -2764,9 +2764,9 @@
               <a:buNone/>
             </a:pPr>
             <a:r>
-              <a:rPr lang="en-US" sz="1050" dirty="0">
-                <a:solidFill>
-                  <a:srgbClr val="345671"/>
+              <a:rPr lang="en-US" sz="1050" b="1" dirty="0">
+                <a:solidFill>
+                  <a:srgbClr val="0C2A3D"/>
                 </a:solidFill>
                 <a:latin typeface="Calibri" pitchFamily="34" charset="0"/>
                 <a:ea typeface="Calibri" pitchFamily="34" charset="-122"/>
@@ -2805,7 +2805,7 @@
             <a:r>
               <a:rPr lang="en-US" sz="1050" b="1" dirty="0">
                 <a:solidFill>
-                  <a:srgbClr val="D97706"/>
+                  <a:srgbClr val="B45309"/>
                 </a:solidFill>
                 <a:latin typeface="Calibri" pitchFamily="34" charset="0"/>
                 <a:ea typeface="Calibri" pitchFamily="34" charset="-122"/>
@@ -2817,9 +2817,9 @@
               <a:buNone/>
             </a:pPr>
             <a:r>
-              <a:rPr lang="en-US" sz="1050" dirty="0">
-                <a:solidFill>
-                  <a:srgbClr val="345671"/>
+              <a:rPr lang="en-US" sz="1050" b="1" dirty="0">
+                <a:solidFill>
+                  <a:srgbClr val="0C2A3D"/>
                 </a:solidFill>
                 <a:latin typeface="Calibri" pitchFamily="34" charset="0"/>
                 <a:ea typeface="Calibri" pitchFamily="34" charset="-122"/>
@@ -2858,7 +2858,7 @@
             <a:r>
               <a:rPr lang="en-US" sz="1050" b="1" dirty="0">
                 <a:solidFill>
-                  <a:srgbClr val="D97706"/>
+                  <a:srgbClr val="B45309"/>
                 </a:solidFill>
                 <a:latin typeface="Calibri" pitchFamily="34" charset="0"/>
                 <a:ea typeface="Calibri" pitchFamily="34" charset="-122"/>
@@ -2870,9 +2870,9 @@
               <a:buNone/>
             </a:pPr>
             <a:r>
-              <a:rPr lang="en-US" sz="1050" dirty="0">
-                <a:solidFill>
-                  <a:srgbClr val="345671"/>
+              <a:rPr lang="en-US" sz="1050" b="1" dirty="0">
+                <a:solidFill>
+                  <a:srgbClr val="0C2A3D"/>
                 </a:solidFill>
                 <a:latin typeface="Calibri" pitchFamily="34" charset="0"/>
                 <a:ea typeface="Calibri" pitchFamily="34" charset="-122"/>
@@ -2911,7 +2911,7 @@
             <a:r>
               <a:rPr lang="en-US" sz="1050" b="1" dirty="0">
                 <a:solidFill>
-                  <a:srgbClr val="D97706"/>
+                  <a:srgbClr val="B45309"/>
                 </a:solidFill>
                 <a:latin typeface="Calibri" pitchFamily="34" charset="0"/>
                 <a:ea typeface="Calibri" pitchFamily="34" charset="-122"/>
@@ -2923,9 +2923,9 @@
               <a:buNone/>
             </a:pPr>
             <a:r>
-              <a:rPr lang="en-US" sz="1050" dirty="0">
-                <a:solidFill>
-                  <a:srgbClr val="345671"/>
+              <a:rPr lang="en-US" sz="1050" b="1" dirty="0">
+                <a:solidFill>
+                  <a:srgbClr val="0C2A3D"/>
                 </a:solidFill>
                 <a:latin typeface="Calibri" pitchFamily="34" charset="0"/>
                 <a:ea typeface="Calibri" pitchFamily="34" charset="-122"/>
@@ -3121,7 +3121,7 @@
             <a:r>
               <a:rPr lang="en-US" sz="1000" b="1" dirty="0">
                 <a:solidFill>
-                  <a:srgbClr val="7C3AED"/>
+                  <a:srgbClr val="5B21B6"/>
                 </a:solidFill>
                 <a:latin typeface="Calibri" pitchFamily="34" charset="0"/>
                 <a:ea typeface="Calibri" pitchFamily="34" charset="-122"/>
@@ -3133,9 +3133,9 @@
               <a:buNone/>
             </a:pPr>
             <a:r>
-              <a:rPr lang="en-US" sz="1000" dirty="0">
-                <a:solidFill>
-                  <a:srgbClr val="345671"/>
+              <a:rPr lang="en-US" sz="1000" b="1" dirty="0">
+                <a:solidFill>
+                  <a:srgbClr val="0C2A3D"/>
                 </a:solidFill>
                 <a:latin typeface="Calibri" pitchFamily="34" charset="0"/>
                 <a:ea typeface="Calibri" pitchFamily="34" charset="-122"/>
@@ -3174,7 +3174,7 @@
             <a:r>
               <a:rPr lang="en-US" sz="1000" b="1" dirty="0">
                 <a:solidFill>
-                  <a:srgbClr val="7C3AED"/>
+                  <a:srgbClr val="5B21B6"/>
                 </a:solidFill>
                 <a:latin typeface="Calibri" pitchFamily="34" charset="0"/>
                 <a:ea typeface="Calibri" pitchFamily="34" charset="-122"/>
@@ -3186,9 +3186,9 @@
               <a:buNone/>
             </a:pPr>
             <a:r>
-              <a:rPr lang="en-US" sz="1000" dirty="0">
-                <a:solidFill>
-                  <a:srgbClr val="345671"/>
+              <a:rPr lang="en-US" sz="1000" b="1" dirty="0">
+                <a:solidFill>
+                  <a:srgbClr val="0C2A3D"/>
                 </a:solidFill>
                 <a:latin typeface="Calibri" pitchFamily="34" charset="0"/>
                 <a:ea typeface="Calibri" pitchFamily="34" charset="-122"/>
@@ -3227,7 +3227,7 @@
             <a:r>
               <a:rPr lang="en-US" sz="1000" b="1" dirty="0">
                 <a:solidFill>
-                  <a:srgbClr val="7C3AED"/>
+                  <a:srgbClr val="5B21B6"/>
                 </a:solidFill>
                 <a:latin typeface="Calibri" pitchFamily="34" charset="0"/>
                 <a:ea typeface="Calibri" pitchFamily="34" charset="-122"/>
@@ -3239,9 +3239,9 @@
               <a:buNone/>
             </a:pPr>
             <a:r>
-              <a:rPr lang="en-US" sz="1000" dirty="0">
-                <a:solidFill>
-                  <a:srgbClr val="345671"/>
+              <a:rPr lang="en-US" sz="1000" b="1" dirty="0">
+                <a:solidFill>
+                  <a:srgbClr val="0C2A3D"/>
                 </a:solidFill>
                 <a:latin typeface="Calibri" pitchFamily="34" charset="0"/>
                 <a:ea typeface="Calibri" pitchFamily="34" charset="-122"/>
@@ -3280,7 +3280,7 @@
             <a:r>
               <a:rPr lang="en-US" sz="1000" b="1" dirty="0">
                 <a:solidFill>
-                  <a:srgbClr val="7C3AED"/>
+                  <a:srgbClr val="5B21B6"/>
                 </a:solidFill>
                 <a:latin typeface="Calibri" pitchFamily="34" charset="0"/>
                 <a:ea typeface="Calibri" pitchFamily="34" charset="-122"/>
@@ -3292,9 +3292,9 @@
               <a:buNone/>
             </a:pPr>
             <a:r>
-              <a:rPr lang="en-US" sz="1000" dirty="0">
-                <a:solidFill>
-                  <a:srgbClr val="345671"/>
+              <a:rPr lang="en-US" sz="1000" b="1" dirty="0">
+                <a:solidFill>
+                  <a:srgbClr val="0C2A3D"/>
                 </a:solidFill>
                 <a:latin typeface="Calibri" pitchFamily="34" charset="0"/>
                 <a:ea typeface="Calibri" pitchFamily="34" charset="-122"/>
@@ -3333,7 +3333,7 @@
             <a:r>
               <a:rPr lang="en-US" sz="1000" b="1" dirty="0">
                 <a:solidFill>
-                  <a:srgbClr val="7C3AED"/>
+                  <a:srgbClr val="5B21B6"/>
                 </a:solidFill>
                 <a:latin typeface="Calibri" pitchFamily="34" charset="0"/>
                 <a:ea typeface="Calibri" pitchFamily="34" charset="-122"/>
@@ -3345,9 +3345,9 @@
               <a:buNone/>
             </a:pPr>
             <a:r>
-              <a:rPr lang="en-US" sz="1000" dirty="0">
-                <a:solidFill>
-                  <a:srgbClr val="345671"/>
+              <a:rPr lang="en-US" sz="1000" b="1" dirty="0">
+                <a:solidFill>
+                  <a:srgbClr val="0C2A3D"/>
                 </a:solidFill>
                 <a:latin typeface="Calibri" pitchFamily="34" charset="0"/>
                 <a:ea typeface="Calibri" pitchFamily="34" charset="-122"/>
@@ -3386,7 +3386,7 @@
             <a:r>
               <a:rPr lang="en-US" sz="1000" b="1" dirty="0">
                 <a:solidFill>
-                  <a:srgbClr val="7C3AED"/>
+                  <a:srgbClr val="5B21B6"/>
                 </a:solidFill>
                 <a:latin typeface="Calibri" pitchFamily="34" charset="0"/>
                 <a:ea typeface="Calibri" pitchFamily="34" charset="-122"/>
@@ -3398,9 +3398,9 @@
               <a:buNone/>
             </a:pPr>
             <a:r>
-              <a:rPr lang="en-US" sz="1000" dirty="0">
-                <a:solidFill>
-                  <a:srgbClr val="345671"/>
+              <a:rPr lang="en-US" sz="1000" b="1" dirty="0">
+                <a:solidFill>
+                  <a:srgbClr val="0C2A3D"/>
                 </a:solidFill>
                 <a:latin typeface="Calibri" pitchFamily="34" charset="0"/>
                 <a:ea typeface="Calibri" pitchFamily="34" charset="-122"/>
@@ -3439,7 +3439,7 @@
             <a:r>
               <a:rPr lang="en-US" sz="1000" b="1" dirty="0">
                 <a:solidFill>
-                  <a:srgbClr val="7C3AED"/>
+                  <a:srgbClr val="5B21B6"/>
                 </a:solidFill>
                 <a:latin typeface="Calibri" pitchFamily="34" charset="0"/>
                 <a:ea typeface="Calibri" pitchFamily="34" charset="-122"/>
@@ -3451,9 +3451,9 @@
               <a:buNone/>
             </a:pPr>
             <a:r>
-              <a:rPr lang="en-US" sz="1000" dirty="0">
-                <a:solidFill>
-                  <a:srgbClr val="345671"/>
+              <a:rPr lang="en-US" sz="1000" b="1" dirty="0">
+                <a:solidFill>
+                  <a:srgbClr val="0C2A3D"/>
                 </a:solidFill>
                 <a:latin typeface="Calibri" pitchFamily="34" charset="0"/>
                 <a:ea typeface="Calibri" pitchFamily="34" charset="-122"/>
@@ -3492,7 +3492,7 @@
             <a:r>
               <a:rPr lang="en-US" sz="1000" b="1" dirty="0">
                 <a:solidFill>
-                  <a:srgbClr val="7C3AED"/>
+                  <a:srgbClr val="5B21B6"/>
                 </a:solidFill>
                 <a:latin typeface="Calibri" pitchFamily="34" charset="0"/>
                 <a:ea typeface="Calibri" pitchFamily="34" charset="-122"/>
@@ -3504,9 +3504,9 @@
               <a:buNone/>
             </a:pPr>
             <a:r>
-              <a:rPr lang="en-US" sz="1000" dirty="0">
-                <a:solidFill>
-                  <a:srgbClr val="345671"/>
+              <a:rPr lang="en-US" sz="1000" b="1" dirty="0">
+                <a:solidFill>
+                  <a:srgbClr val="0C2A3D"/>
                 </a:solidFill>
                 <a:latin typeface="Calibri" pitchFamily="34" charset="0"/>
                 <a:ea typeface="Calibri" pitchFamily="34" charset="-122"/>

--- a/outputs/flyers/USMLE_June_Advert.pptx
+++ b/outputs/flyers/USMLE_June_Advert.pptx
@@ -3791,7 +3791,21 @@
               <a:buNone/>
             </a:pPr>
             <a:r>
-              <a:rPr lang="en-US" sz="1100" b="1" dirty="0">
+              <a:rPr lang="en-US" sz="1050" dirty="0">
+                <a:solidFill>
+                  <a:srgbClr val="0C2A3D"/>
+                </a:solidFill>
+                <a:latin typeface="Calibri" pitchFamily="34" charset="0"/>
+                <a:ea typeface="Calibri" pitchFamily="34" charset="-122"/>
+                <a:cs typeface="Calibri" pitchFamily="34" charset="-120"/>
+              </a:rPr>
+              <a:t>Or find the sign-up link on </a:t>
+            </a:r>
+            <a:pPr indent="0" marL="0">
+              <a:buNone/>
+            </a:pPr>
+            <a:r>
+              <a:rPr lang="en-US" sz="1050" b="1" dirty="0">
                 <a:solidFill>
                   <a:srgbClr val="0284C7"/>
                 </a:solidFill>
@@ -3801,7 +3815,7 @@
               </a:rPr>
               <a:t>bakesiga.github.io/usmle-dashboard</a:t>
             </a:r>
-            <a:endParaRPr lang="en-US" sz="1100" dirty="0"/>
+            <a:endParaRPr lang="en-US" sz="1050" dirty="0"/>
           </a:p>
         </p:txBody>
       </p:sp>

--- a/outputs/flyers/USMLE_June_Advert.pptx
+++ b/outputs/flyers/USMLE_June_Advert.pptx
@@ -1154,7 +1154,7 @@
                 <a:ea typeface="Calibri" pitchFamily="34" charset="-122"/>
                 <a:cs typeface="Calibri" pitchFamily="34" charset="-120"/>
               </a:rPr>
-              <a:t>Allan Bakesiga, MD</a:t>
+              <a:t>Allan Bakesiga</a:t>
             </a:r>
             <a:endParaRPr lang="en-US" sz="1100" dirty="0"/>
           </a:p>

--- a/outputs/flyers/USMLE_June_Advert.pptx
+++ b/outputs/flyers/USMLE_June_Advert.pptx
@@ -883,7 +883,7 @@
         </p:nvSpPr>
         <p:spPr>
           <a:xfrm>
-            <a:off x="0" y="2203704"/>
+            <a:off x="0" y="2340864"/>
             <a:ext cx="8229600" cy="36576"/>
           </a:xfrm>
           <a:prstGeom prst="rect">
@@ -1169,7 +1169,7 @@
         <p:spPr>
           <a:xfrm>
             <a:off x="5961888" y="1746504"/>
-            <a:ext cx="1874520" cy="182880"/>
+            <a:ext cx="1874520" cy="173736"/>
           </a:xfrm>
           <a:prstGeom prst="rect">
             <a:avLst/>
@@ -1185,7 +1185,7 @@
               <a:buNone/>
             </a:pPr>
             <a:r>
-              <a:rPr lang="en-US" sz="950" b="1" dirty="0">
+              <a:rPr lang="en-US" sz="900" b="1" dirty="0">
                 <a:solidFill>
                   <a:srgbClr val="345671"/>
                 </a:solidFill>
@@ -1195,7 +1195,7 @@
               </a:rPr>
               <a:t>MD (Makerere)  ·  MScGH (Duke)</a:t>
             </a:r>
-            <a:endParaRPr lang="en-US" sz="950" dirty="0"/>
+            <a:endParaRPr lang="en-US" sz="900" dirty="0"/>
           </a:p>
         </p:txBody>
       </p:sp>
@@ -1207,8 +1207,8 @@
         </p:nvSpPr>
         <p:spPr>
           <a:xfrm>
-            <a:off x="5961888" y="1929384"/>
-            <a:ext cx="1874520" cy="182880"/>
+            <a:off x="5961888" y="1920240"/>
+            <a:ext cx="1874520" cy="173736"/>
           </a:xfrm>
           <a:prstGeom prst="rect">
             <a:avLst/>
@@ -1224,7 +1224,7 @@
               <a:buNone/>
             </a:pPr>
             <a:r>
-              <a:rPr lang="en-US" sz="950" b="1" dirty="0">
+              <a:rPr lang="en-US" sz="900" b="1" dirty="0">
                 <a:solidFill>
                   <a:srgbClr val="345671"/>
                 </a:solidFill>
@@ -1232,21 +1232,60 @@
                 <a:ea typeface="Calibri" pitchFamily="34" charset="-122"/>
                 <a:cs typeface="Calibri" pitchFamily="34" charset="-120"/>
               </a:rPr>
+              <a:t>Past TA · Epi &amp; Biostats (Duke)</a:t>
+            </a:r>
+            <a:endParaRPr lang="en-US" sz="900" dirty="0"/>
+          </a:p>
+        </p:txBody>
+      </p:sp>
+      <p:sp>
+        <p:nvSpPr>
+          <p:cNvPr id="12" name="Text 9"/>
+          <p:cNvSpPr/>
+          <p:nvPr/>
+        </p:nvSpPr>
+        <p:spPr>
+          <a:xfrm>
+            <a:off x="5961888" y="2093976"/>
+            <a:ext cx="1874520" cy="173736"/>
+          </a:xfrm>
+          <a:prstGeom prst="rect">
+            <a:avLst/>
+          </a:prstGeom>
+          <a:noFill/>
+          <a:ln/>
+        </p:spPr>
+        <p:txBody>
+          <a:bodyPr wrap="square" lIns="0" tIns="0" rIns="0" bIns="0" rtlCol="0" anchor="ctr"/>
+          <a:lstStyle/>
+          <a:p>
+            <a:pPr algn="ctr" indent="0" marL="0">
+              <a:buNone/>
+            </a:pPr>
+            <a:r>
+              <a:rPr lang="en-US" sz="900" b="1" dirty="0">
+                <a:solidFill>
+                  <a:srgbClr val="345671"/>
+                </a:solidFill>
+                <a:latin typeface="Calibri" pitchFamily="34" charset="0"/>
+                <a:ea typeface="Calibri" pitchFamily="34" charset="-122"/>
+                <a:cs typeface="Calibri" pitchFamily="34" charset="-120"/>
+              </a:rPr>
               <a:t>PGY-1 Neurology, Creighton</a:t>
             </a:r>
-            <a:endParaRPr lang="en-US" sz="950" dirty="0"/>
-          </a:p>
-        </p:txBody>
-      </p:sp>
-      <p:sp>
-        <p:nvSpPr>
-          <p:cNvPr id="12" name="Text 9"/>
-          <p:cNvSpPr/>
-          <p:nvPr/>
-        </p:nvSpPr>
-        <p:spPr>
-          <a:xfrm>
-            <a:off x="502920" y="2441448"/>
+            <a:endParaRPr lang="en-US" sz="900" dirty="0"/>
+          </a:p>
+        </p:txBody>
+      </p:sp>
+      <p:sp>
+        <p:nvSpPr>
+          <p:cNvPr id="13" name="Text 10"/>
+          <p:cNvSpPr/>
+          <p:nvPr/>
+        </p:nvSpPr>
+        <p:spPr>
+          <a:xfrm>
+            <a:off x="502920" y="2578608"/>
             <a:ext cx="7223760" cy="237744"/>
           </a:xfrm>
           <a:prstGeom prst="rect">
@@ -1279,13 +1318,13 @@
       </p:sp>
       <p:sp>
         <p:nvSpPr>
-          <p:cNvPr id="13" name="Shape 10"/>
-          <p:cNvSpPr/>
-          <p:nvPr/>
-        </p:nvSpPr>
-        <p:spPr>
-          <a:xfrm>
-            <a:off x="502920" y="2743200"/>
+          <p:cNvPr id="14" name="Shape 11"/>
+          <p:cNvSpPr/>
+          <p:nvPr/>
+        </p:nvSpPr>
+        <p:spPr>
+          <a:xfrm>
+            <a:off x="502920" y="2880360"/>
             <a:ext cx="1005840" cy="0"/>
           </a:xfrm>
           <a:prstGeom prst="line">
@@ -1302,13 +1341,13 @@
       </p:sp>
       <p:sp>
         <p:nvSpPr>
-          <p:cNvPr id="14" name="Shape 11"/>
-          <p:cNvSpPr/>
-          <p:nvPr/>
-        </p:nvSpPr>
-        <p:spPr>
-          <a:xfrm>
-            <a:off x="502920" y="2743200"/>
+          <p:cNvPr id="15" name="Shape 12"/>
+          <p:cNvSpPr/>
+          <p:nvPr/>
+        </p:nvSpPr>
+        <p:spPr>
+          <a:xfrm>
+            <a:off x="502920" y="2880360"/>
             <a:ext cx="3543300" cy="2377440"/>
           </a:xfrm>
           <a:prstGeom prst="roundRect">
@@ -1329,13 +1368,13 @@
       </p:sp>
       <p:sp>
         <p:nvSpPr>
-          <p:cNvPr id="15" name="Shape 12"/>
-          <p:cNvSpPr/>
-          <p:nvPr/>
-        </p:nvSpPr>
-        <p:spPr>
-          <a:xfrm>
-            <a:off x="502920" y="2816352"/>
+          <p:cNvPr id="16" name="Shape 13"/>
+          <p:cNvSpPr/>
+          <p:nvPr/>
+        </p:nvSpPr>
+        <p:spPr>
+          <a:xfrm>
+            <a:off x="502920" y="2953512"/>
             <a:ext cx="3543300" cy="493776"/>
           </a:xfrm>
           <a:prstGeom prst="rect">
@@ -1354,13 +1393,13 @@
       </p:sp>
       <p:sp>
         <p:nvSpPr>
-          <p:cNvPr id="16" name="Shape 13"/>
-          <p:cNvSpPr/>
-          <p:nvPr/>
-        </p:nvSpPr>
-        <p:spPr>
-          <a:xfrm>
-            <a:off x="502920" y="2743200"/>
+          <p:cNvPr id="17" name="Shape 14"/>
+          <p:cNvSpPr/>
+          <p:nvPr/>
+        </p:nvSpPr>
+        <p:spPr>
+          <a:xfrm>
+            <a:off x="502920" y="2880360"/>
             <a:ext cx="3543300" cy="566928"/>
           </a:xfrm>
           <a:prstGeom prst="roundRect">
@@ -1381,13 +1420,13 @@
       </p:sp>
       <p:sp>
         <p:nvSpPr>
-          <p:cNvPr id="17" name="Text 14"/>
-          <p:cNvSpPr/>
-          <p:nvPr/>
-        </p:nvSpPr>
-        <p:spPr>
-          <a:xfrm>
-            <a:off x="630936" y="2798064"/>
+          <p:cNvPr id="18" name="Text 15"/>
+          <p:cNvSpPr/>
+          <p:nvPr/>
+        </p:nvSpPr>
+        <p:spPr>
+          <a:xfrm>
+            <a:off x="630936" y="2935224"/>
             <a:ext cx="3287268" cy="256032"/>
           </a:xfrm>
           <a:prstGeom prst="rect">
@@ -1420,13 +1459,13 @@
       </p:sp>
       <p:sp>
         <p:nvSpPr>
-          <p:cNvPr id="18" name="Text 15"/>
-          <p:cNvSpPr/>
-          <p:nvPr/>
-        </p:nvSpPr>
-        <p:spPr>
-          <a:xfrm>
-            <a:off x="630936" y="3054096"/>
+          <p:cNvPr id="19" name="Text 16"/>
+          <p:cNvSpPr/>
+          <p:nvPr/>
+        </p:nvSpPr>
+        <p:spPr>
+          <a:xfrm>
+            <a:off x="630936" y="3191256"/>
             <a:ext cx="3287268" cy="219456"/>
           </a:xfrm>
           <a:prstGeom prst="rect">
@@ -1459,13 +1498,13 @@
       </p:sp>
       <p:sp>
         <p:nvSpPr>
-          <p:cNvPr id="19" name="Text 16"/>
-          <p:cNvSpPr/>
-          <p:nvPr/>
-        </p:nvSpPr>
-        <p:spPr>
-          <a:xfrm>
-            <a:off x="630936" y="3401568"/>
+          <p:cNvPr id="20" name="Text 17"/>
+          <p:cNvSpPr/>
+          <p:nvPr/>
+        </p:nvSpPr>
+        <p:spPr>
+          <a:xfrm>
+            <a:off x="630936" y="3538728"/>
             <a:ext cx="3287268" cy="164592"/>
           </a:xfrm>
           <a:prstGeom prst="rect">
@@ -1512,13 +1551,13 @@
       </p:sp>
       <p:sp>
         <p:nvSpPr>
-          <p:cNvPr id="20" name="Text 17"/>
-          <p:cNvSpPr/>
-          <p:nvPr/>
-        </p:nvSpPr>
-        <p:spPr>
-          <a:xfrm>
-            <a:off x="630936" y="3566160"/>
+          <p:cNvPr id="21" name="Text 18"/>
+          <p:cNvSpPr/>
+          <p:nvPr/>
+        </p:nvSpPr>
+        <p:spPr>
+          <a:xfrm>
+            <a:off x="630936" y="3703320"/>
             <a:ext cx="3287268" cy="164592"/>
           </a:xfrm>
           <a:prstGeom prst="rect">
@@ -1565,13 +1604,13 @@
       </p:sp>
       <p:sp>
         <p:nvSpPr>
-          <p:cNvPr id="21" name="Text 18"/>
-          <p:cNvSpPr/>
-          <p:nvPr/>
-        </p:nvSpPr>
-        <p:spPr>
-          <a:xfrm>
-            <a:off x="630936" y="3730752"/>
+          <p:cNvPr id="22" name="Text 19"/>
+          <p:cNvSpPr/>
+          <p:nvPr/>
+        </p:nvSpPr>
+        <p:spPr>
+          <a:xfrm>
+            <a:off x="630936" y="3867912"/>
             <a:ext cx="3287268" cy="164592"/>
           </a:xfrm>
           <a:prstGeom prst="rect">
@@ -1618,13 +1657,13 @@
       </p:sp>
       <p:sp>
         <p:nvSpPr>
-          <p:cNvPr id="22" name="Text 19"/>
-          <p:cNvSpPr/>
-          <p:nvPr/>
-        </p:nvSpPr>
-        <p:spPr>
-          <a:xfrm>
-            <a:off x="630936" y="3895344"/>
+          <p:cNvPr id="23" name="Text 20"/>
+          <p:cNvSpPr/>
+          <p:nvPr/>
+        </p:nvSpPr>
+        <p:spPr>
+          <a:xfrm>
+            <a:off x="630936" y="4032504"/>
             <a:ext cx="3287268" cy="164592"/>
           </a:xfrm>
           <a:prstGeom prst="rect">
@@ -1671,13 +1710,13 @@
       </p:sp>
       <p:sp>
         <p:nvSpPr>
-          <p:cNvPr id="23" name="Text 20"/>
-          <p:cNvSpPr/>
-          <p:nvPr/>
-        </p:nvSpPr>
-        <p:spPr>
-          <a:xfrm>
-            <a:off x="630936" y="4059936"/>
+          <p:cNvPr id="24" name="Text 21"/>
+          <p:cNvSpPr/>
+          <p:nvPr/>
+        </p:nvSpPr>
+        <p:spPr>
+          <a:xfrm>
+            <a:off x="630936" y="4197096"/>
             <a:ext cx="3287268" cy="164592"/>
           </a:xfrm>
           <a:prstGeom prst="rect">
@@ -1724,13 +1763,13 @@
       </p:sp>
       <p:sp>
         <p:nvSpPr>
-          <p:cNvPr id="24" name="Text 21"/>
-          <p:cNvSpPr/>
-          <p:nvPr/>
-        </p:nvSpPr>
-        <p:spPr>
-          <a:xfrm>
-            <a:off x="630936" y="4224528"/>
+          <p:cNvPr id="25" name="Text 22"/>
+          <p:cNvSpPr/>
+          <p:nvPr/>
+        </p:nvSpPr>
+        <p:spPr>
+          <a:xfrm>
+            <a:off x="630936" y="4361688"/>
             <a:ext cx="3287268" cy="164592"/>
           </a:xfrm>
           <a:prstGeom prst="rect">
@@ -1777,13 +1816,13 @@
       </p:sp>
       <p:sp>
         <p:nvSpPr>
-          <p:cNvPr id="25" name="Text 22"/>
-          <p:cNvSpPr/>
-          <p:nvPr/>
-        </p:nvSpPr>
-        <p:spPr>
-          <a:xfrm>
-            <a:off x="630936" y="4389120"/>
+          <p:cNvPr id="26" name="Text 23"/>
+          <p:cNvSpPr/>
+          <p:nvPr/>
+        </p:nvSpPr>
+        <p:spPr>
+          <a:xfrm>
+            <a:off x="630936" y="4526280"/>
             <a:ext cx="3287268" cy="164592"/>
           </a:xfrm>
           <a:prstGeom prst="rect">
@@ -1830,13 +1869,13 @@
       </p:sp>
       <p:sp>
         <p:nvSpPr>
-          <p:cNvPr id="26" name="Text 23"/>
-          <p:cNvSpPr/>
-          <p:nvPr/>
-        </p:nvSpPr>
-        <p:spPr>
-          <a:xfrm>
-            <a:off x="630936" y="4553712"/>
+          <p:cNvPr id="27" name="Text 24"/>
+          <p:cNvSpPr/>
+          <p:nvPr/>
+        </p:nvSpPr>
+        <p:spPr>
+          <a:xfrm>
+            <a:off x="630936" y="4690872"/>
             <a:ext cx="3287268" cy="164592"/>
           </a:xfrm>
           <a:prstGeom prst="rect">
@@ -1883,13 +1922,13 @@
       </p:sp>
       <p:sp>
         <p:nvSpPr>
-          <p:cNvPr id="27" name="Text 24"/>
-          <p:cNvSpPr/>
-          <p:nvPr/>
-        </p:nvSpPr>
-        <p:spPr>
-          <a:xfrm>
-            <a:off x="630936" y="4718304"/>
+          <p:cNvPr id="28" name="Text 25"/>
+          <p:cNvSpPr/>
+          <p:nvPr/>
+        </p:nvSpPr>
+        <p:spPr>
+          <a:xfrm>
+            <a:off x="630936" y="4855464"/>
             <a:ext cx="3287268" cy="164592"/>
           </a:xfrm>
           <a:prstGeom prst="rect">
@@ -1936,13 +1975,13 @@
       </p:sp>
       <p:sp>
         <p:nvSpPr>
-          <p:cNvPr id="28" name="Text 25"/>
-          <p:cNvSpPr/>
-          <p:nvPr/>
-        </p:nvSpPr>
-        <p:spPr>
-          <a:xfrm>
-            <a:off x="630936" y="4882896"/>
+          <p:cNvPr id="29" name="Text 26"/>
+          <p:cNvSpPr/>
+          <p:nvPr/>
+        </p:nvSpPr>
+        <p:spPr>
+          <a:xfrm>
+            <a:off x="630936" y="5020056"/>
             <a:ext cx="3287268" cy="164592"/>
           </a:xfrm>
           <a:prstGeom prst="rect">
@@ -1989,13 +2028,13 @@
       </p:sp>
       <p:sp>
         <p:nvSpPr>
-          <p:cNvPr id="29" name="Shape 26"/>
-          <p:cNvSpPr/>
-          <p:nvPr/>
-        </p:nvSpPr>
-        <p:spPr>
-          <a:xfrm>
-            <a:off x="4183380" y="2743200"/>
+          <p:cNvPr id="30" name="Shape 27"/>
+          <p:cNvSpPr/>
+          <p:nvPr/>
+        </p:nvSpPr>
+        <p:spPr>
+          <a:xfrm>
+            <a:off x="4183380" y="2880360"/>
             <a:ext cx="3543300" cy="2377440"/>
           </a:xfrm>
           <a:prstGeom prst="roundRect">
@@ -2016,13 +2055,13 @@
       </p:sp>
       <p:sp>
         <p:nvSpPr>
-          <p:cNvPr id="30" name="Shape 27"/>
-          <p:cNvSpPr/>
-          <p:nvPr/>
-        </p:nvSpPr>
-        <p:spPr>
-          <a:xfrm>
-            <a:off x="4183380" y="2816352"/>
+          <p:cNvPr id="31" name="Shape 28"/>
+          <p:cNvSpPr/>
+          <p:nvPr/>
+        </p:nvSpPr>
+        <p:spPr>
+          <a:xfrm>
+            <a:off x="4183380" y="2953512"/>
             <a:ext cx="3543300" cy="493776"/>
           </a:xfrm>
           <a:prstGeom prst="rect">
@@ -2041,13 +2080,13 @@
       </p:sp>
       <p:sp>
         <p:nvSpPr>
-          <p:cNvPr id="31" name="Shape 28"/>
-          <p:cNvSpPr/>
-          <p:nvPr/>
-        </p:nvSpPr>
-        <p:spPr>
-          <a:xfrm>
-            <a:off x="4183380" y="2743200"/>
+          <p:cNvPr id="32" name="Shape 29"/>
+          <p:cNvSpPr/>
+          <p:nvPr/>
+        </p:nvSpPr>
+        <p:spPr>
+          <a:xfrm>
+            <a:off x="4183380" y="2880360"/>
             <a:ext cx="3543300" cy="566928"/>
           </a:xfrm>
           <a:prstGeom prst="roundRect">
@@ -2068,13 +2107,13 @@
       </p:sp>
       <p:sp>
         <p:nvSpPr>
-          <p:cNvPr id="32" name="Text 29"/>
-          <p:cNvSpPr/>
-          <p:nvPr/>
-        </p:nvSpPr>
-        <p:spPr>
-          <a:xfrm>
-            <a:off x="4311396" y="2798064"/>
+          <p:cNvPr id="33" name="Text 30"/>
+          <p:cNvSpPr/>
+          <p:nvPr/>
+        </p:nvSpPr>
+        <p:spPr>
+          <a:xfrm>
+            <a:off x="4311396" y="2935224"/>
             <a:ext cx="3287268" cy="256032"/>
           </a:xfrm>
           <a:prstGeom prst="rect">
@@ -2107,13 +2146,13 @@
       </p:sp>
       <p:sp>
         <p:nvSpPr>
-          <p:cNvPr id="33" name="Text 30"/>
-          <p:cNvSpPr/>
-          <p:nvPr/>
-        </p:nvSpPr>
-        <p:spPr>
-          <a:xfrm>
-            <a:off x="4311396" y="3054096"/>
+          <p:cNvPr id="34" name="Text 31"/>
+          <p:cNvSpPr/>
+          <p:nvPr/>
+        </p:nvSpPr>
+        <p:spPr>
+          <a:xfrm>
+            <a:off x="4311396" y="3191256"/>
             <a:ext cx="3287268" cy="219456"/>
           </a:xfrm>
           <a:prstGeom prst="rect">
@@ -2146,13 +2185,13 @@
       </p:sp>
       <p:sp>
         <p:nvSpPr>
-          <p:cNvPr id="34" name="Text 31"/>
-          <p:cNvSpPr/>
-          <p:nvPr/>
-        </p:nvSpPr>
-        <p:spPr>
-          <a:xfrm>
-            <a:off x="4311396" y="3401568"/>
+          <p:cNvPr id="35" name="Text 32"/>
+          <p:cNvSpPr/>
+          <p:nvPr/>
+        </p:nvSpPr>
+        <p:spPr>
+          <a:xfrm>
+            <a:off x="4311396" y="3538728"/>
             <a:ext cx="3287268" cy="205740"/>
           </a:xfrm>
           <a:prstGeom prst="rect">
@@ -2199,13 +2238,13 @@
       </p:sp>
       <p:sp>
         <p:nvSpPr>
-          <p:cNvPr id="35" name="Text 32"/>
-          <p:cNvSpPr/>
-          <p:nvPr/>
-        </p:nvSpPr>
-        <p:spPr>
-          <a:xfrm>
-            <a:off x="4311396" y="3607308"/>
+          <p:cNvPr id="36" name="Text 33"/>
+          <p:cNvSpPr/>
+          <p:nvPr/>
+        </p:nvSpPr>
+        <p:spPr>
+          <a:xfrm>
+            <a:off x="4311396" y="3744468"/>
             <a:ext cx="3287268" cy="205740"/>
           </a:xfrm>
           <a:prstGeom prst="rect">
@@ -2252,13 +2291,13 @@
       </p:sp>
       <p:sp>
         <p:nvSpPr>
-          <p:cNvPr id="36" name="Text 33"/>
-          <p:cNvSpPr/>
-          <p:nvPr/>
-        </p:nvSpPr>
-        <p:spPr>
-          <a:xfrm>
-            <a:off x="4311396" y="3813048"/>
+          <p:cNvPr id="37" name="Text 34"/>
+          <p:cNvSpPr/>
+          <p:nvPr/>
+        </p:nvSpPr>
+        <p:spPr>
+          <a:xfrm>
+            <a:off x="4311396" y="3950208"/>
             <a:ext cx="3287268" cy="205740"/>
           </a:xfrm>
           <a:prstGeom prst="rect">
@@ -2305,13 +2344,13 @@
       </p:sp>
       <p:sp>
         <p:nvSpPr>
-          <p:cNvPr id="37" name="Text 34"/>
-          <p:cNvSpPr/>
-          <p:nvPr/>
-        </p:nvSpPr>
-        <p:spPr>
-          <a:xfrm>
-            <a:off x="4311396" y="4018788"/>
+          <p:cNvPr id="38" name="Text 35"/>
+          <p:cNvSpPr/>
+          <p:nvPr/>
+        </p:nvSpPr>
+        <p:spPr>
+          <a:xfrm>
+            <a:off x="4311396" y="4155948"/>
             <a:ext cx="3287268" cy="205740"/>
           </a:xfrm>
           <a:prstGeom prst="rect">
@@ -2358,13 +2397,13 @@
       </p:sp>
       <p:sp>
         <p:nvSpPr>
-          <p:cNvPr id="38" name="Text 35"/>
-          <p:cNvSpPr/>
-          <p:nvPr/>
-        </p:nvSpPr>
-        <p:spPr>
-          <a:xfrm>
-            <a:off x="4311396" y="4224528"/>
+          <p:cNvPr id="39" name="Text 36"/>
+          <p:cNvSpPr/>
+          <p:nvPr/>
+        </p:nvSpPr>
+        <p:spPr>
+          <a:xfrm>
+            <a:off x="4311396" y="4361688"/>
             <a:ext cx="3287268" cy="205740"/>
           </a:xfrm>
           <a:prstGeom prst="rect">
@@ -2411,13 +2450,13 @@
       </p:sp>
       <p:sp>
         <p:nvSpPr>
-          <p:cNvPr id="39" name="Text 36"/>
-          <p:cNvSpPr/>
-          <p:nvPr/>
-        </p:nvSpPr>
-        <p:spPr>
-          <a:xfrm>
-            <a:off x="4311396" y="4430268"/>
+          <p:cNvPr id="40" name="Text 37"/>
+          <p:cNvSpPr/>
+          <p:nvPr/>
+        </p:nvSpPr>
+        <p:spPr>
+          <a:xfrm>
+            <a:off x="4311396" y="4567428"/>
             <a:ext cx="3287268" cy="205740"/>
           </a:xfrm>
           <a:prstGeom prst="rect">
@@ -2464,13 +2503,13 @@
       </p:sp>
       <p:sp>
         <p:nvSpPr>
-          <p:cNvPr id="40" name="Text 37"/>
-          <p:cNvSpPr/>
-          <p:nvPr/>
-        </p:nvSpPr>
-        <p:spPr>
-          <a:xfrm>
-            <a:off x="4311396" y="4636008"/>
+          <p:cNvPr id="41" name="Text 38"/>
+          <p:cNvSpPr/>
+          <p:nvPr/>
+        </p:nvSpPr>
+        <p:spPr>
+          <a:xfrm>
+            <a:off x="4311396" y="4773168"/>
             <a:ext cx="3287268" cy="205740"/>
           </a:xfrm>
           <a:prstGeom prst="rect">
@@ -2517,13 +2556,13 @@
       </p:sp>
       <p:sp>
         <p:nvSpPr>
-          <p:cNvPr id="41" name="Text 38"/>
-          <p:cNvSpPr/>
-          <p:nvPr/>
-        </p:nvSpPr>
-        <p:spPr>
-          <a:xfrm>
-            <a:off x="4311396" y="4841748"/>
+          <p:cNvPr id="42" name="Text 39"/>
+          <p:cNvSpPr/>
+          <p:nvPr/>
+        </p:nvSpPr>
+        <p:spPr>
+          <a:xfrm>
+            <a:off x="4311396" y="4978908"/>
             <a:ext cx="3287268" cy="205740"/>
           </a:xfrm>
           <a:prstGeom prst="rect">
@@ -2570,13 +2609,13 @@
       </p:sp>
       <p:sp>
         <p:nvSpPr>
-          <p:cNvPr id="42" name="Shape 39"/>
-          <p:cNvSpPr/>
-          <p:nvPr/>
-        </p:nvSpPr>
-        <p:spPr>
-          <a:xfrm>
-            <a:off x="502920" y="5257800"/>
+          <p:cNvPr id="43" name="Shape 40"/>
+          <p:cNvSpPr/>
+          <p:nvPr/>
+        </p:nvSpPr>
+        <p:spPr>
+          <a:xfrm>
+            <a:off x="502920" y="5394960"/>
             <a:ext cx="3543300" cy="2377440"/>
           </a:xfrm>
           <a:prstGeom prst="roundRect">
@@ -2597,13 +2636,13 @@
       </p:sp>
       <p:sp>
         <p:nvSpPr>
-          <p:cNvPr id="43" name="Shape 40"/>
-          <p:cNvSpPr/>
-          <p:nvPr/>
-        </p:nvSpPr>
-        <p:spPr>
-          <a:xfrm>
-            <a:off x="502920" y="5330952"/>
+          <p:cNvPr id="44" name="Shape 41"/>
+          <p:cNvSpPr/>
+          <p:nvPr/>
+        </p:nvSpPr>
+        <p:spPr>
+          <a:xfrm>
+            <a:off x="502920" y="5468112"/>
             <a:ext cx="3543300" cy="493776"/>
           </a:xfrm>
           <a:prstGeom prst="rect">
@@ -2622,13 +2661,13 @@
       </p:sp>
       <p:sp>
         <p:nvSpPr>
-          <p:cNvPr id="44" name="Shape 41"/>
-          <p:cNvSpPr/>
-          <p:nvPr/>
-        </p:nvSpPr>
-        <p:spPr>
-          <a:xfrm>
-            <a:off x="502920" y="5257800"/>
+          <p:cNvPr id="45" name="Shape 42"/>
+          <p:cNvSpPr/>
+          <p:nvPr/>
+        </p:nvSpPr>
+        <p:spPr>
+          <a:xfrm>
+            <a:off x="502920" y="5394960"/>
             <a:ext cx="3543300" cy="566928"/>
           </a:xfrm>
           <a:prstGeom prst="roundRect">
@@ -2649,13 +2688,13 @@
       </p:sp>
       <p:sp>
         <p:nvSpPr>
-          <p:cNvPr id="45" name="Text 42"/>
-          <p:cNvSpPr/>
-          <p:nvPr/>
-        </p:nvSpPr>
-        <p:spPr>
-          <a:xfrm>
-            <a:off x="630936" y="5312664"/>
+          <p:cNvPr id="46" name="Text 43"/>
+          <p:cNvSpPr/>
+          <p:nvPr/>
+        </p:nvSpPr>
+        <p:spPr>
+          <a:xfrm>
+            <a:off x="630936" y="5449824"/>
             <a:ext cx="3287268" cy="256032"/>
           </a:xfrm>
           <a:prstGeom prst="rect">
@@ -2688,13 +2727,13 @@
       </p:sp>
       <p:sp>
         <p:nvSpPr>
-          <p:cNvPr id="46" name="Text 43"/>
-          <p:cNvSpPr/>
-          <p:nvPr/>
-        </p:nvSpPr>
-        <p:spPr>
-          <a:xfrm>
-            <a:off x="630936" y="5568696"/>
+          <p:cNvPr id="47" name="Text 44"/>
+          <p:cNvSpPr/>
+          <p:nvPr/>
+        </p:nvSpPr>
+        <p:spPr>
+          <a:xfrm>
+            <a:off x="630936" y="5705856"/>
             <a:ext cx="3287268" cy="219456"/>
           </a:xfrm>
           <a:prstGeom prst="rect">
@@ -2727,13 +2766,13 @@
       </p:sp>
       <p:sp>
         <p:nvSpPr>
-          <p:cNvPr id="47" name="Text 44"/>
-          <p:cNvSpPr/>
-          <p:nvPr/>
-        </p:nvSpPr>
-        <p:spPr>
-          <a:xfrm>
-            <a:off x="630936" y="5916168"/>
+          <p:cNvPr id="48" name="Text 45"/>
+          <p:cNvSpPr/>
+          <p:nvPr/>
+        </p:nvSpPr>
+        <p:spPr>
+          <a:xfrm>
+            <a:off x="630936" y="6053328"/>
             <a:ext cx="3287268" cy="411480"/>
           </a:xfrm>
           <a:prstGeom prst="rect">
@@ -2780,13 +2819,13 @@
       </p:sp>
       <p:sp>
         <p:nvSpPr>
-          <p:cNvPr id="48" name="Text 45"/>
-          <p:cNvSpPr/>
-          <p:nvPr/>
-        </p:nvSpPr>
-        <p:spPr>
-          <a:xfrm>
-            <a:off x="630936" y="6327648"/>
+          <p:cNvPr id="49" name="Text 46"/>
+          <p:cNvSpPr/>
+          <p:nvPr/>
+        </p:nvSpPr>
+        <p:spPr>
+          <a:xfrm>
+            <a:off x="630936" y="6464808"/>
             <a:ext cx="3287268" cy="411480"/>
           </a:xfrm>
           <a:prstGeom prst="rect">
@@ -2833,13 +2872,13 @@
       </p:sp>
       <p:sp>
         <p:nvSpPr>
-          <p:cNvPr id="49" name="Text 46"/>
-          <p:cNvSpPr/>
-          <p:nvPr/>
-        </p:nvSpPr>
-        <p:spPr>
-          <a:xfrm>
-            <a:off x="630936" y="6739128"/>
+          <p:cNvPr id="50" name="Text 47"/>
+          <p:cNvSpPr/>
+          <p:nvPr/>
+        </p:nvSpPr>
+        <p:spPr>
+          <a:xfrm>
+            <a:off x="630936" y="6876288"/>
             <a:ext cx="3287268" cy="411480"/>
           </a:xfrm>
           <a:prstGeom prst="rect">
@@ -2886,13 +2925,13 @@
       </p:sp>
       <p:sp>
         <p:nvSpPr>
-          <p:cNvPr id="50" name="Text 47"/>
-          <p:cNvSpPr/>
-          <p:nvPr/>
-        </p:nvSpPr>
-        <p:spPr>
-          <a:xfrm>
-            <a:off x="630936" y="7150608"/>
+          <p:cNvPr id="51" name="Text 48"/>
+          <p:cNvSpPr/>
+          <p:nvPr/>
+        </p:nvSpPr>
+        <p:spPr>
+          <a:xfrm>
+            <a:off x="630936" y="7287768"/>
             <a:ext cx="3287268" cy="411480"/>
           </a:xfrm>
           <a:prstGeom prst="rect">
@@ -2939,13 +2978,13 @@
       </p:sp>
       <p:sp>
         <p:nvSpPr>
-          <p:cNvPr id="51" name="Shape 48"/>
-          <p:cNvSpPr/>
-          <p:nvPr/>
-        </p:nvSpPr>
-        <p:spPr>
-          <a:xfrm>
-            <a:off x="4183380" y="5257800"/>
+          <p:cNvPr id="52" name="Shape 49"/>
+          <p:cNvSpPr/>
+          <p:nvPr/>
+        </p:nvSpPr>
+        <p:spPr>
+          <a:xfrm>
+            <a:off x="4183380" y="5394960"/>
             <a:ext cx="3543300" cy="2377440"/>
           </a:xfrm>
           <a:prstGeom prst="roundRect">
@@ -2966,13 +3005,13 @@
       </p:sp>
       <p:sp>
         <p:nvSpPr>
-          <p:cNvPr id="52" name="Shape 49"/>
-          <p:cNvSpPr/>
-          <p:nvPr/>
-        </p:nvSpPr>
-        <p:spPr>
-          <a:xfrm>
-            <a:off x="4183380" y="5330952"/>
+          <p:cNvPr id="53" name="Shape 50"/>
+          <p:cNvSpPr/>
+          <p:nvPr/>
+        </p:nvSpPr>
+        <p:spPr>
+          <a:xfrm>
+            <a:off x="4183380" y="5468112"/>
             <a:ext cx="3543300" cy="493776"/>
           </a:xfrm>
           <a:prstGeom prst="rect">
@@ -2991,13 +3030,13 @@
       </p:sp>
       <p:sp>
         <p:nvSpPr>
-          <p:cNvPr id="53" name="Shape 50"/>
-          <p:cNvSpPr/>
-          <p:nvPr/>
-        </p:nvSpPr>
-        <p:spPr>
-          <a:xfrm>
-            <a:off x="4183380" y="5257800"/>
+          <p:cNvPr id="54" name="Shape 51"/>
+          <p:cNvSpPr/>
+          <p:nvPr/>
+        </p:nvSpPr>
+        <p:spPr>
+          <a:xfrm>
+            <a:off x="4183380" y="5394960"/>
             <a:ext cx="3543300" cy="566928"/>
           </a:xfrm>
           <a:prstGeom prst="roundRect">
@@ -3018,13 +3057,13 @@
       </p:sp>
       <p:sp>
         <p:nvSpPr>
-          <p:cNvPr id="54" name="Text 51"/>
-          <p:cNvSpPr/>
-          <p:nvPr/>
-        </p:nvSpPr>
-        <p:spPr>
-          <a:xfrm>
-            <a:off x="4311396" y="5312664"/>
+          <p:cNvPr id="55" name="Text 52"/>
+          <p:cNvSpPr/>
+          <p:nvPr/>
+        </p:nvSpPr>
+        <p:spPr>
+          <a:xfrm>
+            <a:off x="4311396" y="5449824"/>
             <a:ext cx="3287268" cy="256032"/>
           </a:xfrm>
           <a:prstGeom prst="rect">
@@ -3057,13 +3096,13 @@
       </p:sp>
       <p:sp>
         <p:nvSpPr>
-          <p:cNvPr id="55" name="Text 52"/>
-          <p:cNvSpPr/>
-          <p:nvPr/>
-        </p:nvSpPr>
-        <p:spPr>
-          <a:xfrm>
-            <a:off x="4311396" y="5568696"/>
+          <p:cNvPr id="56" name="Text 53"/>
+          <p:cNvSpPr/>
+          <p:nvPr/>
+        </p:nvSpPr>
+        <p:spPr>
+          <a:xfrm>
+            <a:off x="4311396" y="5705856"/>
             <a:ext cx="3287268" cy="219456"/>
           </a:xfrm>
           <a:prstGeom prst="rect">
@@ -3096,13 +3135,13 @@
       </p:sp>
       <p:sp>
         <p:nvSpPr>
-          <p:cNvPr id="56" name="Text 53"/>
-          <p:cNvSpPr/>
-          <p:nvPr/>
-        </p:nvSpPr>
-        <p:spPr>
-          <a:xfrm>
-            <a:off x="4311396" y="5916168"/>
+          <p:cNvPr id="57" name="Text 54"/>
+          <p:cNvSpPr/>
+          <p:nvPr/>
+        </p:nvSpPr>
+        <p:spPr>
+          <a:xfrm>
+            <a:off x="4311396" y="6053328"/>
             <a:ext cx="3287268" cy="205740"/>
           </a:xfrm>
           <a:prstGeom prst="rect">
@@ -3149,13 +3188,13 @@
       </p:sp>
       <p:sp>
         <p:nvSpPr>
-          <p:cNvPr id="57" name="Text 54"/>
-          <p:cNvSpPr/>
-          <p:nvPr/>
-        </p:nvSpPr>
-        <p:spPr>
-          <a:xfrm>
-            <a:off x="4311396" y="6121908"/>
+          <p:cNvPr id="58" name="Text 55"/>
+          <p:cNvSpPr/>
+          <p:nvPr/>
+        </p:nvSpPr>
+        <p:spPr>
+          <a:xfrm>
+            <a:off x="4311396" y="6259068"/>
             <a:ext cx="3287268" cy="205740"/>
           </a:xfrm>
           <a:prstGeom prst="rect">
@@ -3202,13 +3241,13 @@
       </p:sp>
       <p:sp>
         <p:nvSpPr>
-          <p:cNvPr id="58" name="Text 55"/>
-          <p:cNvSpPr/>
-          <p:nvPr/>
-        </p:nvSpPr>
-        <p:spPr>
-          <a:xfrm>
-            <a:off x="4311396" y="6327648"/>
+          <p:cNvPr id="59" name="Text 56"/>
+          <p:cNvSpPr/>
+          <p:nvPr/>
+        </p:nvSpPr>
+        <p:spPr>
+          <a:xfrm>
+            <a:off x="4311396" y="6464808"/>
             <a:ext cx="3287268" cy="205740"/>
           </a:xfrm>
           <a:prstGeom prst="rect">
@@ -3255,13 +3294,13 @@
       </p:sp>
       <p:sp>
         <p:nvSpPr>
-          <p:cNvPr id="59" name="Text 56"/>
-          <p:cNvSpPr/>
-          <p:nvPr/>
-        </p:nvSpPr>
-        <p:spPr>
-          <a:xfrm>
-            <a:off x="4311396" y="6533388"/>
+          <p:cNvPr id="60" name="Text 57"/>
+          <p:cNvSpPr/>
+          <p:nvPr/>
+        </p:nvSpPr>
+        <p:spPr>
+          <a:xfrm>
+            <a:off x="4311396" y="6670548"/>
             <a:ext cx="3287268" cy="205740"/>
           </a:xfrm>
           <a:prstGeom prst="rect">
@@ -3308,13 +3347,13 @@
       </p:sp>
       <p:sp>
         <p:nvSpPr>
-          <p:cNvPr id="60" name="Text 57"/>
-          <p:cNvSpPr/>
-          <p:nvPr/>
-        </p:nvSpPr>
-        <p:spPr>
-          <a:xfrm>
-            <a:off x="4311396" y="6739128"/>
+          <p:cNvPr id="61" name="Text 58"/>
+          <p:cNvSpPr/>
+          <p:nvPr/>
+        </p:nvSpPr>
+        <p:spPr>
+          <a:xfrm>
+            <a:off x="4311396" y="6876288"/>
             <a:ext cx="3287268" cy="205740"/>
           </a:xfrm>
           <a:prstGeom prst="rect">
@@ -3361,13 +3400,13 @@
       </p:sp>
       <p:sp>
         <p:nvSpPr>
-          <p:cNvPr id="61" name="Text 58"/>
-          <p:cNvSpPr/>
-          <p:nvPr/>
-        </p:nvSpPr>
-        <p:spPr>
-          <a:xfrm>
-            <a:off x="4311396" y="6944868"/>
+          <p:cNvPr id="62" name="Text 59"/>
+          <p:cNvSpPr/>
+          <p:nvPr/>
+        </p:nvSpPr>
+        <p:spPr>
+          <a:xfrm>
+            <a:off x="4311396" y="7082028"/>
             <a:ext cx="3287268" cy="205740"/>
           </a:xfrm>
           <a:prstGeom prst="rect">
@@ -3414,13 +3453,13 @@
       </p:sp>
       <p:sp>
         <p:nvSpPr>
-          <p:cNvPr id="62" name="Text 59"/>
-          <p:cNvSpPr/>
-          <p:nvPr/>
-        </p:nvSpPr>
-        <p:spPr>
-          <a:xfrm>
-            <a:off x="4311396" y="7150608"/>
+          <p:cNvPr id="63" name="Text 60"/>
+          <p:cNvSpPr/>
+          <p:nvPr/>
+        </p:nvSpPr>
+        <p:spPr>
+          <a:xfrm>
+            <a:off x="4311396" y="7287768"/>
             <a:ext cx="3287268" cy="205740"/>
           </a:xfrm>
           <a:prstGeom prst="rect">
@@ -3467,13 +3506,13 @@
       </p:sp>
       <p:sp>
         <p:nvSpPr>
-          <p:cNvPr id="63" name="Text 60"/>
-          <p:cNvSpPr/>
-          <p:nvPr/>
-        </p:nvSpPr>
-        <p:spPr>
-          <a:xfrm>
-            <a:off x="4311396" y="7356348"/>
+          <p:cNvPr id="64" name="Text 61"/>
+          <p:cNvSpPr/>
+          <p:nvPr/>
+        </p:nvSpPr>
+        <p:spPr>
+          <a:xfrm>
+            <a:off x="4311396" y="7493508"/>
             <a:ext cx="3287268" cy="205740"/>
           </a:xfrm>
           <a:prstGeom prst="rect">
@@ -3520,13 +3559,13 @@
       </p:sp>
       <p:sp>
         <p:nvSpPr>
-          <p:cNvPr id="64" name="Shape 61"/>
-          <p:cNvSpPr/>
-          <p:nvPr/>
-        </p:nvSpPr>
-        <p:spPr>
-          <a:xfrm>
-            <a:off x="502920" y="7799832"/>
+          <p:cNvPr id="65" name="Shape 62"/>
+          <p:cNvSpPr/>
+          <p:nvPr/>
+        </p:nvSpPr>
+        <p:spPr>
+          <a:xfrm>
+            <a:off x="502920" y="7936992"/>
             <a:ext cx="7223760" cy="658368"/>
           </a:xfrm>
           <a:prstGeom prst="roundRect">
@@ -3547,13 +3586,13 @@
       </p:sp>
       <p:sp>
         <p:nvSpPr>
-          <p:cNvPr id="65" name="Text 62"/>
-          <p:cNvSpPr/>
-          <p:nvPr/>
-        </p:nvSpPr>
-        <p:spPr>
-          <a:xfrm>
-            <a:off x="777240" y="7799832"/>
+          <p:cNvPr id="66" name="Text 63"/>
+          <p:cNvSpPr/>
+          <p:nvPr/>
+        </p:nvSpPr>
+        <p:spPr>
+          <a:xfrm>
+            <a:off x="777240" y="7936992"/>
             <a:ext cx="6675120" cy="658368"/>
           </a:xfrm>
           <a:prstGeom prst="rect">
@@ -3600,13 +3639,13 @@
       </p:sp>
       <p:sp>
         <p:nvSpPr>
-          <p:cNvPr id="66" name="Shape 63"/>
-          <p:cNvSpPr/>
-          <p:nvPr/>
-        </p:nvSpPr>
-        <p:spPr>
-          <a:xfrm>
-            <a:off x="502920" y="8641080"/>
+          <p:cNvPr id="67" name="Shape 64"/>
+          <p:cNvSpPr/>
+          <p:nvPr/>
+        </p:nvSpPr>
+        <p:spPr>
+          <a:xfrm>
+            <a:off x="502920" y="8778240"/>
             <a:ext cx="1280160" cy="1280160"/>
           </a:xfrm>
           <a:prstGeom prst="roundRect">
@@ -3627,7 +3666,7 @@
       </p:sp>
       <p:pic>
         <p:nvPicPr>
-          <p:cNvPr id="67" name="Image 1" descr="signup_qr.png">    </p:cNvPr>
+          <p:cNvPr id="68" name="Image 1" descr="signup_qr.png">    </p:cNvPr>
           <p:cNvPicPr>
             <a:picLocks noChangeAspect="1"/>
           </p:cNvPicPr>
@@ -3641,7 +3680,7 @@
         </p:blipFill>
         <p:spPr>
           <a:xfrm>
-            <a:off x="576072" y="8714232"/>
+            <a:off x="576072" y="8851392"/>
             <a:ext cx="1133856" cy="1133856"/>
           </a:xfrm>
           <a:prstGeom prst="rect">
@@ -3651,13 +3690,13 @@
       </p:pic>
       <p:sp>
         <p:nvSpPr>
-          <p:cNvPr id="68" name="Text 64"/>
-          <p:cNvSpPr/>
-          <p:nvPr/>
-        </p:nvSpPr>
-        <p:spPr>
-          <a:xfrm>
-            <a:off x="502920" y="9939528"/>
+          <p:cNvPr id="69" name="Text 65"/>
+          <p:cNvSpPr/>
+          <p:nvPr/>
+        </p:nvSpPr>
+        <p:spPr>
+          <a:xfrm>
+            <a:off x="502920" y="10076688"/>
             <a:ext cx="1280160" cy="201168"/>
           </a:xfrm>
           <a:prstGeom prst="rect">
@@ -3690,13 +3729,13 @@
       </p:sp>
       <p:sp>
         <p:nvSpPr>
-          <p:cNvPr id="69" name="Text 65"/>
-          <p:cNvSpPr/>
-          <p:nvPr/>
-        </p:nvSpPr>
-        <p:spPr>
-          <a:xfrm>
-            <a:off x="2057400" y="8659368"/>
+          <p:cNvPr id="70" name="Text 66"/>
+          <p:cNvSpPr/>
+          <p:nvPr/>
+        </p:nvSpPr>
+        <p:spPr>
+          <a:xfrm>
+            <a:off x="2057400" y="8796528"/>
             <a:ext cx="5669280" cy="457200"/>
           </a:xfrm>
           <a:prstGeom prst="rect">
@@ -3729,13 +3768,13 @@
       </p:sp>
       <p:sp>
         <p:nvSpPr>
-          <p:cNvPr id="70" name="Text 66"/>
-          <p:cNvSpPr/>
-          <p:nvPr/>
-        </p:nvSpPr>
-        <p:spPr>
-          <a:xfrm>
-            <a:off x="2057400" y="9134856"/>
+          <p:cNvPr id="71" name="Text 67"/>
+          <p:cNvSpPr/>
+          <p:nvPr/>
+        </p:nvSpPr>
+        <p:spPr>
+          <a:xfrm>
+            <a:off x="2057400" y="9272016"/>
             <a:ext cx="5669280" cy="237744"/>
           </a:xfrm>
           <a:prstGeom prst="rect">
@@ -3768,13 +3807,13 @@
       </p:sp>
       <p:sp>
         <p:nvSpPr>
-          <p:cNvPr id="71" name="Text 67"/>
-          <p:cNvSpPr/>
-          <p:nvPr/>
-        </p:nvSpPr>
-        <p:spPr>
-          <a:xfrm>
-            <a:off x="2057400" y="9409176"/>
+          <p:cNvPr id="72" name="Text 68"/>
+          <p:cNvSpPr/>
+          <p:nvPr/>
+        </p:nvSpPr>
+        <p:spPr>
+          <a:xfrm>
+            <a:off x="2057400" y="9546336"/>
             <a:ext cx="5669280" cy="219456"/>
           </a:xfrm>
           <a:prstGeom prst="rect">
@@ -3821,7 +3860,7 @@
       </p:sp>
       <p:pic>
         <p:nvPicPr>
-          <p:cNvPr id="72" name="Image 2" descr="email-blue.png">    </p:cNvPr>
+          <p:cNvPr id="73" name="Image 2" descr="email-blue.png">    </p:cNvPr>
           <p:cNvPicPr>
             <a:picLocks noChangeAspect="1"/>
           </p:cNvPicPr>
@@ -3835,7 +3874,7 @@
         </p:blipFill>
         <p:spPr>
           <a:xfrm>
-            <a:off x="2057400" y="9720072"/>
+            <a:off x="2057400" y="9857232"/>
             <a:ext cx="182880" cy="182880"/>
           </a:xfrm>
           <a:prstGeom prst="rect">
@@ -3845,13 +3884,13 @@
       </p:pic>
       <p:sp>
         <p:nvSpPr>
-          <p:cNvPr id="73" name="Text 68"/>
-          <p:cNvSpPr/>
-          <p:nvPr/>
-        </p:nvSpPr>
-        <p:spPr>
-          <a:xfrm>
-            <a:off x="2295144" y="9692640"/>
+          <p:cNvPr id="74" name="Text 69"/>
+          <p:cNvSpPr/>
+          <p:nvPr/>
+        </p:nvSpPr>
+        <p:spPr>
+          <a:xfrm>
+            <a:off x="2295144" y="9829800"/>
             <a:ext cx="1615440" cy="256032"/>
           </a:xfrm>
           <a:prstGeom prst="rect">
@@ -3884,7 +3923,7 @@
       </p:sp>
       <p:pic>
         <p:nvPicPr>
-          <p:cNvPr id="74" name="Image 3" descr="whatsapp.png">    </p:cNvPr>
+          <p:cNvPr id="75" name="Image 3" descr="whatsapp.png">    </p:cNvPr>
           <p:cNvPicPr>
             <a:picLocks noChangeAspect="1"/>
           </p:cNvPicPr>
@@ -3898,7 +3937,7 @@
         </p:blipFill>
         <p:spPr>
           <a:xfrm>
-            <a:off x="3947160" y="9720072"/>
+            <a:off x="3947160" y="9857232"/>
             <a:ext cx="182880" cy="182880"/>
           </a:xfrm>
           <a:prstGeom prst="rect">
@@ -3908,13 +3947,13 @@
       </p:pic>
       <p:sp>
         <p:nvSpPr>
-          <p:cNvPr id="75" name="Text 69"/>
-          <p:cNvSpPr/>
-          <p:nvPr/>
-        </p:nvSpPr>
-        <p:spPr>
-          <a:xfrm>
-            <a:off x="4184904" y="9692640"/>
+          <p:cNvPr id="76" name="Text 70"/>
+          <p:cNvSpPr/>
+          <p:nvPr/>
+        </p:nvSpPr>
+        <p:spPr>
+          <a:xfrm>
+            <a:off x="4184904" y="9829800"/>
             <a:ext cx="1615440" cy="256032"/>
           </a:xfrm>
           <a:prstGeom prst="rect">
@@ -3947,7 +3986,7 @@
       </p:sp>
       <p:pic>
         <p:nvPicPr>
-          <p:cNvPr id="76" name="Image 4" descr="phone-blue.png">    </p:cNvPr>
+          <p:cNvPr id="77" name="Image 4" descr="phone-blue.png">    </p:cNvPr>
           <p:cNvPicPr>
             <a:picLocks noChangeAspect="1"/>
           </p:cNvPicPr>
@@ -3961,7 +4000,7 @@
         </p:blipFill>
         <p:spPr>
           <a:xfrm>
-            <a:off x="5836920" y="9720072"/>
+            <a:off x="5836920" y="9857232"/>
             <a:ext cx="182880" cy="182880"/>
           </a:xfrm>
           <a:prstGeom prst="rect">
@@ -3971,13 +4010,13 @@
       </p:pic>
       <p:sp>
         <p:nvSpPr>
-          <p:cNvPr id="77" name="Text 70"/>
-          <p:cNvSpPr/>
-          <p:nvPr/>
-        </p:nvSpPr>
-        <p:spPr>
-          <a:xfrm>
-            <a:off x="6074664" y="9692640"/>
+          <p:cNvPr id="78" name="Text 71"/>
+          <p:cNvSpPr/>
+          <p:nvPr/>
+        </p:nvSpPr>
+        <p:spPr>
+          <a:xfrm>
+            <a:off x="6074664" y="9829800"/>
             <a:ext cx="1615440" cy="256032"/>
           </a:xfrm>
           <a:prstGeom prst="rect">
